--- a/mamawell_employee_card.pptx
+++ b/mamawell_employee_card.pptx
@@ -3098,24 +3098,360 @@
       <p:grpSpPr/>
       <p:sp>
         <p:nvSpPr>
-          <p:cNvPr id="2" name="Rounded Rectangle 1"/>
+          <p:cNvPr id="2" name="Rectangle 1"/>
           <p:cNvSpPr/>
           <p:nvPr/>
         </p:nvSpPr>
         <p:spPr>
           <a:xfrm>
-            <a:off x="360000" y="360000"/>
+            <a:off x="543600" y="1746000"/>
             <a:ext cx="3081600" cy="1944000"/>
           </a:xfrm>
-          <a:prstGeom prst="roundRect">
+          <a:prstGeom prst="rect">
+            <a:avLst/>
+          </a:prstGeom>
+          <a:solidFill>
+            <a:srgbClr val="FFFFFF"/>
+          </a:solidFill>
+          <a:ln w="3175">
+            <a:solidFill>
+              <a:srgbClr val="D6D6D6"/>
+            </a:solidFill>
+          </a:ln>
+        </p:spPr>
+        <p:style>
+          <a:lnRef idx="1">
+            <a:schemeClr val="accent1"/>
+          </a:lnRef>
+          <a:fillRef idx="3">
+            <a:schemeClr val="accent1"/>
+          </a:fillRef>
+          <a:effectRef idx="2">
+            <a:schemeClr val="accent1"/>
+          </a:effectRef>
+          <a:fontRef idx="minor">
+            <a:schemeClr val="lt1"/>
+          </a:fontRef>
+        </p:style>
+        <p:txBody>
+          <a:bodyPr rtlCol="0" anchor="ctr"/>
+          <a:lstStyle/>
+          <a:p>
+            <a:pPr algn="ctr"/>
+          </a:p>
+        </p:txBody>
+      </p:sp>
+      <p:sp>
+        <p:nvSpPr>
+          <p:cNvPr id="3" name="Oval 2"/>
+          <p:cNvSpPr/>
+          <p:nvPr/>
+        </p:nvSpPr>
+        <p:spPr>
+          <a:xfrm>
+            <a:off x="2703600" y="1674000"/>
+            <a:ext cx="1080000" cy="648000"/>
+          </a:xfrm>
+          <a:prstGeom prst="ellipse">
             <a:avLst/>
           </a:prstGeom>
           <a:solidFill>
             <a:srgbClr val="FBDFD2"/>
           </a:solidFill>
-          <a:ln w="6350">
+          <a:ln>
+            <a:noFill/>
+          </a:ln>
+        </p:spPr>
+        <p:style>
+          <a:lnRef idx="1">
+            <a:schemeClr val="accent1"/>
+          </a:lnRef>
+          <a:fillRef idx="3">
+            <a:schemeClr val="accent1"/>
+          </a:fillRef>
+          <a:effectRef idx="2">
+            <a:schemeClr val="accent1"/>
+          </a:effectRef>
+          <a:fontRef idx="minor">
+            <a:schemeClr val="lt1"/>
+          </a:fontRef>
+        </p:style>
+        <p:txBody>
+          <a:bodyPr rtlCol="0" anchor="ctr"/>
+          <a:lstStyle/>
+          <a:p>
+            <a:pPr algn="ctr"/>
+          </a:p>
+        </p:txBody>
+      </p:sp>
+      <p:sp>
+        <p:nvSpPr>
+          <p:cNvPr id="4" name="Oval 3"/>
+          <p:cNvSpPr/>
+          <p:nvPr/>
+        </p:nvSpPr>
+        <p:spPr>
+          <a:xfrm>
+            <a:off x="3135600" y="2106000"/>
+            <a:ext cx="720000" cy="468000"/>
+          </a:xfrm>
+          <a:prstGeom prst="ellipse">
+            <a:avLst/>
+          </a:prstGeom>
+          <a:solidFill>
+            <a:srgbClr val="FBDFD2"/>
+          </a:solidFill>
+          <a:ln>
+            <a:noFill/>
+          </a:ln>
+        </p:spPr>
+        <p:style>
+          <a:lnRef idx="1">
+            <a:schemeClr val="accent1"/>
+          </a:lnRef>
+          <a:fillRef idx="3">
+            <a:schemeClr val="accent1"/>
+          </a:fillRef>
+          <a:effectRef idx="2">
+            <a:schemeClr val="accent1"/>
+          </a:effectRef>
+          <a:fontRef idx="minor">
+            <a:schemeClr val="lt1"/>
+          </a:fontRef>
+        </p:style>
+        <p:txBody>
+          <a:bodyPr rtlCol="0" anchor="ctr"/>
+          <a:lstStyle/>
+          <a:p>
+            <a:pPr algn="ctr"/>
+          </a:p>
+        </p:txBody>
+      </p:sp>
+      <p:sp>
+        <p:nvSpPr>
+          <p:cNvPr id="5" name="Oval 4"/>
+          <p:cNvSpPr/>
+          <p:nvPr/>
+        </p:nvSpPr>
+        <p:spPr>
+          <a:xfrm>
+            <a:off x="3351600" y="1746000"/>
+            <a:ext cx="432000" cy="288000"/>
+          </a:xfrm>
+          <a:prstGeom prst="ellipse">
+            <a:avLst/>
+          </a:prstGeom>
+          <a:solidFill>
+            <a:srgbClr val="FBDFD2"/>
+          </a:solidFill>
+          <a:ln>
+            <a:noFill/>
+          </a:ln>
+        </p:spPr>
+        <p:style>
+          <a:lnRef idx="1">
+            <a:schemeClr val="accent1"/>
+          </a:lnRef>
+          <a:fillRef idx="3">
+            <a:schemeClr val="accent1"/>
+          </a:fillRef>
+          <a:effectRef idx="2">
+            <a:schemeClr val="accent1"/>
+          </a:effectRef>
+          <a:fontRef idx="minor">
+            <a:schemeClr val="lt1"/>
+          </a:fontRef>
+        </p:style>
+        <p:txBody>
+          <a:bodyPr rtlCol="0" anchor="ctr"/>
+          <a:lstStyle/>
+          <a:p>
+            <a:pPr algn="ctr"/>
+          </a:p>
+        </p:txBody>
+      </p:sp>
+      <p:sp>
+        <p:nvSpPr>
+          <p:cNvPr id="6" name="Oval 5"/>
+          <p:cNvSpPr/>
+          <p:nvPr/>
+        </p:nvSpPr>
+        <p:spPr>
+          <a:xfrm>
+            <a:off x="471600" y="3258000"/>
+            <a:ext cx="1080000" cy="540000"/>
+          </a:xfrm>
+          <a:prstGeom prst="ellipse">
+            <a:avLst/>
+          </a:prstGeom>
+          <a:solidFill>
+            <a:srgbClr val="DCE7E9"/>
+          </a:solidFill>
+          <a:ln>
+            <a:noFill/>
+          </a:ln>
+        </p:spPr>
+        <p:style>
+          <a:lnRef idx="1">
+            <a:schemeClr val="accent1"/>
+          </a:lnRef>
+          <a:fillRef idx="3">
+            <a:schemeClr val="accent1"/>
+          </a:fillRef>
+          <a:effectRef idx="2">
+            <a:schemeClr val="accent1"/>
+          </a:effectRef>
+          <a:fontRef idx="minor">
+            <a:schemeClr val="lt1"/>
+          </a:fontRef>
+        </p:style>
+        <p:txBody>
+          <a:bodyPr rtlCol="0" anchor="ctr"/>
+          <a:lstStyle/>
+          <a:p>
+            <a:pPr algn="ctr"/>
+          </a:p>
+        </p:txBody>
+      </p:sp>
+      <p:sp>
+        <p:nvSpPr>
+          <p:cNvPr id="7" name="Oval 6"/>
+          <p:cNvSpPr/>
+          <p:nvPr/>
+        </p:nvSpPr>
+        <p:spPr>
+          <a:xfrm>
+            <a:off x="1083600" y="3402000"/>
+            <a:ext cx="720000" cy="360000"/>
+          </a:xfrm>
+          <a:prstGeom prst="ellipse">
+            <a:avLst/>
+          </a:prstGeom>
+          <a:solidFill>
+            <a:srgbClr val="FBDFD2"/>
+          </a:solidFill>
+          <a:ln>
+            <a:noFill/>
+          </a:ln>
+        </p:spPr>
+        <p:style>
+          <a:lnRef idx="1">
+            <a:schemeClr val="accent1"/>
+          </a:lnRef>
+          <a:fillRef idx="3">
+            <a:schemeClr val="accent1"/>
+          </a:fillRef>
+          <a:effectRef idx="2">
+            <a:schemeClr val="accent1"/>
+          </a:effectRef>
+          <a:fontRef idx="minor">
+            <a:schemeClr val="lt1"/>
+          </a:fontRef>
+        </p:style>
+        <p:txBody>
+          <a:bodyPr rtlCol="0" anchor="ctr"/>
+          <a:lstStyle/>
+          <a:p>
+            <a:pPr algn="ctr"/>
+          </a:p>
+        </p:txBody>
+      </p:sp>
+      <p:sp>
+        <p:nvSpPr>
+          <p:cNvPr id="8" name="Oval 7"/>
+          <p:cNvSpPr/>
+          <p:nvPr/>
+        </p:nvSpPr>
+        <p:spPr>
+          <a:xfrm>
+            <a:off x="615600" y="3474000"/>
+            <a:ext cx="540000" cy="288000"/>
+          </a:xfrm>
+          <a:prstGeom prst="ellipse">
+            <a:avLst/>
+          </a:prstGeom>
+          <a:solidFill>
+            <a:srgbClr val="DCE7E9"/>
+          </a:solidFill>
+          <a:ln>
+            <a:noFill/>
+          </a:ln>
+        </p:spPr>
+        <p:style>
+          <a:lnRef idx="1">
+            <a:schemeClr val="accent1"/>
+          </a:lnRef>
+          <a:fillRef idx="3">
+            <a:schemeClr val="accent1"/>
+          </a:fillRef>
+          <a:effectRef idx="2">
+            <a:schemeClr val="accent1"/>
+          </a:effectRef>
+          <a:fontRef idx="minor">
+            <a:schemeClr val="lt1"/>
+          </a:fontRef>
+        </p:style>
+        <p:txBody>
+          <a:bodyPr rtlCol="0" anchor="ctr"/>
+          <a:lstStyle/>
+          <a:p>
+            <a:pPr algn="ctr"/>
+          </a:p>
+        </p:txBody>
+      </p:sp>
+      <p:sp>
+        <p:nvSpPr>
+          <p:cNvPr id="9" name="Freeform 8"/>
+          <p:cNvSpPr/>
+          <p:nvPr/>
+        </p:nvSpPr>
+        <p:spPr>
+          <a:xfrm>
+            <a:off x="360000" y="-108000"/>
+            <a:ext cx="2721600" cy="3582000"/>
+          </a:xfrm>
+          <a:custGeom>
+            <a:avLst/>
+            <a:gdLst/>
+            <a:ahLst/>
+            <a:cxnLst/>
+            <a:rect l="l" t="t" r="r" b="b"/>
+            <a:pathLst>
+              <a:path w="2721600" h="3582000">
+                <a:moveTo>
+                  <a:pt x="183600" y="3582000"/>
+                </a:moveTo>
+                <a:lnTo>
+                  <a:pt x="0" y="36000"/>
+                </a:lnTo>
+                <a:lnTo>
+                  <a:pt x="360000" y="180000"/>
+                </a:lnTo>
+                <a:lnTo>
+                  <a:pt x="720000" y="108000"/>
+                </a:lnTo>
+                <a:lnTo>
+                  <a:pt x="1152000" y="0"/>
+                </a:lnTo>
+                <a:lnTo>
+                  <a:pt x="1584000" y="36000"/>
+                </a:lnTo>
+                <a:lnTo>
+                  <a:pt x="1980000" y="180000"/>
+                </a:lnTo>
+                <a:lnTo>
+                  <a:pt x="2340000" y="144000"/>
+                </a:lnTo>
+                <a:lnTo>
+                  <a:pt x="2721600" y="72000"/>
+                </a:lnTo>
+              </a:path>
+            </a:pathLst>
+          </a:custGeom>
+          <a:noFill/>
+          <a:ln w="12700">
             <a:solidFill>
-              <a:srgbClr val="D6D6D6"/>
+              <a:srgbClr val="FD7066"/>
             </a:solidFill>
           </a:ln>
         </p:spPr>
@@ -3143,16 +3479,16 @@
       </p:sp>
       <p:sp>
         <p:nvSpPr>
-          <p:cNvPr id="3" name="Wave 2"/>
+          <p:cNvPr id="10" name="Oval 9"/>
           <p:cNvSpPr/>
           <p:nvPr/>
         </p:nvSpPr>
         <p:spPr>
           <a:xfrm>
-            <a:off x="360000" y="360000"/>
-            <a:ext cx="3081600" cy="288000"/>
-          </a:xfrm>
-          <a:prstGeom prst="wave">
+            <a:off x="795600" y="2214000"/>
+            <a:ext cx="540000" cy="432000"/>
+          </a:xfrm>
+          <a:prstGeom prst="ellipse">
             <a:avLst/>
           </a:prstGeom>
           <a:solidFill>
@@ -3186,16 +3522,16 @@
       </p:sp>
       <p:sp>
         <p:nvSpPr>
-          <p:cNvPr id="4" name="Heart 3"/>
+          <p:cNvPr id="11" name="Oval 10"/>
           <p:cNvSpPr/>
           <p:nvPr/>
         </p:nvSpPr>
         <p:spPr>
           <a:xfrm>
-            <a:off x="468000" y="648000"/>
-            <a:ext cx="648000" cy="648000"/>
-          </a:xfrm>
-          <a:prstGeom prst="heart">
+            <a:off x="1227600" y="2322000"/>
+            <a:ext cx="396000" cy="324000"/>
+          </a:xfrm>
+          <a:prstGeom prst="ellipse">
             <a:avLst/>
           </a:prstGeom>
           <a:solidFill>
@@ -3229,14 +3565,57 @@
       </p:sp>
       <p:sp>
         <p:nvSpPr>
-          <p:cNvPr id="5" name="TextBox 4"/>
+          <p:cNvPr id="12" name="Oval 11"/>
+          <p:cNvSpPr/>
+          <p:nvPr/>
+        </p:nvSpPr>
+        <p:spPr>
+          <a:xfrm>
+            <a:off x="1119600" y="2394000"/>
+            <a:ext cx="180000" cy="144000"/>
+          </a:xfrm>
+          <a:prstGeom prst="ellipse">
+            <a:avLst/>
+          </a:prstGeom>
+          <a:solidFill>
+            <a:srgbClr val="FFFFFF"/>
+          </a:solidFill>
+          <a:ln>
+            <a:noFill/>
+          </a:ln>
+        </p:spPr>
+        <p:style>
+          <a:lnRef idx="1">
+            <a:schemeClr val="accent1"/>
+          </a:lnRef>
+          <a:fillRef idx="3">
+            <a:schemeClr val="accent1"/>
+          </a:fillRef>
+          <a:effectRef idx="2">
+            <a:schemeClr val="accent1"/>
+          </a:effectRef>
+          <a:fontRef idx="minor">
+            <a:schemeClr val="lt1"/>
+          </a:fontRef>
+        </p:style>
+        <p:txBody>
+          <a:bodyPr rtlCol="0" anchor="ctr"/>
+          <a:lstStyle/>
+          <a:p>
+            <a:pPr algn="ctr"/>
+          </a:p>
+        </p:txBody>
+      </p:sp>
+      <p:sp>
+        <p:nvSpPr>
+          <p:cNvPr id="13" name="TextBox 12"/>
           <p:cNvSpPr txBox="1"/>
           <p:nvPr/>
         </p:nvSpPr>
         <p:spPr>
           <a:xfrm>
-            <a:off x="504000" y="1008000"/>
-            <a:ext cx="576000" cy="288000"/>
+            <a:off x="615600" y="2862000"/>
+            <a:ext cx="1188000" cy="288000"/>
           </a:xfrm>
           <a:prstGeom prst="rect">
             <a:avLst/>
@@ -3244,19 +3623,19 @@
           <a:noFill/>
         </p:spPr>
         <p:txBody>
-          <a:bodyPr wrap="none">
+          <a:bodyPr wrap="square" lIns="0" rIns="0" tIns="0" bIns="0" anchor="t">
             <a:spAutoFit/>
           </a:bodyPr>
           <a:lstStyle/>
           <a:p>
-            <a:pPr algn="ctr">
-              <a:defRPr sz="1000" b="1">
+            <a:pPr algn="ctr"/>
+            <a:r>
+              <a:rPr sz="1500" b="1">
                 <a:solidFill>
                   <a:srgbClr val="FD7066"/>
                 </a:solidFill>
-              </a:defRPr>
-            </a:pPr>
-            <a:r>
+                <a:latin typeface="Arial Rounded MT Bold"/>
+              </a:rPr>
               <a:t>mamawell</a:t>
             </a:r>
           </a:p>
@@ -3264,14 +3643,57 @@
       </p:sp>
       <p:sp>
         <p:nvSpPr>
-          <p:cNvPr id="6" name="TextBox 5"/>
+          <p:cNvPr id="14" name="Oval 13"/>
+          <p:cNvSpPr/>
+          <p:nvPr/>
+        </p:nvSpPr>
+        <p:spPr>
+          <a:xfrm>
+            <a:off x="1983600" y="2034000"/>
+            <a:ext cx="252000" cy="252000"/>
+          </a:xfrm>
+          <a:prstGeom prst="ellipse">
+            <a:avLst/>
+          </a:prstGeom>
+          <a:solidFill>
+            <a:srgbClr val="FBDFD2"/>
+          </a:solidFill>
+          <a:ln>
+            <a:noFill/>
+          </a:ln>
+        </p:spPr>
+        <p:style>
+          <a:lnRef idx="1">
+            <a:schemeClr val="accent1"/>
+          </a:lnRef>
+          <a:fillRef idx="3">
+            <a:schemeClr val="accent1"/>
+          </a:fillRef>
+          <a:effectRef idx="2">
+            <a:schemeClr val="accent1"/>
+          </a:effectRef>
+          <a:fontRef idx="minor">
+            <a:schemeClr val="lt1"/>
+          </a:fontRef>
+        </p:style>
+        <p:txBody>
+          <a:bodyPr rtlCol="0" anchor="ctr"/>
+          <a:lstStyle/>
+          <a:p>
+            <a:pPr algn="ctr"/>
+          </a:p>
+        </p:txBody>
+      </p:sp>
+      <p:sp>
+        <p:nvSpPr>
+          <p:cNvPr id="15" name="TextBox 14"/>
           <p:cNvSpPr txBox="1"/>
           <p:nvPr/>
         </p:nvSpPr>
         <p:spPr>
           <a:xfrm>
-            <a:off x="1260000" y="540000"/>
-            <a:ext cx="2073600" cy="180000"/>
+            <a:off x="1983600" y="2034000"/>
+            <a:ext cx="252000" cy="252000"/>
           </a:xfrm>
           <a:prstGeom prst="rect">
             <a:avLst/>
@@ -3279,19 +3701,53 @@
           <a:noFill/>
         </p:spPr>
         <p:txBody>
-          <a:bodyPr wrap="none">
+          <a:bodyPr wrap="square" lIns="0" rIns="0" tIns="0" bIns="0" anchor="ctr">
             <a:spAutoFit/>
           </a:bodyPr>
           <a:lstStyle/>
           <a:p>
-            <a:pPr>
-              <a:defRPr sz="900" b="1">
+            <a:pPr algn="ctr"/>
+            <a:r>
+              <a:rPr sz="1100" b="1">
+                <a:solidFill>
+                  <a:srgbClr val="FD7066"/>
+                </a:solidFill>
+              </a:rPr>
+              <a:t>♡</a:t>
+            </a:r>
+          </a:p>
+        </p:txBody>
+      </p:sp>
+      <p:sp>
+        <p:nvSpPr>
+          <p:cNvPr id="16" name="TextBox 15"/>
+          <p:cNvSpPr txBox="1"/>
+          <p:nvPr/>
+        </p:nvSpPr>
+        <p:spPr>
+          <a:xfrm>
+            <a:off x="2307600" y="2016000"/>
+            <a:ext cx="1245600" cy="162000"/>
+          </a:xfrm>
+          <a:prstGeom prst="rect">
+            <a:avLst/>
+          </a:prstGeom>
+          <a:noFill/>
+        </p:spPr>
+        <p:txBody>
+          <a:bodyPr wrap="square" lIns="0" rIns="0" tIns="0" bIns="0" anchor="t">
+            <a:spAutoFit/>
+          </a:bodyPr>
+          <a:lstStyle/>
+          <a:p>
+            <a:pPr algn="l"/>
+            <a:r>
+              <a:rPr sz="850" b="1">
                 <a:solidFill>
                   <a:srgbClr val="4E4B4C"/>
                 </a:solidFill>
-              </a:defRPr>
-            </a:pPr>
-            <a:r>
+                <a:latin typeface="游ゴシック"/>
+              </a:rPr>
               <a:t>常に誠実に</a:t>
             </a:r>
           </a:p>
@@ -3299,14 +3755,14 @@
       </p:sp>
       <p:sp>
         <p:nvSpPr>
-          <p:cNvPr id="7" name="TextBox 6"/>
+          <p:cNvPr id="17" name="TextBox 16"/>
           <p:cNvSpPr txBox="1"/>
           <p:nvPr/>
         </p:nvSpPr>
         <p:spPr>
           <a:xfrm>
-            <a:off x="1260000" y="684000"/>
-            <a:ext cx="2073600" cy="144000"/>
+            <a:off x="2307600" y="2170800"/>
+            <a:ext cx="1245600" cy="126000"/>
           </a:xfrm>
           <a:prstGeom prst="rect">
             <a:avLst/>
@@ -3314,185 +3770,79 @@
           <a:noFill/>
         </p:spPr>
         <p:txBody>
-          <a:bodyPr wrap="none">
+          <a:bodyPr wrap="square" lIns="0" rIns="0" tIns="0" bIns="0" anchor="t">
             <a:spAutoFit/>
           </a:bodyPr>
           <a:lstStyle/>
           <a:p>
-            <a:pPr>
-              <a:defRPr sz="700">
+            <a:pPr algn="l"/>
+            <a:r>
+              <a:rPr sz="650" b="0">
                 <a:solidFill>
                   <a:srgbClr val="FD7066"/>
                 </a:solidFill>
-              </a:defRPr>
-            </a:pPr>
-            <a:r>
+                <a:latin typeface="Helvetica Neue"/>
+              </a:rPr>
               <a:t>Integrity First</a:t>
             </a:r>
           </a:p>
         </p:txBody>
       </p:sp>
-      <p:sp>
-        <p:nvSpPr>
-          <p:cNvPr id="8" name="TextBox 7"/>
-          <p:cNvSpPr txBox="1"/>
-          <p:nvPr/>
-        </p:nvSpPr>
-        <p:spPr>
-          <a:xfrm>
-            <a:off x="1260000" y="900000"/>
-            <a:ext cx="2073600" cy="180000"/>
-          </a:xfrm>
-          <a:prstGeom prst="rect">
-            <a:avLst/>
-          </a:prstGeom>
-          <a:noFill/>
-        </p:spPr>
-        <p:txBody>
-          <a:bodyPr wrap="none">
-            <a:spAutoFit/>
-          </a:bodyPr>
-          <a:lstStyle/>
-          <a:p>
-            <a:pPr>
-              <a:defRPr sz="900" b="1">
-                <a:solidFill>
-                  <a:srgbClr val="4E4B4C"/>
-                </a:solidFill>
-              </a:defRPr>
-            </a:pPr>
-            <a:r>
-              <a:t>仕組みで勝つ</a:t>
-            </a:r>
-          </a:p>
-        </p:txBody>
-      </p:sp>
-      <p:sp>
-        <p:nvSpPr>
-          <p:cNvPr id="9" name="TextBox 8"/>
-          <p:cNvSpPr txBox="1"/>
-          <p:nvPr/>
-        </p:nvSpPr>
-        <p:spPr>
-          <a:xfrm>
-            <a:off x="1260000" y="1044000"/>
-            <a:ext cx="2073600" cy="144000"/>
-          </a:xfrm>
-          <a:prstGeom prst="rect">
-            <a:avLst/>
-          </a:prstGeom>
-          <a:noFill/>
-        </p:spPr>
-        <p:txBody>
-          <a:bodyPr wrap="none">
-            <a:spAutoFit/>
-          </a:bodyPr>
-          <a:lstStyle/>
-          <a:p>
-            <a:pPr>
-              <a:defRPr sz="700">
-                <a:solidFill>
-                  <a:srgbClr val="FD7066"/>
-                </a:solidFill>
-              </a:defRPr>
-            </a:pPr>
-            <a:r>
-              <a:t>System &gt; Hero</a:t>
-            </a:r>
-          </a:p>
-        </p:txBody>
-      </p:sp>
-      <p:sp>
-        <p:nvSpPr>
-          <p:cNvPr id="10" name="TextBox 9"/>
-          <p:cNvSpPr txBox="1"/>
-          <p:nvPr/>
-        </p:nvSpPr>
-        <p:spPr>
-          <a:xfrm>
-            <a:off x="1260000" y="1260000"/>
-            <a:ext cx="2073600" cy="180000"/>
-          </a:xfrm>
-          <a:prstGeom prst="rect">
-            <a:avLst/>
-          </a:prstGeom>
-          <a:noFill/>
-        </p:spPr>
-        <p:txBody>
-          <a:bodyPr wrap="none">
-            <a:spAutoFit/>
-          </a:bodyPr>
-          <a:lstStyle/>
-          <a:p>
-            <a:pPr>
-              <a:defRPr sz="900" b="1">
-                <a:solidFill>
-                  <a:srgbClr val="4E4B4C"/>
-                </a:solidFill>
-              </a:defRPr>
-            </a:pPr>
-            <a:r>
-              <a:t>前進のために話す</a:t>
-            </a:r>
-          </a:p>
-        </p:txBody>
-      </p:sp>
-      <p:sp>
-        <p:nvSpPr>
-          <p:cNvPr id="11" name="TextBox 10"/>
-          <p:cNvSpPr txBox="1"/>
-          <p:nvPr/>
-        </p:nvSpPr>
-        <p:spPr>
-          <a:xfrm>
-            <a:off x="1260000" y="1404000"/>
-            <a:ext cx="2073600" cy="144000"/>
-          </a:xfrm>
-          <a:prstGeom prst="rect">
-            <a:avLst/>
-          </a:prstGeom>
-          <a:noFill/>
-        </p:spPr>
-        <p:txBody>
-          <a:bodyPr wrap="none">
-            <a:spAutoFit/>
-          </a:bodyPr>
-          <a:lstStyle/>
-          <a:p>
-            <a:pPr>
-              <a:defRPr sz="700">
-                <a:solidFill>
-                  <a:srgbClr val="FD7066"/>
-                </a:solidFill>
-              </a:defRPr>
-            </a:pPr>
-            <a:r>
-              <a:t>Move Forward Together</a:t>
-            </a:r>
-          </a:p>
-        </p:txBody>
-      </p:sp>
-      <p:sp>
-        <p:nvSpPr>
-          <p:cNvPr id="12" name="Rounded Rectangle 11"/>
-          <p:cNvSpPr/>
-          <p:nvPr/>
-        </p:nvSpPr>
-        <p:spPr>
-          <a:xfrm>
-            <a:off x="3621600" y="360000"/>
-            <a:ext cx="3081600" cy="1944000"/>
-          </a:xfrm>
-          <a:prstGeom prst="roundRect">
-            <a:avLst/>
-          </a:prstGeom>
-          <a:solidFill>
-            <a:srgbClr val="FBDFD2"/>
-          </a:solidFill>
+      <p:cxnSp>
+        <p:nvCxnSpPr>
+          <p:cNvPr id="18" name="Connector 17"/>
+          <p:cNvCxnSpPr/>
+          <p:nvPr/>
+        </p:nvCxnSpPr>
+        <p:spPr>
+          <a:xfrm>
+            <a:off x="1983600.0" y="2394000.0"/>
+            <a:ext cx="1569600.0" cy="0.0"/>
+          </a:xfrm>
+          <a:prstGeom prst="line">
+            <a:avLst/>
+          </a:prstGeom>
           <a:ln w="6350">
             <a:solidFill>
               <a:srgbClr val="D6D6D6"/>
             </a:solidFill>
+            <a:prstDash val="sysDot"/>
+          </a:ln>
+        </p:spPr>
+        <p:style>
+          <a:lnRef idx="2">
+            <a:schemeClr val="accent1"/>
+          </a:lnRef>
+          <a:fillRef idx="0">
+            <a:schemeClr val="accent1"/>
+          </a:fillRef>
+          <a:effectRef idx="1">
+            <a:schemeClr val="accent1"/>
+          </a:effectRef>
+          <a:fontRef idx="minor">
+            <a:schemeClr val="tx1"/>
+          </a:fontRef>
+        </p:style>
+      </p:cxnSp>
+      <p:sp>
+        <p:nvSpPr>
+          <p:cNvPr id="19" name="Oval 18"/>
+          <p:cNvSpPr/>
+          <p:nvPr/>
+        </p:nvSpPr>
+        <p:spPr>
+          <a:xfrm>
+            <a:off x="1983600" y="2502000"/>
+            <a:ext cx="252000" cy="252000"/>
+          </a:xfrm>
+          <a:prstGeom prst="ellipse">
+            <a:avLst/>
+          </a:prstGeom>
+          <a:solidFill>
+            <a:srgbClr val="DCE7E9"/>
+          </a:solidFill>
+          <a:ln>
+            <a:noFill/>
           </a:ln>
         </p:spPr>
         <p:style>
@@ -3519,16 +3869,684 @@
       </p:sp>
       <p:sp>
         <p:nvSpPr>
-          <p:cNvPr id="13" name="Wave 12"/>
+          <p:cNvPr id="20" name="TextBox 19"/>
+          <p:cNvSpPr txBox="1"/>
+          <p:nvPr/>
+        </p:nvSpPr>
+        <p:spPr>
+          <a:xfrm>
+            <a:off x="1983600" y="2502000"/>
+            <a:ext cx="252000" cy="252000"/>
+          </a:xfrm>
+          <a:prstGeom prst="rect">
+            <a:avLst/>
+          </a:prstGeom>
+          <a:noFill/>
+        </p:spPr>
+        <p:txBody>
+          <a:bodyPr wrap="square" lIns="0" rIns="0" tIns="0" bIns="0" anchor="ctr">
+            <a:spAutoFit/>
+          </a:bodyPr>
+          <a:lstStyle/>
+          <a:p>
+            <a:pPr algn="ctr"/>
+            <a:r>
+              <a:rPr sz="1100" b="1">
+                <a:solidFill>
+                  <a:srgbClr val="FD7066"/>
+                </a:solidFill>
+              </a:rPr>
+              <a:t>📈</a:t>
+            </a:r>
+          </a:p>
+        </p:txBody>
+      </p:sp>
+      <p:sp>
+        <p:nvSpPr>
+          <p:cNvPr id="21" name="TextBox 20"/>
+          <p:cNvSpPr txBox="1"/>
+          <p:nvPr/>
+        </p:nvSpPr>
+        <p:spPr>
+          <a:xfrm>
+            <a:off x="2307600" y="2484000"/>
+            <a:ext cx="1245600" cy="162000"/>
+          </a:xfrm>
+          <a:prstGeom prst="rect">
+            <a:avLst/>
+          </a:prstGeom>
+          <a:noFill/>
+        </p:spPr>
+        <p:txBody>
+          <a:bodyPr wrap="square" lIns="0" rIns="0" tIns="0" bIns="0" anchor="t">
+            <a:spAutoFit/>
+          </a:bodyPr>
+          <a:lstStyle/>
+          <a:p>
+            <a:pPr algn="l"/>
+            <a:r>
+              <a:rPr sz="850" b="1">
+                <a:solidFill>
+                  <a:srgbClr val="4E4B4C"/>
+                </a:solidFill>
+                <a:latin typeface="游ゴシック"/>
+              </a:rPr>
+              <a:t>仕組みで勝つ</a:t>
+            </a:r>
+          </a:p>
+        </p:txBody>
+      </p:sp>
+      <p:sp>
+        <p:nvSpPr>
+          <p:cNvPr id="22" name="TextBox 21"/>
+          <p:cNvSpPr txBox="1"/>
+          <p:nvPr/>
+        </p:nvSpPr>
+        <p:spPr>
+          <a:xfrm>
+            <a:off x="2307600" y="2638800"/>
+            <a:ext cx="1245600" cy="126000"/>
+          </a:xfrm>
+          <a:prstGeom prst="rect">
+            <a:avLst/>
+          </a:prstGeom>
+          <a:noFill/>
+        </p:spPr>
+        <p:txBody>
+          <a:bodyPr wrap="square" lIns="0" rIns="0" tIns="0" bIns="0" anchor="t">
+            <a:spAutoFit/>
+          </a:bodyPr>
+          <a:lstStyle/>
+          <a:p>
+            <a:pPr algn="l"/>
+            <a:r>
+              <a:rPr sz="650" b="0">
+                <a:solidFill>
+                  <a:srgbClr val="FD7066"/>
+                </a:solidFill>
+                <a:latin typeface="Helvetica Neue"/>
+              </a:rPr>
+              <a:t>System &gt; Hero</a:t>
+            </a:r>
+          </a:p>
+        </p:txBody>
+      </p:sp>
+      <p:cxnSp>
+        <p:nvCxnSpPr>
+          <p:cNvPr id="23" name="Connector 22"/>
+          <p:cNvCxnSpPr/>
+          <p:nvPr/>
+        </p:nvCxnSpPr>
+        <p:spPr>
+          <a:xfrm>
+            <a:off x="1983600.0" y="2862000.0"/>
+            <a:ext cx="1569600.0" cy="0.0"/>
+          </a:xfrm>
+          <a:prstGeom prst="line">
+            <a:avLst/>
+          </a:prstGeom>
+          <a:ln w="6350">
+            <a:solidFill>
+              <a:srgbClr val="D6D6D6"/>
+            </a:solidFill>
+            <a:prstDash val="sysDot"/>
+          </a:ln>
+        </p:spPr>
+        <p:style>
+          <a:lnRef idx="2">
+            <a:schemeClr val="accent1"/>
+          </a:lnRef>
+          <a:fillRef idx="0">
+            <a:schemeClr val="accent1"/>
+          </a:fillRef>
+          <a:effectRef idx="1">
+            <a:schemeClr val="accent1"/>
+          </a:effectRef>
+          <a:fontRef idx="minor">
+            <a:schemeClr val="tx1"/>
+          </a:fontRef>
+        </p:style>
+      </p:cxnSp>
+      <p:sp>
+        <p:nvSpPr>
+          <p:cNvPr id="24" name="Oval 23"/>
           <p:cNvSpPr/>
           <p:nvPr/>
         </p:nvSpPr>
         <p:spPr>
           <a:xfrm>
-            <a:off x="3621600" y="360000"/>
-            <a:ext cx="3081600" cy="288000"/>
-          </a:xfrm>
-          <a:prstGeom prst="wave">
+            <a:off x="1983600" y="2970000"/>
+            <a:ext cx="252000" cy="252000"/>
+          </a:xfrm>
+          <a:prstGeom prst="ellipse">
+            <a:avLst/>
+          </a:prstGeom>
+          <a:solidFill>
+            <a:srgbClr val="FBDFD2"/>
+          </a:solidFill>
+          <a:ln>
+            <a:noFill/>
+          </a:ln>
+        </p:spPr>
+        <p:style>
+          <a:lnRef idx="1">
+            <a:schemeClr val="accent1"/>
+          </a:lnRef>
+          <a:fillRef idx="3">
+            <a:schemeClr val="accent1"/>
+          </a:fillRef>
+          <a:effectRef idx="2">
+            <a:schemeClr val="accent1"/>
+          </a:effectRef>
+          <a:fontRef idx="minor">
+            <a:schemeClr val="lt1"/>
+          </a:fontRef>
+        </p:style>
+        <p:txBody>
+          <a:bodyPr rtlCol="0" anchor="ctr"/>
+          <a:lstStyle/>
+          <a:p>
+            <a:pPr algn="ctr"/>
+          </a:p>
+        </p:txBody>
+      </p:sp>
+      <p:sp>
+        <p:nvSpPr>
+          <p:cNvPr id="25" name="TextBox 24"/>
+          <p:cNvSpPr txBox="1"/>
+          <p:nvPr/>
+        </p:nvSpPr>
+        <p:spPr>
+          <a:xfrm>
+            <a:off x="1983600" y="2970000"/>
+            <a:ext cx="252000" cy="252000"/>
+          </a:xfrm>
+          <a:prstGeom prst="rect">
+            <a:avLst/>
+          </a:prstGeom>
+          <a:noFill/>
+        </p:spPr>
+        <p:txBody>
+          <a:bodyPr wrap="square" lIns="0" rIns="0" tIns="0" bIns="0" anchor="ctr">
+            <a:spAutoFit/>
+          </a:bodyPr>
+          <a:lstStyle/>
+          <a:p>
+            <a:pPr algn="ctr"/>
+            <a:r>
+              <a:rPr sz="1100" b="1">
+                <a:solidFill>
+                  <a:srgbClr val="FD7066"/>
+                </a:solidFill>
+              </a:rPr>
+              <a:t>👥</a:t>
+            </a:r>
+          </a:p>
+        </p:txBody>
+      </p:sp>
+      <p:sp>
+        <p:nvSpPr>
+          <p:cNvPr id="26" name="TextBox 25"/>
+          <p:cNvSpPr txBox="1"/>
+          <p:nvPr/>
+        </p:nvSpPr>
+        <p:spPr>
+          <a:xfrm>
+            <a:off x="2307600" y="2952000"/>
+            <a:ext cx="1245600" cy="162000"/>
+          </a:xfrm>
+          <a:prstGeom prst="rect">
+            <a:avLst/>
+          </a:prstGeom>
+          <a:noFill/>
+        </p:spPr>
+        <p:txBody>
+          <a:bodyPr wrap="square" lIns="0" rIns="0" tIns="0" bIns="0" anchor="t">
+            <a:spAutoFit/>
+          </a:bodyPr>
+          <a:lstStyle/>
+          <a:p>
+            <a:pPr algn="l"/>
+            <a:r>
+              <a:rPr sz="850" b="1">
+                <a:solidFill>
+                  <a:srgbClr val="4E4B4C"/>
+                </a:solidFill>
+                <a:latin typeface="游ゴシック"/>
+              </a:rPr>
+              <a:t>前進のために話す</a:t>
+            </a:r>
+          </a:p>
+        </p:txBody>
+      </p:sp>
+      <p:sp>
+        <p:nvSpPr>
+          <p:cNvPr id="27" name="TextBox 26"/>
+          <p:cNvSpPr txBox="1"/>
+          <p:nvPr/>
+        </p:nvSpPr>
+        <p:spPr>
+          <a:xfrm>
+            <a:off x="2307600" y="3106800"/>
+            <a:ext cx="1245600" cy="126000"/>
+          </a:xfrm>
+          <a:prstGeom prst="rect">
+            <a:avLst/>
+          </a:prstGeom>
+          <a:noFill/>
+        </p:spPr>
+        <p:txBody>
+          <a:bodyPr wrap="square" lIns="0" rIns="0" tIns="0" bIns="0" anchor="t">
+            <a:spAutoFit/>
+          </a:bodyPr>
+          <a:lstStyle/>
+          <a:p>
+            <a:pPr algn="l"/>
+            <a:r>
+              <a:rPr sz="650" b="0">
+                <a:solidFill>
+                  <a:srgbClr val="FD7066"/>
+                </a:solidFill>
+                <a:latin typeface="Helvetica Neue"/>
+              </a:rPr>
+              <a:t>Move Forward Together</a:t>
+            </a:r>
+          </a:p>
+        </p:txBody>
+      </p:sp>
+      <p:sp>
+        <p:nvSpPr>
+          <p:cNvPr id="28" name="Rectangle 27"/>
+          <p:cNvSpPr/>
+          <p:nvPr/>
+        </p:nvSpPr>
+        <p:spPr>
+          <a:xfrm>
+            <a:off x="3805200" y="1746000"/>
+            <a:ext cx="3081600" cy="1944000"/>
+          </a:xfrm>
+          <a:prstGeom prst="rect">
+            <a:avLst/>
+          </a:prstGeom>
+          <a:solidFill>
+            <a:srgbClr val="FFFFFF"/>
+          </a:solidFill>
+          <a:ln w="3175">
+            <a:solidFill>
+              <a:srgbClr val="D6D6D6"/>
+            </a:solidFill>
+          </a:ln>
+        </p:spPr>
+        <p:style>
+          <a:lnRef idx="1">
+            <a:schemeClr val="accent1"/>
+          </a:lnRef>
+          <a:fillRef idx="3">
+            <a:schemeClr val="accent1"/>
+          </a:fillRef>
+          <a:effectRef idx="2">
+            <a:schemeClr val="accent1"/>
+          </a:effectRef>
+          <a:fontRef idx="minor">
+            <a:schemeClr val="lt1"/>
+          </a:fontRef>
+        </p:style>
+        <p:txBody>
+          <a:bodyPr rtlCol="0" anchor="ctr"/>
+          <a:lstStyle/>
+          <a:p>
+            <a:pPr algn="ctr"/>
+          </a:p>
+        </p:txBody>
+      </p:sp>
+      <p:sp>
+        <p:nvSpPr>
+          <p:cNvPr id="29" name="Oval 28"/>
+          <p:cNvSpPr/>
+          <p:nvPr/>
+        </p:nvSpPr>
+        <p:spPr>
+          <a:xfrm>
+            <a:off x="5965200" y="1674000"/>
+            <a:ext cx="1080000" cy="648000"/>
+          </a:xfrm>
+          <a:prstGeom prst="ellipse">
+            <a:avLst/>
+          </a:prstGeom>
+          <a:solidFill>
+            <a:srgbClr val="FBDFD2"/>
+          </a:solidFill>
+          <a:ln>
+            <a:noFill/>
+          </a:ln>
+        </p:spPr>
+        <p:style>
+          <a:lnRef idx="1">
+            <a:schemeClr val="accent1"/>
+          </a:lnRef>
+          <a:fillRef idx="3">
+            <a:schemeClr val="accent1"/>
+          </a:fillRef>
+          <a:effectRef idx="2">
+            <a:schemeClr val="accent1"/>
+          </a:effectRef>
+          <a:fontRef idx="minor">
+            <a:schemeClr val="lt1"/>
+          </a:fontRef>
+        </p:style>
+        <p:txBody>
+          <a:bodyPr rtlCol="0" anchor="ctr"/>
+          <a:lstStyle/>
+          <a:p>
+            <a:pPr algn="ctr"/>
+          </a:p>
+        </p:txBody>
+      </p:sp>
+      <p:sp>
+        <p:nvSpPr>
+          <p:cNvPr id="30" name="Oval 29"/>
+          <p:cNvSpPr/>
+          <p:nvPr/>
+        </p:nvSpPr>
+        <p:spPr>
+          <a:xfrm>
+            <a:off x="6397200" y="2106000"/>
+            <a:ext cx="720000" cy="468000"/>
+          </a:xfrm>
+          <a:prstGeom prst="ellipse">
+            <a:avLst/>
+          </a:prstGeom>
+          <a:solidFill>
+            <a:srgbClr val="FBDFD2"/>
+          </a:solidFill>
+          <a:ln>
+            <a:noFill/>
+          </a:ln>
+        </p:spPr>
+        <p:style>
+          <a:lnRef idx="1">
+            <a:schemeClr val="accent1"/>
+          </a:lnRef>
+          <a:fillRef idx="3">
+            <a:schemeClr val="accent1"/>
+          </a:fillRef>
+          <a:effectRef idx="2">
+            <a:schemeClr val="accent1"/>
+          </a:effectRef>
+          <a:fontRef idx="minor">
+            <a:schemeClr val="lt1"/>
+          </a:fontRef>
+        </p:style>
+        <p:txBody>
+          <a:bodyPr rtlCol="0" anchor="ctr"/>
+          <a:lstStyle/>
+          <a:p>
+            <a:pPr algn="ctr"/>
+          </a:p>
+        </p:txBody>
+      </p:sp>
+      <p:sp>
+        <p:nvSpPr>
+          <p:cNvPr id="31" name="Oval 30"/>
+          <p:cNvSpPr/>
+          <p:nvPr/>
+        </p:nvSpPr>
+        <p:spPr>
+          <a:xfrm>
+            <a:off x="6613200" y="1746000"/>
+            <a:ext cx="432000" cy="288000"/>
+          </a:xfrm>
+          <a:prstGeom prst="ellipse">
+            <a:avLst/>
+          </a:prstGeom>
+          <a:solidFill>
+            <a:srgbClr val="FBDFD2"/>
+          </a:solidFill>
+          <a:ln>
+            <a:noFill/>
+          </a:ln>
+        </p:spPr>
+        <p:style>
+          <a:lnRef idx="1">
+            <a:schemeClr val="accent1"/>
+          </a:lnRef>
+          <a:fillRef idx="3">
+            <a:schemeClr val="accent1"/>
+          </a:fillRef>
+          <a:effectRef idx="2">
+            <a:schemeClr val="accent1"/>
+          </a:effectRef>
+          <a:fontRef idx="minor">
+            <a:schemeClr val="lt1"/>
+          </a:fontRef>
+        </p:style>
+        <p:txBody>
+          <a:bodyPr rtlCol="0" anchor="ctr"/>
+          <a:lstStyle/>
+          <a:p>
+            <a:pPr algn="ctr"/>
+          </a:p>
+        </p:txBody>
+      </p:sp>
+      <p:sp>
+        <p:nvSpPr>
+          <p:cNvPr id="32" name="Oval 31"/>
+          <p:cNvSpPr/>
+          <p:nvPr/>
+        </p:nvSpPr>
+        <p:spPr>
+          <a:xfrm>
+            <a:off x="3733200" y="3258000"/>
+            <a:ext cx="1080000" cy="540000"/>
+          </a:xfrm>
+          <a:prstGeom prst="ellipse">
+            <a:avLst/>
+          </a:prstGeom>
+          <a:solidFill>
+            <a:srgbClr val="DCE7E9"/>
+          </a:solidFill>
+          <a:ln>
+            <a:noFill/>
+          </a:ln>
+        </p:spPr>
+        <p:style>
+          <a:lnRef idx="1">
+            <a:schemeClr val="accent1"/>
+          </a:lnRef>
+          <a:fillRef idx="3">
+            <a:schemeClr val="accent1"/>
+          </a:fillRef>
+          <a:effectRef idx="2">
+            <a:schemeClr val="accent1"/>
+          </a:effectRef>
+          <a:fontRef idx="minor">
+            <a:schemeClr val="lt1"/>
+          </a:fontRef>
+        </p:style>
+        <p:txBody>
+          <a:bodyPr rtlCol="0" anchor="ctr"/>
+          <a:lstStyle/>
+          <a:p>
+            <a:pPr algn="ctr"/>
+          </a:p>
+        </p:txBody>
+      </p:sp>
+      <p:sp>
+        <p:nvSpPr>
+          <p:cNvPr id="33" name="Oval 32"/>
+          <p:cNvSpPr/>
+          <p:nvPr/>
+        </p:nvSpPr>
+        <p:spPr>
+          <a:xfrm>
+            <a:off x="4345200" y="3402000"/>
+            <a:ext cx="720000" cy="360000"/>
+          </a:xfrm>
+          <a:prstGeom prst="ellipse">
+            <a:avLst/>
+          </a:prstGeom>
+          <a:solidFill>
+            <a:srgbClr val="FBDFD2"/>
+          </a:solidFill>
+          <a:ln>
+            <a:noFill/>
+          </a:ln>
+        </p:spPr>
+        <p:style>
+          <a:lnRef idx="1">
+            <a:schemeClr val="accent1"/>
+          </a:lnRef>
+          <a:fillRef idx="3">
+            <a:schemeClr val="accent1"/>
+          </a:fillRef>
+          <a:effectRef idx="2">
+            <a:schemeClr val="accent1"/>
+          </a:effectRef>
+          <a:fontRef idx="minor">
+            <a:schemeClr val="lt1"/>
+          </a:fontRef>
+        </p:style>
+        <p:txBody>
+          <a:bodyPr rtlCol="0" anchor="ctr"/>
+          <a:lstStyle/>
+          <a:p>
+            <a:pPr algn="ctr"/>
+          </a:p>
+        </p:txBody>
+      </p:sp>
+      <p:sp>
+        <p:nvSpPr>
+          <p:cNvPr id="34" name="Oval 33"/>
+          <p:cNvSpPr/>
+          <p:nvPr/>
+        </p:nvSpPr>
+        <p:spPr>
+          <a:xfrm>
+            <a:off x="3877200" y="3474000"/>
+            <a:ext cx="540000" cy="288000"/>
+          </a:xfrm>
+          <a:prstGeom prst="ellipse">
+            <a:avLst/>
+          </a:prstGeom>
+          <a:solidFill>
+            <a:srgbClr val="DCE7E9"/>
+          </a:solidFill>
+          <a:ln>
+            <a:noFill/>
+          </a:ln>
+        </p:spPr>
+        <p:style>
+          <a:lnRef idx="1">
+            <a:schemeClr val="accent1"/>
+          </a:lnRef>
+          <a:fillRef idx="3">
+            <a:schemeClr val="accent1"/>
+          </a:fillRef>
+          <a:effectRef idx="2">
+            <a:schemeClr val="accent1"/>
+          </a:effectRef>
+          <a:fontRef idx="minor">
+            <a:schemeClr val="lt1"/>
+          </a:fontRef>
+        </p:style>
+        <p:txBody>
+          <a:bodyPr rtlCol="0" anchor="ctr"/>
+          <a:lstStyle/>
+          <a:p>
+            <a:pPr algn="ctr"/>
+          </a:p>
+        </p:txBody>
+      </p:sp>
+      <p:sp>
+        <p:nvSpPr>
+          <p:cNvPr id="35" name="Freeform 34"/>
+          <p:cNvSpPr/>
+          <p:nvPr/>
+        </p:nvSpPr>
+        <p:spPr>
+          <a:xfrm>
+            <a:off x="360000" y="-108000"/>
+            <a:ext cx="3445200" cy="3582000"/>
+          </a:xfrm>
+          <a:custGeom>
+            <a:avLst/>
+            <a:gdLst/>
+            <a:ahLst/>
+            <a:cxnLst/>
+            <a:rect l="l" t="t" r="r" b="b"/>
+            <a:pathLst>
+              <a:path w="3445200" h="3582000">
+                <a:moveTo>
+                  <a:pt x="3445200" y="3582000"/>
+                </a:moveTo>
+                <a:lnTo>
+                  <a:pt x="0" y="36000"/>
+                </a:lnTo>
+                <a:lnTo>
+                  <a:pt x="360000" y="180000"/>
+                </a:lnTo>
+                <a:lnTo>
+                  <a:pt x="720000" y="108000"/>
+                </a:lnTo>
+                <a:lnTo>
+                  <a:pt x="1152000" y="0"/>
+                </a:lnTo>
+                <a:lnTo>
+                  <a:pt x="1584000" y="36000"/>
+                </a:lnTo>
+                <a:lnTo>
+                  <a:pt x="1980000" y="180000"/>
+                </a:lnTo>
+                <a:lnTo>
+                  <a:pt x="2340000" y="144000"/>
+                </a:lnTo>
+                <a:lnTo>
+                  <a:pt x="2721600" y="72000"/>
+                </a:lnTo>
+              </a:path>
+            </a:pathLst>
+          </a:custGeom>
+          <a:noFill/>
+          <a:ln w="12700">
+            <a:solidFill>
+              <a:srgbClr val="FD7066"/>
+            </a:solidFill>
+          </a:ln>
+        </p:spPr>
+        <p:style>
+          <a:lnRef idx="1">
+            <a:schemeClr val="accent1"/>
+          </a:lnRef>
+          <a:fillRef idx="3">
+            <a:schemeClr val="accent1"/>
+          </a:fillRef>
+          <a:effectRef idx="2">
+            <a:schemeClr val="accent1"/>
+          </a:effectRef>
+          <a:fontRef idx="minor">
+            <a:schemeClr val="lt1"/>
+          </a:fontRef>
+        </p:style>
+        <p:txBody>
+          <a:bodyPr rtlCol="0" anchor="ctr"/>
+          <a:lstStyle/>
+          <a:p>
+            <a:pPr algn="ctr"/>
+          </a:p>
+        </p:txBody>
+      </p:sp>
+      <p:sp>
+        <p:nvSpPr>
+          <p:cNvPr id="36" name="Oval 35"/>
+          <p:cNvSpPr/>
+          <p:nvPr/>
+        </p:nvSpPr>
+        <p:spPr>
+          <a:xfrm>
+            <a:off x="4057200" y="2214000"/>
+            <a:ext cx="540000" cy="432000"/>
+          </a:xfrm>
+          <a:prstGeom prst="ellipse">
             <a:avLst/>
           </a:prstGeom>
           <a:solidFill>
@@ -3562,16 +4580,16 @@
       </p:sp>
       <p:sp>
         <p:nvSpPr>
-          <p:cNvPr id="14" name="Heart 13"/>
+          <p:cNvPr id="37" name="Oval 36"/>
           <p:cNvSpPr/>
           <p:nvPr/>
         </p:nvSpPr>
         <p:spPr>
           <a:xfrm>
-            <a:off x="3729600" y="648000"/>
-            <a:ext cx="648000" cy="648000"/>
-          </a:xfrm>
-          <a:prstGeom prst="heart">
+            <a:off x="4489200" y="2322000"/>
+            <a:ext cx="396000" cy="324000"/>
+          </a:xfrm>
+          <a:prstGeom prst="ellipse">
             <a:avLst/>
           </a:prstGeom>
           <a:solidFill>
@@ -3605,14 +4623,57 @@
       </p:sp>
       <p:sp>
         <p:nvSpPr>
-          <p:cNvPr id="15" name="TextBox 14"/>
+          <p:cNvPr id="38" name="Oval 37"/>
+          <p:cNvSpPr/>
+          <p:nvPr/>
+        </p:nvSpPr>
+        <p:spPr>
+          <a:xfrm>
+            <a:off x="4381200" y="2394000"/>
+            <a:ext cx="180000" cy="144000"/>
+          </a:xfrm>
+          <a:prstGeom prst="ellipse">
+            <a:avLst/>
+          </a:prstGeom>
+          <a:solidFill>
+            <a:srgbClr val="FFFFFF"/>
+          </a:solidFill>
+          <a:ln>
+            <a:noFill/>
+          </a:ln>
+        </p:spPr>
+        <p:style>
+          <a:lnRef idx="1">
+            <a:schemeClr val="accent1"/>
+          </a:lnRef>
+          <a:fillRef idx="3">
+            <a:schemeClr val="accent1"/>
+          </a:fillRef>
+          <a:effectRef idx="2">
+            <a:schemeClr val="accent1"/>
+          </a:effectRef>
+          <a:fontRef idx="minor">
+            <a:schemeClr val="lt1"/>
+          </a:fontRef>
+        </p:style>
+        <p:txBody>
+          <a:bodyPr rtlCol="0" anchor="ctr"/>
+          <a:lstStyle/>
+          <a:p>
+            <a:pPr algn="ctr"/>
+          </a:p>
+        </p:txBody>
+      </p:sp>
+      <p:sp>
+        <p:nvSpPr>
+          <p:cNvPr id="39" name="TextBox 38"/>
           <p:cNvSpPr txBox="1"/>
           <p:nvPr/>
         </p:nvSpPr>
         <p:spPr>
           <a:xfrm>
-            <a:off x="3765600" y="1008000"/>
-            <a:ext cx="576000" cy="288000"/>
+            <a:off x="3877200" y="2862000"/>
+            <a:ext cx="1188000" cy="288000"/>
           </a:xfrm>
           <a:prstGeom prst="rect">
             <a:avLst/>
@@ -3620,19 +4681,19 @@
           <a:noFill/>
         </p:spPr>
         <p:txBody>
-          <a:bodyPr wrap="none">
+          <a:bodyPr wrap="square" lIns="0" rIns="0" tIns="0" bIns="0" anchor="t">
             <a:spAutoFit/>
           </a:bodyPr>
           <a:lstStyle/>
           <a:p>
-            <a:pPr algn="ctr">
-              <a:defRPr sz="1000" b="1">
+            <a:pPr algn="ctr"/>
+            <a:r>
+              <a:rPr sz="1500" b="1">
                 <a:solidFill>
                   <a:srgbClr val="FD7066"/>
                 </a:solidFill>
-              </a:defRPr>
-            </a:pPr>
-            <a:r>
+                <a:latin typeface="Arial Rounded MT Bold"/>
+              </a:rPr>
               <a:t>mamawell</a:t>
             </a:r>
           </a:p>
@@ -3640,14 +4701,57 @@
       </p:sp>
       <p:sp>
         <p:nvSpPr>
-          <p:cNvPr id="16" name="TextBox 15"/>
+          <p:cNvPr id="40" name="Oval 39"/>
+          <p:cNvSpPr/>
+          <p:nvPr/>
+        </p:nvSpPr>
+        <p:spPr>
+          <a:xfrm>
+            <a:off x="5245200" y="2034000"/>
+            <a:ext cx="252000" cy="252000"/>
+          </a:xfrm>
+          <a:prstGeom prst="ellipse">
+            <a:avLst/>
+          </a:prstGeom>
+          <a:solidFill>
+            <a:srgbClr val="FBDFD2"/>
+          </a:solidFill>
+          <a:ln>
+            <a:noFill/>
+          </a:ln>
+        </p:spPr>
+        <p:style>
+          <a:lnRef idx="1">
+            <a:schemeClr val="accent1"/>
+          </a:lnRef>
+          <a:fillRef idx="3">
+            <a:schemeClr val="accent1"/>
+          </a:fillRef>
+          <a:effectRef idx="2">
+            <a:schemeClr val="accent1"/>
+          </a:effectRef>
+          <a:fontRef idx="minor">
+            <a:schemeClr val="lt1"/>
+          </a:fontRef>
+        </p:style>
+        <p:txBody>
+          <a:bodyPr rtlCol="0" anchor="ctr"/>
+          <a:lstStyle/>
+          <a:p>
+            <a:pPr algn="ctr"/>
+          </a:p>
+        </p:txBody>
+      </p:sp>
+      <p:sp>
+        <p:nvSpPr>
+          <p:cNvPr id="41" name="TextBox 40"/>
           <p:cNvSpPr txBox="1"/>
           <p:nvPr/>
         </p:nvSpPr>
         <p:spPr>
           <a:xfrm>
-            <a:off x="4521600" y="540000"/>
-            <a:ext cx="2073600" cy="180000"/>
+            <a:off x="5245200" y="2034000"/>
+            <a:ext cx="252000" cy="252000"/>
           </a:xfrm>
           <a:prstGeom prst="rect">
             <a:avLst/>
@@ -3655,19 +4759,53 @@
           <a:noFill/>
         </p:spPr>
         <p:txBody>
-          <a:bodyPr wrap="none">
+          <a:bodyPr wrap="square" lIns="0" rIns="0" tIns="0" bIns="0" anchor="ctr">
             <a:spAutoFit/>
           </a:bodyPr>
           <a:lstStyle/>
           <a:p>
-            <a:pPr>
-              <a:defRPr sz="900" b="1">
+            <a:pPr algn="ctr"/>
+            <a:r>
+              <a:rPr sz="1100" b="1">
+                <a:solidFill>
+                  <a:srgbClr val="FD7066"/>
+                </a:solidFill>
+              </a:rPr>
+              <a:t>♡</a:t>
+            </a:r>
+          </a:p>
+        </p:txBody>
+      </p:sp>
+      <p:sp>
+        <p:nvSpPr>
+          <p:cNvPr id="42" name="TextBox 41"/>
+          <p:cNvSpPr txBox="1"/>
+          <p:nvPr/>
+        </p:nvSpPr>
+        <p:spPr>
+          <a:xfrm>
+            <a:off x="5569200" y="2016000"/>
+            <a:ext cx="1245600" cy="162000"/>
+          </a:xfrm>
+          <a:prstGeom prst="rect">
+            <a:avLst/>
+          </a:prstGeom>
+          <a:noFill/>
+        </p:spPr>
+        <p:txBody>
+          <a:bodyPr wrap="square" lIns="0" rIns="0" tIns="0" bIns="0" anchor="t">
+            <a:spAutoFit/>
+          </a:bodyPr>
+          <a:lstStyle/>
+          <a:p>
+            <a:pPr algn="l"/>
+            <a:r>
+              <a:rPr sz="850" b="1">
                 <a:solidFill>
                   <a:srgbClr val="4E4B4C"/>
                 </a:solidFill>
-              </a:defRPr>
-            </a:pPr>
-            <a:r>
+                <a:latin typeface="游ゴシック"/>
+              </a:rPr>
               <a:t>常に誠実に</a:t>
             </a:r>
           </a:p>
@@ -3675,14 +4813,14 @@
       </p:sp>
       <p:sp>
         <p:nvSpPr>
-          <p:cNvPr id="17" name="TextBox 16"/>
+          <p:cNvPr id="43" name="TextBox 42"/>
           <p:cNvSpPr txBox="1"/>
           <p:nvPr/>
         </p:nvSpPr>
         <p:spPr>
           <a:xfrm>
-            <a:off x="4521600" y="684000"/>
-            <a:ext cx="2073600" cy="144000"/>
+            <a:off x="5569200" y="2170800"/>
+            <a:ext cx="1245600" cy="126000"/>
           </a:xfrm>
           <a:prstGeom prst="rect">
             <a:avLst/>
@@ -3690,185 +4828,79 @@
           <a:noFill/>
         </p:spPr>
         <p:txBody>
-          <a:bodyPr wrap="none">
+          <a:bodyPr wrap="square" lIns="0" rIns="0" tIns="0" bIns="0" anchor="t">
             <a:spAutoFit/>
           </a:bodyPr>
           <a:lstStyle/>
           <a:p>
-            <a:pPr>
-              <a:defRPr sz="700">
+            <a:pPr algn="l"/>
+            <a:r>
+              <a:rPr sz="650" b="0">
                 <a:solidFill>
                   <a:srgbClr val="FD7066"/>
                 </a:solidFill>
-              </a:defRPr>
-            </a:pPr>
-            <a:r>
+                <a:latin typeface="Helvetica Neue"/>
+              </a:rPr>
               <a:t>Integrity First</a:t>
             </a:r>
           </a:p>
         </p:txBody>
       </p:sp>
-      <p:sp>
-        <p:nvSpPr>
-          <p:cNvPr id="18" name="TextBox 17"/>
-          <p:cNvSpPr txBox="1"/>
-          <p:nvPr/>
-        </p:nvSpPr>
-        <p:spPr>
-          <a:xfrm>
-            <a:off x="4521600" y="900000"/>
-            <a:ext cx="2073600" cy="180000"/>
-          </a:xfrm>
-          <a:prstGeom prst="rect">
-            <a:avLst/>
-          </a:prstGeom>
-          <a:noFill/>
-        </p:spPr>
-        <p:txBody>
-          <a:bodyPr wrap="none">
-            <a:spAutoFit/>
-          </a:bodyPr>
-          <a:lstStyle/>
-          <a:p>
-            <a:pPr>
-              <a:defRPr sz="900" b="1">
-                <a:solidFill>
-                  <a:srgbClr val="4E4B4C"/>
-                </a:solidFill>
-              </a:defRPr>
-            </a:pPr>
-            <a:r>
-              <a:t>仕組みで勝つ</a:t>
-            </a:r>
-          </a:p>
-        </p:txBody>
-      </p:sp>
-      <p:sp>
-        <p:nvSpPr>
-          <p:cNvPr id="19" name="TextBox 18"/>
-          <p:cNvSpPr txBox="1"/>
-          <p:nvPr/>
-        </p:nvSpPr>
-        <p:spPr>
-          <a:xfrm>
-            <a:off x="4521600" y="1044000"/>
-            <a:ext cx="2073600" cy="144000"/>
-          </a:xfrm>
-          <a:prstGeom prst="rect">
-            <a:avLst/>
-          </a:prstGeom>
-          <a:noFill/>
-        </p:spPr>
-        <p:txBody>
-          <a:bodyPr wrap="none">
-            <a:spAutoFit/>
-          </a:bodyPr>
-          <a:lstStyle/>
-          <a:p>
-            <a:pPr>
-              <a:defRPr sz="700">
-                <a:solidFill>
-                  <a:srgbClr val="FD7066"/>
-                </a:solidFill>
-              </a:defRPr>
-            </a:pPr>
-            <a:r>
-              <a:t>System &gt; Hero</a:t>
-            </a:r>
-          </a:p>
-        </p:txBody>
-      </p:sp>
-      <p:sp>
-        <p:nvSpPr>
-          <p:cNvPr id="20" name="TextBox 19"/>
-          <p:cNvSpPr txBox="1"/>
-          <p:nvPr/>
-        </p:nvSpPr>
-        <p:spPr>
-          <a:xfrm>
-            <a:off x="4521600" y="1260000"/>
-            <a:ext cx="2073600" cy="180000"/>
-          </a:xfrm>
-          <a:prstGeom prst="rect">
-            <a:avLst/>
-          </a:prstGeom>
-          <a:noFill/>
-        </p:spPr>
-        <p:txBody>
-          <a:bodyPr wrap="none">
-            <a:spAutoFit/>
-          </a:bodyPr>
-          <a:lstStyle/>
-          <a:p>
-            <a:pPr>
-              <a:defRPr sz="900" b="1">
-                <a:solidFill>
-                  <a:srgbClr val="4E4B4C"/>
-                </a:solidFill>
-              </a:defRPr>
-            </a:pPr>
-            <a:r>
-              <a:t>前進のために話す</a:t>
-            </a:r>
-          </a:p>
-        </p:txBody>
-      </p:sp>
-      <p:sp>
-        <p:nvSpPr>
-          <p:cNvPr id="21" name="TextBox 20"/>
-          <p:cNvSpPr txBox="1"/>
-          <p:nvPr/>
-        </p:nvSpPr>
-        <p:spPr>
-          <a:xfrm>
-            <a:off x="4521600" y="1404000"/>
-            <a:ext cx="2073600" cy="144000"/>
-          </a:xfrm>
-          <a:prstGeom prst="rect">
-            <a:avLst/>
-          </a:prstGeom>
-          <a:noFill/>
-        </p:spPr>
-        <p:txBody>
-          <a:bodyPr wrap="none">
-            <a:spAutoFit/>
-          </a:bodyPr>
-          <a:lstStyle/>
-          <a:p>
-            <a:pPr>
-              <a:defRPr sz="700">
-                <a:solidFill>
-                  <a:srgbClr val="FD7066"/>
-                </a:solidFill>
-              </a:defRPr>
-            </a:pPr>
-            <a:r>
-              <a:t>Move Forward Together</a:t>
-            </a:r>
-          </a:p>
-        </p:txBody>
-      </p:sp>
-      <p:sp>
-        <p:nvSpPr>
-          <p:cNvPr id="22" name="Rounded Rectangle 21"/>
-          <p:cNvSpPr/>
-          <p:nvPr/>
-        </p:nvSpPr>
-        <p:spPr>
-          <a:xfrm>
-            <a:off x="6883200" y="360000"/>
-            <a:ext cx="3081600" cy="1944000"/>
-          </a:xfrm>
-          <a:prstGeom prst="roundRect">
-            <a:avLst/>
-          </a:prstGeom>
-          <a:solidFill>
-            <a:srgbClr val="FBDFD2"/>
-          </a:solidFill>
+      <p:cxnSp>
+        <p:nvCxnSpPr>
+          <p:cNvPr id="44" name="Connector 43"/>
+          <p:cNvCxnSpPr/>
+          <p:nvPr/>
+        </p:nvCxnSpPr>
+        <p:spPr>
+          <a:xfrm>
+            <a:off x="5245200.0" y="2394000.0"/>
+            <a:ext cx="1569600.0" cy="0.0"/>
+          </a:xfrm>
+          <a:prstGeom prst="line">
+            <a:avLst/>
+          </a:prstGeom>
           <a:ln w="6350">
             <a:solidFill>
               <a:srgbClr val="D6D6D6"/>
             </a:solidFill>
+            <a:prstDash val="sysDot"/>
+          </a:ln>
+        </p:spPr>
+        <p:style>
+          <a:lnRef idx="2">
+            <a:schemeClr val="accent1"/>
+          </a:lnRef>
+          <a:fillRef idx="0">
+            <a:schemeClr val="accent1"/>
+          </a:fillRef>
+          <a:effectRef idx="1">
+            <a:schemeClr val="accent1"/>
+          </a:effectRef>
+          <a:fontRef idx="minor">
+            <a:schemeClr val="tx1"/>
+          </a:fontRef>
+        </p:style>
+      </p:cxnSp>
+      <p:sp>
+        <p:nvSpPr>
+          <p:cNvPr id="45" name="Oval 44"/>
+          <p:cNvSpPr/>
+          <p:nvPr/>
+        </p:nvSpPr>
+        <p:spPr>
+          <a:xfrm>
+            <a:off x="5245200" y="2502000"/>
+            <a:ext cx="252000" cy="252000"/>
+          </a:xfrm>
+          <a:prstGeom prst="ellipse">
+            <a:avLst/>
+          </a:prstGeom>
+          <a:solidFill>
+            <a:srgbClr val="DCE7E9"/>
+          </a:solidFill>
+          <a:ln>
+            <a:noFill/>
           </a:ln>
         </p:spPr>
         <p:style>
@@ -3895,16 +4927,684 @@
       </p:sp>
       <p:sp>
         <p:nvSpPr>
-          <p:cNvPr id="23" name="Wave 22"/>
+          <p:cNvPr id="46" name="TextBox 45"/>
+          <p:cNvSpPr txBox="1"/>
+          <p:nvPr/>
+        </p:nvSpPr>
+        <p:spPr>
+          <a:xfrm>
+            <a:off x="5245200" y="2502000"/>
+            <a:ext cx="252000" cy="252000"/>
+          </a:xfrm>
+          <a:prstGeom prst="rect">
+            <a:avLst/>
+          </a:prstGeom>
+          <a:noFill/>
+        </p:spPr>
+        <p:txBody>
+          <a:bodyPr wrap="square" lIns="0" rIns="0" tIns="0" bIns="0" anchor="ctr">
+            <a:spAutoFit/>
+          </a:bodyPr>
+          <a:lstStyle/>
+          <a:p>
+            <a:pPr algn="ctr"/>
+            <a:r>
+              <a:rPr sz="1100" b="1">
+                <a:solidFill>
+                  <a:srgbClr val="FD7066"/>
+                </a:solidFill>
+              </a:rPr>
+              <a:t>📈</a:t>
+            </a:r>
+          </a:p>
+        </p:txBody>
+      </p:sp>
+      <p:sp>
+        <p:nvSpPr>
+          <p:cNvPr id="47" name="TextBox 46"/>
+          <p:cNvSpPr txBox="1"/>
+          <p:nvPr/>
+        </p:nvSpPr>
+        <p:spPr>
+          <a:xfrm>
+            <a:off x="5569200" y="2484000"/>
+            <a:ext cx="1245600" cy="162000"/>
+          </a:xfrm>
+          <a:prstGeom prst="rect">
+            <a:avLst/>
+          </a:prstGeom>
+          <a:noFill/>
+        </p:spPr>
+        <p:txBody>
+          <a:bodyPr wrap="square" lIns="0" rIns="0" tIns="0" bIns="0" anchor="t">
+            <a:spAutoFit/>
+          </a:bodyPr>
+          <a:lstStyle/>
+          <a:p>
+            <a:pPr algn="l"/>
+            <a:r>
+              <a:rPr sz="850" b="1">
+                <a:solidFill>
+                  <a:srgbClr val="4E4B4C"/>
+                </a:solidFill>
+                <a:latin typeface="游ゴシック"/>
+              </a:rPr>
+              <a:t>仕組みで勝つ</a:t>
+            </a:r>
+          </a:p>
+        </p:txBody>
+      </p:sp>
+      <p:sp>
+        <p:nvSpPr>
+          <p:cNvPr id="48" name="TextBox 47"/>
+          <p:cNvSpPr txBox="1"/>
+          <p:nvPr/>
+        </p:nvSpPr>
+        <p:spPr>
+          <a:xfrm>
+            <a:off x="5569200" y="2638800"/>
+            <a:ext cx="1245600" cy="126000"/>
+          </a:xfrm>
+          <a:prstGeom prst="rect">
+            <a:avLst/>
+          </a:prstGeom>
+          <a:noFill/>
+        </p:spPr>
+        <p:txBody>
+          <a:bodyPr wrap="square" lIns="0" rIns="0" tIns="0" bIns="0" anchor="t">
+            <a:spAutoFit/>
+          </a:bodyPr>
+          <a:lstStyle/>
+          <a:p>
+            <a:pPr algn="l"/>
+            <a:r>
+              <a:rPr sz="650" b="0">
+                <a:solidFill>
+                  <a:srgbClr val="FD7066"/>
+                </a:solidFill>
+                <a:latin typeface="Helvetica Neue"/>
+              </a:rPr>
+              <a:t>System &gt; Hero</a:t>
+            </a:r>
+          </a:p>
+        </p:txBody>
+      </p:sp>
+      <p:cxnSp>
+        <p:nvCxnSpPr>
+          <p:cNvPr id="49" name="Connector 48"/>
+          <p:cNvCxnSpPr/>
+          <p:nvPr/>
+        </p:nvCxnSpPr>
+        <p:spPr>
+          <a:xfrm>
+            <a:off x="5245200.0" y="2862000.0"/>
+            <a:ext cx="1569600.0" cy="0.0"/>
+          </a:xfrm>
+          <a:prstGeom prst="line">
+            <a:avLst/>
+          </a:prstGeom>
+          <a:ln w="6350">
+            <a:solidFill>
+              <a:srgbClr val="D6D6D6"/>
+            </a:solidFill>
+            <a:prstDash val="sysDot"/>
+          </a:ln>
+        </p:spPr>
+        <p:style>
+          <a:lnRef idx="2">
+            <a:schemeClr val="accent1"/>
+          </a:lnRef>
+          <a:fillRef idx="0">
+            <a:schemeClr val="accent1"/>
+          </a:fillRef>
+          <a:effectRef idx="1">
+            <a:schemeClr val="accent1"/>
+          </a:effectRef>
+          <a:fontRef idx="minor">
+            <a:schemeClr val="tx1"/>
+          </a:fontRef>
+        </p:style>
+      </p:cxnSp>
+      <p:sp>
+        <p:nvSpPr>
+          <p:cNvPr id="50" name="Oval 49"/>
           <p:cNvSpPr/>
           <p:nvPr/>
         </p:nvSpPr>
         <p:spPr>
           <a:xfrm>
-            <a:off x="6883200" y="360000"/>
-            <a:ext cx="3081600" cy="288000"/>
-          </a:xfrm>
-          <a:prstGeom prst="wave">
+            <a:off x="5245200" y="2970000"/>
+            <a:ext cx="252000" cy="252000"/>
+          </a:xfrm>
+          <a:prstGeom prst="ellipse">
+            <a:avLst/>
+          </a:prstGeom>
+          <a:solidFill>
+            <a:srgbClr val="FBDFD2"/>
+          </a:solidFill>
+          <a:ln>
+            <a:noFill/>
+          </a:ln>
+        </p:spPr>
+        <p:style>
+          <a:lnRef idx="1">
+            <a:schemeClr val="accent1"/>
+          </a:lnRef>
+          <a:fillRef idx="3">
+            <a:schemeClr val="accent1"/>
+          </a:fillRef>
+          <a:effectRef idx="2">
+            <a:schemeClr val="accent1"/>
+          </a:effectRef>
+          <a:fontRef idx="minor">
+            <a:schemeClr val="lt1"/>
+          </a:fontRef>
+        </p:style>
+        <p:txBody>
+          <a:bodyPr rtlCol="0" anchor="ctr"/>
+          <a:lstStyle/>
+          <a:p>
+            <a:pPr algn="ctr"/>
+          </a:p>
+        </p:txBody>
+      </p:sp>
+      <p:sp>
+        <p:nvSpPr>
+          <p:cNvPr id="51" name="TextBox 50"/>
+          <p:cNvSpPr txBox="1"/>
+          <p:nvPr/>
+        </p:nvSpPr>
+        <p:spPr>
+          <a:xfrm>
+            <a:off x="5245200" y="2970000"/>
+            <a:ext cx="252000" cy="252000"/>
+          </a:xfrm>
+          <a:prstGeom prst="rect">
+            <a:avLst/>
+          </a:prstGeom>
+          <a:noFill/>
+        </p:spPr>
+        <p:txBody>
+          <a:bodyPr wrap="square" lIns="0" rIns="0" tIns="0" bIns="0" anchor="ctr">
+            <a:spAutoFit/>
+          </a:bodyPr>
+          <a:lstStyle/>
+          <a:p>
+            <a:pPr algn="ctr"/>
+            <a:r>
+              <a:rPr sz="1100" b="1">
+                <a:solidFill>
+                  <a:srgbClr val="FD7066"/>
+                </a:solidFill>
+              </a:rPr>
+              <a:t>👥</a:t>
+            </a:r>
+          </a:p>
+        </p:txBody>
+      </p:sp>
+      <p:sp>
+        <p:nvSpPr>
+          <p:cNvPr id="52" name="TextBox 51"/>
+          <p:cNvSpPr txBox="1"/>
+          <p:nvPr/>
+        </p:nvSpPr>
+        <p:spPr>
+          <a:xfrm>
+            <a:off x="5569200" y="2952000"/>
+            <a:ext cx="1245600" cy="162000"/>
+          </a:xfrm>
+          <a:prstGeom prst="rect">
+            <a:avLst/>
+          </a:prstGeom>
+          <a:noFill/>
+        </p:spPr>
+        <p:txBody>
+          <a:bodyPr wrap="square" lIns="0" rIns="0" tIns="0" bIns="0" anchor="t">
+            <a:spAutoFit/>
+          </a:bodyPr>
+          <a:lstStyle/>
+          <a:p>
+            <a:pPr algn="l"/>
+            <a:r>
+              <a:rPr sz="850" b="1">
+                <a:solidFill>
+                  <a:srgbClr val="4E4B4C"/>
+                </a:solidFill>
+                <a:latin typeface="游ゴシック"/>
+              </a:rPr>
+              <a:t>前進のために話す</a:t>
+            </a:r>
+          </a:p>
+        </p:txBody>
+      </p:sp>
+      <p:sp>
+        <p:nvSpPr>
+          <p:cNvPr id="53" name="TextBox 52"/>
+          <p:cNvSpPr txBox="1"/>
+          <p:nvPr/>
+        </p:nvSpPr>
+        <p:spPr>
+          <a:xfrm>
+            <a:off x="5569200" y="3106800"/>
+            <a:ext cx="1245600" cy="126000"/>
+          </a:xfrm>
+          <a:prstGeom prst="rect">
+            <a:avLst/>
+          </a:prstGeom>
+          <a:noFill/>
+        </p:spPr>
+        <p:txBody>
+          <a:bodyPr wrap="square" lIns="0" rIns="0" tIns="0" bIns="0" anchor="t">
+            <a:spAutoFit/>
+          </a:bodyPr>
+          <a:lstStyle/>
+          <a:p>
+            <a:pPr algn="l"/>
+            <a:r>
+              <a:rPr sz="650" b="0">
+                <a:solidFill>
+                  <a:srgbClr val="FD7066"/>
+                </a:solidFill>
+                <a:latin typeface="Helvetica Neue"/>
+              </a:rPr>
+              <a:t>Move Forward Together</a:t>
+            </a:r>
+          </a:p>
+        </p:txBody>
+      </p:sp>
+      <p:sp>
+        <p:nvSpPr>
+          <p:cNvPr id="54" name="Rectangle 53"/>
+          <p:cNvSpPr/>
+          <p:nvPr/>
+        </p:nvSpPr>
+        <p:spPr>
+          <a:xfrm>
+            <a:off x="7066800" y="1746000"/>
+            <a:ext cx="3081600" cy="1944000"/>
+          </a:xfrm>
+          <a:prstGeom prst="rect">
+            <a:avLst/>
+          </a:prstGeom>
+          <a:solidFill>
+            <a:srgbClr val="FFFFFF"/>
+          </a:solidFill>
+          <a:ln w="3175">
+            <a:solidFill>
+              <a:srgbClr val="D6D6D6"/>
+            </a:solidFill>
+          </a:ln>
+        </p:spPr>
+        <p:style>
+          <a:lnRef idx="1">
+            <a:schemeClr val="accent1"/>
+          </a:lnRef>
+          <a:fillRef idx="3">
+            <a:schemeClr val="accent1"/>
+          </a:fillRef>
+          <a:effectRef idx="2">
+            <a:schemeClr val="accent1"/>
+          </a:effectRef>
+          <a:fontRef idx="minor">
+            <a:schemeClr val="lt1"/>
+          </a:fontRef>
+        </p:style>
+        <p:txBody>
+          <a:bodyPr rtlCol="0" anchor="ctr"/>
+          <a:lstStyle/>
+          <a:p>
+            <a:pPr algn="ctr"/>
+          </a:p>
+        </p:txBody>
+      </p:sp>
+      <p:sp>
+        <p:nvSpPr>
+          <p:cNvPr id="55" name="Oval 54"/>
+          <p:cNvSpPr/>
+          <p:nvPr/>
+        </p:nvSpPr>
+        <p:spPr>
+          <a:xfrm>
+            <a:off x="9226800" y="1674000"/>
+            <a:ext cx="1080000" cy="648000"/>
+          </a:xfrm>
+          <a:prstGeom prst="ellipse">
+            <a:avLst/>
+          </a:prstGeom>
+          <a:solidFill>
+            <a:srgbClr val="FBDFD2"/>
+          </a:solidFill>
+          <a:ln>
+            <a:noFill/>
+          </a:ln>
+        </p:spPr>
+        <p:style>
+          <a:lnRef idx="1">
+            <a:schemeClr val="accent1"/>
+          </a:lnRef>
+          <a:fillRef idx="3">
+            <a:schemeClr val="accent1"/>
+          </a:fillRef>
+          <a:effectRef idx="2">
+            <a:schemeClr val="accent1"/>
+          </a:effectRef>
+          <a:fontRef idx="minor">
+            <a:schemeClr val="lt1"/>
+          </a:fontRef>
+        </p:style>
+        <p:txBody>
+          <a:bodyPr rtlCol="0" anchor="ctr"/>
+          <a:lstStyle/>
+          <a:p>
+            <a:pPr algn="ctr"/>
+          </a:p>
+        </p:txBody>
+      </p:sp>
+      <p:sp>
+        <p:nvSpPr>
+          <p:cNvPr id="56" name="Oval 55"/>
+          <p:cNvSpPr/>
+          <p:nvPr/>
+        </p:nvSpPr>
+        <p:spPr>
+          <a:xfrm>
+            <a:off x="9658800" y="2106000"/>
+            <a:ext cx="720000" cy="468000"/>
+          </a:xfrm>
+          <a:prstGeom prst="ellipse">
+            <a:avLst/>
+          </a:prstGeom>
+          <a:solidFill>
+            <a:srgbClr val="FBDFD2"/>
+          </a:solidFill>
+          <a:ln>
+            <a:noFill/>
+          </a:ln>
+        </p:spPr>
+        <p:style>
+          <a:lnRef idx="1">
+            <a:schemeClr val="accent1"/>
+          </a:lnRef>
+          <a:fillRef idx="3">
+            <a:schemeClr val="accent1"/>
+          </a:fillRef>
+          <a:effectRef idx="2">
+            <a:schemeClr val="accent1"/>
+          </a:effectRef>
+          <a:fontRef idx="minor">
+            <a:schemeClr val="lt1"/>
+          </a:fontRef>
+        </p:style>
+        <p:txBody>
+          <a:bodyPr rtlCol="0" anchor="ctr"/>
+          <a:lstStyle/>
+          <a:p>
+            <a:pPr algn="ctr"/>
+          </a:p>
+        </p:txBody>
+      </p:sp>
+      <p:sp>
+        <p:nvSpPr>
+          <p:cNvPr id="57" name="Oval 56"/>
+          <p:cNvSpPr/>
+          <p:nvPr/>
+        </p:nvSpPr>
+        <p:spPr>
+          <a:xfrm>
+            <a:off x="9874800" y="1746000"/>
+            <a:ext cx="432000" cy="288000"/>
+          </a:xfrm>
+          <a:prstGeom prst="ellipse">
+            <a:avLst/>
+          </a:prstGeom>
+          <a:solidFill>
+            <a:srgbClr val="FBDFD2"/>
+          </a:solidFill>
+          <a:ln>
+            <a:noFill/>
+          </a:ln>
+        </p:spPr>
+        <p:style>
+          <a:lnRef idx="1">
+            <a:schemeClr val="accent1"/>
+          </a:lnRef>
+          <a:fillRef idx="3">
+            <a:schemeClr val="accent1"/>
+          </a:fillRef>
+          <a:effectRef idx="2">
+            <a:schemeClr val="accent1"/>
+          </a:effectRef>
+          <a:fontRef idx="minor">
+            <a:schemeClr val="lt1"/>
+          </a:fontRef>
+        </p:style>
+        <p:txBody>
+          <a:bodyPr rtlCol="0" anchor="ctr"/>
+          <a:lstStyle/>
+          <a:p>
+            <a:pPr algn="ctr"/>
+          </a:p>
+        </p:txBody>
+      </p:sp>
+      <p:sp>
+        <p:nvSpPr>
+          <p:cNvPr id="58" name="Oval 57"/>
+          <p:cNvSpPr/>
+          <p:nvPr/>
+        </p:nvSpPr>
+        <p:spPr>
+          <a:xfrm>
+            <a:off x="6994800" y="3258000"/>
+            <a:ext cx="1080000" cy="540000"/>
+          </a:xfrm>
+          <a:prstGeom prst="ellipse">
+            <a:avLst/>
+          </a:prstGeom>
+          <a:solidFill>
+            <a:srgbClr val="DCE7E9"/>
+          </a:solidFill>
+          <a:ln>
+            <a:noFill/>
+          </a:ln>
+        </p:spPr>
+        <p:style>
+          <a:lnRef idx="1">
+            <a:schemeClr val="accent1"/>
+          </a:lnRef>
+          <a:fillRef idx="3">
+            <a:schemeClr val="accent1"/>
+          </a:fillRef>
+          <a:effectRef idx="2">
+            <a:schemeClr val="accent1"/>
+          </a:effectRef>
+          <a:fontRef idx="minor">
+            <a:schemeClr val="lt1"/>
+          </a:fontRef>
+        </p:style>
+        <p:txBody>
+          <a:bodyPr rtlCol="0" anchor="ctr"/>
+          <a:lstStyle/>
+          <a:p>
+            <a:pPr algn="ctr"/>
+          </a:p>
+        </p:txBody>
+      </p:sp>
+      <p:sp>
+        <p:nvSpPr>
+          <p:cNvPr id="59" name="Oval 58"/>
+          <p:cNvSpPr/>
+          <p:nvPr/>
+        </p:nvSpPr>
+        <p:spPr>
+          <a:xfrm>
+            <a:off x="7606800" y="3402000"/>
+            <a:ext cx="720000" cy="360000"/>
+          </a:xfrm>
+          <a:prstGeom prst="ellipse">
+            <a:avLst/>
+          </a:prstGeom>
+          <a:solidFill>
+            <a:srgbClr val="FBDFD2"/>
+          </a:solidFill>
+          <a:ln>
+            <a:noFill/>
+          </a:ln>
+        </p:spPr>
+        <p:style>
+          <a:lnRef idx="1">
+            <a:schemeClr val="accent1"/>
+          </a:lnRef>
+          <a:fillRef idx="3">
+            <a:schemeClr val="accent1"/>
+          </a:fillRef>
+          <a:effectRef idx="2">
+            <a:schemeClr val="accent1"/>
+          </a:effectRef>
+          <a:fontRef idx="minor">
+            <a:schemeClr val="lt1"/>
+          </a:fontRef>
+        </p:style>
+        <p:txBody>
+          <a:bodyPr rtlCol="0" anchor="ctr"/>
+          <a:lstStyle/>
+          <a:p>
+            <a:pPr algn="ctr"/>
+          </a:p>
+        </p:txBody>
+      </p:sp>
+      <p:sp>
+        <p:nvSpPr>
+          <p:cNvPr id="60" name="Oval 59"/>
+          <p:cNvSpPr/>
+          <p:nvPr/>
+        </p:nvSpPr>
+        <p:spPr>
+          <a:xfrm>
+            <a:off x="7138800" y="3474000"/>
+            <a:ext cx="540000" cy="288000"/>
+          </a:xfrm>
+          <a:prstGeom prst="ellipse">
+            <a:avLst/>
+          </a:prstGeom>
+          <a:solidFill>
+            <a:srgbClr val="DCE7E9"/>
+          </a:solidFill>
+          <a:ln>
+            <a:noFill/>
+          </a:ln>
+        </p:spPr>
+        <p:style>
+          <a:lnRef idx="1">
+            <a:schemeClr val="accent1"/>
+          </a:lnRef>
+          <a:fillRef idx="3">
+            <a:schemeClr val="accent1"/>
+          </a:fillRef>
+          <a:effectRef idx="2">
+            <a:schemeClr val="accent1"/>
+          </a:effectRef>
+          <a:fontRef idx="minor">
+            <a:schemeClr val="lt1"/>
+          </a:fontRef>
+        </p:style>
+        <p:txBody>
+          <a:bodyPr rtlCol="0" anchor="ctr"/>
+          <a:lstStyle/>
+          <a:p>
+            <a:pPr algn="ctr"/>
+          </a:p>
+        </p:txBody>
+      </p:sp>
+      <p:sp>
+        <p:nvSpPr>
+          <p:cNvPr id="61" name="Freeform 60"/>
+          <p:cNvSpPr/>
+          <p:nvPr/>
+        </p:nvSpPr>
+        <p:spPr>
+          <a:xfrm>
+            <a:off x="360000" y="-108000"/>
+            <a:ext cx="6706800" cy="3582000"/>
+          </a:xfrm>
+          <a:custGeom>
+            <a:avLst/>
+            <a:gdLst/>
+            <a:ahLst/>
+            <a:cxnLst/>
+            <a:rect l="l" t="t" r="r" b="b"/>
+            <a:pathLst>
+              <a:path w="6706800" h="3582000">
+                <a:moveTo>
+                  <a:pt x="6706800" y="3582000"/>
+                </a:moveTo>
+                <a:lnTo>
+                  <a:pt x="0" y="36000"/>
+                </a:lnTo>
+                <a:lnTo>
+                  <a:pt x="360000" y="180000"/>
+                </a:lnTo>
+                <a:lnTo>
+                  <a:pt x="720000" y="108000"/>
+                </a:lnTo>
+                <a:lnTo>
+                  <a:pt x="1152000" y="0"/>
+                </a:lnTo>
+                <a:lnTo>
+                  <a:pt x="1584000" y="36000"/>
+                </a:lnTo>
+                <a:lnTo>
+                  <a:pt x="1980000" y="180000"/>
+                </a:lnTo>
+                <a:lnTo>
+                  <a:pt x="2340000" y="144000"/>
+                </a:lnTo>
+                <a:lnTo>
+                  <a:pt x="2721600" y="72000"/>
+                </a:lnTo>
+              </a:path>
+            </a:pathLst>
+          </a:custGeom>
+          <a:noFill/>
+          <a:ln w="12700">
+            <a:solidFill>
+              <a:srgbClr val="FD7066"/>
+            </a:solidFill>
+          </a:ln>
+        </p:spPr>
+        <p:style>
+          <a:lnRef idx="1">
+            <a:schemeClr val="accent1"/>
+          </a:lnRef>
+          <a:fillRef idx="3">
+            <a:schemeClr val="accent1"/>
+          </a:fillRef>
+          <a:effectRef idx="2">
+            <a:schemeClr val="accent1"/>
+          </a:effectRef>
+          <a:fontRef idx="minor">
+            <a:schemeClr val="lt1"/>
+          </a:fontRef>
+        </p:style>
+        <p:txBody>
+          <a:bodyPr rtlCol="0" anchor="ctr"/>
+          <a:lstStyle/>
+          <a:p>
+            <a:pPr algn="ctr"/>
+          </a:p>
+        </p:txBody>
+      </p:sp>
+      <p:sp>
+        <p:nvSpPr>
+          <p:cNvPr id="62" name="Oval 61"/>
+          <p:cNvSpPr/>
+          <p:nvPr/>
+        </p:nvSpPr>
+        <p:spPr>
+          <a:xfrm>
+            <a:off x="7318800" y="2214000"/>
+            <a:ext cx="540000" cy="432000"/>
+          </a:xfrm>
+          <a:prstGeom prst="ellipse">
             <a:avLst/>
           </a:prstGeom>
           <a:solidFill>
@@ -3938,16 +5638,16 @@
       </p:sp>
       <p:sp>
         <p:nvSpPr>
-          <p:cNvPr id="24" name="Heart 23"/>
+          <p:cNvPr id="63" name="Oval 62"/>
           <p:cNvSpPr/>
           <p:nvPr/>
         </p:nvSpPr>
         <p:spPr>
           <a:xfrm>
-            <a:off x="6991200" y="648000"/>
-            <a:ext cx="648000" cy="648000"/>
-          </a:xfrm>
-          <a:prstGeom prst="heart">
+            <a:off x="7750800" y="2322000"/>
+            <a:ext cx="396000" cy="324000"/>
+          </a:xfrm>
+          <a:prstGeom prst="ellipse">
             <a:avLst/>
           </a:prstGeom>
           <a:solidFill>
@@ -3981,14 +5681,57 @@
       </p:sp>
       <p:sp>
         <p:nvSpPr>
-          <p:cNvPr id="25" name="TextBox 24"/>
+          <p:cNvPr id="64" name="Oval 63"/>
+          <p:cNvSpPr/>
+          <p:nvPr/>
+        </p:nvSpPr>
+        <p:spPr>
+          <a:xfrm>
+            <a:off x="7642800" y="2394000"/>
+            <a:ext cx="180000" cy="144000"/>
+          </a:xfrm>
+          <a:prstGeom prst="ellipse">
+            <a:avLst/>
+          </a:prstGeom>
+          <a:solidFill>
+            <a:srgbClr val="FFFFFF"/>
+          </a:solidFill>
+          <a:ln>
+            <a:noFill/>
+          </a:ln>
+        </p:spPr>
+        <p:style>
+          <a:lnRef idx="1">
+            <a:schemeClr val="accent1"/>
+          </a:lnRef>
+          <a:fillRef idx="3">
+            <a:schemeClr val="accent1"/>
+          </a:fillRef>
+          <a:effectRef idx="2">
+            <a:schemeClr val="accent1"/>
+          </a:effectRef>
+          <a:fontRef idx="minor">
+            <a:schemeClr val="lt1"/>
+          </a:fontRef>
+        </p:style>
+        <p:txBody>
+          <a:bodyPr rtlCol="0" anchor="ctr"/>
+          <a:lstStyle/>
+          <a:p>
+            <a:pPr algn="ctr"/>
+          </a:p>
+        </p:txBody>
+      </p:sp>
+      <p:sp>
+        <p:nvSpPr>
+          <p:cNvPr id="65" name="TextBox 64"/>
           <p:cNvSpPr txBox="1"/>
           <p:nvPr/>
         </p:nvSpPr>
         <p:spPr>
           <a:xfrm>
-            <a:off x="7027200" y="1008000"/>
-            <a:ext cx="576000" cy="288000"/>
+            <a:off x="7138800" y="2862000"/>
+            <a:ext cx="1188000" cy="288000"/>
           </a:xfrm>
           <a:prstGeom prst="rect">
             <a:avLst/>
@@ -3996,19 +5739,19 @@
           <a:noFill/>
         </p:spPr>
         <p:txBody>
-          <a:bodyPr wrap="none">
+          <a:bodyPr wrap="square" lIns="0" rIns="0" tIns="0" bIns="0" anchor="t">
             <a:spAutoFit/>
           </a:bodyPr>
           <a:lstStyle/>
           <a:p>
-            <a:pPr algn="ctr">
-              <a:defRPr sz="1000" b="1">
+            <a:pPr algn="ctr"/>
+            <a:r>
+              <a:rPr sz="1500" b="1">
                 <a:solidFill>
                   <a:srgbClr val="FD7066"/>
                 </a:solidFill>
-              </a:defRPr>
-            </a:pPr>
-            <a:r>
+                <a:latin typeface="Arial Rounded MT Bold"/>
+              </a:rPr>
               <a:t>mamawell</a:t>
             </a:r>
           </a:p>
@@ -4016,14 +5759,57 @@
       </p:sp>
       <p:sp>
         <p:nvSpPr>
-          <p:cNvPr id="26" name="TextBox 25"/>
+          <p:cNvPr id="66" name="Oval 65"/>
+          <p:cNvSpPr/>
+          <p:nvPr/>
+        </p:nvSpPr>
+        <p:spPr>
+          <a:xfrm>
+            <a:off x="8506800" y="2034000"/>
+            <a:ext cx="252000" cy="252000"/>
+          </a:xfrm>
+          <a:prstGeom prst="ellipse">
+            <a:avLst/>
+          </a:prstGeom>
+          <a:solidFill>
+            <a:srgbClr val="FBDFD2"/>
+          </a:solidFill>
+          <a:ln>
+            <a:noFill/>
+          </a:ln>
+        </p:spPr>
+        <p:style>
+          <a:lnRef idx="1">
+            <a:schemeClr val="accent1"/>
+          </a:lnRef>
+          <a:fillRef idx="3">
+            <a:schemeClr val="accent1"/>
+          </a:fillRef>
+          <a:effectRef idx="2">
+            <a:schemeClr val="accent1"/>
+          </a:effectRef>
+          <a:fontRef idx="minor">
+            <a:schemeClr val="lt1"/>
+          </a:fontRef>
+        </p:style>
+        <p:txBody>
+          <a:bodyPr rtlCol="0" anchor="ctr"/>
+          <a:lstStyle/>
+          <a:p>
+            <a:pPr algn="ctr"/>
+          </a:p>
+        </p:txBody>
+      </p:sp>
+      <p:sp>
+        <p:nvSpPr>
+          <p:cNvPr id="67" name="TextBox 66"/>
           <p:cNvSpPr txBox="1"/>
           <p:nvPr/>
         </p:nvSpPr>
         <p:spPr>
           <a:xfrm>
-            <a:off x="7783200" y="540000"/>
-            <a:ext cx="2073600" cy="180000"/>
+            <a:off x="8506800" y="2034000"/>
+            <a:ext cx="252000" cy="252000"/>
           </a:xfrm>
           <a:prstGeom prst="rect">
             <a:avLst/>
@@ -4031,19 +5817,53 @@
           <a:noFill/>
         </p:spPr>
         <p:txBody>
-          <a:bodyPr wrap="none">
+          <a:bodyPr wrap="square" lIns="0" rIns="0" tIns="0" bIns="0" anchor="ctr">
             <a:spAutoFit/>
           </a:bodyPr>
           <a:lstStyle/>
           <a:p>
-            <a:pPr>
-              <a:defRPr sz="900" b="1">
+            <a:pPr algn="ctr"/>
+            <a:r>
+              <a:rPr sz="1100" b="1">
+                <a:solidFill>
+                  <a:srgbClr val="FD7066"/>
+                </a:solidFill>
+              </a:rPr>
+              <a:t>♡</a:t>
+            </a:r>
+          </a:p>
+        </p:txBody>
+      </p:sp>
+      <p:sp>
+        <p:nvSpPr>
+          <p:cNvPr id="68" name="TextBox 67"/>
+          <p:cNvSpPr txBox="1"/>
+          <p:nvPr/>
+        </p:nvSpPr>
+        <p:spPr>
+          <a:xfrm>
+            <a:off x="8830800" y="2016000"/>
+            <a:ext cx="1245600" cy="162000"/>
+          </a:xfrm>
+          <a:prstGeom prst="rect">
+            <a:avLst/>
+          </a:prstGeom>
+          <a:noFill/>
+        </p:spPr>
+        <p:txBody>
+          <a:bodyPr wrap="square" lIns="0" rIns="0" tIns="0" bIns="0" anchor="t">
+            <a:spAutoFit/>
+          </a:bodyPr>
+          <a:lstStyle/>
+          <a:p>
+            <a:pPr algn="l"/>
+            <a:r>
+              <a:rPr sz="850" b="1">
                 <a:solidFill>
                   <a:srgbClr val="4E4B4C"/>
                 </a:solidFill>
-              </a:defRPr>
-            </a:pPr>
-            <a:r>
+                <a:latin typeface="游ゴシック"/>
+              </a:rPr>
               <a:t>常に誠実に</a:t>
             </a:r>
           </a:p>
@@ -4051,14 +5871,14 @@
       </p:sp>
       <p:sp>
         <p:nvSpPr>
-          <p:cNvPr id="27" name="TextBox 26"/>
+          <p:cNvPr id="69" name="TextBox 68"/>
           <p:cNvSpPr txBox="1"/>
           <p:nvPr/>
         </p:nvSpPr>
         <p:spPr>
           <a:xfrm>
-            <a:off x="7783200" y="684000"/>
-            <a:ext cx="2073600" cy="144000"/>
+            <a:off x="8830800" y="2170800"/>
+            <a:ext cx="1245600" cy="126000"/>
           </a:xfrm>
           <a:prstGeom prst="rect">
             <a:avLst/>
@@ -4066,185 +5886,79 @@
           <a:noFill/>
         </p:spPr>
         <p:txBody>
-          <a:bodyPr wrap="none">
+          <a:bodyPr wrap="square" lIns="0" rIns="0" tIns="0" bIns="0" anchor="t">
             <a:spAutoFit/>
           </a:bodyPr>
           <a:lstStyle/>
           <a:p>
-            <a:pPr>
-              <a:defRPr sz="700">
+            <a:pPr algn="l"/>
+            <a:r>
+              <a:rPr sz="650" b="0">
                 <a:solidFill>
                   <a:srgbClr val="FD7066"/>
                 </a:solidFill>
-              </a:defRPr>
-            </a:pPr>
-            <a:r>
+                <a:latin typeface="Helvetica Neue"/>
+              </a:rPr>
               <a:t>Integrity First</a:t>
             </a:r>
           </a:p>
         </p:txBody>
       </p:sp>
-      <p:sp>
-        <p:nvSpPr>
-          <p:cNvPr id="28" name="TextBox 27"/>
-          <p:cNvSpPr txBox="1"/>
-          <p:nvPr/>
-        </p:nvSpPr>
-        <p:spPr>
-          <a:xfrm>
-            <a:off x="7783200" y="900000"/>
-            <a:ext cx="2073600" cy="180000"/>
-          </a:xfrm>
-          <a:prstGeom prst="rect">
-            <a:avLst/>
-          </a:prstGeom>
-          <a:noFill/>
-        </p:spPr>
-        <p:txBody>
-          <a:bodyPr wrap="none">
-            <a:spAutoFit/>
-          </a:bodyPr>
-          <a:lstStyle/>
-          <a:p>
-            <a:pPr>
-              <a:defRPr sz="900" b="1">
-                <a:solidFill>
-                  <a:srgbClr val="4E4B4C"/>
-                </a:solidFill>
-              </a:defRPr>
-            </a:pPr>
-            <a:r>
-              <a:t>仕組みで勝つ</a:t>
-            </a:r>
-          </a:p>
-        </p:txBody>
-      </p:sp>
-      <p:sp>
-        <p:nvSpPr>
-          <p:cNvPr id="29" name="TextBox 28"/>
-          <p:cNvSpPr txBox="1"/>
-          <p:nvPr/>
-        </p:nvSpPr>
-        <p:spPr>
-          <a:xfrm>
-            <a:off x="7783200" y="1044000"/>
-            <a:ext cx="2073600" cy="144000"/>
-          </a:xfrm>
-          <a:prstGeom prst="rect">
-            <a:avLst/>
-          </a:prstGeom>
-          <a:noFill/>
-        </p:spPr>
-        <p:txBody>
-          <a:bodyPr wrap="none">
-            <a:spAutoFit/>
-          </a:bodyPr>
-          <a:lstStyle/>
-          <a:p>
-            <a:pPr>
-              <a:defRPr sz="700">
-                <a:solidFill>
-                  <a:srgbClr val="FD7066"/>
-                </a:solidFill>
-              </a:defRPr>
-            </a:pPr>
-            <a:r>
-              <a:t>System &gt; Hero</a:t>
-            </a:r>
-          </a:p>
-        </p:txBody>
-      </p:sp>
-      <p:sp>
-        <p:nvSpPr>
-          <p:cNvPr id="30" name="TextBox 29"/>
-          <p:cNvSpPr txBox="1"/>
-          <p:nvPr/>
-        </p:nvSpPr>
-        <p:spPr>
-          <a:xfrm>
-            <a:off x="7783200" y="1260000"/>
-            <a:ext cx="2073600" cy="180000"/>
-          </a:xfrm>
-          <a:prstGeom prst="rect">
-            <a:avLst/>
-          </a:prstGeom>
-          <a:noFill/>
-        </p:spPr>
-        <p:txBody>
-          <a:bodyPr wrap="none">
-            <a:spAutoFit/>
-          </a:bodyPr>
-          <a:lstStyle/>
-          <a:p>
-            <a:pPr>
-              <a:defRPr sz="900" b="1">
-                <a:solidFill>
-                  <a:srgbClr val="4E4B4C"/>
-                </a:solidFill>
-              </a:defRPr>
-            </a:pPr>
-            <a:r>
-              <a:t>前進のために話す</a:t>
-            </a:r>
-          </a:p>
-        </p:txBody>
-      </p:sp>
-      <p:sp>
-        <p:nvSpPr>
-          <p:cNvPr id="31" name="TextBox 30"/>
-          <p:cNvSpPr txBox="1"/>
-          <p:nvPr/>
-        </p:nvSpPr>
-        <p:spPr>
-          <a:xfrm>
-            <a:off x="7783200" y="1404000"/>
-            <a:ext cx="2073600" cy="144000"/>
-          </a:xfrm>
-          <a:prstGeom prst="rect">
-            <a:avLst/>
-          </a:prstGeom>
-          <a:noFill/>
-        </p:spPr>
-        <p:txBody>
-          <a:bodyPr wrap="none">
-            <a:spAutoFit/>
-          </a:bodyPr>
-          <a:lstStyle/>
-          <a:p>
-            <a:pPr>
-              <a:defRPr sz="700">
-                <a:solidFill>
-                  <a:srgbClr val="FD7066"/>
-                </a:solidFill>
-              </a:defRPr>
-            </a:pPr>
-            <a:r>
-              <a:t>Move Forward Together</a:t>
-            </a:r>
-          </a:p>
-        </p:txBody>
-      </p:sp>
-      <p:sp>
-        <p:nvSpPr>
-          <p:cNvPr id="32" name="Rounded Rectangle 31"/>
-          <p:cNvSpPr/>
-          <p:nvPr/>
-        </p:nvSpPr>
-        <p:spPr>
-          <a:xfrm>
-            <a:off x="360000" y="2484000"/>
-            <a:ext cx="3081600" cy="1944000"/>
-          </a:xfrm>
-          <a:prstGeom prst="roundRect">
-            <a:avLst/>
-          </a:prstGeom>
-          <a:solidFill>
-            <a:srgbClr val="FBDFD2"/>
-          </a:solidFill>
+      <p:cxnSp>
+        <p:nvCxnSpPr>
+          <p:cNvPr id="70" name="Connector 69"/>
+          <p:cNvCxnSpPr/>
+          <p:nvPr/>
+        </p:nvCxnSpPr>
+        <p:spPr>
+          <a:xfrm>
+            <a:off x="8506800.0" y="2394000.0"/>
+            <a:ext cx="1569600.0" cy="0.0"/>
+          </a:xfrm>
+          <a:prstGeom prst="line">
+            <a:avLst/>
+          </a:prstGeom>
           <a:ln w="6350">
             <a:solidFill>
               <a:srgbClr val="D6D6D6"/>
             </a:solidFill>
+            <a:prstDash val="sysDot"/>
+          </a:ln>
+        </p:spPr>
+        <p:style>
+          <a:lnRef idx="2">
+            <a:schemeClr val="accent1"/>
+          </a:lnRef>
+          <a:fillRef idx="0">
+            <a:schemeClr val="accent1"/>
+          </a:fillRef>
+          <a:effectRef idx="1">
+            <a:schemeClr val="accent1"/>
+          </a:effectRef>
+          <a:fontRef idx="minor">
+            <a:schemeClr val="tx1"/>
+          </a:fontRef>
+        </p:style>
+      </p:cxnSp>
+      <p:sp>
+        <p:nvSpPr>
+          <p:cNvPr id="71" name="Oval 70"/>
+          <p:cNvSpPr/>
+          <p:nvPr/>
+        </p:nvSpPr>
+        <p:spPr>
+          <a:xfrm>
+            <a:off x="8506800" y="2502000"/>
+            <a:ext cx="252000" cy="252000"/>
+          </a:xfrm>
+          <a:prstGeom prst="ellipse">
+            <a:avLst/>
+          </a:prstGeom>
+          <a:solidFill>
+            <a:srgbClr val="DCE7E9"/>
+          </a:solidFill>
+          <a:ln>
+            <a:noFill/>
           </a:ln>
         </p:spPr>
         <p:style>
@@ -4271,16 +5985,684 @@
       </p:sp>
       <p:sp>
         <p:nvSpPr>
-          <p:cNvPr id="33" name="Wave 32"/>
+          <p:cNvPr id="72" name="TextBox 71"/>
+          <p:cNvSpPr txBox="1"/>
+          <p:nvPr/>
+        </p:nvSpPr>
+        <p:spPr>
+          <a:xfrm>
+            <a:off x="8506800" y="2502000"/>
+            <a:ext cx="252000" cy="252000"/>
+          </a:xfrm>
+          <a:prstGeom prst="rect">
+            <a:avLst/>
+          </a:prstGeom>
+          <a:noFill/>
+        </p:spPr>
+        <p:txBody>
+          <a:bodyPr wrap="square" lIns="0" rIns="0" tIns="0" bIns="0" anchor="ctr">
+            <a:spAutoFit/>
+          </a:bodyPr>
+          <a:lstStyle/>
+          <a:p>
+            <a:pPr algn="ctr"/>
+            <a:r>
+              <a:rPr sz="1100" b="1">
+                <a:solidFill>
+                  <a:srgbClr val="FD7066"/>
+                </a:solidFill>
+              </a:rPr>
+              <a:t>📈</a:t>
+            </a:r>
+          </a:p>
+        </p:txBody>
+      </p:sp>
+      <p:sp>
+        <p:nvSpPr>
+          <p:cNvPr id="73" name="TextBox 72"/>
+          <p:cNvSpPr txBox="1"/>
+          <p:nvPr/>
+        </p:nvSpPr>
+        <p:spPr>
+          <a:xfrm>
+            <a:off x="8830800" y="2484000"/>
+            <a:ext cx="1245600" cy="162000"/>
+          </a:xfrm>
+          <a:prstGeom prst="rect">
+            <a:avLst/>
+          </a:prstGeom>
+          <a:noFill/>
+        </p:spPr>
+        <p:txBody>
+          <a:bodyPr wrap="square" lIns="0" rIns="0" tIns="0" bIns="0" anchor="t">
+            <a:spAutoFit/>
+          </a:bodyPr>
+          <a:lstStyle/>
+          <a:p>
+            <a:pPr algn="l"/>
+            <a:r>
+              <a:rPr sz="850" b="1">
+                <a:solidFill>
+                  <a:srgbClr val="4E4B4C"/>
+                </a:solidFill>
+                <a:latin typeface="游ゴシック"/>
+              </a:rPr>
+              <a:t>仕組みで勝つ</a:t>
+            </a:r>
+          </a:p>
+        </p:txBody>
+      </p:sp>
+      <p:sp>
+        <p:nvSpPr>
+          <p:cNvPr id="74" name="TextBox 73"/>
+          <p:cNvSpPr txBox="1"/>
+          <p:nvPr/>
+        </p:nvSpPr>
+        <p:spPr>
+          <a:xfrm>
+            <a:off x="8830800" y="2638800"/>
+            <a:ext cx="1245600" cy="126000"/>
+          </a:xfrm>
+          <a:prstGeom prst="rect">
+            <a:avLst/>
+          </a:prstGeom>
+          <a:noFill/>
+        </p:spPr>
+        <p:txBody>
+          <a:bodyPr wrap="square" lIns="0" rIns="0" tIns="0" bIns="0" anchor="t">
+            <a:spAutoFit/>
+          </a:bodyPr>
+          <a:lstStyle/>
+          <a:p>
+            <a:pPr algn="l"/>
+            <a:r>
+              <a:rPr sz="650" b="0">
+                <a:solidFill>
+                  <a:srgbClr val="FD7066"/>
+                </a:solidFill>
+                <a:latin typeface="Helvetica Neue"/>
+              </a:rPr>
+              <a:t>System &gt; Hero</a:t>
+            </a:r>
+          </a:p>
+        </p:txBody>
+      </p:sp>
+      <p:cxnSp>
+        <p:nvCxnSpPr>
+          <p:cNvPr id="75" name="Connector 74"/>
+          <p:cNvCxnSpPr/>
+          <p:nvPr/>
+        </p:nvCxnSpPr>
+        <p:spPr>
+          <a:xfrm>
+            <a:off x="8506800.0" y="2862000.0"/>
+            <a:ext cx="1569600.0" cy="0.0"/>
+          </a:xfrm>
+          <a:prstGeom prst="line">
+            <a:avLst/>
+          </a:prstGeom>
+          <a:ln w="6350">
+            <a:solidFill>
+              <a:srgbClr val="D6D6D6"/>
+            </a:solidFill>
+            <a:prstDash val="sysDot"/>
+          </a:ln>
+        </p:spPr>
+        <p:style>
+          <a:lnRef idx="2">
+            <a:schemeClr val="accent1"/>
+          </a:lnRef>
+          <a:fillRef idx="0">
+            <a:schemeClr val="accent1"/>
+          </a:fillRef>
+          <a:effectRef idx="1">
+            <a:schemeClr val="accent1"/>
+          </a:effectRef>
+          <a:fontRef idx="minor">
+            <a:schemeClr val="tx1"/>
+          </a:fontRef>
+        </p:style>
+      </p:cxnSp>
+      <p:sp>
+        <p:nvSpPr>
+          <p:cNvPr id="76" name="Oval 75"/>
           <p:cNvSpPr/>
           <p:nvPr/>
         </p:nvSpPr>
         <p:spPr>
           <a:xfrm>
-            <a:off x="360000" y="2484000"/>
-            <a:ext cx="3081600" cy="288000"/>
-          </a:xfrm>
-          <a:prstGeom prst="wave">
+            <a:off x="8506800" y="2970000"/>
+            <a:ext cx="252000" cy="252000"/>
+          </a:xfrm>
+          <a:prstGeom prst="ellipse">
+            <a:avLst/>
+          </a:prstGeom>
+          <a:solidFill>
+            <a:srgbClr val="FBDFD2"/>
+          </a:solidFill>
+          <a:ln>
+            <a:noFill/>
+          </a:ln>
+        </p:spPr>
+        <p:style>
+          <a:lnRef idx="1">
+            <a:schemeClr val="accent1"/>
+          </a:lnRef>
+          <a:fillRef idx="3">
+            <a:schemeClr val="accent1"/>
+          </a:fillRef>
+          <a:effectRef idx="2">
+            <a:schemeClr val="accent1"/>
+          </a:effectRef>
+          <a:fontRef idx="minor">
+            <a:schemeClr val="lt1"/>
+          </a:fontRef>
+        </p:style>
+        <p:txBody>
+          <a:bodyPr rtlCol="0" anchor="ctr"/>
+          <a:lstStyle/>
+          <a:p>
+            <a:pPr algn="ctr"/>
+          </a:p>
+        </p:txBody>
+      </p:sp>
+      <p:sp>
+        <p:nvSpPr>
+          <p:cNvPr id="77" name="TextBox 76"/>
+          <p:cNvSpPr txBox="1"/>
+          <p:nvPr/>
+        </p:nvSpPr>
+        <p:spPr>
+          <a:xfrm>
+            <a:off x="8506800" y="2970000"/>
+            <a:ext cx="252000" cy="252000"/>
+          </a:xfrm>
+          <a:prstGeom prst="rect">
+            <a:avLst/>
+          </a:prstGeom>
+          <a:noFill/>
+        </p:spPr>
+        <p:txBody>
+          <a:bodyPr wrap="square" lIns="0" rIns="0" tIns="0" bIns="0" anchor="ctr">
+            <a:spAutoFit/>
+          </a:bodyPr>
+          <a:lstStyle/>
+          <a:p>
+            <a:pPr algn="ctr"/>
+            <a:r>
+              <a:rPr sz="1100" b="1">
+                <a:solidFill>
+                  <a:srgbClr val="FD7066"/>
+                </a:solidFill>
+              </a:rPr>
+              <a:t>👥</a:t>
+            </a:r>
+          </a:p>
+        </p:txBody>
+      </p:sp>
+      <p:sp>
+        <p:nvSpPr>
+          <p:cNvPr id="78" name="TextBox 77"/>
+          <p:cNvSpPr txBox="1"/>
+          <p:nvPr/>
+        </p:nvSpPr>
+        <p:spPr>
+          <a:xfrm>
+            <a:off x="8830800" y="2952000"/>
+            <a:ext cx="1245600" cy="162000"/>
+          </a:xfrm>
+          <a:prstGeom prst="rect">
+            <a:avLst/>
+          </a:prstGeom>
+          <a:noFill/>
+        </p:spPr>
+        <p:txBody>
+          <a:bodyPr wrap="square" lIns="0" rIns="0" tIns="0" bIns="0" anchor="t">
+            <a:spAutoFit/>
+          </a:bodyPr>
+          <a:lstStyle/>
+          <a:p>
+            <a:pPr algn="l"/>
+            <a:r>
+              <a:rPr sz="850" b="1">
+                <a:solidFill>
+                  <a:srgbClr val="4E4B4C"/>
+                </a:solidFill>
+                <a:latin typeface="游ゴシック"/>
+              </a:rPr>
+              <a:t>前進のために話す</a:t>
+            </a:r>
+          </a:p>
+        </p:txBody>
+      </p:sp>
+      <p:sp>
+        <p:nvSpPr>
+          <p:cNvPr id="79" name="TextBox 78"/>
+          <p:cNvSpPr txBox="1"/>
+          <p:nvPr/>
+        </p:nvSpPr>
+        <p:spPr>
+          <a:xfrm>
+            <a:off x="8830800" y="3106800"/>
+            <a:ext cx="1245600" cy="126000"/>
+          </a:xfrm>
+          <a:prstGeom prst="rect">
+            <a:avLst/>
+          </a:prstGeom>
+          <a:noFill/>
+        </p:spPr>
+        <p:txBody>
+          <a:bodyPr wrap="square" lIns="0" rIns="0" tIns="0" bIns="0" anchor="t">
+            <a:spAutoFit/>
+          </a:bodyPr>
+          <a:lstStyle/>
+          <a:p>
+            <a:pPr algn="l"/>
+            <a:r>
+              <a:rPr sz="650" b="0">
+                <a:solidFill>
+                  <a:srgbClr val="FD7066"/>
+                </a:solidFill>
+                <a:latin typeface="Helvetica Neue"/>
+              </a:rPr>
+              <a:t>Move Forward Together</a:t>
+            </a:r>
+          </a:p>
+        </p:txBody>
+      </p:sp>
+      <p:sp>
+        <p:nvSpPr>
+          <p:cNvPr id="80" name="Rectangle 79"/>
+          <p:cNvSpPr/>
+          <p:nvPr/>
+        </p:nvSpPr>
+        <p:spPr>
+          <a:xfrm>
+            <a:off x="543600" y="3870000"/>
+            <a:ext cx="3081600" cy="1944000"/>
+          </a:xfrm>
+          <a:prstGeom prst="rect">
+            <a:avLst/>
+          </a:prstGeom>
+          <a:solidFill>
+            <a:srgbClr val="FFFFFF"/>
+          </a:solidFill>
+          <a:ln w="3175">
+            <a:solidFill>
+              <a:srgbClr val="D6D6D6"/>
+            </a:solidFill>
+          </a:ln>
+        </p:spPr>
+        <p:style>
+          <a:lnRef idx="1">
+            <a:schemeClr val="accent1"/>
+          </a:lnRef>
+          <a:fillRef idx="3">
+            <a:schemeClr val="accent1"/>
+          </a:fillRef>
+          <a:effectRef idx="2">
+            <a:schemeClr val="accent1"/>
+          </a:effectRef>
+          <a:fontRef idx="minor">
+            <a:schemeClr val="lt1"/>
+          </a:fontRef>
+        </p:style>
+        <p:txBody>
+          <a:bodyPr rtlCol="0" anchor="ctr"/>
+          <a:lstStyle/>
+          <a:p>
+            <a:pPr algn="ctr"/>
+          </a:p>
+        </p:txBody>
+      </p:sp>
+      <p:sp>
+        <p:nvSpPr>
+          <p:cNvPr id="81" name="Oval 80"/>
+          <p:cNvSpPr/>
+          <p:nvPr/>
+        </p:nvSpPr>
+        <p:spPr>
+          <a:xfrm>
+            <a:off x="2703600" y="3798000"/>
+            <a:ext cx="1080000" cy="648000"/>
+          </a:xfrm>
+          <a:prstGeom prst="ellipse">
+            <a:avLst/>
+          </a:prstGeom>
+          <a:solidFill>
+            <a:srgbClr val="FBDFD2"/>
+          </a:solidFill>
+          <a:ln>
+            <a:noFill/>
+          </a:ln>
+        </p:spPr>
+        <p:style>
+          <a:lnRef idx="1">
+            <a:schemeClr val="accent1"/>
+          </a:lnRef>
+          <a:fillRef idx="3">
+            <a:schemeClr val="accent1"/>
+          </a:fillRef>
+          <a:effectRef idx="2">
+            <a:schemeClr val="accent1"/>
+          </a:effectRef>
+          <a:fontRef idx="minor">
+            <a:schemeClr val="lt1"/>
+          </a:fontRef>
+        </p:style>
+        <p:txBody>
+          <a:bodyPr rtlCol="0" anchor="ctr"/>
+          <a:lstStyle/>
+          <a:p>
+            <a:pPr algn="ctr"/>
+          </a:p>
+        </p:txBody>
+      </p:sp>
+      <p:sp>
+        <p:nvSpPr>
+          <p:cNvPr id="82" name="Oval 81"/>
+          <p:cNvSpPr/>
+          <p:nvPr/>
+        </p:nvSpPr>
+        <p:spPr>
+          <a:xfrm>
+            <a:off x="3135600" y="4230000"/>
+            <a:ext cx="720000" cy="468000"/>
+          </a:xfrm>
+          <a:prstGeom prst="ellipse">
+            <a:avLst/>
+          </a:prstGeom>
+          <a:solidFill>
+            <a:srgbClr val="FBDFD2"/>
+          </a:solidFill>
+          <a:ln>
+            <a:noFill/>
+          </a:ln>
+        </p:spPr>
+        <p:style>
+          <a:lnRef idx="1">
+            <a:schemeClr val="accent1"/>
+          </a:lnRef>
+          <a:fillRef idx="3">
+            <a:schemeClr val="accent1"/>
+          </a:fillRef>
+          <a:effectRef idx="2">
+            <a:schemeClr val="accent1"/>
+          </a:effectRef>
+          <a:fontRef idx="minor">
+            <a:schemeClr val="lt1"/>
+          </a:fontRef>
+        </p:style>
+        <p:txBody>
+          <a:bodyPr rtlCol="0" anchor="ctr"/>
+          <a:lstStyle/>
+          <a:p>
+            <a:pPr algn="ctr"/>
+          </a:p>
+        </p:txBody>
+      </p:sp>
+      <p:sp>
+        <p:nvSpPr>
+          <p:cNvPr id="83" name="Oval 82"/>
+          <p:cNvSpPr/>
+          <p:nvPr/>
+        </p:nvSpPr>
+        <p:spPr>
+          <a:xfrm>
+            <a:off x="3351600" y="3870000"/>
+            <a:ext cx="432000" cy="288000"/>
+          </a:xfrm>
+          <a:prstGeom prst="ellipse">
+            <a:avLst/>
+          </a:prstGeom>
+          <a:solidFill>
+            <a:srgbClr val="FBDFD2"/>
+          </a:solidFill>
+          <a:ln>
+            <a:noFill/>
+          </a:ln>
+        </p:spPr>
+        <p:style>
+          <a:lnRef idx="1">
+            <a:schemeClr val="accent1"/>
+          </a:lnRef>
+          <a:fillRef idx="3">
+            <a:schemeClr val="accent1"/>
+          </a:fillRef>
+          <a:effectRef idx="2">
+            <a:schemeClr val="accent1"/>
+          </a:effectRef>
+          <a:fontRef idx="minor">
+            <a:schemeClr val="lt1"/>
+          </a:fontRef>
+        </p:style>
+        <p:txBody>
+          <a:bodyPr rtlCol="0" anchor="ctr"/>
+          <a:lstStyle/>
+          <a:p>
+            <a:pPr algn="ctr"/>
+          </a:p>
+        </p:txBody>
+      </p:sp>
+      <p:sp>
+        <p:nvSpPr>
+          <p:cNvPr id="84" name="Oval 83"/>
+          <p:cNvSpPr/>
+          <p:nvPr/>
+        </p:nvSpPr>
+        <p:spPr>
+          <a:xfrm>
+            <a:off x="471600" y="5382000"/>
+            <a:ext cx="1080000" cy="540000"/>
+          </a:xfrm>
+          <a:prstGeom prst="ellipse">
+            <a:avLst/>
+          </a:prstGeom>
+          <a:solidFill>
+            <a:srgbClr val="DCE7E9"/>
+          </a:solidFill>
+          <a:ln>
+            <a:noFill/>
+          </a:ln>
+        </p:spPr>
+        <p:style>
+          <a:lnRef idx="1">
+            <a:schemeClr val="accent1"/>
+          </a:lnRef>
+          <a:fillRef idx="3">
+            <a:schemeClr val="accent1"/>
+          </a:fillRef>
+          <a:effectRef idx="2">
+            <a:schemeClr val="accent1"/>
+          </a:effectRef>
+          <a:fontRef idx="minor">
+            <a:schemeClr val="lt1"/>
+          </a:fontRef>
+        </p:style>
+        <p:txBody>
+          <a:bodyPr rtlCol="0" anchor="ctr"/>
+          <a:lstStyle/>
+          <a:p>
+            <a:pPr algn="ctr"/>
+          </a:p>
+        </p:txBody>
+      </p:sp>
+      <p:sp>
+        <p:nvSpPr>
+          <p:cNvPr id="85" name="Oval 84"/>
+          <p:cNvSpPr/>
+          <p:nvPr/>
+        </p:nvSpPr>
+        <p:spPr>
+          <a:xfrm>
+            <a:off x="1083600" y="5526000"/>
+            <a:ext cx="720000" cy="360000"/>
+          </a:xfrm>
+          <a:prstGeom prst="ellipse">
+            <a:avLst/>
+          </a:prstGeom>
+          <a:solidFill>
+            <a:srgbClr val="FBDFD2"/>
+          </a:solidFill>
+          <a:ln>
+            <a:noFill/>
+          </a:ln>
+        </p:spPr>
+        <p:style>
+          <a:lnRef idx="1">
+            <a:schemeClr val="accent1"/>
+          </a:lnRef>
+          <a:fillRef idx="3">
+            <a:schemeClr val="accent1"/>
+          </a:fillRef>
+          <a:effectRef idx="2">
+            <a:schemeClr val="accent1"/>
+          </a:effectRef>
+          <a:fontRef idx="minor">
+            <a:schemeClr val="lt1"/>
+          </a:fontRef>
+        </p:style>
+        <p:txBody>
+          <a:bodyPr rtlCol="0" anchor="ctr"/>
+          <a:lstStyle/>
+          <a:p>
+            <a:pPr algn="ctr"/>
+          </a:p>
+        </p:txBody>
+      </p:sp>
+      <p:sp>
+        <p:nvSpPr>
+          <p:cNvPr id="86" name="Oval 85"/>
+          <p:cNvSpPr/>
+          <p:nvPr/>
+        </p:nvSpPr>
+        <p:spPr>
+          <a:xfrm>
+            <a:off x="615600" y="5598000"/>
+            <a:ext cx="540000" cy="288000"/>
+          </a:xfrm>
+          <a:prstGeom prst="ellipse">
+            <a:avLst/>
+          </a:prstGeom>
+          <a:solidFill>
+            <a:srgbClr val="DCE7E9"/>
+          </a:solidFill>
+          <a:ln>
+            <a:noFill/>
+          </a:ln>
+        </p:spPr>
+        <p:style>
+          <a:lnRef idx="1">
+            <a:schemeClr val="accent1"/>
+          </a:lnRef>
+          <a:fillRef idx="3">
+            <a:schemeClr val="accent1"/>
+          </a:fillRef>
+          <a:effectRef idx="2">
+            <a:schemeClr val="accent1"/>
+          </a:effectRef>
+          <a:fontRef idx="minor">
+            <a:schemeClr val="lt1"/>
+          </a:fontRef>
+        </p:style>
+        <p:txBody>
+          <a:bodyPr rtlCol="0" anchor="ctr"/>
+          <a:lstStyle/>
+          <a:p>
+            <a:pPr algn="ctr"/>
+          </a:p>
+        </p:txBody>
+      </p:sp>
+      <p:sp>
+        <p:nvSpPr>
+          <p:cNvPr id="87" name="Freeform 86"/>
+          <p:cNvSpPr/>
+          <p:nvPr/>
+        </p:nvSpPr>
+        <p:spPr>
+          <a:xfrm>
+            <a:off x="360000" y="-108000"/>
+            <a:ext cx="2721600" cy="5706000"/>
+          </a:xfrm>
+          <a:custGeom>
+            <a:avLst/>
+            <a:gdLst/>
+            <a:ahLst/>
+            <a:cxnLst/>
+            <a:rect l="l" t="t" r="r" b="b"/>
+            <a:pathLst>
+              <a:path w="2721600" h="5706000">
+                <a:moveTo>
+                  <a:pt x="183600" y="5706000"/>
+                </a:moveTo>
+                <a:lnTo>
+                  <a:pt x="0" y="36000"/>
+                </a:lnTo>
+                <a:lnTo>
+                  <a:pt x="360000" y="180000"/>
+                </a:lnTo>
+                <a:lnTo>
+                  <a:pt x="720000" y="108000"/>
+                </a:lnTo>
+                <a:lnTo>
+                  <a:pt x="1152000" y="0"/>
+                </a:lnTo>
+                <a:lnTo>
+                  <a:pt x="1584000" y="36000"/>
+                </a:lnTo>
+                <a:lnTo>
+                  <a:pt x="1980000" y="180000"/>
+                </a:lnTo>
+                <a:lnTo>
+                  <a:pt x="2340000" y="144000"/>
+                </a:lnTo>
+                <a:lnTo>
+                  <a:pt x="2721600" y="72000"/>
+                </a:lnTo>
+              </a:path>
+            </a:pathLst>
+          </a:custGeom>
+          <a:noFill/>
+          <a:ln w="12700">
+            <a:solidFill>
+              <a:srgbClr val="FD7066"/>
+            </a:solidFill>
+          </a:ln>
+        </p:spPr>
+        <p:style>
+          <a:lnRef idx="1">
+            <a:schemeClr val="accent1"/>
+          </a:lnRef>
+          <a:fillRef idx="3">
+            <a:schemeClr val="accent1"/>
+          </a:fillRef>
+          <a:effectRef idx="2">
+            <a:schemeClr val="accent1"/>
+          </a:effectRef>
+          <a:fontRef idx="minor">
+            <a:schemeClr val="lt1"/>
+          </a:fontRef>
+        </p:style>
+        <p:txBody>
+          <a:bodyPr rtlCol="0" anchor="ctr"/>
+          <a:lstStyle/>
+          <a:p>
+            <a:pPr algn="ctr"/>
+          </a:p>
+        </p:txBody>
+      </p:sp>
+      <p:sp>
+        <p:nvSpPr>
+          <p:cNvPr id="88" name="Oval 87"/>
+          <p:cNvSpPr/>
+          <p:nvPr/>
+        </p:nvSpPr>
+        <p:spPr>
+          <a:xfrm>
+            <a:off x="795600" y="4338000"/>
+            <a:ext cx="540000" cy="432000"/>
+          </a:xfrm>
+          <a:prstGeom prst="ellipse">
             <a:avLst/>
           </a:prstGeom>
           <a:solidFill>
@@ -4314,16 +6696,16 @@
       </p:sp>
       <p:sp>
         <p:nvSpPr>
-          <p:cNvPr id="34" name="Heart 33"/>
+          <p:cNvPr id="89" name="Oval 88"/>
           <p:cNvSpPr/>
           <p:nvPr/>
         </p:nvSpPr>
         <p:spPr>
           <a:xfrm>
-            <a:off x="468000" y="2772000"/>
-            <a:ext cx="648000" cy="648000"/>
-          </a:xfrm>
-          <a:prstGeom prst="heart">
+            <a:off x="1227600" y="4446000"/>
+            <a:ext cx="396000" cy="324000"/>
+          </a:xfrm>
+          <a:prstGeom prst="ellipse">
             <a:avLst/>
           </a:prstGeom>
           <a:solidFill>
@@ -4357,14 +6739,57 @@
       </p:sp>
       <p:sp>
         <p:nvSpPr>
-          <p:cNvPr id="35" name="TextBox 34"/>
+          <p:cNvPr id="90" name="Oval 89"/>
+          <p:cNvSpPr/>
+          <p:nvPr/>
+        </p:nvSpPr>
+        <p:spPr>
+          <a:xfrm>
+            <a:off x="1119600" y="4518000"/>
+            <a:ext cx="180000" cy="144000"/>
+          </a:xfrm>
+          <a:prstGeom prst="ellipse">
+            <a:avLst/>
+          </a:prstGeom>
+          <a:solidFill>
+            <a:srgbClr val="FFFFFF"/>
+          </a:solidFill>
+          <a:ln>
+            <a:noFill/>
+          </a:ln>
+        </p:spPr>
+        <p:style>
+          <a:lnRef idx="1">
+            <a:schemeClr val="accent1"/>
+          </a:lnRef>
+          <a:fillRef idx="3">
+            <a:schemeClr val="accent1"/>
+          </a:fillRef>
+          <a:effectRef idx="2">
+            <a:schemeClr val="accent1"/>
+          </a:effectRef>
+          <a:fontRef idx="minor">
+            <a:schemeClr val="lt1"/>
+          </a:fontRef>
+        </p:style>
+        <p:txBody>
+          <a:bodyPr rtlCol="0" anchor="ctr"/>
+          <a:lstStyle/>
+          <a:p>
+            <a:pPr algn="ctr"/>
+          </a:p>
+        </p:txBody>
+      </p:sp>
+      <p:sp>
+        <p:nvSpPr>
+          <p:cNvPr id="91" name="TextBox 90"/>
           <p:cNvSpPr txBox="1"/>
           <p:nvPr/>
         </p:nvSpPr>
         <p:spPr>
           <a:xfrm>
-            <a:off x="504000" y="3132000"/>
-            <a:ext cx="576000" cy="288000"/>
+            <a:off x="615600" y="4986000"/>
+            <a:ext cx="1188000" cy="288000"/>
           </a:xfrm>
           <a:prstGeom prst="rect">
             <a:avLst/>
@@ -4372,19 +6797,19 @@
           <a:noFill/>
         </p:spPr>
         <p:txBody>
-          <a:bodyPr wrap="none">
+          <a:bodyPr wrap="square" lIns="0" rIns="0" tIns="0" bIns="0" anchor="t">
             <a:spAutoFit/>
           </a:bodyPr>
           <a:lstStyle/>
           <a:p>
-            <a:pPr algn="ctr">
-              <a:defRPr sz="1000" b="1">
+            <a:pPr algn="ctr"/>
+            <a:r>
+              <a:rPr sz="1500" b="1">
                 <a:solidFill>
                   <a:srgbClr val="FD7066"/>
                 </a:solidFill>
-              </a:defRPr>
-            </a:pPr>
-            <a:r>
+                <a:latin typeface="Arial Rounded MT Bold"/>
+              </a:rPr>
               <a:t>mamawell</a:t>
             </a:r>
           </a:p>
@@ -4392,14 +6817,57 @@
       </p:sp>
       <p:sp>
         <p:nvSpPr>
-          <p:cNvPr id="36" name="TextBox 35"/>
+          <p:cNvPr id="92" name="Oval 91"/>
+          <p:cNvSpPr/>
+          <p:nvPr/>
+        </p:nvSpPr>
+        <p:spPr>
+          <a:xfrm>
+            <a:off x="1983600" y="4158000"/>
+            <a:ext cx="252000" cy="252000"/>
+          </a:xfrm>
+          <a:prstGeom prst="ellipse">
+            <a:avLst/>
+          </a:prstGeom>
+          <a:solidFill>
+            <a:srgbClr val="FBDFD2"/>
+          </a:solidFill>
+          <a:ln>
+            <a:noFill/>
+          </a:ln>
+        </p:spPr>
+        <p:style>
+          <a:lnRef idx="1">
+            <a:schemeClr val="accent1"/>
+          </a:lnRef>
+          <a:fillRef idx="3">
+            <a:schemeClr val="accent1"/>
+          </a:fillRef>
+          <a:effectRef idx="2">
+            <a:schemeClr val="accent1"/>
+          </a:effectRef>
+          <a:fontRef idx="minor">
+            <a:schemeClr val="lt1"/>
+          </a:fontRef>
+        </p:style>
+        <p:txBody>
+          <a:bodyPr rtlCol="0" anchor="ctr"/>
+          <a:lstStyle/>
+          <a:p>
+            <a:pPr algn="ctr"/>
+          </a:p>
+        </p:txBody>
+      </p:sp>
+      <p:sp>
+        <p:nvSpPr>
+          <p:cNvPr id="93" name="TextBox 92"/>
           <p:cNvSpPr txBox="1"/>
           <p:nvPr/>
         </p:nvSpPr>
         <p:spPr>
           <a:xfrm>
-            <a:off x="1260000" y="2664000"/>
-            <a:ext cx="2073600" cy="180000"/>
+            <a:off x="1983600" y="4158000"/>
+            <a:ext cx="252000" cy="252000"/>
           </a:xfrm>
           <a:prstGeom prst="rect">
             <a:avLst/>
@@ -4407,19 +6875,53 @@
           <a:noFill/>
         </p:spPr>
         <p:txBody>
-          <a:bodyPr wrap="none">
+          <a:bodyPr wrap="square" lIns="0" rIns="0" tIns="0" bIns="0" anchor="ctr">
             <a:spAutoFit/>
           </a:bodyPr>
           <a:lstStyle/>
           <a:p>
-            <a:pPr>
-              <a:defRPr sz="900" b="1">
+            <a:pPr algn="ctr"/>
+            <a:r>
+              <a:rPr sz="1100" b="1">
+                <a:solidFill>
+                  <a:srgbClr val="FD7066"/>
+                </a:solidFill>
+              </a:rPr>
+              <a:t>♡</a:t>
+            </a:r>
+          </a:p>
+        </p:txBody>
+      </p:sp>
+      <p:sp>
+        <p:nvSpPr>
+          <p:cNvPr id="94" name="TextBox 93"/>
+          <p:cNvSpPr txBox="1"/>
+          <p:nvPr/>
+        </p:nvSpPr>
+        <p:spPr>
+          <a:xfrm>
+            <a:off x="2307600" y="4140000"/>
+            <a:ext cx="1245600" cy="162000"/>
+          </a:xfrm>
+          <a:prstGeom prst="rect">
+            <a:avLst/>
+          </a:prstGeom>
+          <a:noFill/>
+        </p:spPr>
+        <p:txBody>
+          <a:bodyPr wrap="square" lIns="0" rIns="0" tIns="0" bIns="0" anchor="t">
+            <a:spAutoFit/>
+          </a:bodyPr>
+          <a:lstStyle/>
+          <a:p>
+            <a:pPr algn="l"/>
+            <a:r>
+              <a:rPr sz="850" b="1">
                 <a:solidFill>
                   <a:srgbClr val="4E4B4C"/>
                 </a:solidFill>
-              </a:defRPr>
-            </a:pPr>
-            <a:r>
+                <a:latin typeface="游ゴシック"/>
+              </a:rPr>
               <a:t>常に誠実に</a:t>
             </a:r>
           </a:p>
@@ -4427,14 +6929,14 @@
       </p:sp>
       <p:sp>
         <p:nvSpPr>
-          <p:cNvPr id="37" name="TextBox 36"/>
+          <p:cNvPr id="95" name="TextBox 94"/>
           <p:cNvSpPr txBox="1"/>
           <p:nvPr/>
         </p:nvSpPr>
         <p:spPr>
           <a:xfrm>
-            <a:off x="1260000" y="2808000"/>
-            <a:ext cx="2073600" cy="144000"/>
+            <a:off x="2307600" y="4294800"/>
+            <a:ext cx="1245600" cy="126000"/>
           </a:xfrm>
           <a:prstGeom prst="rect">
             <a:avLst/>
@@ -4442,185 +6944,79 @@
           <a:noFill/>
         </p:spPr>
         <p:txBody>
-          <a:bodyPr wrap="none">
+          <a:bodyPr wrap="square" lIns="0" rIns="0" tIns="0" bIns="0" anchor="t">
             <a:spAutoFit/>
           </a:bodyPr>
           <a:lstStyle/>
           <a:p>
-            <a:pPr>
-              <a:defRPr sz="700">
+            <a:pPr algn="l"/>
+            <a:r>
+              <a:rPr sz="650" b="0">
                 <a:solidFill>
                   <a:srgbClr val="FD7066"/>
                 </a:solidFill>
-              </a:defRPr>
-            </a:pPr>
-            <a:r>
+                <a:latin typeface="Helvetica Neue"/>
+              </a:rPr>
               <a:t>Integrity First</a:t>
             </a:r>
           </a:p>
         </p:txBody>
       </p:sp>
-      <p:sp>
-        <p:nvSpPr>
-          <p:cNvPr id="38" name="TextBox 37"/>
-          <p:cNvSpPr txBox="1"/>
-          <p:nvPr/>
-        </p:nvSpPr>
-        <p:spPr>
-          <a:xfrm>
-            <a:off x="1260000" y="3024000"/>
-            <a:ext cx="2073600" cy="180000"/>
-          </a:xfrm>
-          <a:prstGeom prst="rect">
-            <a:avLst/>
-          </a:prstGeom>
-          <a:noFill/>
-        </p:spPr>
-        <p:txBody>
-          <a:bodyPr wrap="none">
-            <a:spAutoFit/>
-          </a:bodyPr>
-          <a:lstStyle/>
-          <a:p>
-            <a:pPr>
-              <a:defRPr sz="900" b="1">
-                <a:solidFill>
-                  <a:srgbClr val="4E4B4C"/>
-                </a:solidFill>
-              </a:defRPr>
-            </a:pPr>
-            <a:r>
-              <a:t>仕組みで勝つ</a:t>
-            </a:r>
-          </a:p>
-        </p:txBody>
-      </p:sp>
-      <p:sp>
-        <p:nvSpPr>
-          <p:cNvPr id="39" name="TextBox 38"/>
-          <p:cNvSpPr txBox="1"/>
-          <p:nvPr/>
-        </p:nvSpPr>
-        <p:spPr>
-          <a:xfrm>
-            <a:off x="1260000" y="3168000"/>
-            <a:ext cx="2073600" cy="144000"/>
-          </a:xfrm>
-          <a:prstGeom prst="rect">
-            <a:avLst/>
-          </a:prstGeom>
-          <a:noFill/>
-        </p:spPr>
-        <p:txBody>
-          <a:bodyPr wrap="none">
-            <a:spAutoFit/>
-          </a:bodyPr>
-          <a:lstStyle/>
-          <a:p>
-            <a:pPr>
-              <a:defRPr sz="700">
-                <a:solidFill>
-                  <a:srgbClr val="FD7066"/>
-                </a:solidFill>
-              </a:defRPr>
-            </a:pPr>
-            <a:r>
-              <a:t>System &gt; Hero</a:t>
-            </a:r>
-          </a:p>
-        </p:txBody>
-      </p:sp>
-      <p:sp>
-        <p:nvSpPr>
-          <p:cNvPr id="40" name="TextBox 39"/>
-          <p:cNvSpPr txBox="1"/>
-          <p:nvPr/>
-        </p:nvSpPr>
-        <p:spPr>
-          <a:xfrm>
-            <a:off x="1260000" y="3384000"/>
-            <a:ext cx="2073600" cy="180000"/>
-          </a:xfrm>
-          <a:prstGeom prst="rect">
-            <a:avLst/>
-          </a:prstGeom>
-          <a:noFill/>
-        </p:spPr>
-        <p:txBody>
-          <a:bodyPr wrap="none">
-            <a:spAutoFit/>
-          </a:bodyPr>
-          <a:lstStyle/>
-          <a:p>
-            <a:pPr>
-              <a:defRPr sz="900" b="1">
-                <a:solidFill>
-                  <a:srgbClr val="4E4B4C"/>
-                </a:solidFill>
-              </a:defRPr>
-            </a:pPr>
-            <a:r>
-              <a:t>前進のために話す</a:t>
-            </a:r>
-          </a:p>
-        </p:txBody>
-      </p:sp>
-      <p:sp>
-        <p:nvSpPr>
-          <p:cNvPr id="41" name="TextBox 40"/>
-          <p:cNvSpPr txBox="1"/>
-          <p:nvPr/>
-        </p:nvSpPr>
-        <p:spPr>
-          <a:xfrm>
-            <a:off x="1260000" y="3528000"/>
-            <a:ext cx="2073600" cy="144000"/>
-          </a:xfrm>
-          <a:prstGeom prst="rect">
-            <a:avLst/>
-          </a:prstGeom>
-          <a:noFill/>
-        </p:spPr>
-        <p:txBody>
-          <a:bodyPr wrap="none">
-            <a:spAutoFit/>
-          </a:bodyPr>
-          <a:lstStyle/>
-          <a:p>
-            <a:pPr>
-              <a:defRPr sz="700">
-                <a:solidFill>
-                  <a:srgbClr val="FD7066"/>
-                </a:solidFill>
-              </a:defRPr>
-            </a:pPr>
-            <a:r>
-              <a:t>Move Forward Together</a:t>
-            </a:r>
-          </a:p>
-        </p:txBody>
-      </p:sp>
-      <p:sp>
-        <p:nvSpPr>
-          <p:cNvPr id="42" name="Rounded Rectangle 41"/>
-          <p:cNvSpPr/>
-          <p:nvPr/>
-        </p:nvSpPr>
-        <p:spPr>
-          <a:xfrm>
-            <a:off x="3621600" y="2484000"/>
-            <a:ext cx="3081600" cy="1944000"/>
-          </a:xfrm>
-          <a:prstGeom prst="roundRect">
-            <a:avLst/>
-          </a:prstGeom>
-          <a:solidFill>
-            <a:srgbClr val="FBDFD2"/>
-          </a:solidFill>
+      <p:cxnSp>
+        <p:nvCxnSpPr>
+          <p:cNvPr id="96" name="Connector 95"/>
+          <p:cNvCxnSpPr/>
+          <p:nvPr/>
+        </p:nvCxnSpPr>
+        <p:spPr>
+          <a:xfrm>
+            <a:off x="1983600.0" y="4518000.0"/>
+            <a:ext cx="1569600.0" cy="0.0"/>
+          </a:xfrm>
+          <a:prstGeom prst="line">
+            <a:avLst/>
+          </a:prstGeom>
           <a:ln w="6350">
             <a:solidFill>
               <a:srgbClr val="D6D6D6"/>
             </a:solidFill>
+            <a:prstDash val="sysDot"/>
+          </a:ln>
+        </p:spPr>
+        <p:style>
+          <a:lnRef idx="2">
+            <a:schemeClr val="accent1"/>
+          </a:lnRef>
+          <a:fillRef idx="0">
+            <a:schemeClr val="accent1"/>
+          </a:fillRef>
+          <a:effectRef idx="1">
+            <a:schemeClr val="accent1"/>
+          </a:effectRef>
+          <a:fontRef idx="minor">
+            <a:schemeClr val="tx1"/>
+          </a:fontRef>
+        </p:style>
+      </p:cxnSp>
+      <p:sp>
+        <p:nvSpPr>
+          <p:cNvPr id="97" name="Oval 96"/>
+          <p:cNvSpPr/>
+          <p:nvPr/>
+        </p:nvSpPr>
+        <p:spPr>
+          <a:xfrm>
+            <a:off x="1983600" y="4626000"/>
+            <a:ext cx="252000" cy="252000"/>
+          </a:xfrm>
+          <a:prstGeom prst="ellipse">
+            <a:avLst/>
+          </a:prstGeom>
+          <a:solidFill>
+            <a:srgbClr val="DCE7E9"/>
+          </a:solidFill>
+          <a:ln>
+            <a:noFill/>
           </a:ln>
         </p:spPr>
         <p:style>
@@ -4647,16 +7043,684 @@
       </p:sp>
       <p:sp>
         <p:nvSpPr>
-          <p:cNvPr id="43" name="Wave 42"/>
+          <p:cNvPr id="98" name="TextBox 97"/>
+          <p:cNvSpPr txBox="1"/>
+          <p:nvPr/>
+        </p:nvSpPr>
+        <p:spPr>
+          <a:xfrm>
+            <a:off x="1983600" y="4626000"/>
+            <a:ext cx="252000" cy="252000"/>
+          </a:xfrm>
+          <a:prstGeom prst="rect">
+            <a:avLst/>
+          </a:prstGeom>
+          <a:noFill/>
+        </p:spPr>
+        <p:txBody>
+          <a:bodyPr wrap="square" lIns="0" rIns="0" tIns="0" bIns="0" anchor="ctr">
+            <a:spAutoFit/>
+          </a:bodyPr>
+          <a:lstStyle/>
+          <a:p>
+            <a:pPr algn="ctr"/>
+            <a:r>
+              <a:rPr sz="1100" b="1">
+                <a:solidFill>
+                  <a:srgbClr val="FD7066"/>
+                </a:solidFill>
+              </a:rPr>
+              <a:t>📈</a:t>
+            </a:r>
+          </a:p>
+        </p:txBody>
+      </p:sp>
+      <p:sp>
+        <p:nvSpPr>
+          <p:cNvPr id="99" name="TextBox 98"/>
+          <p:cNvSpPr txBox="1"/>
+          <p:nvPr/>
+        </p:nvSpPr>
+        <p:spPr>
+          <a:xfrm>
+            <a:off x="2307600" y="4608000"/>
+            <a:ext cx="1245600" cy="162000"/>
+          </a:xfrm>
+          <a:prstGeom prst="rect">
+            <a:avLst/>
+          </a:prstGeom>
+          <a:noFill/>
+        </p:spPr>
+        <p:txBody>
+          <a:bodyPr wrap="square" lIns="0" rIns="0" tIns="0" bIns="0" anchor="t">
+            <a:spAutoFit/>
+          </a:bodyPr>
+          <a:lstStyle/>
+          <a:p>
+            <a:pPr algn="l"/>
+            <a:r>
+              <a:rPr sz="850" b="1">
+                <a:solidFill>
+                  <a:srgbClr val="4E4B4C"/>
+                </a:solidFill>
+                <a:latin typeface="游ゴシック"/>
+              </a:rPr>
+              <a:t>仕組みで勝つ</a:t>
+            </a:r>
+          </a:p>
+        </p:txBody>
+      </p:sp>
+      <p:sp>
+        <p:nvSpPr>
+          <p:cNvPr id="100" name="TextBox 99"/>
+          <p:cNvSpPr txBox="1"/>
+          <p:nvPr/>
+        </p:nvSpPr>
+        <p:spPr>
+          <a:xfrm>
+            <a:off x="2307600" y="4762800"/>
+            <a:ext cx="1245600" cy="126000"/>
+          </a:xfrm>
+          <a:prstGeom prst="rect">
+            <a:avLst/>
+          </a:prstGeom>
+          <a:noFill/>
+        </p:spPr>
+        <p:txBody>
+          <a:bodyPr wrap="square" lIns="0" rIns="0" tIns="0" bIns="0" anchor="t">
+            <a:spAutoFit/>
+          </a:bodyPr>
+          <a:lstStyle/>
+          <a:p>
+            <a:pPr algn="l"/>
+            <a:r>
+              <a:rPr sz="650" b="0">
+                <a:solidFill>
+                  <a:srgbClr val="FD7066"/>
+                </a:solidFill>
+                <a:latin typeface="Helvetica Neue"/>
+              </a:rPr>
+              <a:t>System &gt; Hero</a:t>
+            </a:r>
+          </a:p>
+        </p:txBody>
+      </p:sp>
+      <p:cxnSp>
+        <p:nvCxnSpPr>
+          <p:cNvPr id="101" name="Connector 100"/>
+          <p:cNvCxnSpPr/>
+          <p:nvPr/>
+        </p:nvCxnSpPr>
+        <p:spPr>
+          <a:xfrm>
+            <a:off x="1983600.0" y="4986000.0"/>
+            <a:ext cx="1569600.0" cy="0.0"/>
+          </a:xfrm>
+          <a:prstGeom prst="line">
+            <a:avLst/>
+          </a:prstGeom>
+          <a:ln w="6350">
+            <a:solidFill>
+              <a:srgbClr val="D6D6D6"/>
+            </a:solidFill>
+            <a:prstDash val="sysDot"/>
+          </a:ln>
+        </p:spPr>
+        <p:style>
+          <a:lnRef idx="2">
+            <a:schemeClr val="accent1"/>
+          </a:lnRef>
+          <a:fillRef idx="0">
+            <a:schemeClr val="accent1"/>
+          </a:fillRef>
+          <a:effectRef idx="1">
+            <a:schemeClr val="accent1"/>
+          </a:effectRef>
+          <a:fontRef idx="minor">
+            <a:schemeClr val="tx1"/>
+          </a:fontRef>
+        </p:style>
+      </p:cxnSp>
+      <p:sp>
+        <p:nvSpPr>
+          <p:cNvPr id="102" name="Oval 101"/>
           <p:cNvSpPr/>
           <p:nvPr/>
         </p:nvSpPr>
         <p:spPr>
           <a:xfrm>
-            <a:off x="3621600" y="2484000"/>
-            <a:ext cx="3081600" cy="288000"/>
-          </a:xfrm>
-          <a:prstGeom prst="wave">
+            <a:off x="1983600" y="5094000"/>
+            <a:ext cx="252000" cy="252000"/>
+          </a:xfrm>
+          <a:prstGeom prst="ellipse">
+            <a:avLst/>
+          </a:prstGeom>
+          <a:solidFill>
+            <a:srgbClr val="FBDFD2"/>
+          </a:solidFill>
+          <a:ln>
+            <a:noFill/>
+          </a:ln>
+        </p:spPr>
+        <p:style>
+          <a:lnRef idx="1">
+            <a:schemeClr val="accent1"/>
+          </a:lnRef>
+          <a:fillRef idx="3">
+            <a:schemeClr val="accent1"/>
+          </a:fillRef>
+          <a:effectRef idx="2">
+            <a:schemeClr val="accent1"/>
+          </a:effectRef>
+          <a:fontRef idx="minor">
+            <a:schemeClr val="lt1"/>
+          </a:fontRef>
+        </p:style>
+        <p:txBody>
+          <a:bodyPr rtlCol="0" anchor="ctr"/>
+          <a:lstStyle/>
+          <a:p>
+            <a:pPr algn="ctr"/>
+          </a:p>
+        </p:txBody>
+      </p:sp>
+      <p:sp>
+        <p:nvSpPr>
+          <p:cNvPr id="103" name="TextBox 102"/>
+          <p:cNvSpPr txBox="1"/>
+          <p:nvPr/>
+        </p:nvSpPr>
+        <p:spPr>
+          <a:xfrm>
+            <a:off x="1983600" y="5094000"/>
+            <a:ext cx="252000" cy="252000"/>
+          </a:xfrm>
+          <a:prstGeom prst="rect">
+            <a:avLst/>
+          </a:prstGeom>
+          <a:noFill/>
+        </p:spPr>
+        <p:txBody>
+          <a:bodyPr wrap="square" lIns="0" rIns="0" tIns="0" bIns="0" anchor="ctr">
+            <a:spAutoFit/>
+          </a:bodyPr>
+          <a:lstStyle/>
+          <a:p>
+            <a:pPr algn="ctr"/>
+            <a:r>
+              <a:rPr sz="1100" b="1">
+                <a:solidFill>
+                  <a:srgbClr val="FD7066"/>
+                </a:solidFill>
+              </a:rPr>
+              <a:t>👥</a:t>
+            </a:r>
+          </a:p>
+        </p:txBody>
+      </p:sp>
+      <p:sp>
+        <p:nvSpPr>
+          <p:cNvPr id="104" name="TextBox 103"/>
+          <p:cNvSpPr txBox="1"/>
+          <p:nvPr/>
+        </p:nvSpPr>
+        <p:spPr>
+          <a:xfrm>
+            <a:off x="2307600" y="5076000"/>
+            <a:ext cx="1245600" cy="162000"/>
+          </a:xfrm>
+          <a:prstGeom prst="rect">
+            <a:avLst/>
+          </a:prstGeom>
+          <a:noFill/>
+        </p:spPr>
+        <p:txBody>
+          <a:bodyPr wrap="square" lIns="0" rIns="0" tIns="0" bIns="0" anchor="t">
+            <a:spAutoFit/>
+          </a:bodyPr>
+          <a:lstStyle/>
+          <a:p>
+            <a:pPr algn="l"/>
+            <a:r>
+              <a:rPr sz="850" b="1">
+                <a:solidFill>
+                  <a:srgbClr val="4E4B4C"/>
+                </a:solidFill>
+                <a:latin typeface="游ゴシック"/>
+              </a:rPr>
+              <a:t>前進のために話す</a:t>
+            </a:r>
+          </a:p>
+        </p:txBody>
+      </p:sp>
+      <p:sp>
+        <p:nvSpPr>
+          <p:cNvPr id="105" name="TextBox 104"/>
+          <p:cNvSpPr txBox="1"/>
+          <p:nvPr/>
+        </p:nvSpPr>
+        <p:spPr>
+          <a:xfrm>
+            <a:off x="2307600" y="5230800"/>
+            <a:ext cx="1245600" cy="126000"/>
+          </a:xfrm>
+          <a:prstGeom prst="rect">
+            <a:avLst/>
+          </a:prstGeom>
+          <a:noFill/>
+        </p:spPr>
+        <p:txBody>
+          <a:bodyPr wrap="square" lIns="0" rIns="0" tIns="0" bIns="0" anchor="t">
+            <a:spAutoFit/>
+          </a:bodyPr>
+          <a:lstStyle/>
+          <a:p>
+            <a:pPr algn="l"/>
+            <a:r>
+              <a:rPr sz="650" b="0">
+                <a:solidFill>
+                  <a:srgbClr val="FD7066"/>
+                </a:solidFill>
+                <a:latin typeface="Helvetica Neue"/>
+              </a:rPr>
+              <a:t>Move Forward Together</a:t>
+            </a:r>
+          </a:p>
+        </p:txBody>
+      </p:sp>
+      <p:sp>
+        <p:nvSpPr>
+          <p:cNvPr id="106" name="Rectangle 105"/>
+          <p:cNvSpPr/>
+          <p:nvPr/>
+        </p:nvSpPr>
+        <p:spPr>
+          <a:xfrm>
+            <a:off x="3805200" y="3870000"/>
+            <a:ext cx="3081600" cy="1944000"/>
+          </a:xfrm>
+          <a:prstGeom prst="rect">
+            <a:avLst/>
+          </a:prstGeom>
+          <a:solidFill>
+            <a:srgbClr val="FFFFFF"/>
+          </a:solidFill>
+          <a:ln w="3175">
+            <a:solidFill>
+              <a:srgbClr val="D6D6D6"/>
+            </a:solidFill>
+          </a:ln>
+        </p:spPr>
+        <p:style>
+          <a:lnRef idx="1">
+            <a:schemeClr val="accent1"/>
+          </a:lnRef>
+          <a:fillRef idx="3">
+            <a:schemeClr val="accent1"/>
+          </a:fillRef>
+          <a:effectRef idx="2">
+            <a:schemeClr val="accent1"/>
+          </a:effectRef>
+          <a:fontRef idx="minor">
+            <a:schemeClr val="lt1"/>
+          </a:fontRef>
+        </p:style>
+        <p:txBody>
+          <a:bodyPr rtlCol="0" anchor="ctr"/>
+          <a:lstStyle/>
+          <a:p>
+            <a:pPr algn="ctr"/>
+          </a:p>
+        </p:txBody>
+      </p:sp>
+      <p:sp>
+        <p:nvSpPr>
+          <p:cNvPr id="107" name="Oval 106"/>
+          <p:cNvSpPr/>
+          <p:nvPr/>
+        </p:nvSpPr>
+        <p:spPr>
+          <a:xfrm>
+            <a:off x="5965200" y="3798000"/>
+            <a:ext cx="1080000" cy="648000"/>
+          </a:xfrm>
+          <a:prstGeom prst="ellipse">
+            <a:avLst/>
+          </a:prstGeom>
+          <a:solidFill>
+            <a:srgbClr val="FBDFD2"/>
+          </a:solidFill>
+          <a:ln>
+            <a:noFill/>
+          </a:ln>
+        </p:spPr>
+        <p:style>
+          <a:lnRef idx="1">
+            <a:schemeClr val="accent1"/>
+          </a:lnRef>
+          <a:fillRef idx="3">
+            <a:schemeClr val="accent1"/>
+          </a:fillRef>
+          <a:effectRef idx="2">
+            <a:schemeClr val="accent1"/>
+          </a:effectRef>
+          <a:fontRef idx="minor">
+            <a:schemeClr val="lt1"/>
+          </a:fontRef>
+        </p:style>
+        <p:txBody>
+          <a:bodyPr rtlCol="0" anchor="ctr"/>
+          <a:lstStyle/>
+          <a:p>
+            <a:pPr algn="ctr"/>
+          </a:p>
+        </p:txBody>
+      </p:sp>
+      <p:sp>
+        <p:nvSpPr>
+          <p:cNvPr id="108" name="Oval 107"/>
+          <p:cNvSpPr/>
+          <p:nvPr/>
+        </p:nvSpPr>
+        <p:spPr>
+          <a:xfrm>
+            <a:off x="6397200" y="4230000"/>
+            <a:ext cx="720000" cy="468000"/>
+          </a:xfrm>
+          <a:prstGeom prst="ellipse">
+            <a:avLst/>
+          </a:prstGeom>
+          <a:solidFill>
+            <a:srgbClr val="FBDFD2"/>
+          </a:solidFill>
+          <a:ln>
+            <a:noFill/>
+          </a:ln>
+        </p:spPr>
+        <p:style>
+          <a:lnRef idx="1">
+            <a:schemeClr val="accent1"/>
+          </a:lnRef>
+          <a:fillRef idx="3">
+            <a:schemeClr val="accent1"/>
+          </a:fillRef>
+          <a:effectRef idx="2">
+            <a:schemeClr val="accent1"/>
+          </a:effectRef>
+          <a:fontRef idx="minor">
+            <a:schemeClr val="lt1"/>
+          </a:fontRef>
+        </p:style>
+        <p:txBody>
+          <a:bodyPr rtlCol="0" anchor="ctr"/>
+          <a:lstStyle/>
+          <a:p>
+            <a:pPr algn="ctr"/>
+          </a:p>
+        </p:txBody>
+      </p:sp>
+      <p:sp>
+        <p:nvSpPr>
+          <p:cNvPr id="109" name="Oval 108"/>
+          <p:cNvSpPr/>
+          <p:nvPr/>
+        </p:nvSpPr>
+        <p:spPr>
+          <a:xfrm>
+            <a:off x="6613200" y="3870000"/>
+            <a:ext cx="432000" cy="288000"/>
+          </a:xfrm>
+          <a:prstGeom prst="ellipse">
+            <a:avLst/>
+          </a:prstGeom>
+          <a:solidFill>
+            <a:srgbClr val="FBDFD2"/>
+          </a:solidFill>
+          <a:ln>
+            <a:noFill/>
+          </a:ln>
+        </p:spPr>
+        <p:style>
+          <a:lnRef idx="1">
+            <a:schemeClr val="accent1"/>
+          </a:lnRef>
+          <a:fillRef idx="3">
+            <a:schemeClr val="accent1"/>
+          </a:fillRef>
+          <a:effectRef idx="2">
+            <a:schemeClr val="accent1"/>
+          </a:effectRef>
+          <a:fontRef idx="minor">
+            <a:schemeClr val="lt1"/>
+          </a:fontRef>
+        </p:style>
+        <p:txBody>
+          <a:bodyPr rtlCol="0" anchor="ctr"/>
+          <a:lstStyle/>
+          <a:p>
+            <a:pPr algn="ctr"/>
+          </a:p>
+        </p:txBody>
+      </p:sp>
+      <p:sp>
+        <p:nvSpPr>
+          <p:cNvPr id="110" name="Oval 109"/>
+          <p:cNvSpPr/>
+          <p:nvPr/>
+        </p:nvSpPr>
+        <p:spPr>
+          <a:xfrm>
+            <a:off x="3733200" y="5382000"/>
+            <a:ext cx="1080000" cy="540000"/>
+          </a:xfrm>
+          <a:prstGeom prst="ellipse">
+            <a:avLst/>
+          </a:prstGeom>
+          <a:solidFill>
+            <a:srgbClr val="DCE7E9"/>
+          </a:solidFill>
+          <a:ln>
+            <a:noFill/>
+          </a:ln>
+        </p:spPr>
+        <p:style>
+          <a:lnRef idx="1">
+            <a:schemeClr val="accent1"/>
+          </a:lnRef>
+          <a:fillRef idx="3">
+            <a:schemeClr val="accent1"/>
+          </a:fillRef>
+          <a:effectRef idx="2">
+            <a:schemeClr val="accent1"/>
+          </a:effectRef>
+          <a:fontRef idx="minor">
+            <a:schemeClr val="lt1"/>
+          </a:fontRef>
+        </p:style>
+        <p:txBody>
+          <a:bodyPr rtlCol="0" anchor="ctr"/>
+          <a:lstStyle/>
+          <a:p>
+            <a:pPr algn="ctr"/>
+          </a:p>
+        </p:txBody>
+      </p:sp>
+      <p:sp>
+        <p:nvSpPr>
+          <p:cNvPr id="111" name="Oval 110"/>
+          <p:cNvSpPr/>
+          <p:nvPr/>
+        </p:nvSpPr>
+        <p:spPr>
+          <a:xfrm>
+            <a:off x="4345200" y="5526000"/>
+            <a:ext cx="720000" cy="360000"/>
+          </a:xfrm>
+          <a:prstGeom prst="ellipse">
+            <a:avLst/>
+          </a:prstGeom>
+          <a:solidFill>
+            <a:srgbClr val="FBDFD2"/>
+          </a:solidFill>
+          <a:ln>
+            <a:noFill/>
+          </a:ln>
+        </p:spPr>
+        <p:style>
+          <a:lnRef idx="1">
+            <a:schemeClr val="accent1"/>
+          </a:lnRef>
+          <a:fillRef idx="3">
+            <a:schemeClr val="accent1"/>
+          </a:fillRef>
+          <a:effectRef idx="2">
+            <a:schemeClr val="accent1"/>
+          </a:effectRef>
+          <a:fontRef idx="minor">
+            <a:schemeClr val="lt1"/>
+          </a:fontRef>
+        </p:style>
+        <p:txBody>
+          <a:bodyPr rtlCol="0" anchor="ctr"/>
+          <a:lstStyle/>
+          <a:p>
+            <a:pPr algn="ctr"/>
+          </a:p>
+        </p:txBody>
+      </p:sp>
+      <p:sp>
+        <p:nvSpPr>
+          <p:cNvPr id="112" name="Oval 111"/>
+          <p:cNvSpPr/>
+          <p:nvPr/>
+        </p:nvSpPr>
+        <p:spPr>
+          <a:xfrm>
+            <a:off x="3877200" y="5598000"/>
+            <a:ext cx="540000" cy="288000"/>
+          </a:xfrm>
+          <a:prstGeom prst="ellipse">
+            <a:avLst/>
+          </a:prstGeom>
+          <a:solidFill>
+            <a:srgbClr val="DCE7E9"/>
+          </a:solidFill>
+          <a:ln>
+            <a:noFill/>
+          </a:ln>
+        </p:spPr>
+        <p:style>
+          <a:lnRef idx="1">
+            <a:schemeClr val="accent1"/>
+          </a:lnRef>
+          <a:fillRef idx="3">
+            <a:schemeClr val="accent1"/>
+          </a:fillRef>
+          <a:effectRef idx="2">
+            <a:schemeClr val="accent1"/>
+          </a:effectRef>
+          <a:fontRef idx="minor">
+            <a:schemeClr val="lt1"/>
+          </a:fontRef>
+        </p:style>
+        <p:txBody>
+          <a:bodyPr rtlCol="0" anchor="ctr"/>
+          <a:lstStyle/>
+          <a:p>
+            <a:pPr algn="ctr"/>
+          </a:p>
+        </p:txBody>
+      </p:sp>
+      <p:sp>
+        <p:nvSpPr>
+          <p:cNvPr id="113" name="Freeform 112"/>
+          <p:cNvSpPr/>
+          <p:nvPr/>
+        </p:nvSpPr>
+        <p:spPr>
+          <a:xfrm>
+            <a:off x="360000" y="-108000"/>
+            <a:ext cx="3445200" cy="5706000"/>
+          </a:xfrm>
+          <a:custGeom>
+            <a:avLst/>
+            <a:gdLst/>
+            <a:ahLst/>
+            <a:cxnLst/>
+            <a:rect l="l" t="t" r="r" b="b"/>
+            <a:pathLst>
+              <a:path w="3445200" h="5706000">
+                <a:moveTo>
+                  <a:pt x="3445200" y="5706000"/>
+                </a:moveTo>
+                <a:lnTo>
+                  <a:pt x="0" y="36000"/>
+                </a:lnTo>
+                <a:lnTo>
+                  <a:pt x="360000" y="180000"/>
+                </a:lnTo>
+                <a:lnTo>
+                  <a:pt x="720000" y="108000"/>
+                </a:lnTo>
+                <a:lnTo>
+                  <a:pt x="1152000" y="0"/>
+                </a:lnTo>
+                <a:lnTo>
+                  <a:pt x="1584000" y="36000"/>
+                </a:lnTo>
+                <a:lnTo>
+                  <a:pt x="1980000" y="180000"/>
+                </a:lnTo>
+                <a:lnTo>
+                  <a:pt x="2340000" y="144000"/>
+                </a:lnTo>
+                <a:lnTo>
+                  <a:pt x="2721600" y="72000"/>
+                </a:lnTo>
+              </a:path>
+            </a:pathLst>
+          </a:custGeom>
+          <a:noFill/>
+          <a:ln w="12700">
+            <a:solidFill>
+              <a:srgbClr val="FD7066"/>
+            </a:solidFill>
+          </a:ln>
+        </p:spPr>
+        <p:style>
+          <a:lnRef idx="1">
+            <a:schemeClr val="accent1"/>
+          </a:lnRef>
+          <a:fillRef idx="3">
+            <a:schemeClr val="accent1"/>
+          </a:fillRef>
+          <a:effectRef idx="2">
+            <a:schemeClr val="accent1"/>
+          </a:effectRef>
+          <a:fontRef idx="minor">
+            <a:schemeClr val="lt1"/>
+          </a:fontRef>
+        </p:style>
+        <p:txBody>
+          <a:bodyPr rtlCol="0" anchor="ctr"/>
+          <a:lstStyle/>
+          <a:p>
+            <a:pPr algn="ctr"/>
+          </a:p>
+        </p:txBody>
+      </p:sp>
+      <p:sp>
+        <p:nvSpPr>
+          <p:cNvPr id="114" name="Oval 113"/>
+          <p:cNvSpPr/>
+          <p:nvPr/>
+        </p:nvSpPr>
+        <p:spPr>
+          <a:xfrm>
+            <a:off x="4057200" y="4338000"/>
+            <a:ext cx="540000" cy="432000"/>
+          </a:xfrm>
+          <a:prstGeom prst="ellipse">
             <a:avLst/>
           </a:prstGeom>
           <a:solidFill>
@@ -4690,16 +7754,16 @@
       </p:sp>
       <p:sp>
         <p:nvSpPr>
-          <p:cNvPr id="44" name="Heart 43"/>
+          <p:cNvPr id="115" name="Oval 114"/>
           <p:cNvSpPr/>
           <p:nvPr/>
         </p:nvSpPr>
         <p:spPr>
           <a:xfrm>
-            <a:off x="3729600" y="2772000"/>
-            <a:ext cx="648000" cy="648000"/>
-          </a:xfrm>
-          <a:prstGeom prst="heart">
+            <a:off x="4489200" y="4446000"/>
+            <a:ext cx="396000" cy="324000"/>
+          </a:xfrm>
+          <a:prstGeom prst="ellipse">
             <a:avLst/>
           </a:prstGeom>
           <a:solidFill>
@@ -4733,14 +7797,57 @@
       </p:sp>
       <p:sp>
         <p:nvSpPr>
-          <p:cNvPr id="45" name="TextBox 44"/>
+          <p:cNvPr id="116" name="Oval 115"/>
+          <p:cNvSpPr/>
+          <p:nvPr/>
+        </p:nvSpPr>
+        <p:spPr>
+          <a:xfrm>
+            <a:off x="4381200" y="4518000"/>
+            <a:ext cx="180000" cy="144000"/>
+          </a:xfrm>
+          <a:prstGeom prst="ellipse">
+            <a:avLst/>
+          </a:prstGeom>
+          <a:solidFill>
+            <a:srgbClr val="FFFFFF"/>
+          </a:solidFill>
+          <a:ln>
+            <a:noFill/>
+          </a:ln>
+        </p:spPr>
+        <p:style>
+          <a:lnRef idx="1">
+            <a:schemeClr val="accent1"/>
+          </a:lnRef>
+          <a:fillRef idx="3">
+            <a:schemeClr val="accent1"/>
+          </a:fillRef>
+          <a:effectRef idx="2">
+            <a:schemeClr val="accent1"/>
+          </a:effectRef>
+          <a:fontRef idx="minor">
+            <a:schemeClr val="lt1"/>
+          </a:fontRef>
+        </p:style>
+        <p:txBody>
+          <a:bodyPr rtlCol="0" anchor="ctr"/>
+          <a:lstStyle/>
+          <a:p>
+            <a:pPr algn="ctr"/>
+          </a:p>
+        </p:txBody>
+      </p:sp>
+      <p:sp>
+        <p:nvSpPr>
+          <p:cNvPr id="117" name="TextBox 116"/>
           <p:cNvSpPr txBox="1"/>
           <p:nvPr/>
         </p:nvSpPr>
         <p:spPr>
           <a:xfrm>
-            <a:off x="3765600" y="3132000"/>
-            <a:ext cx="576000" cy="288000"/>
+            <a:off x="3877200" y="4986000"/>
+            <a:ext cx="1188000" cy="288000"/>
           </a:xfrm>
           <a:prstGeom prst="rect">
             <a:avLst/>
@@ -4748,19 +7855,19 @@
           <a:noFill/>
         </p:spPr>
         <p:txBody>
-          <a:bodyPr wrap="none">
+          <a:bodyPr wrap="square" lIns="0" rIns="0" tIns="0" bIns="0" anchor="t">
             <a:spAutoFit/>
           </a:bodyPr>
           <a:lstStyle/>
           <a:p>
-            <a:pPr algn="ctr">
-              <a:defRPr sz="1000" b="1">
+            <a:pPr algn="ctr"/>
+            <a:r>
+              <a:rPr sz="1500" b="1">
                 <a:solidFill>
                   <a:srgbClr val="FD7066"/>
                 </a:solidFill>
-              </a:defRPr>
-            </a:pPr>
-            <a:r>
+                <a:latin typeface="Arial Rounded MT Bold"/>
+              </a:rPr>
               <a:t>mamawell</a:t>
             </a:r>
           </a:p>
@@ -4768,14 +7875,57 @@
       </p:sp>
       <p:sp>
         <p:nvSpPr>
-          <p:cNvPr id="46" name="TextBox 45"/>
+          <p:cNvPr id="118" name="Oval 117"/>
+          <p:cNvSpPr/>
+          <p:nvPr/>
+        </p:nvSpPr>
+        <p:spPr>
+          <a:xfrm>
+            <a:off x="5245200" y="4158000"/>
+            <a:ext cx="252000" cy="252000"/>
+          </a:xfrm>
+          <a:prstGeom prst="ellipse">
+            <a:avLst/>
+          </a:prstGeom>
+          <a:solidFill>
+            <a:srgbClr val="FBDFD2"/>
+          </a:solidFill>
+          <a:ln>
+            <a:noFill/>
+          </a:ln>
+        </p:spPr>
+        <p:style>
+          <a:lnRef idx="1">
+            <a:schemeClr val="accent1"/>
+          </a:lnRef>
+          <a:fillRef idx="3">
+            <a:schemeClr val="accent1"/>
+          </a:fillRef>
+          <a:effectRef idx="2">
+            <a:schemeClr val="accent1"/>
+          </a:effectRef>
+          <a:fontRef idx="minor">
+            <a:schemeClr val="lt1"/>
+          </a:fontRef>
+        </p:style>
+        <p:txBody>
+          <a:bodyPr rtlCol="0" anchor="ctr"/>
+          <a:lstStyle/>
+          <a:p>
+            <a:pPr algn="ctr"/>
+          </a:p>
+        </p:txBody>
+      </p:sp>
+      <p:sp>
+        <p:nvSpPr>
+          <p:cNvPr id="119" name="TextBox 118"/>
           <p:cNvSpPr txBox="1"/>
           <p:nvPr/>
         </p:nvSpPr>
         <p:spPr>
           <a:xfrm>
-            <a:off x="4521600" y="2664000"/>
-            <a:ext cx="2073600" cy="180000"/>
+            <a:off x="5245200" y="4158000"/>
+            <a:ext cx="252000" cy="252000"/>
           </a:xfrm>
           <a:prstGeom prst="rect">
             <a:avLst/>
@@ -4783,19 +7933,53 @@
           <a:noFill/>
         </p:spPr>
         <p:txBody>
-          <a:bodyPr wrap="none">
+          <a:bodyPr wrap="square" lIns="0" rIns="0" tIns="0" bIns="0" anchor="ctr">
             <a:spAutoFit/>
           </a:bodyPr>
           <a:lstStyle/>
           <a:p>
-            <a:pPr>
-              <a:defRPr sz="900" b="1">
+            <a:pPr algn="ctr"/>
+            <a:r>
+              <a:rPr sz="1100" b="1">
+                <a:solidFill>
+                  <a:srgbClr val="FD7066"/>
+                </a:solidFill>
+              </a:rPr>
+              <a:t>♡</a:t>
+            </a:r>
+          </a:p>
+        </p:txBody>
+      </p:sp>
+      <p:sp>
+        <p:nvSpPr>
+          <p:cNvPr id="120" name="TextBox 119"/>
+          <p:cNvSpPr txBox="1"/>
+          <p:nvPr/>
+        </p:nvSpPr>
+        <p:spPr>
+          <a:xfrm>
+            <a:off x="5569200" y="4140000"/>
+            <a:ext cx="1245600" cy="162000"/>
+          </a:xfrm>
+          <a:prstGeom prst="rect">
+            <a:avLst/>
+          </a:prstGeom>
+          <a:noFill/>
+        </p:spPr>
+        <p:txBody>
+          <a:bodyPr wrap="square" lIns="0" rIns="0" tIns="0" bIns="0" anchor="t">
+            <a:spAutoFit/>
+          </a:bodyPr>
+          <a:lstStyle/>
+          <a:p>
+            <a:pPr algn="l"/>
+            <a:r>
+              <a:rPr sz="850" b="1">
                 <a:solidFill>
                   <a:srgbClr val="4E4B4C"/>
                 </a:solidFill>
-              </a:defRPr>
-            </a:pPr>
-            <a:r>
+                <a:latin typeface="游ゴシック"/>
+              </a:rPr>
               <a:t>常に誠実に</a:t>
             </a:r>
           </a:p>
@@ -4803,14 +7987,14 @@
       </p:sp>
       <p:sp>
         <p:nvSpPr>
-          <p:cNvPr id="47" name="TextBox 46"/>
+          <p:cNvPr id="121" name="TextBox 120"/>
           <p:cNvSpPr txBox="1"/>
           <p:nvPr/>
         </p:nvSpPr>
         <p:spPr>
           <a:xfrm>
-            <a:off x="4521600" y="2808000"/>
-            <a:ext cx="2073600" cy="144000"/>
+            <a:off x="5569200" y="4294800"/>
+            <a:ext cx="1245600" cy="126000"/>
           </a:xfrm>
           <a:prstGeom prst="rect">
             <a:avLst/>
@@ -4818,185 +8002,79 @@
           <a:noFill/>
         </p:spPr>
         <p:txBody>
-          <a:bodyPr wrap="none">
+          <a:bodyPr wrap="square" lIns="0" rIns="0" tIns="0" bIns="0" anchor="t">
             <a:spAutoFit/>
           </a:bodyPr>
           <a:lstStyle/>
           <a:p>
-            <a:pPr>
-              <a:defRPr sz="700">
+            <a:pPr algn="l"/>
+            <a:r>
+              <a:rPr sz="650" b="0">
                 <a:solidFill>
                   <a:srgbClr val="FD7066"/>
                 </a:solidFill>
-              </a:defRPr>
-            </a:pPr>
-            <a:r>
+                <a:latin typeface="Helvetica Neue"/>
+              </a:rPr>
               <a:t>Integrity First</a:t>
             </a:r>
           </a:p>
         </p:txBody>
       </p:sp>
-      <p:sp>
-        <p:nvSpPr>
-          <p:cNvPr id="48" name="TextBox 47"/>
-          <p:cNvSpPr txBox="1"/>
-          <p:nvPr/>
-        </p:nvSpPr>
-        <p:spPr>
-          <a:xfrm>
-            <a:off x="4521600" y="3024000"/>
-            <a:ext cx="2073600" cy="180000"/>
-          </a:xfrm>
-          <a:prstGeom prst="rect">
-            <a:avLst/>
-          </a:prstGeom>
-          <a:noFill/>
-        </p:spPr>
-        <p:txBody>
-          <a:bodyPr wrap="none">
-            <a:spAutoFit/>
-          </a:bodyPr>
-          <a:lstStyle/>
-          <a:p>
-            <a:pPr>
-              <a:defRPr sz="900" b="1">
-                <a:solidFill>
-                  <a:srgbClr val="4E4B4C"/>
-                </a:solidFill>
-              </a:defRPr>
-            </a:pPr>
-            <a:r>
-              <a:t>仕組みで勝つ</a:t>
-            </a:r>
-          </a:p>
-        </p:txBody>
-      </p:sp>
-      <p:sp>
-        <p:nvSpPr>
-          <p:cNvPr id="49" name="TextBox 48"/>
-          <p:cNvSpPr txBox="1"/>
-          <p:nvPr/>
-        </p:nvSpPr>
-        <p:spPr>
-          <a:xfrm>
-            <a:off x="4521600" y="3168000"/>
-            <a:ext cx="2073600" cy="144000"/>
-          </a:xfrm>
-          <a:prstGeom prst="rect">
-            <a:avLst/>
-          </a:prstGeom>
-          <a:noFill/>
-        </p:spPr>
-        <p:txBody>
-          <a:bodyPr wrap="none">
-            <a:spAutoFit/>
-          </a:bodyPr>
-          <a:lstStyle/>
-          <a:p>
-            <a:pPr>
-              <a:defRPr sz="700">
-                <a:solidFill>
-                  <a:srgbClr val="FD7066"/>
-                </a:solidFill>
-              </a:defRPr>
-            </a:pPr>
-            <a:r>
-              <a:t>System &gt; Hero</a:t>
-            </a:r>
-          </a:p>
-        </p:txBody>
-      </p:sp>
-      <p:sp>
-        <p:nvSpPr>
-          <p:cNvPr id="50" name="TextBox 49"/>
-          <p:cNvSpPr txBox="1"/>
-          <p:nvPr/>
-        </p:nvSpPr>
-        <p:spPr>
-          <a:xfrm>
-            <a:off x="4521600" y="3384000"/>
-            <a:ext cx="2073600" cy="180000"/>
-          </a:xfrm>
-          <a:prstGeom prst="rect">
-            <a:avLst/>
-          </a:prstGeom>
-          <a:noFill/>
-        </p:spPr>
-        <p:txBody>
-          <a:bodyPr wrap="none">
-            <a:spAutoFit/>
-          </a:bodyPr>
-          <a:lstStyle/>
-          <a:p>
-            <a:pPr>
-              <a:defRPr sz="900" b="1">
-                <a:solidFill>
-                  <a:srgbClr val="4E4B4C"/>
-                </a:solidFill>
-              </a:defRPr>
-            </a:pPr>
-            <a:r>
-              <a:t>前進のために話す</a:t>
-            </a:r>
-          </a:p>
-        </p:txBody>
-      </p:sp>
-      <p:sp>
-        <p:nvSpPr>
-          <p:cNvPr id="51" name="TextBox 50"/>
-          <p:cNvSpPr txBox="1"/>
-          <p:nvPr/>
-        </p:nvSpPr>
-        <p:spPr>
-          <a:xfrm>
-            <a:off x="4521600" y="3528000"/>
-            <a:ext cx="2073600" cy="144000"/>
-          </a:xfrm>
-          <a:prstGeom prst="rect">
-            <a:avLst/>
-          </a:prstGeom>
-          <a:noFill/>
-        </p:spPr>
-        <p:txBody>
-          <a:bodyPr wrap="none">
-            <a:spAutoFit/>
-          </a:bodyPr>
-          <a:lstStyle/>
-          <a:p>
-            <a:pPr>
-              <a:defRPr sz="700">
-                <a:solidFill>
-                  <a:srgbClr val="FD7066"/>
-                </a:solidFill>
-              </a:defRPr>
-            </a:pPr>
-            <a:r>
-              <a:t>Move Forward Together</a:t>
-            </a:r>
-          </a:p>
-        </p:txBody>
-      </p:sp>
-      <p:sp>
-        <p:nvSpPr>
-          <p:cNvPr id="52" name="Rounded Rectangle 51"/>
-          <p:cNvSpPr/>
-          <p:nvPr/>
-        </p:nvSpPr>
-        <p:spPr>
-          <a:xfrm>
-            <a:off x="6883200" y="2484000"/>
-            <a:ext cx="3081600" cy="1944000"/>
-          </a:xfrm>
-          <a:prstGeom prst="roundRect">
-            <a:avLst/>
-          </a:prstGeom>
-          <a:solidFill>
-            <a:srgbClr val="FBDFD2"/>
-          </a:solidFill>
+      <p:cxnSp>
+        <p:nvCxnSpPr>
+          <p:cNvPr id="122" name="Connector 121"/>
+          <p:cNvCxnSpPr/>
+          <p:nvPr/>
+        </p:nvCxnSpPr>
+        <p:spPr>
+          <a:xfrm>
+            <a:off x="5245200.0" y="4518000.0"/>
+            <a:ext cx="1569600.0" cy="0.0"/>
+          </a:xfrm>
+          <a:prstGeom prst="line">
+            <a:avLst/>
+          </a:prstGeom>
           <a:ln w="6350">
             <a:solidFill>
               <a:srgbClr val="D6D6D6"/>
             </a:solidFill>
+            <a:prstDash val="sysDot"/>
+          </a:ln>
+        </p:spPr>
+        <p:style>
+          <a:lnRef idx="2">
+            <a:schemeClr val="accent1"/>
+          </a:lnRef>
+          <a:fillRef idx="0">
+            <a:schemeClr val="accent1"/>
+          </a:fillRef>
+          <a:effectRef idx="1">
+            <a:schemeClr val="accent1"/>
+          </a:effectRef>
+          <a:fontRef idx="minor">
+            <a:schemeClr val="tx1"/>
+          </a:fontRef>
+        </p:style>
+      </p:cxnSp>
+      <p:sp>
+        <p:nvSpPr>
+          <p:cNvPr id="123" name="Oval 122"/>
+          <p:cNvSpPr/>
+          <p:nvPr/>
+        </p:nvSpPr>
+        <p:spPr>
+          <a:xfrm>
+            <a:off x="5245200" y="4626000"/>
+            <a:ext cx="252000" cy="252000"/>
+          </a:xfrm>
+          <a:prstGeom prst="ellipse">
+            <a:avLst/>
+          </a:prstGeom>
+          <a:solidFill>
+            <a:srgbClr val="DCE7E9"/>
+          </a:solidFill>
+          <a:ln>
+            <a:noFill/>
           </a:ln>
         </p:spPr>
         <p:style>
@@ -5023,16 +8101,684 @@
       </p:sp>
       <p:sp>
         <p:nvSpPr>
-          <p:cNvPr id="53" name="Wave 52"/>
+          <p:cNvPr id="124" name="TextBox 123"/>
+          <p:cNvSpPr txBox="1"/>
+          <p:nvPr/>
+        </p:nvSpPr>
+        <p:spPr>
+          <a:xfrm>
+            <a:off x="5245200" y="4626000"/>
+            <a:ext cx="252000" cy="252000"/>
+          </a:xfrm>
+          <a:prstGeom prst="rect">
+            <a:avLst/>
+          </a:prstGeom>
+          <a:noFill/>
+        </p:spPr>
+        <p:txBody>
+          <a:bodyPr wrap="square" lIns="0" rIns="0" tIns="0" bIns="0" anchor="ctr">
+            <a:spAutoFit/>
+          </a:bodyPr>
+          <a:lstStyle/>
+          <a:p>
+            <a:pPr algn="ctr"/>
+            <a:r>
+              <a:rPr sz="1100" b="1">
+                <a:solidFill>
+                  <a:srgbClr val="FD7066"/>
+                </a:solidFill>
+              </a:rPr>
+              <a:t>📈</a:t>
+            </a:r>
+          </a:p>
+        </p:txBody>
+      </p:sp>
+      <p:sp>
+        <p:nvSpPr>
+          <p:cNvPr id="125" name="TextBox 124"/>
+          <p:cNvSpPr txBox="1"/>
+          <p:nvPr/>
+        </p:nvSpPr>
+        <p:spPr>
+          <a:xfrm>
+            <a:off x="5569200" y="4608000"/>
+            <a:ext cx="1245600" cy="162000"/>
+          </a:xfrm>
+          <a:prstGeom prst="rect">
+            <a:avLst/>
+          </a:prstGeom>
+          <a:noFill/>
+        </p:spPr>
+        <p:txBody>
+          <a:bodyPr wrap="square" lIns="0" rIns="0" tIns="0" bIns="0" anchor="t">
+            <a:spAutoFit/>
+          </a:bodyPr>
+          <a:lstStyle/>
+          <a:p>
+            <a:pPr algn="l"/>
+            <a:r>
+              <a:rPr sz="850" b="1">
+                <a:solidFill>
+                  <a:srgbClr val="4E4B4C"/>
+                </a:solidFill>
+                <a:latin typeface="游ゴシック"/>
+              </a:rPr>
+              <a:t>仕組みで勝つ</a:t>
+            </a:r>
+          </a:p>
+        </p:txBody>
+      </p:sp>
+      <p:sp>
+        <p:nvSpPr>
+          <p:cNvPr id="126" name="TextBox 125"/>
+          <p:cNvSpPr txBox="1"/>
+          <p:nvPr/>
+        </p:nvSpPr>
+        <p:spPr>
+          <a:xfrm>
+            <a:off x="5569200" y="4762800"/>
+            <a:ext cx="1245600" cy="126000"/>
+          </a:xfrm>
+          <a:prstGeom prst="rect">
+            <a:avLst/>
+          </a:prstGeom>
+          <a:noFill/>
+        </p:spPr>
+        <p:txBody>
+          <a:bodyPr wrap="square" lIns="0" rIns="0" tIns="0" bIns="0" anchor="t">
+            <a:spAutoFit/>
+          </a:bodyPr>
+          <a:lstStyle/>
+          <a:p>
+            <a:pPr algn="l"/>
+            <a:r>
+              <a:rPr sz="650" b="0">
+                <a:solidFill>
+                  <a:srgbClr val="FD7066"/>
+                </a:solidFill>
+                <a:latin typeface="Helvetica Neue"/>
+              </a:rPr>
+              <a:t>System &gt; Hero</a:t>
+            </a:r>
+          </a:p>
+        </p:txBody>
+      </p:sp>
+      <p:cxnSp>
+        <p:nvCxnSpPr>
+          <p:cNvPr id="127" name="Connector 126"/>
+          <p:cNvCxnSpPr/>
+          <p:nvPr/>
+        </p:nvCxnSpPr>
+        <p:spPr>
+          <a:xfrm>
+            <a:off x="5245200.0" y="4986000.0"/>
+            <a:ext cx="1569600.0" cy="0.0"/>
+          </a:xfrm>
+          <a:prstGeom prst="line">
+            <a:avLst/>
+          </a:prstGeom>
+          <a:ln w="6350">
+            <a:solidFill>
+              <a:srgbClr val="D6D6D6"/>
+            </a:solidFill>
+            <a:prstDash val="sysDot"/>
+          </a:ln>
+        </p:spPr>
+        <p:style>
+          <a:lnRef idx="2">
+            <a:schemeClr val="accent1"/>
+          </a:lnRef>
+          <a:fillRef idx="0">
+            <a:schemeClr val="accent1"/>
+          </a:fillRef>
+          <a:effectRef idx="1">
+            <a:schemeClr val="accent1"/>
+          </a:effectRef>
+          <a:fontRef idx="minor">
+            <a:schemeClr val="tx1"/>
+          </a:fontRef>
+        </p:style>
+      </p:cxnSp>
+      <p:sp>
+        <p:nvSpPr>
+          <p:cNvPr id="128" name="Oval 127"/>
           <p:cNvSpPr/>
           <p:nvPr/>
         </p:nvSpPr>
         <p:spPr>
           <a:xfrm>
-            <a:off x="6883200" y="2484000"/>
-            <a:ext cx="3081600" cy="288000"/>
-          </a:xfrm>
-          <a:prstGeom prst="wave">
+            <a:off x="5245200" y="5094000"/>
+            <a:ext cx="252000" cy="252000"/>
+          </a:xfrm>
+          <a:prstGeom prst="ellipse">
+            <a:avLst/>
+          </a:prstGeom>
+          <a:solidFill>
+            <a:srgbClr val="FBDFD2"/>
+          </a:solidFill>
+          <a:ln>
+            <a:noFill/>
+          </a:ln>
+        </p:spPr>
+        <p:style>
+          <a:lnRef idx="1">
+            <a:schemeClr val="accent1"/>
+          </a:lnRef>
+          <a:fillRef idx="3">
+            <a:schemeClr val="accent1"/>
+          </a:fillRef>
+          <a:effectRef idx="2">
+            <a:schemeClr val="accent1"/>
+          </a:effectRef>
+          <a:fontRef idx="minor">
+            <a:schemeClr val="lt1"/>
+          </a:fontRef>
+        </p:style>
+        <p:txBody>
+          <a:bodyPr rtlCol="0" anchor="ctr"/>
+          <a:lstStyle/>
+          <a:p>
+            <a:pPr algn="ctr"/>
+          </a:p>
+        </p:txBody>
+      </p:sp>
+      <p:sp>
+        <p:nvSpPr>
+          <p:cNvPr id="129" name="TextBox 128"/>
+          <p:cNvSpPr txBox="1"/>
+          <p:nvPr/>
+        </p:nvSpPr>
+        <p:spPr>
+          <a:xfrm>
+            <a:off x="5245200" y="5094000"/>
+            <a:ext cx="252000" cy="252000"/>
+          </a:xfrm>
+          <a:prstGeom prst="rect">
+            <a:avLst/>
+          </a:prstGeom>
+          <a:noFill/>
+        </p:spPr>
+        <p:txBody>
+          <a:bodyPr wrap="square" lIns="0" rIns="0" tIns="0" bIns="0" anchor="ctr">
+            <a:spAutoFit/>
+          </a:bodyPr>
+          <a:lstStyle/>
+          <a:p>
+            <a:pPr algn="ctr"/>
+            <a:r>
+              <a:rPr sz="1100" b="1">
+                <a:solidFill>
+                  <a:srgbClr val="FD7066"/>
+                </a:solidFill>
+              </a:rPr>
+              <a:t>👥</a:t>
+            </a:r>
+          </a:p>
+        </p:txBody>
+      </p:sp>
+      <p:sp>
+        <p:nvSpPr>
+          <p:cNvPr id="130" name="TextBox 129"/>
+          <p:cNvSpPr txBox="1"/>
+          <p:nvPr/>
+        </p:nvSpPr>
+        <p:spPr>
+          <a:xfrm>
+            <a:off x="5569200" y="5076000"/>
+            <a:ext cx="1245600" cy="162000"/>
+          </a:xfrm>
+          <a:prstGeom prst="rect">
+            <a:avLst/>
+          </a:prstGeom>
+          <a:noFill/>
+        </p:spPr>
+        <p:txBody>
+          <a:bodyPr wrap="square" lIns="0" rIns="0" tIns="0" bIns="0" anchor="t">
+            <a:spAutoFit/>
+          </a:bodyPr>
+          <a:lstStyle/>
+          <a:p>
+            <a:pPr algn="l"/>
+            <a:r>
+              <a:rPr sz="850" b="1">
+                <a:solidFill>
+                  <a:srgbClr val="4E4B4C"/>
+                </a:solidFill>
+                <a:latin typeface="游ゴシック"/>
+              </a:rPr>
+              <a:t>前進のために話す</a:t>
+            </a:r>
+          </a:p>
+        </p:txBody>
+      </p:sp>
+      <p:sp>
+        <p:nvSpPr>
+          <p:cNvPr id="131" name="TextBox 130"/>
+          <p:cNvSpPr txBox="1"/>
+          <p:nvPr/>
+        </p:nvSpPr>
+        <p:spPr>
+          <a:xfrm>
+            <a:off x="5569200" y="5230800"/>
+            <a:ext cx="1245600" cy="126000"/>
+          </a:xfrm>
+          <a:prstGeom prst="rect">
+            <a:avLst/>
+          </a:prstGeom>
+          <a:noFill/>
+        </p:spPr>
+        <p:txBody>
+          <a:bodyPr wrap="square" lIns="0" rIns="0" tIns="0" bIns="0" anchor="t">
+            <a:spAutoFit/>
+          </a:bodyPr>
+          <a:lstStyle/>
+          <a:p>
+            <a:pPr algn="l"/>
+            <a:r>
+              <a:rPr sz="650" b="0">
+                <a:solidFill>
+                  <a:srgbClr val="FD7066"/>
+                </a:solidFill>
+                <a:latin typeface="Helvetica Neue"/>
+              </a:rPr>
+              <a:t>Move Forward Together</a:t>
+            </a:r>
+          </a:p>
+        </p:txBody>
+      </p:sp>
+      <p:sp>
+        <p:nvSpPr>
+          <p:cNvPr id="132" name="Rectangle 131"/>
+          <p:cNvSpPr/>
+          <p:nvPr/>
+        </p:nvSpPr>
+        <p:spPr>
+          <a:xfrm>
+            <a:off x="7066800" y="3870000"/>
+            <a:ext cx="3081600" cy="1944000"/>
+          </a:xfrm>
+          <a:prstGeom prst="rect">
+            <a:avLst/>
+          </a:prstGeom>
+          <a:solidFill>
+            <a:srgbClr val="FFFFFF"/>
+          </a:solidFill>
+          <a:ln w="3175">
+            <a:solidFill>
+              <a:srgbClr val="D6D6D6"/>
+            </a:solidFill>
+          </a:ln>
+        </p:spPr>
+        <p:style>
+          <a:lnRef idx="1">
+            <a:schemeClr val="accent1"/>
+          </a:lnRef>
+          <a:fillRef idx="3">
+            <a:schemeClr val="accent1"/>
+          </a:fillRef>
+          <a:effectRef idx="2">
+            <a:schemeClr val="accent1"/>
+          </a:effectRef>
+          <a:fontRef idx="minor">
+            <a:schemeClr val="lt1"/>
+          </a:fontRef>
+        </p:style>
+        <p:txBody>
+          <a:bodyPr rtlCol="0" anchor="ctr"/>
+          <a:lstStyle/>
+          <a:p>
+            <a:pPr algn="ctr"/>
+          </a:p>
+        </p:txBody>
+      </p:sp>
+      <p:sp>
+        <p:nvSpPr>
+          <p:cNvPr id="133" name="Oval 132"/>
+          <p:cNvSpPr/>
+          <p:nvPr/>
+        </p:nvSpPr>
+        <p:spPr>
+          <a:xfrm>
+            <a:off x="9226800" y="3798000"/>
+            <a:ext cx="1080000" cy="648000"/>
+          </a:xfrm>
+          <a:prstGeom prst="ellipse">
+            <a:avLst/>
+          </a:prstGeom>
+          <a:solidFill>
+            <a:srgbClr val="FBDFD2"/>
+          </a:solidFill>
+          <a:ln>
+            <a:noFill/>
+          </a:ln>
+        </p:spPr>
+        <p:style>
+          <a:lnRef idx="1">
+            <a:schemeClr val="accent1"/>
+          </a:lnRef>
+          <a:fillRef idx="3">
+            <a:schemeClr val="accent1"/>
+          </a:fillRef>
+          <a:effectRef idx="2">
+            <a:schemeClr val="accent1"/>
+          </a:effectRef>
+          <a:fontRef idx="minor">
+            <a:schemeClr val="lt1"/>
+          </a:fontRef>
+        </p:style>
+        <p:txBody>
+          <a:bodyPr rtlCol="0" anchor="ctr"/>
+          <a:lstStyle/>
+          <a:p>
+            <a:pPr algn="ctr"/>
+          </a:p>
+        </p:txBody>
+      </p:sp>
+      <p:sp>
+        <p:nvSpPr>
+          <p:cNvPr id="134" name="Oval 133"/>
+          <p:cNvSpPr/>
+          <p:nvPr/>
+        </p:nvSpPr>
+        <p:spPr>
+          <a:xfrm>
+            <a:off x="9658800" y="4230000"/>
+            <a:ext cx="720000" cy="468000"/>
+          </a:xfrm>
+          <a:prstGeom prst="ellipse">
+            <a:avLst/>
+          </a:prstGeom>
+          <a:solidFill>
+            <a:srgbClr val="FBDFD2"/>
+          </a:solidFill>
+          <a:ln>
+            <a:noFill/>
+          </a:ln>
+        </p:spPr>
+        <p:style>
+          <a:lnRef idx="1">
+            <a:schemeClr val="accent1"/>
+          </a:lnRef>
+          <a:fillRef idx="3">
+            <a:schemeClr val="accent1"/>
+          </a:fillRef>
+          <a:effectRef idx="2">
+            <a:schemeClr val="accent1"/>
+          </a:effectRef>
+          <a:fontRef idx="minor">
+            <a:schemeClr val="lt1"/>
+          </a:fontRef>
+        </p:style>
+        <p:txBody>
+          <a:bodyPr rtlCol="0" anchor="ctr"/>
+          <a:lstStyle/>
+          <a:p>
+            <a:pPr algn="ctr"/>
+          </a:p>
+        </p:txBody>
+      </p:sp>
+      <p:sp>
+        <p:nvSpPr>
+          <p:cNvPr id="135" name="Oval 134"/>
+          <p:cNvSpPr/>
+          <p:nvPr/>
+        </p:nvSpPr>
+        <p:spPr>
+          <a:xfrm>
+            <a:off x="9874800" y="3870000"/>
+            <a:ext cx="432000" cy="288000"/>
+          </a:xfrm>
+          <a:prstGeom prst="ellipse">
+            <a:avLst/>
+          </a:prstGeom>
+          <a:solidFill>
+            <a:srgbClr val="FBDFD2"/>
+          </a:solidFill>
+          <a:ln>
+            <a:noFill/>
+          </a:ln>
+        </p:spPr>
+        <p:style>
+          <a:lnRef idx="1">
+            <a:schemeClr val="accent1"/>
+          </a:lnRef>
+          <a:fillRef idx="3">
+            <a:schemeClr val="accent1"/>
+          </a:fillRef>
+          <a:effectRef idx="2">
+            <a:schemeClr val="accent1"/>
+          </a:effectRef>
+          <a:fontRef idx="minor">
+            <a:schemeClr val="lt1"/>
+          </a:fontRef>
+        </p:style>
+        <p:txBody>
+          <a:bodyPr rtlCol="0" anchor="ctr"/>
+          <a:lstStyle/>
+          <a:p>
+            <a:pPr algn="ctr"/>
+          </a:p>
+        </p:txBody>
+      </p:sp>
+      <p:sp>
+        <p:nvSpPr>
+          <p:cNvPr id="136" name="Oval 135"/>
+          <p:cNvSpPr/>
+          <p:nvPr/>
+        </p:nvSpPr>
+        <p:spPr>
+          <a:xfrm>
+            <a:off x="6994800" y="5382000"/>
+            <a:ext cx="1080000" cy="540000"/>
+          </a:xfrm>
+          <a:prstGeom prst="ellipse">
+            <a:avLst/>
+          </a:prstGeom>
+          <a:solidFill>
+            <a:srgbClr val="DCE7E9"/>
+          </a:solidFill>
+          <a:ln>
+            <a:noFill/>
+          </a:ln>
+        </p:spPr>
+        <p:style>
+          <a:lnRef idx="1">
+            <a:schemeClr val="accent1"/>
+          </a:lnRef>
+          <a:fillRef idx="3">
+            <a:schemeClr val="accent1"/>
+          </a:fillRef>
+          <a:effectRef idx="2">
+            <a:schemeClr val="accent1"/>
+          </a:effectRef>
+          <a:fontRef idx="minor">
+            <a:schemeClr val="lt1"/>
+          </a:fontRef>
+        </p:style>
+        <p:txBody>
+          <a:bodyPr rtlCol="0" anchor="ctr"/>
+          <a:lstStyle/>
+          <a:p>
+            <a:pPr algn="ctr"/>
+          </a:p>
+        </p:txBody>
+      </p:sp>
+      <p:sp>
+        <p:nvSpPr>
+          <p:cNvPr id="137" name="Oval 136"/>
+          <p:cNvSpPr/>
+          <p:nvPr/>
+        </p:nvSpPr>
+        <p:spPr>
+          <a:xfrm>
+            <a:off x="7606800" y="5526000"/>
+            <a:ext cx="720000" cy="360000"/>
+          </a:xfrm>
+          <a:prstGeom prst="ellipse">
+            <a:avLst/>
+          </a:prstGeom>
+          <a:solidFill>
+            <a:srgbClr val="FBDFD2"/>
+          </a:solidFill>
+          <a:ln>
+            <a:noFill/>
+          </a:ln>
+        </p:spPr>
+        <p:style>
+          <a:lnRef idx="1">
+            <a:schemeClr val="accent1"/>
+          </a:lnRef>
+          <a:fillRef idx="3">
+            <a:schemeClr val="accent1"/>
+          </a:fillRef>
+          <a:effectRef idx="2">
+            <a:schemeClr val="accent1"/>
+          </a:effectRef>
+          <a:fontRef idx="minor">
+            <a:schemeClr val="lt1"/>
+          </a:fontRef>
+        </p:style>
+        <p:txBody>
+          <a:bodyPr rtlCol="0" anchor="ctr"/>
+          <a:lstStyle/>
+          <a:p>
+            <a:pPr algn="ctr"/>
+          </a:p>
+        </p:txBody>
+      </p:sp>
+      <p:sp>
+        <p:nvSpPr>
+          <p:cNvPr id="138" name="Oval 137"/>
+          <p:cNvSpPr/>
+          <p:nvPr/>
+        </p:nvSpPr>
+        <p:spPr>
+          <a:xfrm>
+            <a:off x="7138800" y="5598000"/>
+            <a:ext cx="540000" cy="288000"/>
+          </a:xfrm>
+          <a:prstGeom prst="ellipse">
+            <a:avLst/>
+          </a:prstGeom>
+          <a:solidFill>
+            <a:srgbClr val="DCE7E9"/>
+          </a:solidFill>
+          <a:ln>
+            <a:noFill/>
+          </a:ln>
+        </p:spPr>
+        <p:style>
+          <a:lnRef idx="1">
+            <a:schemeClr val="accent1"/>
+          </a:lnRef>
+          <a:fillRef idx="3">
+            <a:schemeClr val="accent1"/>
+          </a:fillRef>
+          <a:effectRef idx="2">
+            <a:schemeClr val="accent1"/>
+          </a:effectRef>
+          <a:fontRef idx="minor">
+            <a:schemeClr val="lt1"/>
+          </a:fontRef>
+        </p:style>
+        <p:txBody>
+          <a:bodyPr rtlCol="0" anchor="ctr"/>
+          <a:lstStyle/>
+          <a:p>
+            <a:pPr algn="ctr"/>
+          </a:p>
+        </p:txBody>
+      </p:sp>
+      <p:sp>
+        <p:nvSpPr>
+          <p:cNvPr id="139" name="Freeform 138"/>
+          <p:cNvSpPr/>
+          <p:nvPr/>
+        </p:nvSpPr>
+        <p:spPr>
+          <a:xfrm>
+            <a:off x="360000" y="-108000"/>
+            <a:ext cx="6706800" cy="5706000"/>
+          </a:xfrm>
+          <a:custGeom>
+            <a:avLst/>
+            <a:gdLst/>
+            <a:ahLst/>
+            <a:cxnLst/>
+            <a:rect l="l" t="t" r="r" b="b"/>
+            <a:pathLst>
+              <a:path w="6706800" h="5706000">
+                <a:moveTo>
+                  <a:pt x="6706800" y="5706000"/>
+                </a:moveTo>
+                <a:lnTo>
+                  <a:pt x="0" y="36000"/>
+                </a:lnTo>
+                <a:lnTo>
+                  <a:pt x="360000" y="180000"/>
+                </a:lnTo>
+                <a:lnTo>
+                  <a:pt x="720000" y="108000"/>
+                </a:lnTo>
+                <a:lnTo>
+                  <a:pt x="1152000" y="0"/>
+                </a:lnTo>
+                <a:lnTo>
+                  <a:pt x="1584000" y="36000"/>
+                </a:lnTo>
+                <a:lnTo>
+                  <a:pt x="1980000" y="180000"/>
+                </a:lnTo>
+                <a:lnTo>
+                  <a:pt x="2340000" y="144000"/>
+                </a:lnTo>
+                <a:lnTo>
+                  <a:pt x="2721600" y="72000"/>
+                </a:lnTo>
+              </a:path>
+            </a:pathLst>
+          </a:custGeom>
+          <a:noFill/>
+          <a:ln w="12700">
+            <a:solidFill>
+              <a:srgbClr val="FD7066"/>
+            </a:solidFill>
+          </a:ln>
+        </p:spPr>
+        <p:style>
+          <a:lnRef idx="1">
+            <a:schemeClr val="accent1"/>
+          </a:lnRef>
+          <a:fillRef idx="3">
+            <a:schemeClr val="accent1"/>
+          </a:fillRef>
+          <a:effectRef idx="2">
+            <a:schemeClr val="accent1"/>
+          </a:effectRef>
+          <a:fontRef idx="minor">
+            <a:schemeClr val="lt1"/>
+          </a:fontRef>
+        </p:style>
+        <p:txBody>
+          <a:bodyPr rtlCol="0" anchor="ctr"/>
+          <a:lstStyle/>
+          <a:p>
+            <a:pPr algn="ctr"/>
+          </a:p>
+        </p:txBody>
+      </p:sp>
+      <p:sp>
+        <p:nvSpPr>
+          <p:cNvPr id="140" name="Oval 139"/>
+          <p:cNvSpPr/>
+          <p:nvPr/>
+        </p:nvSpPr>
+        <p:spPr>
+          <a:xfrm>
+            <a:off x="7318800" y="4338000"/>
+            <a:ext cx="540000" cy="432000"/>
+          </a:xfrm>
+          <a:prstGeom prst="ellipse">
             <a:avLst/>
           </a:prstGeom>
           <a:solidFill>
@@ -5066,16 +8812,16 @@
       </p:sp>
       <p:sp>
         <p:nvSpPr>
-          <p:cNvPr id="54" name="Heart 53"/>
+          <p:cNvPr id="141" name="Oval 140"/>
           <p:cNvSpPr/>
           <p:nvPr/>
         </p:nvSpPr>
         <p:spPr>
           <a:xfrm>
-            <a:off x="6991200" y="2772000"/>
-            <a:ext cx="648000" cy="648000"/>
-          </a:xfrm>
-          <a:prstGeom prst="heart">
+            <a:off x="7750800" y="4446000"/>
+            <a:ext cx="396000" cy="324000"/>
+          </a:xfrm>
+          <a:prstGeom prst="ellipse">
             <a:avLst/>
           </a:prstGeom>
           <a:solidFill>
@@ -5109,14 +8855,57 @@
       </p:sp>
       <p:sp>
         <p:nvSpPr>
-          <p:cNvPr id="55" name="TextBox 54"/>
+          <p:cNvPr id="142" name="Oval 141"/>
+          <p:cNvSpPr/>
+          <p:nvPr/>
+        </p:nvSpPr>
+        <p:spPr>
+          <a:xfrm>
+            <a:off x="7642800" y="4518000"/>
+            <a:ext cx="180000" cy="144000"/>
+          </a:xfrm>
+          <a:prstGeom prst="ellipse">
+            <a:avLst/>
+          </a:prstGeom>
+          <a:solidFill>
+            <a:srgbClr val="FFFFFF"/>
+          </a:solidFill>
+          <a:ln>
+            <a:noFill/>
+          </a:ln>
+        </p:spPr>
+        <p:style>
+          <a:lnRef idx="1">
+            <a:schemeClr val="accent1"/>
+          </a:lnRef>
+          <a:fillRef idx="3">
+            <a:schemeClr val="accent1"/>
+          </a:fillRef>
+          <a:effectRef idx="2">
+            <a:schemeClr val="accent1"/>
+          </a:effectRef>
+          <a:fontRef idx="minor">
+            <a:schemeClr val="lt1"/>
+          </a:fontRef>
+        </p:style>
+        <p:txBody>
+          <a:bodyPr rtlCol="0" anchor="ctr"/>
+          <a:lstStyle/>
+          <a:p>
+            <a:pPr algn="ctr"/>
+          </a:p>
+        </p:txBody>
+      </p:sp>
+      <p:sp>
+        <p:nvSpPr>
+          <p:cNvPr id="143" name="TextBox 142"/>
           <p:cNvSpPr txBox="1"/>
           <p:nvPr/>
         </p:nvSpPr>
         <p:spPr>
           <a:xfrm>
-            <a:off x="7027200" y="3132000"/>
-            <a:ext cx="576000" cy="288000"/>
+            <a:off x="7138800" y="4986000"/>
+            <a:ext cx="1188000" cy="288000"/>
           </a:xfrm>
           <a:prstGeom prst="rect">
             <a:avLst/>
@@ -5124,19 +8913,19 @@
           <a:noFill/>
         </p:spPr>
         <p:txBody>
-          <a:bodyPr wrap="none">
+          <a:bodyPr wrap="square" lIns="0" rIns="0" tIns="0" bIns="0" anchor="t">
             <a:spAutoFit/>
           </a:bodyPr>
           <a:lstStyle/>
           <a:p>
-            <a:pPr algn="ctr">
-              <a:defRPr sz="1000" b="1">
+            <a:pPr algn="ctr"/>
+            <a:r>
+              <a:rPr sz="1500" b="1">
                 <a:solidFill>
                   <a:srgbClr val="FD7066"/>
                 </a:solidFill>
-              </a:defRPr>
-            </a:pPr>
-            <a:r>
+                <a:latin typeface="Arial Rounded MT Bold"/>
+              </a:rPr>
               <a:t>mamawell</a:t>
             </a:r>
           </a:p>
@@ -5144,14 +8933,57 @@
       </p:sp>
       <p:sp>
         <p:nvSpPr>
-          <p:cNvPr id="56" name="TextBox 55"/>
+          <p:cNvPr id="144" name="Oval 143"/>
+          <p:cNvSpPr/>
+          <p:nvPr/>
+        </p:nvSpPr>
+        <p:spPr>
+          <a:xfrm>
+            <a:off x="8506800" y="4158000"/>
+            <a:ext cx="252000" cy="252000"/>
+          </a:xfrm>
+          <a:prstGeom prst="ellipse">
+            <a:avLst/>
+          </a:prstGeom>
+          <a:solidFill>
+            <a:srgbClr val="FBDFD2"/>
+          </a:solidFill>
+          <a:ln>
+            <a:noFill/>
+          </a:ln>
+        </p:spPr>
+        <p:style>
+          <a:lnRef idx="1">
+            <a:schemeClr val="accent1"/>
+          </a:lnRef>
+          <a:fillRef idx="3">
+            <a:schemeClr val="accent1"/>
+          </a:fillRef>
+          <a:effectRef idx="2">
+            <a:schemeClr val="accent1"/>
+          </a:effectRef>
+          <a:fontRef idx="minor">
+            <a:schemeClr val="lt1"/>
+          </a:fontRef>
+        </p:style>
+        <p:txBody>
+          <a:bodyPr rtlCol="0" anchor="ctr"/>
+          <a:lstStyle/>
+          <a:p>
+            <a:pPr algn="ctr"/>
+          </a:p>
+        </p:txBody>
+      </p:sp>
+      <p:sp>
+        <p:nvSpPr>
+          <p:cNvPr id="145" name="TextBox 144"/>
           <p:cNvSpPr txBox="1"/>
           <p:nvPr/>
         </p:nvSpPr>
         <p:spPr>
           <a:xfrm>
-            <a:off x="7783200" y="2664000"/>
-            <a:ext cx="2073600" cy="180000"/>
+            <a:off x="8506800" y="4158000"/>
+            <a:ext cx="252000" cy="252000"/>
           </a:xfrm>
           <a:prstGeom prst="rect">
             <a:avLst/>
@@ -5159,19 +8991,53 @@
           <a:noFill/>
         </p:spPr>
         <p:txBody>
-          <a:bodyPr wrap="none">
+          <a:bodyPr wrap="square" lIns="0" rIns="0" tIns="0" bIns="0" anchor="ctr">
             <a:spAutoFit/>
           </a:bodyPr>
           <a:lstStyle/>
           <a:p>
-            <a:pPr>
-              <a:defRPr sz="900" b="1">
+            <a:pPr algn="ctr"/>
+            <a:r>
+              <a:rPr sz="1100" b="1">
+                <a:solidFill>
+                  <a:srgbClr val="FD7066"/>
+                </a:solidFill>
+              </a:rPr>
+              <a:t>♡</a:t>
+            </a:r>
+          </a:p>
+        </p:txBody>
+      </p:sp>
+      <p:sp>
+        <p:nvSpPr>
+          <p:cNvPr id="146" name="TextBox 145"/>
+          <p:cNvSpPr txBox="1"/>
+          <p:nvPr/>
+        </p:nvSpPr>
+        <p:spPr>
+          <a:xfrm>
+            <a:off x="8830800" y="4140000"/>
+            <a:ext cx="1245600" cy="162000"/>
+          </a:xfrm>
+          <a:prstGeom prst="rect">
+            <a:avLst/>
+          </a:prstGeom>
+          <a:noFill/>
+        </p:spPr>
+        <p:txBody>
+          <a:bodyPr wrap="square" lIns="0" rIns="0" tIns="0" bIns="0" anchor="t">
+            <a:spAutoFit/>
+          </a:bodyPr>
+          <a:lstStyle/>
+          <a:p>
+            <a:pPr algn="l"/>
+            <a:r>
+              <a:rPr sz="850" b="1">
                 <a:solidFill>
                   <a:srgbClr val="4E4B4C"/>
                 </a:solidFill>
-              </a:defRPr>
-            </a:pPr>
-            <a:r>
+                <a:latin typeface="游ゴシック"/>
+              </a:rPr>
               <a:t>常に誠実に</a:t>
             </a:r>
           </a:p>
@@ -5179,14 +9045,14 @@
       </p:sp>
       <p:sp>
         <p:nvSpPr>
-          <p:cNvPr id="57" name="TextBox 56"/>
+          <p:cNvPr id="147" name="TextBox 146"/>
           <p:cNvSpPr txBox="1"/>
           <p:nvPr/>
         </p:nvSpPr>
         <p:spPr>
           <a:xfrm>
-            <a:off x="7783200" y="2808000"/>
-            <a:ext cx="2073600" cy="144000"/>
+            <a:off x="8830800" y="4294800"/>
+            <a:ext cx="1245600" cy="126000"/>
           </a:xfrm>
           <a:prstGeom prst="rect">
             <a:avLst/>
@@ -5194,34 +9060,113 @@
           <a:noFill/>
         </p:spPr>
         <p:txBody>
-          <a:bodyPr wrap="none">
+          <a:bodyPr wrap="square" lIns="0" rIns="0" tIns="0" bIns="0" anchor="t">
             <a:spAutoFit/>
           </a:bodyPr>
           <a:lstStyle/>
           <a:p>
-            <a:pPr>
-              <a:defRPr sz="700">
+            <a:pPr algn="l"/>
+            <a:r>
+              <a:rPr sz="650" b="0">
                 <a:solidFill>
                   <a:srgbClr val="FD7066"/>
                 </a:solidFill>
-              </a:defRPr>
-            </a:pPr>
-            <a:r>
+                <a:latin typeface="Helvetica Neue"/>
+              </a:rPr>
               <a:t>Integrity First</a:t>
             </a:r>
           </a:p>
         </p:txBody>
       </p:sp>
-      <p:sp>
-        <p:nvSpPr>
-          <p:cNvPr id="58" name="TextBox 57"/>
+      <p:cxnSp>
+        <p:nvCxnSpPr>
+          <p:cNvPr id="148" name="Connector 147"/>
+          <p:cNvCxnSpPr/>
+          <p:nvPr/>
+        </p:nvCxnSpPr>
+        <p:spPr>
+          <a:xfrm>
+            <a:off x="8506800.0" y="4518000.0"/>
+            <a:ext cx="1569600.0" cy="0.0"/>
+          </a:xfrm>
+          <a:prstGeom prst="line">
+            <a:avLst/>
+          </a:prstGeom>
+          <a:ln w="6350">
+            <a:solidFill>
+              <a:srgbClr val="D6D6D6"/>
+            </a:solidFill>
+            <a:prstDash val="sysDot"/>
+          </a:ln>
+        </p:spPr>
+        <p:style>
+          <a:lnRef idx="2">
+            <a:schemeClr val="accent1"/>
+          </a:lnRef>
+          <a:fillRef idx="0">
+            <a:schemeClr val="accent1"/>
+          </a:fillRef>
+          <a:effectRef idx="1">
+            <a:schemeClr val="accent1"/>
+          </a:effectRef>
+          <a:fontRef idx="minor">
+            <a:schemeClr val="tx1"/>
+          </a:fontRef>
+        </p:style>
+      </p:cxnSp>
+      <p:sp>
+        <p:nvSpPr>
+          <p:cNvPr id="149" name="Oval 148"/>
+          <p:cNvSpPr/>
+          <p:nvPr/>
+        </p:nvSpPr>
+        <p:spPr>
+          <a:xfrm>
+            <a:off x="8506800" y="4626000"/>
+            <a:ext cx="252000" cy="252000"/>
+          </a:xfrm>
+          <a:prstGeom prst="ellipse">
+            <a:avLst/>
+          </a:prstGeom>
+          <a:solidFill>
+            <a:srgbClr val="DCE7E9"/>
+          </a:solidFill>
+          <a:ln>
+            <a:noFill/>
+          </a:ln>
+        </p:spPr>
+        <p:style>
+          <a:lnRef idx="1">
+            <a:schemeClr val="accent1"/>
+          </a:lnRef>
+          <a:fillRef idx="3">
+            <a:schemeClr val="accent1"/>
+          </a:fillRef>
+          <a:effectRef idx="2">
+            <a:schemeClr val="accent1"/>
+          </a:effectRef>
+          <a:fontRef idx="minor">
+            <a:schemeClr val="lt1"/>
+          </a:fontRef>
+        </p:style>
+        <p:txBody>
+          <a:bodyPr rtlCol="0" anchor="ctr"/>
+          <a:lstStyle/>
+          <a:p>
+            <a:pPr algn="ctr"/>
+          </a:p>
+        </p:txBody>
+      </p:sp>
+      <p:sp>
+        <p:nvSpPr>
+          <p:cNvPr id="150" name="TextBox 149"/>
           <p:cNvSpPr txBox="1"/>
           <p:nvPr/>
         </p:nvSpPr>
         <p:spPr>
           <a:xfrm>
-            <a:off x="7783200" y="3024000"/>
-            <a:ext cx="2073600" cy="180000"/>
+            <a:off x="8506800" y="4626000"/>
+            <a:ext cx="252000" cy="252000"/>
           </a:xfrm>
           <a:prstGeom prst="rect">
             <a:avLst/>
@@ -5229,19 +9174,53 @@
           <a:noFill/>
         </p:spPr>
         <p:txBody>
-          <a:bodyPr wrap="none">
+          <a:bodyPr wrap="square" lIns="0" rIns="0" tIns="0" bIns="0" anchor="ctr">
             <a:spAutoFit/>
           </a:bodyPr>
           <a:lstStyle/>
           <a:p>
-            <a:pPr>
-              <a:defRPr sz="900" b="1">
+            <a:pPr algn="ctr"/>
+            <a:r>
+              <a:rPr sz="1100" b="1">
+                <a:solidFill>
+                  <a:srgbClr val="FD7066"/>
+                </a:solidFill>
+              </a:rPr>
+              <a:t>📈</a:t>
+            </a:r>
+          </a:p>
+        </p:txBody>
+      </p:sp>
+      <p:sp>
+        <p:nvSpPr>
+          <p:cNvPr id="151" name="TextBox 150"/>
+          <p:cNvSpPr txBox="1"/>
+          <p:nvPr/>
+        </p:nvSpPr>
+        <p:spPr>
+          <a:xfrm>
+            <a:off x="8830800" y="4608000"/>
+            <a:ext cx="1245600" cy="162000"/>
+          </a:xfrm>
+          <a:prstGeom prst="rect">
+            <a:avLst/>
+          </a:prstGeom>
+          <a:noFill/>
+        </p:spPr>
+        <p:txBody>
+          <a:bodyPr wrap="square" lIns="0" rIns="0" tIns="0" bIns="0" anchor="t">
+            <a:spAutoFit/>
+          </a:bodyPr>
+          <a:lstStyle/>
+          <a:p>
+            <a:pPr algn="l"/>
+            <a:r>
+              <a:rPr sz="850" b="1">
                 <a:solidFill>
                   <a:srgbClr val="4E4B4C"/>
                 </a:solidFill>
-              </a:defRPr>
-            </a:pPr>
-            <a:r>
+                <a:latin typeface="游ゴシック"/>
+              </a:rPr>
               <a:t>仕組みで勝つ</a:t>
             </a:r>
           </a:p>
@@ -5249,14 +9228,14 @@
       </p:sp>
       <p:sp>
         <p:nvSpPr>
-          <p:cNvPr id="59" name="TextBox 58"/>
+          <p:cNvPr id="152" name="TextBox 151"/>
           <p:cNvSpPr txBox="1"/>
           <p:nvPr/>
         </p:nvSpPr>
         <p:spPr>
           <a:xfrm>
-            <a:off x="7783200" y="3168000"/>
-            <a:ext cx="2073600" cy="144000"/>
+            <a:off x="8830800" y="4762800"/>
+            <a:ext cx="1245600" cy="126000"/>
           </a:xfrm>
           <a:prstGeom prst="rect">
             <a:avLst/>
@@ -5264,34 +9243,113 @@
           <a:noFill/>
         </p:spPr>
         <p:txBody>
-          <a:bodyPr wrap="none">
+          <a:bodyPr wrap="square" lIns="0" rIns="0" tIns="0" bIns="0" anchor="t">
             <a:spAutoFit/>
           </a:bodyPr>
           <a:lstStyle/>
           <a:p>
-            <a:pPr>
-              <a:defRPr sz="700">
+            <a:pPr algn="l"/>
+            <a:r>
+              <a:rPr sz="650" b="0">
                 <a:solidFill>
                   <a:srgbClr val="FD7066"/>
                 </a:solidFill>
-              </a:defRPr>
-            </a:pPr>
-            <a:r>
+                <a:latin typeface="Helvetica Neue"/>
+              </a:rPr>
               <a:t>System &gt; Hero</a:t>
             </a:r>
           </a:p>
         </p:txBody>
       </p:sp>
-      <p:sp>
-        <p:nvSpPr>
-          <p:cNvPr id="60" name="TextBox 59"/>
+      <p:cxnSp>
+        <p:nvCxnSpPr>
+          <p:cNvPr id="153" name="Connector 152"/>
+          <p:cNvCxnSpPr/>
+          <p:nvPr/>
+        </p:nvCxnSpPr>
+        <p:spPr>
+          <a:xfrm>
+            <a:off x="8506800.0" y="4986000.0"/>
+            <a:ext cx="1569600.0" cy="0.0"/>
+          </a:xfrm>
+          <a:prstGeom prst="line">
+            <a:avLst/>
+          </a:prstGeom>
+          <a:ln w="6350">
+            <a:solidFill>
+              <a:srgbClr val="D6D6D6"/>
+            </a:solidFill>
+            <a:prstDash val="sysDot"/>
+          </a:ln>
+        </p:spPr>
+        <p:style>
+          <a:lnRef idx="2">
+            <a:schemeClr val="accent1"/>
+          </a:lnRef>
+          <a:fillRef idx="0">
+            <a:schemeClr val="accent1"/>
+          </a:fillRef>
+          <a:effectRef idx="1">
+            <a:schemeClr val="accent1"/>
+          </a:effectRef>
+          <a:fontRef idx="minor">
+            <a:schemeClr val="tx1"/>
+          </a:fontRef>
+        </p:style>
+      </p:cxnSp>
+      <p:sp>
+        <p:nvSpPr>
+          <p:cNvPr id="154" name="Oval 153"/>
+          <p:cNvSpPr/>
+          <p:nvPr/>
+        </p:nvSpPr>
+        <p:spPr>
+          <a:xfrm>
+            <a:off x="8506800" y="5094000"/>
+            <a:ext cx="252000" cy="252000"/>
+          </a:xfrm>
+          <a:prstGeom prst="ellipse">
+            <a:avLst/>
+          </a:prstGeom>
+          <a:solidFill>
+            <a:srgbClr val="FBDFD2"/>
+          </a:solidFill>
+          <a:ln>
+            <a:noFill/>
+          </a:ln>
+        </p:spPr>
+        <p:style>
+          <a:lnRef idx="1">
+            <a:schemeClr val="accent1"/>
+          </a:lnRef>
+          <a:fillRef idx="3">
+            <a:schemeClr val="accent1"/>
+          </a:fillRef>
+          <a:effectRef idx="2">
+            <a:schemeClr val="accent1"/>
+          </a:effectRef>
+          <a:fontRef idx="minor">
+            <a:schemeClr val="lt1"/>
+          </a:fontRef>
+        </p:style>
+        <p:txBody>
+          <a:bodyPr rtlCol="0" anchor="ctr"/>
+          <a:lstStyle/>
+          <a:p>
+            <a:pPr algn="ctr"/>
+          </a:p>
+        </p:txBody>
+      </p:sp>
+      <p:sp>
+        <p:nvSpPr>
+          <p:cNvPr id="155" name="TextBox 154"/>
           <p:cNvSpPr txBox="1"/>
           <p:nvPr/>
         </p:nvSpPr>
         <p:spPr>
           <a:xfrm>
-            <a:off x="7783200" y="3384000"/>
-            <a:ext cx="2073600" cy="180000"/>
+            <a:off x="8506800" y="5094000"/>
+            <a:ext cx="252000" cy="252000"/>
           </a:xfrm>
           <a:prstGeom prst="rect">
             <a:avLst/>
@@ -5299,19 +9357,53 @@
           <a:noFill/>
         </p:spPr>
         <p:txBody>
-          <a:bodyPr wrap="none">
+          <a:bodyPr wrap="square" lIns="0" rIns="0" tIns="0" bIns="0" anchor="ctr">
             <a:spAutoFit/>
           </a:bodyPr>
           <a:lstStyle/>
           <a:p>
-            <a:pPr>
-              <a:defRPr sz="900" b="1">
+            <a:pPr algn="ctr"/>
+            <a:r>
+              <a:rPr sz="1100" b="1">
+                <a:solidFill>
+                  <a:srgbClr val="FD7066"/>
+                </a:solidFill>
+              </a:rPr>
+              <a:t>👥</a:t>
+            </a:r>
+          </a:p>
+        </p:txBody>
+      </p:sp>
+      <p:sp>
+        <p:nvSpPr>
+          <p:cNvPr id="156" name="TextBox 155"/>
+          <p:cNvSpPr txBox="1"/>
+          <p:nvPr/>
+        </p:nvSpPr>
+        <p:spPr>
+          <a:xfrm>
+            <a:off x="8830800" y="5076000"/>
+            <a:ext cx="1245600" cy="162000"/>
+          </a:xfrm>
+          <a:prstGeom prst="rect">
+            <a:avLst/>
+          </a:prstGeom>
+          <a:noFill/>
+        </p:spPr>
+        <p:txBody>
+          <a:bodyPr wrap="square" lIns="0" rIns="0" tIns="0" bIns="0" anchor="t">
+            <a:spAutoFit/>
+          </a:bodyPr>
+          <a:lstStyle/>
+          <a:p>
+            <a:pPr algn="l"/>
+            <a:r>
+              <a:rPr sz="850" b="1">
                 <a:solidFill>
                   <a:srgbClr val="4E4B4C"/>
                 </a:solidFill>
-              </a:defRPr>
-            </a:pPr>
-            <a:r>
+                <a:latin typeface="游ゴシック"/>
+              </a:rPr>
               <a:t>前進のために話す</a:t>
             </a:r>
           </a:p>
@@ -5319,14 +9411,14 @@
       </p:sp>
       <p:sp>
         <p:nvSpPr>
-          <p:cNvPr id="61" name="TextBox 60"/>
+          <p:cNvPr id="157" name="TextBox 156"/>
           <p:cNvSpPr txBox="1"/>
           <p:nvPr/>
         </p:nvSpPr>
         <p:spPr>
           <a:xfrm>
-            <a:off x="7783200" y="3528000"/>
-            <a:ext cx="2073600" cy="144000"/>
+            <a:off x="8830800" y="5230800"/>
+            <a:ext cx="1245600" cy="126000"/>
           </a:xfrm>
           <a:prstGeom prst="rect">
             <a:avLst/>
@@ -5334,24 +9426,1704 @@
           <a:noFill/>
         </p:spPr>
         <p:txBody>
-          <a:bodyPr wrap="none">
+          <a:bodyPr wrap="square" lIns="0" rIns="0" tIns="0" bIns="0" anchor="t">
             <a:spAutoFit/>
           </a:bodyPr>
           <a:lstStyle/>
           <a:p>
-            <a:pPr>
-              <a:defRPr sz="700">
+            <a:pPr algn="l"/>
+            <a:r>
+              <a:rPr sz="650" b="0">
                 <a:solidFill>
                   <a:srgbClr val="FD7066"/>
                 </a:solidFill>
-              </a:defRPr>
-            </a:pPr>
-            <a:r>
+                <a:latin typeface="Helvetica Neue"/>
+              </a:rPr>
               <a:t>Move Forward Together</a:t>
             </a:r>
           </a:p>
         </p:txBody>
       </p:sp>
+      <p:cxnSp>
+        <p:nvCxnSpPr>
+          <p:cNvPr id="158" name="Connector 157"/>
+          <p:cNvCxnSpPr/>
+          <p:nvPr/>
+        </p:nvCxnSpPr>
+        <p:spPr>
+          <a:xfrm>
+            <a:off x="471600.0" y="1746000.0"/>
+            <a:ext cx="144000.0" cy="0.0"/>
+          </a:xfrm>
+          <a:prstGeom prst="line">
+            <a:avLst/>
+          </a:prstGeom>
+          <a:ln w="3175">
+            <a:solidFill>
+              <a:srgbClr val="D6D6D6"/>
+            </a:solidFill>
+          </a:ln>
+        </p:spPr>
+        <p:style>
+          <a:lnRef idx="2">
+            <a:schemeClr val="accent1"/>
+          </a:lnRef>
+          <a:fillRef idx="0">
+            <a:schemeClr val="accent1"/>
+          </a:fillRef>
+          <a:effectRef idx="1">
+            <a:schemeClr val="accent1"/>
+          </a:effectRef>
+          <a:fontRef idx="minor">
+            <a:schemeClr val="tx1"/>
+          </a:fontRef>
+        </p:style>
+      </p:cxnSp>
+      <p:cxnSp>
+        <p:nvCxnSpPr>
+          <p:cNvPr id="159" name="Connector 158"/>
+          <p:cNvCxnSpPr/>
+          <p:nvPr/>
+        </p:nvCxnSpPr>
+        <p:spPr>
+          <a:xfrm>
+            <a:off x="543600.0" y="1674000.0"/>
+            <a:ext cx="0.0" cy="144000.0"/>
+          </a:xfrm>
+          <a:prstGeom prst="line">
+            <a:avLst/>
+          </a:prstGeom>
+          <a:ln w="3175">
+            <a:solidFill>
+              <a:srgbClr val="D6D6D6"/>
+            </a:solidFill>
+          </a:ln>
+        </p:spPr>
+        <p:style>
+          <a:lnRef idx="2">
+            <a:schemeClr val="accent1"/>
+          </a:lnRef>
+          <a:fillRef idx="0">
+            <a:schemeClr val="accent1"/>
+          </a:fillRef>
+          <a:effectRef idx="1">
+            <a:schemeClr val="accent1"/>
+          </a:effectRef>
+          <a:fontRef idx="minor">
+            <a:schemeClr val="tx1"/>
+          </a:fontRef>
+        </p:style>
+      </p:cxnSp>
+      <p:cxnSp>
+        <p:nvCxnSpPr>
+          <p:cNvPr id="160" name="Connector 159"/>
+          <p:cNvCxnSpPr/>
+          <p:nvPr/>
+        </p:nvCxnSpPr>
+        <p:spPr>
+          <a:xfrm>
+            <a:off x="3553200.0" y="1746000.0"/>
+            <a:ext cx="144000.0" cy="0.0"/>
+          </a:xfrm>
+          <a:prstGeom prst="line">
+            <a:avLst/>
+          </a:prstGeom>
+          <a:ln w="3175">
+            <a:solidFill>
+              <a:srgbClr val="D6D6D6"/>
+            </a:solidFill>
+          </a:ln>
+        </p:spPr>
+        <p:style>
+          <a:lnRef idx="2">
+            <a:schemeClr val="accent1"/>
+          </a:lnRef>
+          <a:fillRef idx="0">
+            <a:schemeClr val="accent1"/>
+          </a:fillRef>
+          <a:effectRef idx="1">
+            <a:schemeClr val="accent1"/>
+          </a:effectRef>
+          <a:fontRef idx="minor">
+            <a:schemeClr val="tx1"/>
+          </a:fontRef>
+        </p:style>
+      </p:cxnSp>
+      <p:cxnSp>
+        <p:nvCxnSpPr>
+          <p:cNvPr id="161" name="Connector 160"/>
+          <p:cNvCxnSpPr/>
+          <p:nvPr/>
+        </p:nvCxnSpPr>
+        <p:spPr>
+          <a:xfrm>
+            <a:off x="3625200.0" y="1674000.0"/>
+            <a:ext cx="0.0" cy="144000.0"/>
+          </a:xfrm>
+          <a:prstGeom prst="line">
+            <a:avLst/>
+          </a:prstGeom>
+          <a:ln w="3175">
+            <a:solidFill>
+              <a:srgbClr val="D6D6D6"/>
+            </a:solidFill>
+          </a:ln>
+        </p:spPr>
+        <p:style>
+          <a:lnRef idx="2">
+            <a:schemeClr val="accent1"/>
+          </a:lnRef>
+          <a:fillRef idx="0">
+            <a:schemeClr val="accent1"/>
+          </a:fillRef>
+          <a:effectRef idx="1">
+            <a:schemeClr val="accent1"/>
+          </a:effectRef>
+          <a:fontRef idx="minor">
+            <a:schemeClr val="tx1"/>
+          </a:fontRef>
+        </p:style>
+      </p:cxnSp>
+      <p:cxnSp>
+        <p:nvCxnSpPr>
+          <p:cNvPr id="162" name="Connector 161"/>
+          <p:cNvCxnSpPr/>
+          <p:nvPr/>
+        </p:nvCxnSpPr>
+        <p:spPr>
+          <a:xfrm>
+            <a:off x="471600.0" y="3690000.0"/>
+            <a:ext cx="144000.0" cy="0.0"/>
+          </a:xfrm>
+          <a:prstGeom prst="line">
+            <a:avLst/>
+          </a:prstGeom>
+          <a:ln w="3175">
+            <a:solidFill>
+              <a:srgbClr val="D6D6D6"/>
+            </a:solidFill>
+          </a:ln>
+        </p:spPr>
+        <p:style>
+          <a:lnRef idx="2">
+            <a:schemeClr val="accent1"/>
+          </a:lnRef>
+          <a:fillRef idx="0">
+            <a:schemeClr val="accent1"/>
+          </a:fillRef>
+          <a:effectRef idx="1">
+            <a:schemeClr val="accent1"/>
+          </a:effectRef>
+          <a:fontRef idx="minor">
+            <a:schemeClr val="tx1"/>
+          </a:fontRef>
+        </p:style>
+      </p:cxnSp>
+      <p:cxnSp>
+        <p:nvCxnSpPr>
+          <p:cNvPr id="163" name="Connector 162"/>
+          <p:cNvCxnSpPr/>
+          <p:nvPr/>
+        </p:nvCxnSpPr>
+        <p:spPr>
+          <a:xfrm>
+            <a:off x="543600.0" y="3618000.0"/>
+            <a:ext cx="0.0" cy="144000.0"/>
+          </a:xfrm>
+          <a:prstGeom prst="line">
+            <a:avLst/>
+          </a:prstGeom>
+          <a:ln w="3175">
+            <a:solidFill>
+              <a:srgbClr val="D6D6D6"/>
+            </a:solidFill>
+          </a:ln>
+        </p:spPr>
+        <p:style>
+          <a:lnRef idx="2">
+            <a:schemeClr val="accent1"/>
+          </a:lnRef>
+          <a:fillRef idx="0">
+            <a:schemeClr val="accent1"/>
+          </a:fillRef>
+          <a:effectRef idx="1">
+            <a:schemeClr val="accent1"/>
+          </a:effectRef>
+          <a:fontRef idx="minor">
+            <a:schemeClr val="tx1"/>
+          </a:fontRef>
+        </p:style>
+      </p:cxnSp>
+      <p:cxnSp>
+        <p:nvCxnSpPr>
+          <p:cNvPr id="164" name="Connector 163"/>
+          <p:cNvCxnSpPr/>
+          <p:nvPr/>
+        </p:nvCxnSpPr>
+        <p:spPr>
+          <a:xfrm>
+            <a:off x="3553200.0" y="3690000.0"/>
+            <a:ext cx="144000.0" cy="0.0"/>
+          </a:xfrm>
+          <a:prstGeom prst="line">
+            <a:avLst/>
+          </a:prstGeom>
+          <a:ln w="3175">
+            <a:solidFill>
+              <a:srgbClr val="D6D6D6"/>
+            </a:solidFill>
+          </a:ln>
+        </p:spPr>
+        <p:style>
+          <a:lnRef idx="2">
+            <a:schemeClr val="accent1"/>
+          </a:lnRef>
+          <a:fillRef idx="0">
+            <a:schemeClr val="accent1"/>
+          </a:fillRef>
+          <a:effectRef idx="1">
+            <a:schemeClr val="accent1"/>
+          </a:effectRef>
+          <a:fontRef idx="minor">
+            <a:schemeClr val="tx1"/>
+          </a:fontRef>
+        </p:style>
+      </p:cxnSp>
+      <p:cxnSp>
+        <p:nvCxnSpPr>
+          <p:cNvPr id="165" name="Connector 164"/>
+          <p:cNvCxnSpPr/>
+          <p:nvPr/>
+        </p:nvCxnSpPr>
+        <p:spPr>
+          <a:xfrm>
+            <a:off x="3625200.0" y="3618000.0"/>
+            <a:ext cx="0.0" cy="144000.0"/>
+          </a:xfrm>
+          <a:prstGeom prst="line">
+            <a:avLst/>
+          </a:prstGeom>
+          <a:ln w="3175">
+            <a:solidFill>
+              <a:srgbClr val="D6D6D6"/>
+            </a:solidFill>
+          </a:ln>
+        </p:spPr>
+        <p:style>
+          <a:lnRef idx="2">
+            <a:schemeClr val="accent1"/>
+          </a:lnRef>
+          <a:fillRef idx="0">
+            <a:schemeClr val="accent1"/>
+          </a:fillRef>
+          <a:effectRef idx="1">
+            <a:schemeClr val="accent1"/>
+          </a:effectRef>
+          <a:fontRef idx="minor">
+            <a:schemeClr val="tx1"/>
+          </a:fontRef>
+        </p:style>
+      </p:cxnSp>
+      <p:cxnSp>
+        <p:nvCxnSpPr>
+          <p:cNvPr id="166" name="Connector 165"/>
+          <p:cNvCxnSpPr/>
+          <p:nvPr/>
+        </p:nvCxnSpPr>
+        <p:spPr>
+          <a:xfrm>
+            <a:off x="3733200.0" y="1746000.0"/>
+            <a:ext cx="144000.0" cy="0.0"/>
+          </a:xfrm>
+          <a:prstGeom prst="line">
+            <a:avLst/>
+          </a:prstGeom>
+          <a:ln w="3175">
+            <a:solidFill>
+              <a:srgbClr val="D6D6D6"/>
+            </a:solidFill>
+          </a:ln>
+        </p:spPr>
+        <p:style>
+          <a:lnRef idx="2">
+            <a:schemeClr val="accent1"/>
+          </a:lnRef>
+          <a:fillRef idx="0">
+            <a:schemeClr val="accent1"/>
+          </a:fillRef>
+          <a:effectRef idx="1">
+            <a:schemeClr val="accent1"/>
+          </a:effectRef>
+          <a:fontRef idx="minor">
+            <a:schemeClr val="tx1"/>
+          </a:fontRef>
+        </p:style>
+      </p:cxnSp>
+      <p:cxnSp>
+        <p:nvCxnSpPr>
+          <p:cNvPr id="167" name="Connector 166"/>
+          <p:cNvCxnSpPr/>
+          <p:nvPr/>
+        </p:nvCxnSpPr>
+        <p:spPr>
+          <a:xfrm>
+            <a:off x="3805200.0" y="1674000.0"/>
+            <a:ext cx="0.0" cy="144000.0"/>
+          </a:xfrm>
+          <a:prstGeom prst="line">
+            <a:avLst/>
+          </a:prstGeom>
+          <a:ln w="3175">
+            <a:solidFill>
+              <a:srgbClr val="D6D6D6"/>
+            </a:solidFill>
+          </a:ln>
+        </p:spPr>
+        <p:style>
+          <a:lnRef idx="2">
+            <a:schemeClr val="accent1"/>
+          </a:lnRef>
+          <a:fillRef idx="0">
+            <a:schemeClr val="accent1"/>
+          </a:fillRef>
+          <a:effectRef idx="1">
+            <a:schemeClr val="accent1"/>
+          </a:effectRef>
+          <a:fontRef idx="minor">
+            <a:schemeClr val="tx1"/>
+          </a:fontRef>
+        </p:style>
+      </p:cxnSp>
+      <p:cxnSp>
+        <p:nvCxnSpPr>
+          <p:cNvPr id="168" name="Connector 167"/>
+          <p:cNvCxnSpPr/>
+          <p:nvPr/>
+        </p:nvCxnSpPr>
+        <p:spPr>
+          <a:xfrm>
+            <a:off x="6814800.0" y="1746000.0"/>
+            <a:ext cx="144000.0" cy="0.0"/>
+          </a:xfrm>
+          <a:prstGeom prst="line">
+            <a:avLst/>
+          </a:prstGeom>
+          <a:ln w="3175">
+            <a:solidFill>
+              <a:srgbClr val="D6D6D6"/>
+            </a:solidFill>
+          </a:ln>
+        </p:spPr>
+        <p:style>
+          <a:lnRef idx="2">
+            <a:schemeClr val="accent1"/>
+          </a:lnRef>
+          <a:fillRef idx="0">
+            <a:schemeClr val="accent1"/>
+          </a:fillRef>
+          <a:effectRef idx="1">
+            <a:schemeClr val="accent1"/>
+          </a:effectRef>
+          <a:fontRef idx="minor">
+            <a:schemeClr val="tx1"/>
+          </a:fontRef>
+        </p:style>
+      </p:cxnSp>
+      <p:cxnSp>
+        <p:nvCxnSpPr>
+          <p:cNvPr id="169" name="Connector 168"/>
+          <p:cNvCxnSpPr/>
+          <p:nvPr/>
+        </p:nvCxnSpPr>
+        <p:spPr>
+          <a:xfrm>
+            <a:off x="6886800.0" y="1674000.0"/>
+            <a:ext cx="0.0" cy="144000.0"/>
+          </a:xfrm>
+          <a:prstGeom prst="line">
+            <a:avLst/>
+          </a:prstGeom>
+          <a:ln w="3175">
+            <a:solidFill>
+              <a:srgbClr val="D6D6D6"/>
+            </a:solidFill>
+          </a:ln>
+        </p:spPr>
+        <p:style>
+          <a:lnRef idx="2">
+            <a:schemeClr val="accent1"/>
+          </a:lnRef>
+          <a:fillRef idx="0">
+            <a:schemeClr val="accent1"/>
+          </a:fillRef>
+          <a:effectRef idx="1">
+            <a:schemeClr val="accent1"/>
+          </a:effectRef>
+          <a:fontRef idx="minor">
+            <a:schemeClr val="tx1"/>
+          </a:fontRef>
+        </p:style>
+      </p:cxnSp>
+      <p:cxnSp>
+        <p:nvCxnSpPr>
+          <p:cNvPr id="170" name="Connector 169"/>
+          <p:cNvCxnSpPr/>
+          <p:nvPr/>
+        </p:nvCxnSpPr>
+        <p:spPr>
+          <a:xfrm>
+            <a:off x="3733200.0" y="3690000.0"/>
+            <a:ext cx="144000.0" cy="0.0"/>
+          </a:xfrm>
+          <a:prstGeom prst="line">
+            <a:avLst/>
+          </a:prstGeom>
+          <a:ln w="3175">
+            <a:solidFill>
+              <a:srgbClr val="D6D6D6"/>
+            </a:solidFill>
+          </a:ln>
+        </p:spPr>
+        <p:style>
+          <a:lnRef idx="2">
+            <a:schemeClr val="accent1"/>
+          </a:lnRef>
+          <a:fillRef idx="0">
+            <a:schemeClr val="accent1"/>
+          </a:fillRef>
+          <a:effectRef idx="1">
+            <a:schemeClr val="accent1"/>
+          </a:effectRef>
+          <a:fontRef idx="minor">
+            <a:schemeClr val="tx1"/>
+          </a:fontRef>
+        </p:style>
+      </p:cxnSp>
+      <p:cxnSp>
+        <p:nvCxnSpPr>
+          <p:cNvPr id="171" name="Connector 170"/>
+          <p:cNvCxnSpPr/>
+          <p:nvPr/>
+        </p:nvCxnSpPr>
+        <p:spPr>
+          <a:xfrm>
+            <a:off x="3805200.0" y="3618000.0"/>
+            <a:ext cx="0.0" cy="144000.0"/>
+          </a:xfrm>
+          <a:prstGeom prst="line">
+            <a:avLst/>
+          </a:prstGeom>
+          <a:ln w="3175">
+            <a:solidFill>
+              <a:srgbClr val="D6D6D6"/>
+            </a:solidFill>
+          </a:ln>
+        </p:spPr>
+        <p:style>
+          <a:lnRef idx="2">
+            <a:schemeClr val="accent1"/>
+          </a:lnRef>
+          <a:fillRef idx="0">
+            <a:schemeClr val="accent1"/>
+          </a:fillRef>
+          <a:effectRef idx="1">
+            <a:schemeClr val="accent1"/>
+          </a:effectRef>
+          <a:fontRef idx="minor">
+            <a:schemeClr val="tx1"/>
+          </a:fontRef>
+        </p:style>
+      </p:cxnSp>
+      <p:cxnSp>
+        <p:nvCxnSpPr>
+          <p:cNvPr id="172" name="Connector 171"/>
+          <p:cNvCxnSpPr/>
+          <p:nvPr/>
+        </p:nvCxnSpPr>
+        <p:spPr>
+          <a:xfrm>
+            <a:off x="6814800.0" y="3690000.0"/>
+            <a:ext cx="144000.0" cy="0.0"/>
+          </a:xfrm>
+          <a:prstGeom prst="line">
+            <a:avLst/>
+          </a:prstGeom>
+          <a:ln w="3175">
+            <a:solidFill>
+              <a:srgbClr val="D6D6D6"/>
+            </a:solidFill>
+          </a:ln>
+        </p:spPr>
+        <p:style>
+          <a:lnRef idx="2">
+            <a:schemeClr val="accent1"/>
+          </a:lnRef>
+          <a:fillRef idx="0">
+            <a:schemeClr val="accent1"/>
+          </a:fillRef>
+          <a:effectRef idx="1">
+            <a:schemeClr val="accent1"/>
+          </a:effectRef>
+          <a:fontRef idx="minor">
+            <a:schemeClr val="tx1"/>
+          </a:fontRef>
+        </p:style>
+      </p:cxnSp>
+      <p:cxnSp>
+        <p:nvCxnSpPr>
+          <p:cNvPr id="173" name="Connector 172"/>
+          <p:cNvCxnSpPr/>
+          <p:nvPr/>
+        </p:nvCxnSpPr>
+        <p:spPr>
+          <a:xfrm>
+            <a:off x="6886800.0" y="3618000.0"/>
+            <a:ext cx="0.0" cy="144000.0"/>
+          </a:xfrm>
+          <a:prstGeom prst="line">
+            <a:avLst/>
+          </a:prstGeom>
+          <a:ln w="3175">
+            <a:solidFill>
+              <a:srgbClr val="D6D6D6"/>
+            </a:solidFill>
+          </a:ln>
+        </p:spPr>
+        <p:style>
+          <a:lnRef idx="2">
+            <a:schemeClr val="accent1"/>
+          </a:lnRef>
+          <a:fillRef idx="0">
+            <a:schemeClr val="accent1"/>
+          </a:fillRef>
+          <a:effectRef idx="1">
+            <a:schemeClr val="accent1"/>
+          </a:effectRef>
+          <a:fontRef idx="minor">
+            <a:schemeClr val="tx1"/>
+          </a:fontRef>
+        </p:style>
+      </p:cxnSp>
+      <p:cxnSp>
+        <p:nvCxnSpPr>
+          <p:cNvPr id="174" name="Connector 173"/>
+          <p:cNvCxnSpPr/>
+          <p:nvPr/>
+        </p:nvCxnSpPr>
+        <p:spPr>
+          <a:xfrm>
+            <a:off x="6994800.0" y="1746000.0"/>
+            <a:ext cx="144000.0" cy="0.0"/>
+          </a:xfrm>
+          <a:prstGeom prst="line">
+            <a:avLst/>
+          </a:prstGeom>
+          <a:ln w="3175">
+            <a:solidFill>
+              <a:srgbClr val="D6D6D6"/>
+            </a:solidFill>
+          </a:ln>
+        </p:spPr>
+        <p:style>
+          <a:lnRef idx="2">
+            <a:schemeClr val="accent1"/>
+          </a:lnRef>
+          <a:fillRef idx="0">
+            <a:schemeClr val="accent1"/>
+          </a:fillRef>
+          <a:effectRef idx="1">
+            <a:schemeClr val="accent1"/>
+          </a:effectRef>
+          <a:fontRef idx="minor">
+            <a:schemeClr val="tx1"/>
+          </a:fontRef>
+        </p:style>
+      </p:cxnSp>
+      <p:cxnSp>
+        <p:nvCxnSpPr>
+          <p:cNvPr id="175" name="Connector 174"/>
+          <p:cNvCxnSpPr/>
+          <p:nvPr/>
+        </p:nvCxnSpPr>
+        <p:spPr>
+          <a:xfrm>
+            <a:off x="7066800.0" y="1674000.0"/>
+            <a:ext cx="0.0" cy="144000.0"/>
+          </a:xfrm>
+          <a:prstGeom prst="line">
+            <a:avLst/>
+          </a:prstGeom>
+          <a:ln w="3175">
+            <a:solidFill>
+              <a:srgbClr val="D6D6D6"/>
+            </a:solidFill>
+          </a:ln>
+        </p:spPr>
+        <p:style>
+          <a:lnRef idx="2">
+            <a:schemeClr val="accent1"/>
+          </a:lnRef>
+          <a:fillRef idx="0">
+            <a:schemeClr val="accent1"/>
+          </a:fillRef>
+          <a:effectRef idx="1">
+            <a:schemeClr val="accent1"/>
+          </a:effectRef>
+          <a:fontRef idx="minor">
+            <a:schemeClr val="tx1"/>
+          </a:fontRef>
+        </p:style>
+      </p:cxnSp>
+      <p:cxnSp>
+        <p:nvCxnSpPr>
+          <p:cNvPr id="176" name="Connector 175"/>
+          <p:cNvCxnSpPr/>
+          <p:nvPr/>
+        </p:nvCxnSpPr>
+        <p:spPr>
+          <a:xfrm>
+            <a:off x="10076400.0" y="1746000.0"/>
+            <a:ext cx="144000.0" cy="0.0"/>
+          </a:xfrm>
+          <a:prstGeom prst="line">
+            <a:avLst/>
+          </a:prstGeom>
+          <a:ln w="3175">
+            <a:solidFill>
+              <a:srgbClr val="D6D6D6"/>
+            </a:solidFill>
+          </a:ln>
+        </p:spPr>
+        <p:style>
+          <a:lnRef idx="2">
+            <a:schemeClr val="accent1"/>
+          </a:lnRef>
+          <a:fillRef idx="0">
+            <a:schemeClr val="accent1"/>
+          </a:fillRef>
+          <a:effectRef idx="1">
+            <a:schemeClr val="accent1"/>
+          </a:effectRef>
+          <a:fontRef idx="minor">
+            <a:schemeClr val="tx1"/>
+          </a:fontRef>
+        </p:style>
+      </p:cxnSp>
+      <p:cxnSp>
+        <p:nvCxnSpPr>
+          <p:cNvPr id="177" name="Connector 176"/>
+          <p:cNvCxnSpPr/>
+          <p:nvPr/>
+        </p:nvCxnSpPr>
+        <p:spPr>
+          <a:xfrm>
+            <a:off x="10148400.0" y="1674000.0"/>
+            <a:ext cx="0.0" cy="144000.0"/>
+          </a:xfrm>
+          <a:prstGeom prst="line">
+            <a:avLst/>
+          </a:prstGeom>
+          <a:ln w="3175">
+            <a:solidFill>
+              <a:srgbClr val="D6D6D6"/>
+            </a:solidFill>
+          </a:ln>
+        </p:spPr>
+        <p:style>
+          <a:lnRef idx="2">
+            <a:schemeClr val="accent1"/>
+          </a:lnRef>
+          <a:fillRef idx="0">
+            <a:schemeClr val="accent1"/>
+          </a:fillRef>
+          <a:effectRef idx="1">
+            <a:schemeClr val="accent1"/>
+          </a:effectRef>
+          <a:fontRef idx="minor">
+            <a:schemeClr val="tx1"/>
+          </a:fontRef>
+        </p:style>
+      </p:cxnSp>
+      <p:cxnSp>
+        <p:nvCxnSpPr>
+          <p:cNvPr id="178" name="Connector 177"/>
+          <p:cNvCxnSpPr/>
+          <p:nvPr/>
+        </p:nvCxnSpPr>
+        <p:spPr>
+          <a:xfrm>
+            <a:off x="6994800.0" y="3690000.0"/>
+            <a:ext cx="144000.0" cy="0.0"/>
+          </a:xfrm>
+          <a:prstGeom prst="line">
+            <a:avLst/>
+          </a:prstGeom>
+          <a:ln w="3175">
+            <a:solidFill>
+              <a:srgbClr val="D6D6D6"/>
+            </a:solidFill>
+          </a:ln>
+        </p:spPr>
+        <p:style>
+          <a:lnRef idx="2">
+            <a:schemeClr val="accent1"/>
+          </a:lnRef>
+          <a:fillRef idx="0">
+            <a:schemeClr val="accent1"/>
+          </a:fillRef>
+          <a:effectRef idx="1">
+            <a:schemeClr val="accent1"/>
+          </a:effectRef>
+          <a:fontRef idx="minor">
+            <a:schemeClr val="tx1"/>
+          </a:fontRef>
+        </p:style>
+      </p:cxnSp>
+      <p:cxnSp>
+        <p:nvCxnSpPr>
+          <p:cNvPr id="179" name="Connector 178"/>
+          <p:cNvCxnSpPr/>
+          <p:nvPr/>
+        </p:nvCxnSpPr>
+        <p:spPr>
+          <a:xfrm>
+            <a:off x="7066800.0" y="3618000.0"/>
+            <a:ext cx="0.0" cy="144000.0"/>
+          </a:xfrm>
+          <a:prstGeom prst="line">
+            <a:avLst/>
+          </a:prstGeom>
+          <a:ln w="3175">
+            <a:solidFill>
+              <a:srgbClr val="D6D6D6"/>
+            </a:solidFill>
+          </a:ln>
+        </p:spPr>
+        <p:style>
+          <a:lnRef idx="2">
+            <a:schemeClr val="accent1"/>
+          </a:lnRef>
+          <a:fillRef idx="0">
+            <a:schemeClr val="accent1"/>
+          </a:fillRef>
+          <a:effectRef idx="1">
+            <a:schemeClr val="accent1"/>
+          </a:effectRef>
+          <a:fontRef idx="minor">
+            <a:schemeClr val="tx1"/>
+          </a:fontRef>
+        </p:style>
+      </p:cxnSp>
+      <p:cxnSp>
+        <p:nvCxnSpPr>
+          <p:cNvPr id="180" name="Connector 179"/>
+          <p:cNvCxnSpPr/>
+          <p:nvPr/>
+        </p:nvCxnSpPr>
+        <p:spPr>
+          <a:xfrm>
+            <a:off x="10076400.0" y="3690000.0"/>
+            <a:ext cx="144000.0" cy="0.0"/>
+          </a:xfrm>
+          <a:prstGeom prst="line">
+            <a:avLst/>
+          </a:prstGeom>
+          <a:ln w="3175">
+            <a:solidFill>
+              <a:srgbClr val="D6D6D6"/>
+            </a:solidFill>
+          </a:ln>
+        </p:spPr>
+        <p:style>
+          <a:lnRef idx="2">
+            <a:schemeClr val="accent1"/>
+          </a:lnRef>
+          <a:fillRef idx="0">
+            <a:schemeClr val="accent1"/>
+          </a:fillRef>
+          <a:effectRef idx="1">
+            <a:schemeClr val="accent1"/>
+          </a:effectRef>
+          <a:fontRef idx="minor">
+            <a:schemeClr val="tx1"/>
+          </a:fontRef>
+        </p:style>
+      </p:cxnSp>
+      <p:cxnSp>
+        <p:nvCxnSpPr>
+          <p:cNvPr id="181" name="Connector 180"/>
+          <p:cNvCxnSpPr/>
+          <p:nvPr/>
+        </p:nvCxnSpPr>
+        <p:spPr>
+          <a:xfrm>
+            <a:off x="10148400.0" y="3618000.0"/>
+            <a:ext cx="0.0" cy="144000.0"/>
+          </a:xfrm>
+          <a:prstGeom prst="line">
+            <a:avLst/>
+          </a:prstGeom>
+          <a:ln w="3175">
+            <a:solidFill>
+              <a:srgbClr val="D6D6D6"/>
+            </a:solidFill>
+          </a:ln>
+        </p:spPr>
+        <p:style>
+          <a:lnRef idx="2">
+            <a:schemeClr val="accent1"/>
+          </a:lnRef>
+          <a:fillRef idx="0">
+            <a:schemeClr val="accent1"/>
+          </a:fillRef>
+          <a:effectRef idx="1">
+            <a:schemeClr val="accent1"/>
+          </a:effectRef>
+          <a:fontRef idx="minor">
+            <a:schemeClr val="tx1"/>
+          </a:fontRef>
+        </p:style>
+      </p:cxnSp>
+      <p:cxnSp>
+        <p:nvCxnSpPr>
+          <p:cNvPr id="182" name="Connector 181"/>
+          <p:cNvCxnSpPr/>
+          <p:nvPr/>
+        </p:nvCxnSpPr>
+        <p:spPr>
+          <a:xfrm>
+            <a:off x="471600.0" y="3870000.0"/>
+            <a:ext cx="144000.0" cy="0.0"/>
+          </a:xfrm>
+          <a:prstGeom prst="line">
+            <a:avLst/>
+          </a:prstGeom>
+          <a:ln w="3175">
+            <a:solidFill>
+              <a:srgbClr val="D6D6D6"/>
+            </a:solidFill>
+          </a:ln>
+        </p:spPr>
+        <p:style>
+          <a:lnRef idx="2">
+            <a:schemeClr val="accent1"/>
+          </a:lnRef>
+          <a:fillRef idx="0">
+            <a:schemeClr val="accent1"/>
+          </a:fillRef>
+          <a:effectRef idx="1">
+            <a:schemeClr val="accent1"/>
+          </a:effectRef>
+          <a:fontRef idx="minor">
+            <a:schemeClr val="tx1"/>
+          </a:fontRef>
+        </p:style>
+      </p:cxnSp>
+      <p:cxnSp>
+        <p:nvCxnSpPr>
+          <p:cNvPr id="183" name="Connector 182"/>
+          <p:cNvCxnSpPr/>
+          <p:nvPr/>
+        </p:nvCxnSpPr>
+        <p:spPr>
+          <a:xfrm>
+            <a:off x="543600.0" y="3798000.0"/>
+            <a:ext cx="0.0" cy="144000.0"/>
+          </a:xfrm>
+          <a:prstGeom prst="line">
+            <a:avLst/>
+          </a:prstGeom>
+          <a:ln w="3175">
+            <a:solidFill>
+              <a:srgbClr val="D6D6D6"/>
+            </a:solidFill>
+          </a:ln>
+        </p:spPr>
+        <p:style>
+          <a:lnRef idx="2">
+            <a:schemeClr val="accent1"/>
+          </a:lnRef>
+          <a:fillRef idx="0">
+            <a:schemeClr val="accent1"/>
+          </a:fillRef>
+          <a:effectRef idx="1">
+            <a:schemeClr val="accent1"/>
+          </a:effectRef>
+          <a:fontRef idx="minor">
+            <a:schemeClr val="tx1"/>
+          </a:fontRef>
+        </p:style>
+      </p:cxnSp>
+      <p:cxnSp>
+        <p:nvCxnSpPr>
+          <p:cNvPr id="184" name="Connector 183"/>
+          <p:cNvCxnSpPr/>
+          <p:nvPr/>
+        </p:nvCxnSpPr>
+        <p:spPr>
+          <a:xfrm>
+            <a:off x="3553200.0" y="3870000.0"/>
+            <a:ext cx="144000.0" cy="0.0"/>
+          </a:xfrm>
+          <a:prstGeom prst="line">
+            <a:avLst/>
+          </a:prstGeom>
+          <a:ln w="3175">
+            <a:solidFill>
+              <a:srgbClr val="D6D6D6"/>
+            </a:solidFill>
+          </a:ln>
+        </p:spPr>
+        <p:style>
+          <a:lnRef idx="2">
+            <a:schemeClr val="accent1"/>
+          </a:lnRef>
+          <a:fillRef idx="0">
+            <a:schemeClr val="accent1"/>
+          </a:fillRef>
+          <a:effectRef idx="1">
+            <a:schemeClr val="accent1"/>
+          </a:effectRef>
+          <a:fontRef idx="minor">
+            <a:schemeClr val="tx1"/>
+          </a:fontRef>
+        </p:style>
+      </p:cxnSp>
+      <p:cxnSp>
+        <p:nvCxnSpPr>
+          <p:cNvPr id="185" name="Connector 184"/>
+          <p:cNvCxnSpPr/>
+          <p:nvPr/>
+        </p:nvCxnSpPr>
+        <p:spPr>
+          <a:xfrm>
+            <a:off x="3625200.0" y="3798000.0"/>
+            <a:ext cx="0.0" cy="144000.0"/>
+          </a:xfrm>
+          <a:prstGeom prst="line">
+            <a:avLst/>
+          </a:prstGeom>
+          <a:ln w="3175">
+            <a:solidFill>
+              <a:srgbClr val="D6D6D6"/>
+            </a:solidFill>
+          </a:ln>
+        </p:spPr>
+        <p:style>
+          <a:lnRef idx="2">
+            <a:schemeClr val="accent1"/>
+          </a:lnRef>
+          <a:fillRef idx="0">
+            <a:schemeClr val="accent1"/>
+          </a:fillRef>
+          <a:effectRef idx="1">
+            <a:schemeClr val="accent1"/>
+          </a:effectRef>
+          <a:fontRef idx="minor">
+            <a:schemeClr val="tx1"/>
+          </a:fontRef>
+        </p:style>
+      </p:cxnSp>
+      <p:cxnSp>
+        <p:nvCxnSpPr>
+          <p:cNvPr id="186" name="Connector 185"/>
+          <p:cNvCxnSpPr/>
+          <p:nvPr/>
+        </p:nvCxnSpPr>
+        <p:spPr>
+          <a:xfrm>
+            <a:off x="471600.0" y="5814000.0"/>
+            <a:ext cx="144000.0" cy="0.0"/>
+          </a:xfrm>
+          <a:prstGeom prst="line">
+            <a:avLst/>
+          </a:prstGeom>
+          <a:ln w="3175">
+            <a:solidFill>
+              <a:srgbClr val="D6D6D6"/>
+            </a:solidFill>
+          </a:ln>
+        </p:spPr>
+        <p:style>
+          <a:lnRef idx="2">
+            <a:schemeClr val="accent1"/>
+          </a:lnRef>
+          <a:fillRef idx="0">
+            <a:schemeClr val="accent1"/>
+          </a:fillRef>
+          <a:effectRef idx="1">
+            <a:schemeClr val="accent1"/>
+          </a:effectRef>
+          <a:fontRef idx="minor">
+            <a:schemeClr val="tx1"/>
+          </a:fontRef>
+        </p:style>
+      </p:cxnSp>
+      <p:cxnSp>
+        <p:nvCxnSpPr>
+          <p:cNvPr id="187" name="Connector 186"/>
+          <p:cNvCxnSpPr/>
+          <p:nvPr/>
+        </p:nvCxnSpPr>
+        <p:spPr>
+          <a:xfrm>
+            <a:off x="543600.0" y="5742000.0"/>
+            <a:ext cx="0.0" cy="144000.0"/>
+          </a:xfrm>
+          <a:prstGeom prst="line">
+            <a:avLst/>
+          </a:prstGeom>
+          <a:ln w="3175">
+            <a:solidFill>
+              <a:srgbClr val="D6D6D6"/>
+            </a:solidFill>
+          </a:ln>
+        </p:spPr>
+        <p:style>
+          <a:lnRef idx="2">
+            <a:schemeClr val="accent1"/>
+          </a:lnRef>
+          <a:fillRef idx="0">
+            <a:schemeClr val="accent1"/>
+          </a:fillRef>
+          <a:effectRef idx="1">
+            <a:schemeClr val="accent1"/>
+          </a:effectRef>
+          <a:fontRef idx="minor">
+            <a:schemeClr val="tx1"/>
+          </a:fontRef>
+        </p:style>
+      </p:cxnSp>
+      <p:cxnSp>
+        <p:nvCxnSpPr>
+          <p:cNvPr id="188" name="Connector 187"/>
+          <p:cNvCxnSpPr/>
+          <p:nvPr/>
+        </p:nvCxnSpPr>
+        <p:spPr>
+          <a:xfrm>
+            <a:off x="3553200.0" y="5814000.0"/>
+            <a:ext cx="144000.0" cy="0.0"/>
+          </a:xfrm>
+          <a:prstGeom prst="line">
+            <a:avLst/>
+          </a:prstGeom>
+          <a:ln w="3175">
+            <a:solidFill>
+              <a:srgbClr val="D6D6D6"/>
+            </a:solidFill>
+          </a:ln>
+        </p:spPr>
+        <p:style>
+          <a:lnRef idx="2">
+            <a:schemeClr val="accent1"/>
+          </a:lnRef>
+          <a:fillRef idx="0">
+            <a:schemeClr val="accent1"/>
+          </a:fillRef>
+          <a:effectRef idx="1">
+            <a:schemeClr val="accent1"/>
+          </a:effectRef>
+          <a:fontRef idx="minor">
+            <a:schemeClr val="tx1"/>
+          </a:fontRef>
+        </p:style>
+      </p:cxnSp>
+      <p:cxnSp>
+        <p:nvCxnSpPr>
+          <p:cNvPr id="189" name="Connector 188"/>
+          <p:cNvCxnSpPr/>
+          <p:nvPr/>
+        </p:nvCxnSpPr>
+        <p:spPr>
+          <a:xfrm>
+            <a:off x="3625200.0" y="5742000.0"/>
+            <a:ext cx="0.0" cy="144000.0"/>
+          </a:xfrm>
+          <a:prstGeom prst="line">
+            <a:avLst/>
+          </a:prstGeom>
+          <a:ln w="3175">
+            <a:solidFill>
+              <a:srgbClr val="D6D6D6"/>
+            </a:solidFill>
+          </a:ln>
+        </p:spPr>
+        <p:style>
+          <a:lnRef idx="2">
+            <a:schemeClr val="accent1"/>
+          </a:lnRef>
+          <a:fillRef idx="0">
+            <a:schemeClr val="accent1"/>
+          </a:fillRef>
+          <a:effectRef idx="1">
+            <a:schemeClr val="accent1"/>
+          </a:effectRef>
+          <a:fontRef idx="minor">
+            <a:schemeClr val="tx1"/>
+          </a:fontRef>
+        </p:style>
+      </p:cxnSp>
+      <p:cxnSp>
+        <p:nvCxnSpPr>
+          <p:cNvPr id="190" name="Connector 189"/>
+          <p:cNvCxnSpPr/>
+          <p:nvPr/>
+        </p:nvCxnSpPr>
+        <p:spPr>
+          <a:xfrm>
+            <a:off x="3733200.0" y="3870000.0"/>
+            <a:ext cx="144000.0" cy="0.0"/>
+          </a:xfrm>
+          <a:prstGeom prst="line">
+            <a:avLst/>
+          </a:prstGeom>
+          <a:ln w="3175">
+            <a:solidFill>
+              <a:srgbClr val="D6D6D6"/>
+            </a:solidFill>
+          </a:ln>
+        </p:spPr>
+        <p:style>
+          <a:lnRef idx="2">
+            <a:schemeClr val="accent1"/>
+          </a:lnRef>
+          <a:fillRef idx="0">
+            <a:schemeClr val="accent1"/>
+          </a:fillRef>
+          <a:effectRef idx="1">
+            <a:schemeClr val="accent1"/>
+          </a:effectRef>
+          <a:fontRef idx="minor">
+            <a:schemeClr val="tx1"/>
+          </a:fontRef>
+        </p:style>
+      </p:cxnSp>
+      <p:cxnSp>
+        <p:nvCxnSpPr>
+          <p:cNvPr id="191" name="Connector 190"/>
+          <p:cNvCxnSpPr/>
+          <p:nvPr/>
+        </p:nvCxnSpPr>
+        <p:spPr>
+          <a:xfrm>
+            <a:off x="3805200.0" y="3798000.0"/>
+            <a:ext cx="0.0" cy="144000.0"/>
+          </a:xfrm>
+          <a:prstGeom prst="line">
+            <a:avLst/>
+          </a:prstGeom>
+          <a:ln w="3175">
+            <a:solidFill>
+              <a:srgbClr val="D6D6D6"/>
+            </a:solidFill>
+          </a:ln>
+        </p:spPr>
+        <p:style>
+          <a:lnRef idx="2">
+            <a:schemeClr val="accent1"/>
+          </a:lnRef>
+          <a:fillRef idx="0">
+            <a:schemeClr val="accent1"/>
+          </a:fillRef>
+          <a:effectRef idx="1">
+            <a:schemeClr val="accent1"/>
+          </a:effectRef>
+          <a:fontRef idx="minor">
+            <a:schemeClr val="tx1"/>
+          </a:fontRef>
+        </p:style>
+      </p:cxnSp>
+      <p:cxnSp>
+        <p:nvCxnSpPr>
+          <p:cNvPr id="192" name="Connector 191"/>
+          <p:cNvCxnSpPr/>
+          <p:nvPr/>
+        </p:nvCxnSpPr>
+        <p:spPr>
+          <a:xfrm>
+            <a:off x="6814800.0" y="3870000.0"/>
+            <a:ext cx="144000.0" cy="0.0"/>
+          </a:xfrm>
+          <a:prstGeom prst="line">
+            <a:avLst/>
+          </a:prstGeom>
+          <a:ln w="3175">
+            <a:solidFill>
+              <a:srgbClr val="D6D6D6"/>
+            </a:solidFill>
+          </a:ln>
+        </p:spPr>
+        <p:style>
+          <a:lnRef idx="2">
+            <a:schemeClr val="accent1"/>
+          </a:lnRef>
+          <a:fillRef idx="0">
+            <a:schemeClr val="accent1"/>
+          </a:fillRef>
+          <a:effectRef idx="1">
+            <a:schemeClr val="accent1"/>
+          </a:effectRef>
+          <a:fontRef idx="minor">
+            <a:schemeClr val="tx1"/>
+          </a:fontRef>
+        </p:style>
+      </p:cxnSp>
+      <p:cxnSp>
+        <p:nvCxnSpPr>
+          <p:cNvPr id="193" name="Connector 192"/>
+          <p:cNvCxnSpPr/>
+          <p:nvPr/>
+        </p:nvCxnSpPr>
+        <p:spPr>
+          <a:xfrm>
+            <a:off x="6886800.0" y="3798000.0"/>
+            <a:ext cx="0.0" cy="144000.0"/>
+          </a:xfrm>
+          <a:prstGeom prst="line">
+            <a:avLst/>
+          </a:prstGeom>
+          <a:ln w="3175">
+            <a:solidFill>
+              <a:srgbClr val="D6D6D6"/>
+            </a:solidFill>
+          </a:ln>
+        </p:spPr>
+        <p:style>
+          <a:lnRef idx="2">
+            <a:schemeClr val="accent1"/>
+          </a:lnRef>
+          <a:fillRef idx="0">
+            <a:schemeClr val="accent1"/>
+          </a:fillRef>
+          <a:effectRef idx="1">
+            <a:schemeClr val="accent1"/>
+          </a:effectRef>
+          <a:fontRef idx="minor">
+            <a:schemeClr val="tx1"/>
+          </a:fontRef>
+        </p:style>
+      </p:cxnSp>
+      <p:cxnSp>
+        <p:nvCxnSpPr>
+          <p:cNvPr id="194" name="Connector 193"/>
+          <p:cNvCxnSpPr/>
+          <p:nvPr/>
+        </p:nvCxnSpPr>
+        <p:spPr>
+          <a:xfrm>
+            <a:off x="3733200.0" y="5814000.0"/>
+            <a:ext cx="144000.0" cy="0.0"/>
+          </a:xfrm>
+          <a:prstGeom prst="line">
+            <a:avLst/>
+          </a:prstGeom>
+          <a:ln w="3175">
+            <a:solidFill>
+              <a:srgbClr val="D6D6D6"/>
+            </a:solidFill>
+          </a:ln>
+        </p:spPr>
+        <p:style>
+          <a:lnRef idx="2">
+            <a:schemeClr val="accent1"/>
+          </a:lnRef>
+          <a:fillRef idx="0">
+            <a:schemeClr val="accent1"/>
+          </a:fillRef>
+          <a:effectRef idx="1">
+            <a:schemeClr val="accent1"/>
+          </a:effectRef>
+          <a:fontRef idx="minor">
+            <a:schemeClr val="tx1"/>
+          </a:fontRef>
+        </p:style>
+      </p:cxnSp>
+      <p:cxnSp>
+        <p:nvCxnSpPr>
+          <p:cNvPr id="195" name="Connector 194"/>
+          <p:cNvCxnSpPr/>
+          <p:nvPr/>
+        </p:nvCxnSpPr>
+        <p:spPr>
+          <a:xfrm>
+            <a:off x="3805200.0" y="5742000.0"/>
+            <a:ext cx="0.0" cy="144000.0"/>
+          </a:xfrm>
+          <a:prstGeom prst="line">
+            <a:avLst/>
+          </a:prstGeom>
+          <a:ln w="3175">
+            <a:solidFill>
+              <a:srgbClr val="D6D6D6"/>
+            </a:solidFill>
+          </a:ln>
+        </p:spPr>
+        <p:style>
+          <a:lnRef idx="2">
+            <a:schemeClr val="accent1"/>
+          </a:lnRef>
+          <a:fillRef idx="0">
+            <a:schemeClr val="accent1"/>
+          </a:fillRef>
+          <a:effectRef idx="1">
+            <a:schemeClr val="accent1"/>
+          </a:effectRef>
+          <a:fontRef idx="minor">
+            <a:schemeClr val="tx1"/>
+          </a:fontRef>
+        </p:style>
+      </p:cxnSp>
+      <p:cxnSp>
+        <p:nvCxnSpPr>
+          <p:cNvPr id="196" name="Connector 195"/>
+          <p:cNvCxnSpPr/>
+          <p:nvPr/>
+        </p:nvCxnSpPr>
+        <p:spPr>
+          <a:xfrm>
+            <a:off x="6814800.0" y="5814000.0"/>
+            <a:ext cx="144000.0" cy="0.0"/>
+          </a:xfrm>
+          <a:prstGeom prst="line">
+            <a:avLst/>
+          </a:prstGeom>
+          <a:ln w="3175">
+            <a:solidFill>
+              <a:srgbClr val="D6D6D6"/>
+            </a:solidFill>
+          </a:ln>
+        </p:spPr>
+        <p:style>
+          <a:lnRef idx="2">
+            <a:schemeClr val="accent1"/>
+          </a:lnRef>
+          <a:fillRef idx="0">
+            <a:schemeClr val="accent1"/>
+          </a:fillRef>
+          <a:effectRef idx="1">
+            <a:schemeClr val="accent1"/>
+          </a:effectRef>
+          <a:fontRef idx="minor">
+            <a:schemeClr val="tx1"/>
+          </a:fontRef>
+        </p:style>
+      </p:cxnSp>
+      <p:cxnSp>
+        <p:nvCxnSpPr>
+          <p:cNvPr id="197" name="Connector 196"/>
+          <p:cNvCxnSpPr/>
+          <p:nvPr/>
+        </p:nvCxnSpPr>
+        <p:spPr>
+          <a:xfrm>
+            <a:off x="6886800.0" y="5742000.0"/>
+            <a:ext cx="0.0" cy="144000.0"/>
+          </a:xfrm>
+          <a:prstGeom prst="line">
+            <a:avLst/>
+          </a:prstGeom>
+          <a:ln w="3175">
+            <a:solidFill>
+              <a:srgbClr val="D6D6D6"/>
+            </a:solidFill>
+          </a:ln>
+        </p:spPr>
+        <p:style>
+          <a:lnRef idx="2">
+            <a:schemeClr val="accent1"/>
+          </a:lnRef>
+          <a:fillRef idx="0">
+            <a:schemeClr val="accent1"/>
+          </a:fillRef>
+          <a:effectRef idx="1">
+            <a:schemeClr val="accent1"/>
+          </a:effectRef>
+          <a:fontRef idx="minor">
+            <a:schemeClr val="tx1"/>
+          </a:fontRef>
+        </p:style>
+      </p:cxnSp>
+      <p:cxnSp>
+        <p:nvCxnSpPr>
+          <p:cNvPr id="198" name="Connector 197"/>
+          <p:cNvCxnSpPr/>
+          <p:nvPr/>
+        </p:nvCxnSpPr>
+        <p:spPr>
+          <a:xfrm>
+            <a:off x="6994800.0" y="3870000.0"/>
+            <a:ext cx="144000.0" cy="0.0"/>
+          </a:xfrm>
+          <a:prstGeom prst="line">
+            <a:avLst/>
+          </a:prstGeom>
+          <a:ln w="3175">
+            <a:solidFill>
+              <a:srgbClr val="D6D6D6"/>
+            </a:solidFill>
+          </a:ln>
+        </p:spPr>
+        <p:style>
+          <a:lnRef idx="2">
+            <a:schemeClr val="accent1"/>
+          </a:lnRef>
+          <a:fillRef idx="0">
+            <a:schemeClr val="accent1"/>
+          </a:fillRef>
+          <a:effectRef idx="1">
+            <a:schemeClr val="accent1"/>
+          </a:effectRef>
+          <a:fontRef idx="minor">
+            <a:schemeClr val="tx1"/>
+          </a:fontRef>
+        </p:style>
+      </p:cxnSp>
+      <p:cxnSp>
+        <p:nvCxnSpPr>
+          <p:cNvPr id="199" name="Connector 198"/>
+          <p:cNvCxnSpPr/>
+          <p:nvPr/>
+        </p:nvCxnSpPr>
+        <p:spPr>
+          <a:xfrm>
+            <a:off x="7066800.0" y="3798000.0"/>
+            <a:ext cx="0.0" cy="144000.0"/>
+          </a:xfrm>
+          <a:prstGeom prst="line">
+            <a:avLst/>
+          </a:prstGeom>
+          <a:ln w="3175">
+            <a:solidFill>
+              <a:srgbClr val="D6D6D6"/>
+            </a:solidFill>
+          </a:ln>
+        </p:spPr>
+        <p:style>
+          <a:lnRef idx="2">
+            <a:schemeClr val="accent1"/>
+          </a:lnRef>
+          <a:fillRef idx="0">
+            <a:schemeClr val="accent1"/>
+          </a:fillRef>
+          <a:effectRef idx="1">
+            <a:schemeClr val="accent1"/>
+          </a:effectRef>
+          <a:fontRef idx="minor">
+            <a:schemeClr val="tx1"/>
+          </a:fontRef>
+        </p:style>
+      </p:cxnSp>
+      <p:cxnSp>
+        <p:nvCxnSpPr>
+          <p:cNvPr id="200" name="Connector 199"/>
+          <p:cNvCxnSpPr/>
+          <p:nvPr/>
+        </p:nvCxnSpPr>
+        <p:spPr>
+          <a:xfrm>
+            <a:off x="10076400.0" y="3870000.0"/>
+            <a:ext cx="144000.0" cy="0.0"/>
+          </a:xfrm>
+          <a:prstGeom prst="line">
+            <a:avLst/>
+          </a:prstGeom>
+          <a:ln w="3175">
+            <a:solidFill>
+              <a:srgbClr val="D6D6D6"/>
+            </a:solidFill>
+          </a:ln>
+        </p:spPr>
+        <p:style>
+          <a:lnRef idx="2">
+            <a:schemeClr val="accent1"/>
+          </a:lnRef>
+          <a:fillRef idx="0">
+            <a:schemeClr val="accent1"/>
+          </a:fillRef>
+          <a:effectRef idx="1">
+            <a:schemeClr val="accent1"/>
+          </a:effectRef>
+          <a:fontRef idx="minor">
+            <a:schemeClr val="tx1"/>
+          </a:fontRef>
+        </p:style>
+      </p:cxnSp>
+      <p:cxnSp>
+        <p:nvCxnSpPr>
+          <p:cNvPr id="201" name="Connector 200"/>
+          <p:cNvCxnSpPr/>
+          <p:nvPr/>
+        </p:nvCxnSpPr>
+        <p:spPr>
+          <a:xfrm>
+            <a:off x="10148400.0" y="3798000.0"/>
+            <a:ext cx="0.0" cy="144000.0"/>
+          </a:xfrm>
+          <a:prstGeom prst="line">
+            <a:avLst/>
+          </a:prstGeom>
+          <a:ln w="3175">
+            <a:solidFill>
+              <a:srgbClr val="D6D6D6"/>
+            </a:solidFill>
+          </a:ln>
+        </p:spPr>
+        <p:style>
+          <a:lnRef idx="2">
+            <a:schemeClr val="accent1"/>
+          </a:lnRef>
+          <a:fillRef idx="0">
+            <a:schemeClr val="accent1"/>
+          </a:fillRef>
+          <a:effectRef idx="1">
+            <a:schemeClr val="accent1"/>
+          </a:effectRef>
+          <a:fontRef idx="minor">
+            <a:schemeClr val="tx1"/>
+          </a:fontRef>
+        </p:style>
+      </p:cxnSp>
+      <p:cxnSp>
+        <p:nvCxnSpPr>
+          <p:cNvPr id="202" name="Connector 201"/>
+          <p:cNvCxnSpPr/>
+          <p:nvPr/>
+        </p:nvCxnSpPr>
+        <p:spPr>
+          <a:xfrm>
+            <a:off x="6994800.0" y="5814000.0"/>
+            <a:ext cx="144000.0" cy="0.0"/>
+          </a:xfrm>
+          <a:prstGeom prst="line">
+            <a:avLst/>
+          </a:prstGeom>
+          <a:ln w="3175">
+            <a:solidFill>
+              <a:srgbClr val="D6D6D6"/>
+            </a:solidFill>
+          </a:ln>
+        </p:spPr>
+        <p:style>
+          <a:lnRef idx="2">
+            <a:schemeClr val="accent1"/>
+          </a:lnRef>
+          <a:fillRef idx="0">
+            <a:schemeClr val="accent1"/>
+          </a:fillRef>
+          <a:effectRef idx="1">
+            <a:schemeClr val="accent1"/>
+          </a:effectRef>
+          <a:fontRef idx="minor">
+            <a:schemeClr val="tx1"/>
+          </a:fontRef>
+        </p:style>
+      </p:cxnSp>
+      <p:cxnSp>
+        <p:nvCxnSpPr>
+          <p:cNvPr id="203" name="Connector 202"/>
+          <p:cNvCxnSpPr/>
+          <p:nvPr/>
+        </p:nvCxnSpPr>
+        <p:spPr>
+          <a:xfrm>
+            <a:off x="7066800.0" y="5742000.0"/>
+            <a:ext cx="0.0" cy="144000.0"/>
+          </a:xfrm>
+          <a:prstGeom prst="line">
+            <a:avLst/>
+          </a:prstGeom>
+          <a:ln w="3175">
+            <a:solidFill>
+              <a:srgbClr val="D6D6D6"/>
+            </a:solidFill>
+          </a:ln>
+        </p:spPr>
+        <p:style>
+          <a:lnRef idx="2">
+            <a:schemeClr val="accent1"/>
+          </a:lnRef>
+          <a:fillRef idx="0">
+            <a:schemeClr val="accent1"/>
+          </a:fillRef>
+          <a:effectRef idx="1">
+            <a:schemeClr val="accent1"/>
+          </a:effectRef>
+          <a:fontRef idx="minor">
+            <a:schemeClr val="tx1"/>
+          </a:fontRef>
+        </p:style>
+      </p:cxnSp>
+      <p:cxnSp>
+        <p:nvCxnSpPr>
+          <p:cNvPr id="204" name="Connector 203"/>
+          <p:cNvCxnSpPr/>
+          <p:nvPr/>
+        </p:nvCxnSpPr>
+        <p:spPr>
+          <a:xfrm>
+            <a:off x="10076400.0" y="5814000.0"/>
+            <a:ext cx="144000.0" cy="0.0"/>
+          </a:xfrm>
+          <a:prstGeom prst="line">
+            <a:avLst/>
+          </a:prstGeom>
+          <a:ln w="3175">
+            <a:solidFill>
+              <a:srgbClr val="D6D6D6"/>
+            </a:solidFill>
+          </a:ln>
+        </p:spPr>
+        <p:style>
+          <a:lnRef idx="2">
+            <a:schemeClr val="accent1"/>
+          </a:lnRef>
+          <a:fillRef idx="0">
+            <a:schemeClr val="accent1"/>
+          </a:fillRef>
+          <a:effectRef idx="1">
+            <a:schemeClr val="accent1"/>
+          </a:effectRef>
+          <a:fontRef idx="minor">
+            <a:schemeClr val="tx1"/>
+          </a:fontRef>
+        </p:style>
+      </p:cxnSp>
+      <p:cxnSp>
+        <p:nvCxnSpPr>
+          <p:cNvPr id="205" name="Connector 204"/>
+          <p:cNvCxnSpPr/>
+          <p:nvPr/>
+        </p:nvCxnSpPr>
+        <p:spPr>
+          <a:xfrm>
+            <a:off x="10148400.0" y="5742000.0"/>
+            <a:ext cx="0.0" cy="144000.0"/>
+          </a:xfrm>
+          <a:prstGeom prst="line">
+            <a:avLst/>
+          </a:prstGeom>
+          <a:ln w="3175">
+            <a:solidFill>
+              <a:srgbClr val="D6D6D6"/>
+            </a:solidFill>
+          </a:ln>
+        </p:spPr>
+        <p:style>
+          <a:lnRef idx="2">
+            <a:schemeClr val="accent1"/>
+          </a:lnRef>
+          <a:fillRef idx="0">
+            <a:schemeClr val="accent1"/>
+          </a:fillRef>
+          <a:effectRef idx="1">
+            <a:schemeClr val="accent1"/>
+          </a:effectRef>
+          <a:fontRef idx="minor">
+            <a:schemeClr val="tx1"/>
+          </a:fontRef>
+        </p:style>
+      </p:cxnSp>
     </p:spTree>
   </p:cSld>
   <p:clrMapOvr>

--- a/mamawell_employee_card.pptx
+++ b/mamawell_employee_card.pptx
@@ -3477,173 +3477,33 @@
           </a:p>
         </p:txBody>
       </p:sp>
-      <p:sp>
-        <p:nvSpPr>
-          <p:cNvPr id="10" name="Oval 9"/>
-          <p:cNvSpPr/>
-          <p:nvPr/>
-        </p:nvSpPr>
-        <p:spPr>
-          <a:xfrm>
-            <a:off x="795600" y="2214000"/>
-            <a:ext cx="540000" cy="432000"/>
-          </a:xfrm>
-          <a:prstGeom prst="ellipse">
-            <a:avLst/>
-          </a:prstGeom>
-          <a:solidFill>
-            <a:srgbClr val="FD7066"/>
-          </a:solidFill>
-          <a:ln>
-            <a:noFill/>
-          </a:ln>
-        </p:spPr>
-        <p:style>
-          <a:lnRef idx="1">
-            <a:schemeClr val="accent1"/>
-          </a:lnRef>
-          <a:fillRef idx="3">
-            <a:schemeClr val="accent1"/>
-          </a:fillRef>
-          <a:effectRef idx="2">
-            <a:schemeClr val="accent1"/>
-          </a:effectRef>
-          <a:fontRef idx="minor">
-            <a:schemeClr val="lt1"/>
-          </a:fontRef>
-        </p:style>
-        <p:txBody>
-          <a:bodyPr rtlCol="0" anchor="ctr"/>
-          <a:lstStyle/>
-          <a:p>
-            <a:pPr algn="ctr"/>
-          </a:p>
-        </p:txBody>
-      </p:sp>
+      <p:pic>
+        <p:nvPicPr>
+          <p:cNvPr id="10" name="Picture 9" descr="logo.png"/>
+          <p:cNvPicPr>
+            <a:picLocks noChangeAspect="1"/>
+          </p:cNvPicPr>
+          <p:nvPr/>
+        </p:nvPicPr>
+        <p:blipFill>
+          <a:blip r:embed="rId2"/>
+          <a:stretch>
+            <a:fillRect/>
+          </a:stretch>
+        </p:blipFill>
+        <p:spPr>
+          <a:xfrm>
+            <a:off x="615600" y="2034000"/>
+            <a:ext cx="1188000" cy="1260000"/>
+          </a:xfrm>
+          <a:prstGeom prst="rect">
+            <a:avLst/>
+          </a:prstGeom>
+        </p:spPr>
+      </p:pic>
       <p:sp>
         <p:nvSpPr>
           <p:cNvPr id="11" name="Oval 10"/>
-          <p:cNvSpPr/>
-          <p:nvPr/>
-        </p:nvSpPr>
-        <p:spPr>
-          <a:xfrm>
-            <a:off x="1227600" y="2322000"/>
-            <a:ext cx="396000" cy="324000"/>
-          </a:xfrm>
-          <a:prstGeom prst="ellipse">
-            <a:avLst/>
-          </a:prstGeom>
-          <a:solidFill>
-            <a:srgbClr val="FD7066"/>
-          </a:solidFill>
-          <a:ln>
-            <a:noFill/>
-          </a:ln>
-        </p:spPr>
-        <p:style>
-          <a:lnRef idx="1">
-            <a:schemeClr val="accent1"/>
-          </a:lnRef>
-          <a:fillRef idx="3">
-            <a:schemeClr val="accent1"/>
-          </a:fillRef>
-          <a:effectRef idx="2">
-            <a:schemeClr val="accent1"/>
-          </a:effectRef>
-          <a:fontRef idx="minor">
-            <a:schemeClr val="lt1"/>
-          </a:fontRef>
-        </p:style>
-        <p:txBody>
-          <a:bodyPr rtlCol="0" anchor="ctr"/>
-          <a:lstStyle/>
-          <a:p>
-            <a:pPr algn="ctr"/>
-          </a:p>
-        </p:txBody>
-      </p:sp>
-      <p:sp>
-        <p:nvSpPr>
-          <p:cNvPr id="12" name="Oval 11"/>
-          <p:cNvSpPr/>
-          <p:nvPr/>
-        </p:nvSpPr>
-        <p:spPr>
-          <a:xfrm>
-            <a:off x="1119600" y="2394000"/>
-            <a:ext cx="180000" cy="144000"/>
-          </a:xfrm>
-          <a:prstGeom prst="ellipse">
-            <a:avLst/>
-          </a:prstGeom>
-          <a:solidFill>
-            <a:srgbClr val="FFFFFF"/>
-          </a:solidFill>
-          <a:ln>
-            <a:noFill/>
-          </a:ln>
-        </p:spPr>
-        <p:style>
-          <a:lnRef idx="1">
-            <a:schemeClr val="accent1"/>
-          </a:lnRef>
-          <a:fillRef idx="3">
-            <a:schemeClr val="accent1"/>
-          </a:fillRef>
-          <a:effectRef idx="2">
-            <a:schemeClr val="accent1"/>
-          </a:effectRef>
-          <a:fontRef idx="minor">
-            <a:schemeClr val="lt1"/>
-          </a:fontRef>
-        </p:style>
-        <p:txBody>
-          <a:bodyPr rtlCol="0" anchor="ctr"/>
-          <a:lstStyle/>
-          <a:p>
-            <a:pPr algn="ctr"/>
-          </a:p>
-        </p:txBody>
-      </p:sp>
-      <p:sp>
-        <p:nvSpPr>
-          <p:cNvPr id="13" name="TextBox 12"/>
-          <p:cNvSpPr txBox="1"/>
-          <p:nvPr/>
-        </p:nvSpPr>
-        <p:spPr>
-          <a:xfrm>
-            <a:off x="615600" y="2862000"/>
-            <a:ext cx="1188000" cy="288000"/>
-          </a:xfrm>
-          <a:prstGeom prst="rect">
-            <a:avLst/>
-          </a:prstGeom>
-          <a:noFill/>
-        </p:spPr>
-        <p:txBody>
-          <a:bodyPr wrap="square" lIns="0" rIns="0" tIns="0" bIns="0" anchor="t">
-            <a:spAutoFit/>
-          </a:bodyPr>
-          <a:lstStyle/>
-          <a:p>
-            <a:pPr algn="ctr"/>
-            <a:r>
-              <a:rPr sz="1500" b="1">
-                <a:solidFill>
-                  <a:srgbClr val="FD7066"/>
-                </a:solidFill>
-                <a:latin typeface="Arial Rounded MT Bold"/>
-              </a:rPr>
-              <a:t>mamawell</a:t>
-            </a:r>
-          </a:p>
-        </p:txBody>
-      </p:sp>
-      <p:sp>
-        <p:nvSpPr>
-          <p:cNvPr id="14" name="Oval 13"/>
           <p:cNvSpPr/>
           <p:nvPr/>
         </p:nvSpPr>
@@ -3686,7 +3546,7 @@
       </p:sp>
       <p:sp>
         <p:nvSpPr>
-          <p:cNvPr id="15" name="TextBox 14"/>
+          <p:cNvPr id="12" name="TextBox 11"/>
           <p:cNvSpPr txBox="1"/>
           <p:nvPr/>
         </p:nvSpPr>
@@ -3720,7 +3580,7 @@
       </p:sp>
       <p:sp>
         <p:nvSpPr>
-          <p:cNvPr id="16" name="TextBox 15"/>
+          <p:cNvPr id="13" name="TextBox 12"/>
           <p:cNvSpPr txBox="1"/>
           <p:nvPr/>
         </p:nvSpPr>
@@ -3755,7 +3615,7 @@
       </p:sp>
       <p:sp>
         <p:nvSpPr>
-          <p:cNvPr id="17" name="TextBox 16"/>
+          <p:cNvPr id="14" name="TextBox 13"/>
           <p:cNvSpPr txBox="1"/>
           <p:nvPr/>
         </p:nvSpPr>
@@ -3790,7 +3650,7 @@
       </p:sp>
       <p:cxnSp>
         <p:nvCxnSpPr>
-          <p:cNvPr id="18" name="Connector 17"/>
+          <p:cNvPr id="15" name="Connector 14"/>
           <p:cNvCxnSpPr/>
           <p:nvPr/>
         </p:nvCxnSpPr>
@@ -3826,7 +3686,7 @@
       </p:cxnSp>
       <p:sp>
         <p:nvSpPr>
-          <p:cNvPr id="19" name="Oval 18"/>
+          <p:cNvPr id="16" name="Oval 15"/>
           <p:cNvSpPr/>
           <p:nvPr/>
         </p:nvSpPr>
@@ -3869,7 +3729,7 @@
       </p:sp>
       <p:sp>
         <p:nvSpPr>
-          <p:cNvPr id="20" name="TextBox 19"/>
+          <p:cNvPr id="17" name="TextBox 16"/>
           <p:cNvSpPr txBox="1"/>
           <p:nvPr/>
         </p:nvSpPr>
@@ -3903,7 +3763,7 @@
       </p:sp>
       <p:sp>
         <p:nvSpPr>
-          <p:cNvPr id="21" name="TextBox 20"/>
+          <p:cNvPr id="18" name="TextBox 17"/>
           <p:cNvSpPr txBox="1"/>
           <p:nvPr/>
         </p:nvSpPr>
@@ -3938,7 +3798,7 @@
       </p:sp>
       <p:sp>
         <p:nvSpPr>
-          <p:cNvPr id="22" name="TextBox 21"/>
+          <p:cNvPr id="19" name="TextBox 18"/>
           <p:cNvSpPr txBox="1"/>
           <p:nvPr/>
         </p:nvSpPr>
@@ -3973,7 +3833,7 @@
       </p:sp>
       <p:cxnSp>
         <p:nvCxnSpPr>
-          <p:cNvPr id="23" name="Connector 22"/>
+          <p:cNvPr id="20" name="Connector 19"/>
           <p:cNvCxnSpPr/>
           <p:nvPr/>
         </p:nvCxnSpPr>
@@ -4009,7 +3869,7 @@
       </p:cxnSp>
       <p:sp>
         <p:nvSpPr>
-          <p:cNvPr id="24" name="Oval 23"/>
+          <p:cNvPr id="21" name="Oval 20"/>
           <p:cNvSpPr/>
           <p:nvPr/>
         </p:nvSpPr>
@@ -4052,7 +3912,7 @@
       </p:sp>
       <p:sp>
         <p:nvSpPr>
-          <p:cNvPr id="25" name="TextBox 24"/>
+          <p:cNvPr id="22" name="TextBox 21"/>
           <p:cNvSpPr txBox="1"/>
           <p:nvPr/>
         </p:nvSpPr>
@@ -4086,7 +3946,7 @@
       </p:sp>
       <p:sp>
         <p:nvSpPr>
-          <p:cNvPr id="26" name="TextBox 25"/>
+          <p:cNvPr id="23" name="TextBox 22"/>
           <p:cNvSpPr txBox="1"/>
           <p:nvPr/>
         </p:nvSpPr>
@@ -4121,7 +3981,7 @@
       </p:sp>
       <p:sp>
         <p:nvSpPr>
-          <p:cNvPr id="27" name="TextBox 26"/>
+          <p:cNvPr id="24" name="TextBox 23"/>
           <p:cNvSpPr txBox="1"/>
           <p:nvPr/>
         </p:nvSpPr>
@@ -4156,7 +4016,7 @@
       </p:sp>
       <p:sp>
         <p:nvSpPr>
-          <p:cNvPr id="28" name="Rectangle 27"/>
+          <p:cNvPr id="25" name="Rectangle 24"/>
           <p:cNvSpPr/>
           <p:nvPr/>
         </p:nvSpPr>
@@ -4201,7 +4061,7 @@
       </p:sp>
       <p:sp>
         <p:nvSpPr>
-          <p:cNvPr id="29" name="Oval 28"/>
+          <p:cNvPr id="26" name="Oval 25"/>
           <p:cNvSpPr/>
           <p:nvPr/>
         </p:nvSpPr>
@@ -4244,7 +4104,7 @@
       </p:sp>
       <p:sp>
         <p:nvSpPr>
-          <p:cNvPr id="30" name="Oval 29"/>
+          <p:cNvPr id="27" name="Oval 26"/>
           <p:cNvSpPr/>
           <p:nvPr/>
         </p:nvSpPr>
@@ -4287,7 +4147,7 @@
       </p:sp>
       <p:sp>
         <p:nvSpPr>
-          <p:cNvPr id="31" name="Oval 30"/>
+          <p:cNvPr id="28" name="Oval 27"/>
           <p:cNvSpPr/>
           <p:nvPr/>
         </p:nvSpPr>
@@ -4330,7 +4190,7 @@
       </p:sp>
       <p:sp>
         <p:nvSpPr>
-          <p:cNvPr id="32" name="Oval 31"/>
+          <p:cNvPr id="29" name="Oval 28"/>
           <p:cNvSpPr/>
           <p:nvPr/>
         </p:nvSpPr>
@@ -4373,7 +4233,7 @@
       </p:sp>
       <p:sp>
         <p:nvSpPr>
-          <p:cNvPr id="33" name="Oval 32"/>
+          <p:cNvPr id="30" name="Oval 29"/>
           <p:cNvSpPr/>
           <p:nvPr/>
         </p:nvSpPr>
@@ -4416,7 +4276,7 @@
       </p:sp>
       <p:sp>
         <p:nvSpPr>
-          <p:cNvPr id="34" name="Oval 33"/>
+          <p:cNvPr id="31" name="Oval 30"/>
           <p:cNvSpPr/>
           <p:nvPr/>
         </p:nvSpPr>
@@ -4459,7 +4319,7 @@
       </p:sp>
       <p:sp>
         <p:nvSpPr>
-          <p:cNvPr id="35" name="Freeform 34"/>
+          <p:cNvPr id="32" name="Freeform 31"/>
           <p:cNvSpPr/>
           <p:nvPr/>
         </p:nvSpPr>
@@ -4535,173 +4395,33 @@
           </a:p>
         </p:txBody>
       </p:sp>
-      <p:sp>
-        <p:nvSpPr>
-          <p:cNvPr id="36" name="Oval 35"/>
-          <p:cNvSpPr/>
-          <p:nvPr/>
-        </p:nvSpPr>
-        <p:spPr>
-          <a:xfrm>
-            <a:off x="4057200" y="2214000"/>
-            <a:ext cx="540000" cy="432000"/>
-          </a:xfrm>
-          <a:prstGeom prst="ellipse">
-            <a:avLst/>
-          </a:prstGeom>
-          <a:solidFill>
-            <a:srgbClr val="FD7066"/>
-          </a:solidFill>
-          <a:ln>
-            <a:noFill/>
-          </a:ln>
-        </p:spPr>
-        <p:style>
-          <a:lnRef idx="1">
-            <a:schemeClr val="accent1"/>
-          </a:lnRef>
-          <a:fillRef idx="3">
-            <a:schemeClr val="accent1"/>
-          </a:fillRef>
-          <a:effectRef idx="2">
-            <a:schemeClr val="accent1"/>
-          </a:effectRef>
-          <a:fontRef idx="minor">
-            <a:schemeClr val="lt1"/>
-          </a:fontRef>
-        </p:style>
-        <p:txBody>
-          <a:bodyPr rtlCol="0" anchor="ctr"/>
-          <a:lstStyle/>
-          <a:p>
-            <a:pPr algn="ctr"/>
-          </a:p>
-        </p:txBody>
-      </p:sp>
-      <p:sp>
-        <p:nvSpPr>
-          <p:cNvPr id="37" name="Oval 36"/>
-          <p:cNvSpPr/>
-          <p:nvPr/>
-        </p:nvSpPr>
-        <p:spPr>
-          <a:xfrm>
-            <a:off x="4489200" y="2322000"/>
-            <a:ext cx="396000" cy="324000"/>
-          </a:xfrm>
-          <a:prstGeom prst="ellipse">
-            <a:avLst/>
-          </a:prstGeom>
-          <a:solidFill>
-            <a:srgbClr val="FD7066"/>
-          </a:solidFill>
-          <a:ln>
-            <a:noFill/>
-          </a:ln>
-        </p:spPr>
-        <p:style>
-          <a:lnRef idx="1">
-            <a:schemeClr val="accent1"/>
-          </a:lnRef>
-          <a:fillRef idx="3">
-            <a:schemeClr val="accent1"/>
-          </a:fillRef>
-          <a:effectRef idx="2">
-            <a:schemeClr val="accent1"/>
-          </a:effectRef>
-          <a:fontRef idx="minor">
-            <a:schemeClr val="lt1"/>
-          </a:fontRef>
-        </p:style>
-        <p:txBody>
-          <a:bodyPr rtlCol="0" anchor="ctr"/>
-          <a:lstStyle/>
-          <a:p>
-            <a:pPr algn="ctr"/>
-          </a:p>
-        </p:txBody>
-      </p:sp>
-      <p:sp>
-        <p:nvSpPr>
-          <p:cNvPr id="38" name="Oval 37"/>
-          <p:cNvSpPr/>
-          <p:nvPr/>
-        </p:nvSpPr>
-        <p:spPr>
-          <a:xfrm>
-            <a:off x="4381200" y="2394000"/>
-            <a:ext cx="180000" cy="144000"/>
-          </a:xfrm>
-          <a:prstGeom prst="ellipse">
-            <a:avLst/>
-          </a:prstGeom>
-          <a:solidFill>
-            <a:srgbClr val="FFFFFF"/>
-          </a:solidFill>
-          <a:ln>
-            <a:noFill/>
-          </a:ln>
-        </p:spPr>
-        <p:style>
-          <a:lnRef idx="1">
-            <a:schemeClr val="accent1"/>
-          </a:lnRef>
-          <a:fillRef idx="3">
-            <a:schemeClr val="accent1"/>
-          </a:fillRef>
-          <a:effectRef idx="2">
-            <a:schemeClr val="accent1"/>
-          </a:effectRef>
-          <a:fontRef idx="minor">
-            <a:schemeClr val="lt1"/>
-          </a:fontRef>
-        </p:style>
-        <p:txBody>
-          <a:bodyPr rtlCol="0" anchor="ctr"/>
-          <a:lstStyle/>
-          <a:p>
-            <a:pPr algn="ctr"/>
-          </a:p>
-        </p:txBody>
-      </p:sp>
-      <p:sp>
-        <p:nvSpPr>
-          <p:cNvPr id="39" name="TextBox 38"/>
-          <p:cNvSpPr txBox="1"/>
-          <p:nvPr/>
-        </p:nvSpPr>
-        <p:spPr>
-          <a:xfrm>
-            <a:off x="3877200" y="2862000"/>
-            <a:ext cx="1188000" cy="288000"/>
+      <p:pic>
+        <p:nvPicPr>
+          <p:cNvPr id="33" name="Picture 32" descr="logo.png"/>
+          <p:cNvPicPr>
+            <a:picLocks noChangeAspect="1"/>
+          </p:cNvPicPr>
+          <p:nvPr/>
+        </p:nvPicPr>
+        <p:blipFill>
+          <a:blip r:embed="rId2"/>
+          <a:stretch>
+            <a:fillRect/>
+          </a:stretch>
+        </p:blipFill>
+        <p:spPr>
+          <a:xfrm>
+            <a:off x="3877200" y="2034000"/>
+            <a:ext cx="1188000" cy="1260000"/>
           </a:xfrm>
           <a:prstGeom prst="rect">
             <a:avLst/>
           </a:prstGeom>
-          <a:noFill/>
-        </p:spPr>
-        <p:txBody>
-          <a:bodyPr wrap="square" lIns="0" rIns="0" tIns="0" bIns="0" anchor="t">
-            <a:spAutoFit/>
-          </a:bodyPr>
-          <a:lstStyle/>
-          <a:p>
-            <a:pPr algn="ctr"/>
-            <a:r>
-              <a:rPr sz="1500" b="1">
-                <a:solidFill>
-                  <a:srgbClr val="FD7066"/>
-                </a:solidFill>
-                <a:latin typeface="Arial Rounded MT Bold"/>
-              </a:rPr>
-              <a:t>mamawell</a:t>
-            </a:r>
-          </a:p>
-        </p:txBody>
-      </p:sp>
-      <p:sp>
-        <p:nvSpPr>
-          <p:cNvPr id="40" name="Oval 39"/>
+        </p:spPr>
+      </p:pic>
+      <p:sp>
+        <p:nvSpPr>
+          <p:cNvPr id="34" name="Oval 33"/>
           <p:cNvSpPr/>
           <p:nvPr/>
         </p:nvSpPr>
@@ -4744,7 +4464,7 @@
       </p:sp>
       <p:sp>
         <p:nvSpPr>
-          <p:cNvPr id="41" name="TextBox 40"/>
+          <p:cNvPr id="35" name="TextBox 34"/>
           <p:cNvSpPr txBox="1"/>
           <p:nvPr/>
         </p:nvSpPr>
@@ -4778,7 +4498,7 @@
       </p:sp>
       <p:sp>
         <p:nvSpPr>
-          <p:cNvPr id="42" name="TextBox 41"/>
+          <p:cNvPr id="36" name="TextBox 35"/>
           <p:cNvSpPr txBox="1"/>
           <p:nvPr/>
         </p:nvSpPr>
@@ -4813,7 +4533,7 @@
       </p:sp>
       <p:sp>
         <p:nvSpPr>
-          <p:cNvPr id="43" name="TextBox 42"/>
+          <p:cNvPr id="37" name="TextBox 36"/>
           <p:cNvSpPr txBox="1"/>
           <p:nvPr/>
         </p:nvSpPr>
@@ -4848,7 +4568,7 @@
       </p:sp>
       <p:cxnSp>
         <p:nvCxnSpPr>
-          <p:cNvPr id="44" name="Connector 43"/>
+          <p:cNvPr id="38" name="Connector 37"/>
           <p:cNvCxnSpPr/>
           <p:nvPr/>
         </p:nvCxnSpPr>
@@ -4884,7 +4604,7 @@
       </p:cxnSp>
       <p:sp>
         <p:nvSpPr>
-          <p:cNvPr id="45" name="Oval 44"/>
+          <p:cNvPr id="39" name="Oval 38"/>
           <p:cNvSpPr/>
           <p:nvPr/>
         </p:nvSpPr>
@@ -4927,7 +4647,7 @@
       </p:sp>
       <p:sp>
         <p:nvSpPr>
-          <p:cNvPr id="46" name="TextBox 45"/>
+          <p:cNvPr id="40" name="TextBox 39"/>
           <p:cNvSpPr txBox="1"/>
           <p:nvPr/>
         </p:nvSpPr>
@@ -4961,7 +4681,7 @@
       </p:sp>
       <p:sp>
         <p:nvSpPr>
-          <p:cNvPr id="47" name="TextBox 46"/>
+          <p:cNvPr id="41" name="TextBox 40"/>
           <p:cNvSpPr txBox="1"/>
           <p:nvPr/>
         </p:nvSpPr>
@@ -4996,7 +4716,7 @@
       </p:sp>
       <p:sp>
         <p:nvSpPr>
-          <p:cNvPr id="48" name="TextBox 47"/>
+          <p:cNvPr id="42" name="TextBox 41"/>
           <p:cNvSpPr txBox="1"/>
           <p:nvPr/>
         </p:nvSpPr>
@@ -5031,7 +4751,7 @@
       </p:sp>
       <p:cxnSp>
         <p:nvCxnSpPr>
-          <p:cNvPr id="49" name="Connector 48"/>
+          <p:cNvPr id="43" name="Connector 42"/>
           <p:cNvCxnSpPr/>
           <p:nvPr/>
         </p:nvCxnSpPr>
@@ -5067,7 +4787,7 @@
       </p:cxnSp>
       <p:sp>
         <p:nvSpPr>
-          <p:cNvPr id="50" name="Oval 49"/>
+          <p:cNvPr id="44" name="Oval 43"/>
           <p:cNvSpPr/>
           <p:nvPr/>
         </p:nvSpPr>
@@ -5110,7 +4830,7 @@
       </p:sp>
       <p:sp>
         <p:nvSpPr>
-          <p:cNvPr id="51" name="TextBox 50"/>
+          <p:cNvPr id="45" name="TextBox 44"/>
           <p:cNvSpPr txBox="1"/>
           <p:nvPr/>
         </p:nvSpPr>
@@ -5144,7 +4864,7 @@
       </p:sp>
       <p:sp>
         <p:nvSpPr>
-          <p:cNvPr id="52" name="TextBox 51"/>
+          <p:cNvPr id="46" name="TextBox 45"/>
           <p:cNvSpPr txBox="1"/>
           <p:nvPr/>
         </p:nvSpPr>
@@ -5179,7 +4899,7 @@
       </p:sp>
       <p:sp>
         <p:nvSpPr>
-          <p:cNvPr id="53" name="TextBox 52"/>
+          <p:cNvPr id="47" name="TextBox 46"/>
           <p:cNvSpPr txBox="1"/>
           <p:nvPr/>
         </p:nvSpPr>
@@ -5214,7 +4934,7 @@
       </p:sp>
       <p:sp>
         <p:nvSpPr>
-          <p:cNvPr id="54" name="Rectangle 53"/>
+          <p:cNvPr id="48" name="Rectangle 47"/>
           <p:cNvSpPr/>
           <p:nvPr/>
         </p:nvSpPr>
@@ -5259,7 +4979,7 @@
       </p:sp>
       <p:sp>
         <p:nvSpPr>
-          <p:cNvPr id="55" name="Oval 54"/>
+          <p:cNvPr id="49" name="Oval 48"/>
           <p:cNvSpPr/>
           <p:nvPr/>
         </p:nvSpPr>
@@ -5302,7 +5022,7 @@
       </p:sp>
       <p:sp>
         <p:nvSpPr>
-          <p:cNvPr id="56" name="Oval 55"/>
+          <p:cNvPr id="50" name="Oval 49"/>
           <p:cNvSpPr/>
           <p:nvPr/>
         </p:nvSpPr>
@@ -5345,7 +5065,7 @@
       </p:sp>
       <p:sp>
         <p:nvSpPr>
-          <p:cNvPr id="57" name="Oval 56"/>
+          <p:cNvPr id="51" name="Oval 50"/>
           <p:cNvSpPr/>
           <p:nvPr/>
         </p:nvSpPr>
@@ -5388,7 +5108,7 @@
       </p:sp>
       <p:sp>
         <p:nvSpPr>
-          <p:cNvPr id="58" name="Oval 57"/>
+          <p:cNvPr id="52" name="Oval 51"/>
           <p:cNvSpPr/>
           <p:nvPr/>
         </p:nvSpPr>
@@ -5431,7 +5151,7 @@
       </p:sp>
       <p:sp>
         <p:nvSpPr>
-          <p:cNvPr id="59" name="Oval 58"/>
+          <p:cNvPr id="53" name="Oval 52"/>
           <p:cNvSpPr/>
           <p:nvPr/>
         </p:nvSpPr>
@@ -5474,7 +5194,7 @@
       </p:sp>
       <p:sp>
         <p:nvSpPr>
-          <p:cNvPr id="60" name="Oval 59"/>
+          <p:cNvPr id="54" name="Oval 53"/>
           <p:cNvSpPr/>
           <p:nvPr/>
         </p:nvSpPr>
@@ -5517,7 +5237,7 @@
       </p:sp>
       <p:sp>
         <p:nvSpPr>
-          <p:cNvPr id="61" name="Freeform 60"/>
+          <p:cNvPr id="55" name="Freeform 54"/>
           <p:cNvSpPr/>
           <p:nvPr/>
         </p:nvSpPr>
@@ -5593,173 +5313,33 @@
           </a:p>
         </p:txBody>
       </p:sp>
-      <p:sp>
-        <p:nvSpPr>
-          <p:cNvPr id="62" name="Oval 61"/>
-          <p:cNvSpPr/>
-          <p:nvPr/>
-        </p:nvSpPr>
-        <p:spPr>
-          <a:xfrm>
-            <a:off x="7318800" y="2214000"/>
-            <a:ext cx="540000" cy="432000"/>
-          </a:xfrm>
-          <a:prstGeom prst="ellipse">
-            <a:avLst/>
-          </a:prstGeom>
-          <a:solidFill>
-            <a:srgbClr val="FD7066"/>
-          </a:solidFill>
-          <a:ln>
-            <a:noFill/>
-          </a:ln>
-        </p:spPr>
-        <p:style>
-          <a:lnRef idx="1">
-            <a:schemeClr val="accent1"/>
-          </a:lnRef>
-          <a:fillRef idx="3">
-            <a:schemeClr val="accent1"/>
-          </a:fillRef>
-          <a:effectRef idx="2">
-            <a:schemeClr val="accent1"/>
-          </a:effectRef>
-          <a:fontRef idx="minor">
-            <a:schemeClr val="lt1"/>
-          </a:fontRef>
-        </p:style>
-        <p:txBody>
-          <a:bodyPr rtlCol="0" anchor="ctr"/>
-          <a:lstStyle/>
-          <a:p>
-            <a:pPr algn="ctr"/>
-          </a:p>
-        </p:txBody>
-      </p:sp>
-      <p:sp>
-        <p:nvSpPr>
-          <p:cNvPr id="63" name="Oval 62"/>
-          <p:cNvSpPr/>
-          <p:nvPr/>
-        </p:nvSpPr>
-        <p:spPr>
-          <a:xfrm>
-            <a:off x="7750800" y="2322000"/>
-            <a:ext cx="396000" cy="324000"/>
-          </a:xfrm>
-          <a:prstGeom prst="ellipse">
-            <a:avLst/>
-          </a:prstGeom>
-          <a:solidFill>
-            <a:srgbClr val="FD7066"/>
-          </a:solidFill>
-          <a:ln>
-            <a:noFill/>
-          </a:ln>
-        </p:spPr>
-        <p:style>
-          <a:lnRef idx="1">
-            <a:schemeClr val="accent1"/>
-          </a:lnRef>
-          <a:fillRef idx="3">
-            <a:schemeClr val="accent1"/>
-          </a:fillRef>
-          <a:effectRef idx="2">
-            <a:schemeClr val="accent1"/>
-          </a:effectRef>
-          <a:fontRef idx="minor">
-            <a:schemeClr val="lt1"/>
-          </a:fontRef>
-        </p:style>
-        <p:txBody>
-          <a:bodyPr rtlCol="0" anchor="ctr"/>
-          <a:lstStyle/>
-          <a:p>
-            <a:pPr algn="ctr"/>
-          </a:p>
-        </p:txBody>
-      </p:sp>
-      <p:sp>
-        <p:nvSpPr>
-          <p:cNvPr id="64" name="Oval 63"/>
-          <p:cNvSpPr/>
-          <p:nvPr/>
-        </p:nvSpPr>
-        <p:spPr>
-          <a:xfrm>
-            <a:off x="7642800" y="2394000"/>
-            <a:ext cx="180000" cy="144000"/>
-          </a:xfrm>
-          <a:prstGeom prst="ellipse">
-            <a:avLst/>
-          </a:prstGeom>
-          <a:solidFill>
-            <a:srgbClr val="FFFFFF"/>
-          </a:solidFill>
-          <a:ln>
-            <a:noFill/>
-          </a:ln>
-        </p:spPr>
-        <p:style>
-          <a:lnRef idx="1">
-            <a:schemeClr val="accent1"/>
-          </a:lnRef>
-          <a:fillRef idx="3">
-            <a:schemeClr val="accent1"/>
-          </a:fillRef>
-          <a:effectRef idx="2">
-            <a:schemeClr val="accent1"/>
-          </a:effectRef>
-          <a:fontRef idx="minor">
-            <a:schemeClr val="lt1"/>
-          </a:fontRef>
-        </p:style>
-        <p:txBody>
-          <a:bodyPr rtlCol="0" anchor="ctr"/>
-          <a:lstStyle/>
-          <a:p>
-            <a:pPr algn="ctr"/>
-          </a:p>
-        </p:txBody>
-      </p:sp>
-      <p:sp>
-        <p:nvSpPr>
-          <p:cNvPr id="65" name="TextBox 64"/>
-          <p:cNvSpPr txBox="1"/>
-          <p:nvPr/>
-        </p:nvSpPr>
-        <p:spPr>
-          <a:xfrm>
-            <a:off x="7138800" y="2862000"/>
-            <a:ext cx="1188000" cy="288000"/>
+      <p:pic>
+        <p:nvPicPr>
+          <p:cNvPr id="56" name="Picture 55" descr="logo.png"/>
+          <p:cNvPicPr>
+            <a:picLocks noChangeAspect="1"/>
+          </p:cNvPicPr>
+          <p:nvPr/>
+        </p:nvPicPr>
+        <p:blipFill>
+          <a:blip r:embed="rId2"/>
+          <a:stretch>
+            <a:fillRect/>
+          </a:stretch>
+        </p:blipFill>
+        <p:spPr>
+          <a:xfrm>
+            <a:off x="7138800" y="2034000"/>
+            <a:ext cx="1188000" cy="1260000"/>
           </a:xfrm>
           <a:prstGeom prst="rect">
             <a:avLst/>
           </a:prstGeom>
-          <a:noFill/>
-        </p:spPr>
-        <p:txBody>
-          <a:bodyPr wrap="square" lIns="0" rIns="0" tIns="0" bIns="0" anchor="t">
-            <a:spAutoFit/>
-          </a:bodyPr>
-          <a:lstStyle/>
-          <a:p>
-            <a:pPr algn="ctr"/>
-            <a:r>
-              <a:rPr sz="1500" b="1">
-                <a:solidFill>
-                  <a:srgbClr val="FD7066"/>
-                </a:solidFill>
-                <a:latin typeface="Arial Rounded MT Bold"/>
-              </a:rPr>
-              <a:t>mamawell</a:t>
-            </a:r>
-          </a:p>
-        </p:txBody>
-      </p:sp>
-      <p:sp>
-        <p:nvSpPr>
-          <p:cNvPr id="66" name="Oval 65"/>
+        </p:spPr>
+      </p:pic>
+      <p:sp>
+        <p:nvSpPr>
+          <p:cNvPr id="57" name="Oval 56"/>
           <p:cNvSpPr/>
           <p:nvPr/>
         </p:nvSpPr>
@@ -5802,7 +5382,7 @@
       </p:sp>
       <p:sp>
         <p:nvSpPr>
-          <p:cNvPr id="67" name="TextBox 66"/>
+          <p:cNvPr id="58" name="TextBox 57"/>
           <p:cNvSpPr txBox="1"/>
           <p:nvPr/>
         </p:nvSpPr>
@@ -5836,7 +5416,7 @@
       </p:sp>
       <p:sp>
         <p:nvSpPr>
-          <p:cNvPr id="68" name="TextBox 67"/>
+          <p:cNvPr id="59" name="TextBox 58"/>
           <p:cNvSpPr txBox="1"/>
           <p:nvPr/>
         </p:nvSpPr>
@@ -5871,7 +5451,7 @@
       </p:sp>
       <p:sp>
         <p:nvSpPr>
-          <p:cNvPr id="69" name="TextBox 68"/>
+          <p:cNvPr id="60" name="TextBox 59"/>
           <p:cNvSpPr txBox="1"/>
           <p:nvPr/>
         </p:nvSpPr>
@@ -5906,7 +5486,7 @@
       </p:sp>
       <p:cxnSp>
         <p:nvCxnSpPr>
-          <p:cNvPr id="70" name="Connector 69"/>
+          <p:cNvPr id="61" name="Connector 60"/>
           <p:cNvCxnSpPr/>
           <p:nvPr/>
         </p:nvCxnSpPr>
@@ -5942,7 +5522,7 @@
       </p:cxnSp>
       <p:sp>
         <p:nvSpPr>
-          <p:cNvPr id="71" name="Oval 70"/>
+          <p:cNvPr id="62" name="Oval 61"/>
           <p:cNvSpPr/>
           <p:nvPr/>
         </p:nvSpPr>
@@ -5985,7 +5565,7 @@
       </p:sp>
       <p:sp>
         <p:nvSpPr>
-          <p:cNvPr id="72" name="TextBox 71"/>
+          <p:cNvPr id="63" name="TextBox 62"/>
           <p:cNvSpPr txBox="1"/>
           <p:nvPr/>
         </p:nvSpPr>
@@ -6019,7 +5599,7 @@
       </p:sp>
       <p:sp>
         <p:nvSpPr>
-          <p:cNvPr id="73" name="TextBox 72"/>
+          <p:cNvPr id="64" name="TextBox 63"/>
           <p:cNvSpPr txBox="1"/>
           <p:nvPr/>
         </p:nvSpPr>
@@ -6054,7 +5634,7 @@
       </p:sp>
       <p:sp>
         <p:nvSpPr>
-          <p:cNvPr id="74" name="TextBox 73"/>
+          <p:cNvPr id="65" name="TextBox 64"/>
           <p:cNvSpPr txBox="1"/>
           <p:nvPr/>
         </p:nvSpPr>
@@ -6089,7 +5669,7 @@
       </p:sp>
       <p:cxnSp>
         <p:nvCxnSpPr>
-          <p:cNvPr id="75" name="Connector 74"/>
+          <p:cNvPr id="66" name="Connector 65"/>
           <p:cNvCxnSpPr/>
           <p:nvPr/>
         </p:nvCxnSpPr>
@@ -6125,7 +5705,7 @@
       </p:cxnSp>
       <p:sp>
         <p:nvSpPr>
-          <p:cNvPr id="76" name="Oval 75"/>
+          <p:cNvPr id="67" name="Oval 66"/>
           <p:cNvSpPr/>
           <p:nvPr/>
         </p:nvSpPr>
@@ -6168,7 +5748,7 @@
       </p:sp>
       <p:sp>
         <p:nvSpPr>
-          <p:cNvPr id="77" name="TextBox 76"/>
+          <p:cNvPr id="68" name="TextBox 67"/>
           <p:cNvSpPr txBox="1"/>
           <p:nvPr/>
         </p:nvSpPr>
@@ -6202,7 +5782,7 @@
       </p:sp>
       <p:sp>
         <p:nvSpPr>
-          <p:cNvPr id="78" name="TextBox 77"/>
+          <p:cNvPr id="69" name="TextBox 68"/>
           <p:cNvSpPr txBox="1"/>
           <p:nvPr/>
         </p:nvSpPr>
@@ -6237,7 +5817,7 @@
       </p:sp>
       <p:sp>
         <p:nvSpPr>
-          <p:cNvPr id="79" name="TextBox 78"/>
+          <p:cNvPr id="70" name="TextBox 69"/>
           <p:cNvSpPr txBox="1"/>
           <p:nvPr/>
         </p:nvSpPr>
@@ -6272,7 +5852,7 @@
       </p:sp>
       <p:sp>
         <p:nvSpPr>
-          <p:cNvPr id="80" name="Rectangle 79"/>
+          <p:cNvPr id="71" name="Rectangle 70"/>
           <p:cNvSpPr/>
           <p:nvPr/>
         </p:nvSpPr>
@@ -6317,7 +5897,7 @@
       </p:sp>
       <p:sp>
         <p:nvSpPr>
-          <p:cNvPr id="81" name="Oval 80"/>
+          <p:cNvPr id="72" name="Oval 71"/>
           <p:cNvSpPr/>
           <p:nvPr/>
         </p:nvSpPr>
@@ -6360,7 +5940,7 @@
       </p:sp>
       <p:sp>
         <p:nvSpPr>
-          <p:cNvPr id="82" name="Oval 81"/>
+          <p:cNvPr id="73" name="Oval 72"/>
           <p:cNvSpPr/>
           <p:nvPr/>
         </p:nvSpPr>
@@ -6403,7 +5983,7 @@
       </p:sp>
       <p:sp>
         <p:nvSpPr>
-          <p:cNvPr id="83" name="Oval 82"/>
+          <p:cNvPr id="74" name="Oval 73"/>
           <p:cNvSpPr/>
           <p:nvPr/>
         </p:nvSpPr>
@@ -6446,7 +6026,7 @@
       </p:sp>
       <p:sp>
         <p:nvSpPr>
-          <p:cNvPr id="84" name="Oval 83"/>
+          <p:cNvPr id="75" name="Oval 74"/>
           <p:cNvSpPr/>
           <p:nvPr/>
         </p:nvSpPr>
@@ -6489,7 +6069,7 @@
       </p:sp>
       <p:sp>
         <p:nvSpPr>
-          <p:cNvPr id="85" name="Oval 84"/>
+          <p:cNvPr id="76" name="Oval 75"/>
           <p:cNvSpPr/>
           <p:nvPr/>
         </p:nvSpPr>
@@ -6532,7 +6112,7 @@
       </p:sp>
       <p:sp>
         <p:nvSpPr>
-          <p:cNvPr id="86" name="Oval 85"/>
+          <p:cNvPr id="77" name="Oval 76"/>
           <p:cNvSpPr/>
           <p:nvPr/>
         </p:nvSpPr>
@@ -6575,7 +6155,7 @@
       </p:sp>
       <p:sp>
         <p:nvSpPr>
-          <p:cNvPr id="87" name="Freeform 86"/>
+          <p:cNvPr id="78" name="Freeform 77"/>
           <p:cNvSpPr/>
           <p:nvPr/>
         </p:nvSpPr>
@@ -6651,173 +6231,33 @@
           </a:p>
         </p:txBody>
       </p:sp>
-      <p:sp>
-        <p:nvSpPr>
-          <p:cNvPr id="88" name="Oval 87"/>
-          <p:cNvSpPr/>
-          <p:nvPr/>
-        </p:nvSpPr>
-        <p:spPr>
-          <a:xfrm>
-            <a:off x="795600" y="4338000"/>
-            <a:ext cx="540000" cy="432000"/>
-          </a:xfrm>
-          <a:prstGeom prst="ellipse">
-            <a:avLst/>
-          </a:prstGeom>
-          <a:solidFill>
-            <a:srgbClr val="FD7066"/>
-          </a:solidFill>
-          <a:ln>
-            <a:noFill/>
-          </a:ln>
-        </p:spPr>
-        <p:style>
-          <a:lnRef idx="1">
-            <a:schemeClr val="accent1"/>
-          </a:lnRef>
-          <a:fillRef idx="3">
-            <a:schemeClr val="accent1"/>
-          </a:fillRef>
-          <a:effectRef idx="2">
-            <a:schemeClr val="accent1"/>
-          </a:effectRef>
-          <a:fontRef idx="minor">
-            <a:schemeClr val="lt1"/>
-          </a:fontRef>
-        </p:style>
-        <p:txBody>
-          <a:bodyPr rtlCol="0" anchor="ctr"/>
-          <a:lstStyle/>
-          <a:p>
-            <a:pPr algn="ctr"/>
-          </a:p>
-        </p:txBody>
-      </p:sp>
-      <p:sp>
-        <p:nvSpPr>
-          <p:cNvPr id="89" name="Oval 88"/>
-          <p:cNvSpPr/>
-          <p:nvPr/>
-        </p:nvSpPr>
-        <p:spPr>
-          <a:xfrm>
-            <a:off x="1227600" y="4446000"/>
-            <a:ext cx="396000" cy="324000"/>
-          </a:xfrm>
-          <a:prstGeom prst="ellipse">
-            <a:avLst/>
-          </a:prstGeom>
-          <a:solidFill>
-            <a:srgbClr val="FD7066"/>
-          </a:solidFill>
-          <a:ln>
-            <a:noFill/>
-          </a:ln>
-        </p:spPr>
-        <p:style>
-          <a:lnRef idx="1">
-            <a:schemeClr val="accent1"/>
-          </a:lnRef>
-          <a:fillRef idx="3">
-            <a:schemeClr val="accent1"/>
-          </a:fillRef>
-          <a:effectRef idx="2">
-            <a:schemeClr val="accent1"/>
-          </a:effectRef>
-          <a:fontRef idx="minor">
-            <a:schemeClr val="lt1"/>
-          </a:fontRef>
-        </p:style>
-        <p:txBody>
-          <a:bodyPr rtlCol="0" anchor="ctr"/>
-          <a:lstStyle/>
-          <a:p>
-            <a:pPr algn="ctr"/>
-          </a:p>
-        </p:txBody>
-      </p:sp>
-      <p:sp>
-        <p:nvSpPr>
-          <p:cNvPr id="90" name="Oval 89"/>
-          <p:cNvSpPr/>
-          <p:nvPr/>
-        </p:nvSpPr>
-        <p:spPr>
-          <a:xfrm>
-            <a:off x="1119600" y="4518000"/>
-            <a:ext cx="180000" cy="144000"/>
-          </a:xfrm>
-          <a:prstGeom prst="ellipse">
-            <a:avLst/>
-          </a:prstGeom>
-          <a:solidFill>
-            <a:srgbClr val="FFFFFF"/>
-          </a:solidFill>
-          <a:ln>
-            <a:noFill/>
-          </a:ln>
-        </p:spPr>
-        <p:style>
-          <a:lnRef idx="1">
-            <a:schemeClr val="accent1"/>
-          </a:lnRef>
-          <a:fillRef idx="3">
-            <a:schemeClr val="accent1"/>
-          </a:fillRef>
-          <a:effectRef idx="2">
-            <a:schemeClr val="accent1"/>
-          </a:effectRef>
-          <a:fontRef idx="minor">
-            <a:schemeClr val="lt1"/>
-          </a:fontRef>
-        </p:style>
-        <p:txBody>
-          <a:bodyPr rtlCol="0" anchor="ctr"/>
-          <a:lstStyle/>
-          <a:p>
-            <a:pPr algn="ctr"/>
-          </a:p>
-        </p:txBody>
-      </p:sp>
-      <p:sp>
-        <p:nvSpPr>
-          <p:cNvPr id="91" name="TextBox 90"/>
-          <p:cNvSpPr txBox="1"/>
-          <p:nvPr/>
-        </p:nvSpPr>
-        <p:spPr>
-          <a:xfrm>
-            <a:off x="615600" y="4986000"/>
-            <a:ext cx="1188000" cy="288000"/>
+      <p:pic>
+        <p:nvPicPr>
+          <p:cNvPr id="79" name="Picture 78" descr="logo.png"/>
+          <p:cNvPicPr>
+            <a:picLocks noChangeAspect="1"/>
+          </p:cNvPicPr>
+          <p:nvPr/>
+        </p:nvPicPr>
+        <p:blipFill>
+          <a:blip r:embed="rId2"/>
+          <a:stretch>
+            <a:fillRect/>
+          </a:stretch>
+        </p:blipFill>
+        <p:spPr>
+          <a:xfrm>
+            <a:off x="615600" y="4158000"/>
+            <a:ext cx="1188000" cy="1260000"/>
           </a:xfrm>
           <a:prstGeom prst="rect">
             <a:avLst/>
           </a:prstGeom>
-          <a:noFill/>
-        </p:spPr>
-        <p:txBody>
-          <a:bodyPr wrap="square" lIns="0" rIns="0" tIns="0" bIns="0" anchor="t">
-            <a:spAutoFit/>
-          </a:bodyPr>
-          <a:lstStyle/>
-          <a:p>
-            <a:pPr algn="ctr"/>
-            <a:r>
-              <a:rPr sz="1500" b="1">
-                <a:solidFill>
-                  <a:srgbClr val="FD7066"/>
-                </a:solidFill>
-                <a:latin typeface="Arial Rounded MT Bold"/>
-              </a:rPr>
-              <a:t>mamawell</a:t>
-            </a:r>
-          </a:p>
-        </p:txBody>
-      </p:sp>
-      <p:sp>
-        <p:nvSpPr>
-          <p:cNvPr id="92" name="Oval 91"/>
+        </p:spPr>
+      </p:pic>
+      <p:sp>
+        <p:nvSpPr>
+          <p:cNvPr id="80" name="Oval 79"/>
           <p:cNvSpPr/>
           <p:nvPr/>
         </p:nvSpPr>
@@ -6860,7 +6300,7 @@
       </p:sp>
       <p:sp>
         <p:nvSpPr>
-          <p:cNvPr id="93" name="TextBox 92"/>
+          <p:cNvPr id="81" name="TextBox 80"/>
           <p:cNvSpPr txBox="1"/>
           <p:nvPr/>
         </p:nvSpPr>
@@ -6894,7 +6334,7 @@
       </p:sp>
       <p:sp>
         <p:nvSpPr>
-          <p:cNvPr id="94" name="TextBox 93"/>
+          <p:cNvPr id="82" name="TextBox 81"/>
           <p:cNvSpPr txBox="1"/>
           <p:nvPr/>
         </p:nvSpPr>
@@ -6929,7 +6369,7 @@
       </p:sp>
       <p:sp>
         <p:nvSpPr>
-          <p:cNvPr id="95" name="TextBox 94"/>
+          <p:cNvPr id="83" name="TextBox 82"/>
           <p:cNvSpPr txBox="1"/>
           <p:nvPr/>
         </p:nvSpPr>
@@ -6964,7 +6404,7 @@
       </p:sp>
       <p:cxnSp>
         <p:nvCxnSpPr>
-          <p:cNvPr id="96" name="Connector 95"/>
+          <p:cNvPr id="84" name="Connector 83"/>
           <p:cNvCxnSpPr/>
           <p:nvPr/>
         </p:nvCxnSpPr>
@@ -7000,7 +6440,7 @@
       </p:cxnSp>
       <p:sp>
         <p:nvSpPr>
-          <p:cNvPr id="97" name="Oval 96"/>
+          <p:cNvPr id="85" name="Oval 84"/>
           <p:cNvSpPr/>
           <p:nvPr/>
         </p:nvSpPr>
@@ -7043,7 +6483,7 @@
       </p:sp>
       <p:sp>
         <p:nvSpPr>
-          <p:cNvPr id="98" name="TextBox 97"/>
+          <p:cNvPr id="86" name="TextBox 85"/>
           <p:cNvSpPr txBox="1"/>
           <p:nvPr/>
         </p:nvSpPr>
@@ -7077,7 +6517,7 @@
       </p:sp>
       <p:sp>
         <p:nvSpPr>
-          <p:cNvPr id="99" name="TextBox 98"/>
+          <p:cNvPr id="87" name="TextBox 86"/>
           <p:cNvSpPr txBox="1"/>
           <p:nvPr/>
         </p:nvSpPr>
@@ -7112,7 +6552,7 @@
       </p:sp>
       <p:sp>
         <p:nvSpPr>
-          <p:cNvPr id="100" name="TextBox 99"/>
+          <p:cNvPr id="88" name="TextBox 87"/>
           <p:cNvSpPr txBox="1"/>
           <p:nvPr/>
         </p:nvSpPr>
@@ -7147,7 +6587,7 @@
       </p:sp>
       <p:cxnSp>
         <p:nvCxnSpPr>
-          <p:cNvPr id="101" name="Connector 100"/>
+          <p:cNvPr id="89" name="Connector 88"/>
           <p:cNvCxnSpPr/>
           <p:nvPr/>
         </p:nvCxnSpPr>
@@ -7183,7 +6623,7 @@
       </p:cxnSp>
       <p:sp>
         <p:nvSpPr>
-          <p:cNvPr id="102" name="Oval 101"/>
+          <p:cNvPr id="90" name="Oval 89"/>
           <p:cNvSpPr/>
           <p:nvPr/>
         </p:nvSpPr>
@@ -7226,7 +6666,7 @@
       </p:sp>
       <p:sp>
         <p:nvSpPr>
-          <p:cNvPr id="103" name="TextBox 102"/>
+          <p:cNvPr id="91" name="TextBox 90"/>
           <p:cNvSpPr txBox="1"/>
           <p:nvPr/>
         </p:nvSpPr>
@@ -7260,7 +6700,7 @@
       </p:sp>
       <p:sp>
         <p:nvSpPr>
-          <p:cNvPr id="104" name="TextBox 103"/>
+          <p:cNvPr id="92" name="TextBox 91"/>
           <p:cNvSpPr txBox="1"/>
           <p:nvPr/>
         </p:nvSpPr>
@@ -7295,7 +6735,7 @@
       </p:sp>
       <p:sp>
         <p:nvSpPr>
-          <p:cNvPr id="105" name="TextBox 104"/>
+          <p:cNvPr id="93" name="TextBox 92"/>
           <p:cNvSpPr txBox="1"/>
           <p:nvPr/>
         </p:nvSpPr>
@@ -7330,7 +6770,7 @@
       </p:sp>
       <p:sp>
         <p:nvSpPr>
-          <p:cNvPr id="106" name="Rectangle 105"/>
+          <p:cNvPr id="94" name="Rectangle 93"/>
           <p:cNvSpPr/>
           <p:nvPr/>
         </p:nvSpPr>
@@ -7375,7 +6815,7 @@
       </p:sp>
       <p:sp>
         <p:nvSpPr>
-          <p:cNvPr id="107" name="Oval 106"/>
+          <p:cNvPr id="95" name="Oval 94"/>
           <p:cNvSpPr/>
           <p:nvPr/>
         </p:nvSpPr>
@@ -7418,7 +6858,7 @@
       </p:sp>
       <p:sp>
         <p:nvSpPr>
-          <p:cNvPr id="108" name="Oval 107"/>
+          <p:cNvPr id="96" name="Oval 95"/>
           <p:cNvSpPr/>
           <p:nvPr/>
         </p:nvSpPr>
@@ -7461,7 +6901,7 @@
       </p:sp>
       <p:sp>
         <p:nvSpPr>
-          <p:cNvPr id="109" name="Oval 108"/>
+          <p:cNvPr id="97" name="Oval 96"/>
           <p:cNvSpPr/>
           <p:nvPr/>
         </p:nvSpPr>
@@ -7504,7 +6944,7 @@
       </p:sp>
       <p:sp>
         <p:nvSpPr>
-          <p:cNvPr id="110" name="Oval 109"/>
+          <p:cNvPr id="98" name="Oval 97"/>
           <p:cNvSpPr/>
           <p:nvPr/>
         </p:nvSpPr>
@@ -7547,7 +6987,7 @@
       </p:sp>
       <p:sp>
         <p:nvSpPr>
-          <p:cNvPr id="111" name="Oval 110"/>
+          <p:cNvPr id="99" name="Oval 98"/>
           <p:cNvSpPr/>
           <p:nvPr/>
         </p:nvSpPr>
@@ -7590,7 +7030,7 @@
       </p:sp>
       <p:sp>
         <p:nvSpPr>
-          <p:cNvPr id="112" name="Oval 111"/>
+          <p:cNvPr id="100" name="Oval 99"/>
           <p:cNvSpPr/>
           <p:nvPr/>
         </p:nvSpPr>
@@ -7633,7 +7073,7 @@
       </p:sp>
       <p:sp>
         <p:nvSpPr>
-          <p:cNvPr id="113" name="Freeform 112"/>
+          <p:cNvPr id="101" name="Freeform 100"/>
           <p:cNvSpPr/>
           <p:nvPr/>
         </p:nvSpPr>
@@ -7709,173 +7149,33 @@
           </a:p>
         </p:txBody>
       </p:sp>
-      <p:sp>
-        <p:nvSpPr>
-          <p:cNvPr id="114" name="Oval 113"/>
-          <p:cNvSpPr/>
-          <p:nvPr/>
-        </p:nvSpPr>
-        <p:spPr>
-          <a:xfrm>
-            <a:off x="4057200" y="4338000"/>
-            <a:ext cx="540000" cy="432000"/>
-          </a:xfrm>
-          <a:prstGeom prst="ellipse">
-            <a:avLst/>
-          </a:prstGeom>
-          <a:solidFill>
-            <a:srgbClr val="FD7066"/>
-          </a:solidFill>
-          <a:ln>
-            <a:noFill/>
-          </a:ln>
-        </p:spPr>
-        <p:style>
-          <a:lnRef idx="1">
-            <a:schemeClr val="accent1"/>
-          </a:lnRef>
-          <a:fillRef idx="3">
-            <a:schemeClr val="accent1"/>
-          </a:fillRef>
-          <a:effectRef idx="2">
-            <a:schemeClr val="accent1"/>
-          </a:effectRef>
-          <a:fontRef idx="minor">
-            <a:schemeClr val="lt1"/>
-          </a:fontRef>
-        </p:style>
-        <p:txBody>
-          <a:bodyPr rtlCol="0" anchor="ctr"/>
-          <a:lstStyle/>
-          <a:p>
-            <a:pPr algn="ctr"/>
-          </a:p>
-        </p:txBody>
-      </p:sp>
-      <p:sp>
-        <p:nvSpPr>
-          <p:cNvPr id="115" name="Oval 114"/>
-          <p:cNvSpPr/>
-          <p:nvPr/>
-        </p:nvSpPr>
-        <p:spPr>
-          <a:xfrm>
-            <a:off x="4489200" y="4446000"/>
-            <a:ext cx="396000" cy="324000"/>
-          </a:xfrm>
-          <a:prstGeom prst="ellipse">
-            <a:avLst/>
-          </a:prstGeom>
-          <a:solidFill>
-            <a:srgbClr val="FD7066"/>
-          </a:solidFill>
-          <a:ln>
-            <a:noFill/>
-          </a:ln>
-        </p:spPr>
-        <p:style>
-          <a:lnRef idx="1">
-            <a:schemeClr val="accent1"/>
-          </a:lnRef>
-          <a:fillRef idx="3">
-            <a:schemeClr val="accent1"/>
-          </a:fillRef>
-          <a:effectRef idx="2">
-            <a:schemeClr val="accent1"/>
-          </a:effectRef>
-          <a:fontRef idx="minor">
-            <a:schemeClr val="lt1"/>
-          </a:fontRef>
-        </p:style>
-        <p:txBody>
-          <a:bodyPr rtlCol="0" anchor="ctr"/>
-          <a:lstStyle/>
-          <a:p>
-            <a:pPr algn="ctr"/>
-          </a:p>
-        </p:txBody>
-      </p:sp>
-      <p:sp>
-        <p:nvSpPr>
-          <p:cNvPr id="116" name="Oval 115"/>
-          <p:cNvSpPr/>
-          <p:nvPr/>
-        </p:nvSpPr>
-        <p:spPr>
-          <a:xfrm>
-            <a:off x="4381200" y="4518000"/>
-            <a:ext cx="180000" cy="144000"/>
-          </a:xfrm>
-          <a:prstGeom prst="ellipse">
-            <a:avLst/>
-          </a:prstGeom>
-          <a:solidFill>
-            <a:srgbClr val="FFFFFF"/>
-          </a:solidFill>
-          <a:ln>
-            <a:noFill/>
-          </a:ln>
-        </p:spPr>
-        <p:style>
-          <a:lnRef idx="1">
-            <a:schemeClr val="accent1"/>
-          </a:lnRef>
-          <a:fillRef idx="3">
-            <a:schemeClr val="accent1"/>
-          </a:fillRef>
-          <a:effectRef idx="2">
-            <a:schemeClr val="accent1"/>
-          </a:effectRef>
-          <a:fontRef idx="minor">
-            <a:schemeClr val="lt1"/>
-          </a:fontRef>
-        </p:style>
-        <p:txBody>
-          <a:bodyPr rtlCol="0" anchor="ctr"/>
-          <a:lstStyle/>
-          <a:p>
-            <a:pPr algn="ctr"/>
-          </a:p>
-        </p:txBody>
-      </p:sp>
-      <p:sp>
-        <p:nvSpPr>
-          <p:cNvPr id="117" name="TextBox 116"/>
-          <p:cNvSpPr txBox="1"/>
-          <p:nvPr/>
-        </p:nvSpPr>
-        <p:spPr>
-          <a:xfrm>
-            <a:off x="3877200" y="4986000"/>
-            <a:ext cx="1188000" cy="288000"/>
+      <p:pic>
+        <p:nvPicPr>
+          <p:cNvPr id="102" name="Picture 101" descr="logo.png"/>
+          <p:cNvPicPr>
+            <a:picLocks noChangeAspect="1"/>
+          </p:cNvPicPr>
+          <p:nvPr/>
+        </p:nvPicPr>
+        <p:blipFill>
+          <a:blip r:embed="rId2"/>
+          <a:stretch>
+            <a:fillRect/>
+          </a:stretch>
+        </p:blipFill>
+        <p:spPr>
+          <a:xfrm>
+            <a:off x="3877200" y="4158000"/>
+            <a:ext cx="1188000" cy="1260000"/>
           </a:xfrm>
           <a:prstGeom prst="rect">
             <a:avLst/>
           </a:prstGeom>
-          <a:noFill/>
-        </p:spPr>
-        <p:txBody>
-          <a:bodyPr wrap="square" lIns="0" rIns="0" tIns="0" bIns="0" anchor="t">
-            <a:spAutoFit/>
-          </a:bodyPr>
-          <a:lstStyle/>
-          <a:p>
-            <a:pPr algn="ctr"/>
-            <a:r>
-              <a:rPr sz="1500" b="1">
-                <a:solidFill>
-                  <a:srgbClr val="FD7066"/>
-                </a:solidFill>
-                <a:latin typeface="Arial Rounded MT Bold"/>
-              </a:rPr>
-              <a:t>mamawell</a:t>
-            </a:r>
-          </a:p>
-        </p:txBody>
-      </p:sp>
-      <p:sp>
-        <p:nvSpPr>
-          <p:cNvPr id="118" name="Oval 117"/>
+        </p:spPr>
+      </p:pic>
+      <p:sp>
+        <p:nvSpPr>
+          <p:cNvPr id="103" name="Oval 102"/>
           <p:cNvSpPr/>
           <p:nvPr/>
         </p:nvSpPr>
@@ -7918,7 +7218,7 @@
       </p:sp>
       <p:sp>
         <p:nvSpPr>
-          <p:cNvPr id="119" name="TextBox 118"/>
+          <p:cNvPr id="104" name="TextBox 103"/>
           <p:cNvSpPr txBox="1"/>
           <p:nvPr/>
         </p:nvSpPr>
@@ -7952,7 +7252,7 @@
       </p:sp>
       <p:sp>
         <p:nvSpPr>
-          <p:cNvPr id="120" name="TextBox 119"/>
+          <p:cNvPr id="105" name="TextBox 104"/>
           <p:cNvSpPr txBox="1"/>
           <p:nvPr/>
         </p:nvSpPr>
@@ -7987,7 +7287,7 @@
       </p:sp>
       <p:sp>
         <p:nvSpPr>
-          <p:cNvPr id="121" name="TextBox 120"/>
+          <p:cNvPr id="106" name="TextBox 105"/>
           <p:cNvSpPr txBox="1"/>
           <p:nvPr/>
         </p:nvSpPr>
@@ -8022,7 +7322,7 @@
       </p:sp>
       <p:cxnSp>
         <p:nvCxnSpPr>
-          <p:cNvPr id="122" name="Connector 121"/>
+          <p:cNvPr id="107" name="Connector 106"/>
           <p:cNvCxnSpPr/>
           <p:nvPr/>
         </p:nvCxnSpPr>
@@ -8058,7 +7358,7 @@
       </p:cxnSp>
       <p:sp>
         <p:nvSpPr>
-          <p:cNvPr id="123" name="Oval 122"/>
+          <p:cNvPr id="108" name="Oval 107"/>
           <p:cNvSpPr/>
           <p:nvPr/>
         </p:nvSpPr>
@@ -8101,7 +7401,7 @@
       </p:sp>
       <p:sp>
         <p:nvSpPr>
-          <p:cNvPr id="124" name="TextBox 123"/>
+          <p:cNvPr id="109" name="TextBox 108"/>
           <p:cNvSpPr txBox="1"/>
           <p:nvPr/>
         </p:nvSpPr>
@@ -8135,7 +7435,7 @@
       </p:sp>
       <p:sp>
         <p:nvSpPr>
-          <p:cNvPr id="125" name="TextBox 124"/>
+          <p:cNvPr id="110" name="TextBox 109"/>
           <p:cNvSpPr txBox="1"/>
           <p:nvPr/>
         </p:nvSpPr>
@@ -8170,7 +7470,7 @@
       </p:sp>
       <p:sp>
         <p:nvSpPr>
-          <p:cNvPr id="126" name="TextBox 125"/>
+          <p:cNvPr id="111" name="TextBox 110"/>
           <p:cNvSpPr txBox="1"/>
           <p:nvPr/>
         </p:nvSpPr>
@@ -8205,7 +7505,7 @@
       </p:sp>
       <p:cxnSp>
         <p:nvCxnSpPr>
-          <p:cNvPr id="127" name="Connector 126"/>
+          <p:cNvPr id="112" name="Connector 111"/>
           <p:cNvCxnSpPr/>
           <p:nvPr/>
         </p:nvCxnSpPr>
@@ -8241,7 +7541,7 @@
       </p:cxnSp>
       <p:sp>
         <p:nvSpPr>
-          <p:cNvPr id="128" name="Oval 127"/>
+          <p:cNvPr id="113" name="Oval 112"/>
           <p:cNvSpPr/>
           <p:nvPr/>
         </p:nvSpPr>
@@ -8284,7 +7584,7 @@
       </p:sp>
       <p:sp>
         <p:nvSpPr>
-          <p:cNvPr id="129" name="TextBox 128"/>
+          <p:cNvPr id="114" name="TextBox 113"/>
           <p:cNvSpPr txBox="1"/>
           <p:nvPr/>
         </p:nvSpPr>
@@ -8318,7 +7618,7 @@
       </p:sp>
       <p:sp>
         <p:nvSpPr>
-          <p:cNvPr id="130" name="TextBox 129"/>
+          <p:cNvPr id="115" name="TextBox 114"/>
           <p:cNvSpPr txBox="1"/>
           <p:nvPr/>
         </p:nvSpPr>
@@ -8353,7 +7653,7 @@
       </p:sp>
       <p:sp>
         <p:nvSpPr>
-          <p:cNvPr id="131" name="TextBox 130"/>
+          <p:cNvPr id="116" name="TextBox 115"/>
           <p:cNvSpPr txBox="1"/>
           <p:nvPr/>
         </p:nvSpPr>
@@ -8388,7 +7688,7 @@
       </p:sp>
       <p:sp>
         <p:nvSpPr>
-          <p:cNvPr id="132" name="Rectangle 131"/>
+          <p:cNvPr id="117" name="Rectangle 116"/>
           <p:cNvSpPr/>
           <p:nvPr/>
         </p:nvSpPr>
@@ -8433,7 +7733,7 @@
       </p:sp>
       <p:sp>
         <p:nvSpPr>
-          <p:cNvPr id="133" name="Oval 132"/>
+          <p:cNvPr id="118" name="Oval 117"/>
           <p:cNvSpPr/>
           <p:nvPr/>
         </p:nvSpPr>
@@ -8476,7 +7776,7 @@
       </p:sp>
       <p:sp>
         <p:nvSpPr>
-          <p:cNvPr id="134" name="Oval 133"/>
+          <p:cNvPr id="119" name="Oval 118"/>
           <p:cNvSpPr/>
           <p:nvPr/>
         </p:nvSpPr>
@@ -8519,7 +7819,7 @@
       </p:sp>
       <p:sp>
         <p:nvSpPr>
-          <p:cNvPr id="135" name="Oval 134"/>
+          <p:cNvPr id="120" name="Oval 119"/>
           <p:cNvSpPr/>
           <p:nvPr/>
         </p:nvSpPr>
@@ -8562,7 +7862,7 @@
       </p:sp>
       <p:sp>
         <p:nvSpPr>
-          <p:cNvPr id="136" name="Oval 135"/>
+          <p:cNvPr id="121" name="Oval 120"/>
           <p:cNvSpPr/>
           <p:nvPr/>
         </p:nvSpPr>
@@ -8605,7 +7905,7 @@
       </p:sp>
       <p:sp>
         <p:nvSpPr>
-          <p:cNvPr id="137" name="Oval 136"/>
+          <p:cNvPr id="122" name="Oval 121"/>
           <p:cNvSpPr/>
           <p:nvPr/>
         </p:nvSpPr>
@@ -8648,7 +7948,7 @@
       </p:sp>
       <p:sp>
         <p:nvSpPr>
-          <p:cNvPr id="138" name="Oval 137"/>
+          <p:cNvPr id="123" name="Oval 122"/>
           <p:cNvSpPr/>
           <p:nvPr/>
         </p:nvSpPr>
@@ -8691,7 +7991,7 @@
       </p:sp>
       <p:sp>
         <p:nvSpPr>
-          <p:cNvPr id="139" name="Freeform 138"/>
+          <p:cNvPr id="124" name="Freeform 123"/>
           <p:cNvSpPr/>
           <p:nvPr/>
         </p:nvSpPr>
@@ -8767,173 +8067,33 @@
           </a:p>
         </p:txBody>
       </p:sp>
-      <p:sp>
-        <p:nvSpPr>
-          <p:cNvPr id="140" name="Oval 139"/>
-          <p:cNvSpPr/>
-          <p:nvPr/>
-        </p:nvSpPr>
-        <p:spPr>
-          <a:xfrm>
-            <a:off x="7318800" y="4338000"/>
-            <a:ext cx="540000" cy="432000"/>
-          </a:xfrm>
-          <a:prstGeom prst="ellipse">
-            <a:avLst/>
-          </a:prstGeom>
-          <a:solidFill>
-            <a:srgbClr val="FD7066"/>
-          </a:solidFill>
-          <a:ln>
-            <a:noFill/>
-          </a:ln>
-        </p:spPr>
-        <p:style>
-          <a:lnRef idx="1">
-            <a:schemeClr val="accent1"/>
-          </a:lnRef>
-          <a:fillRef idx="3">
-            <a:schemeClr val="accent1"/>
-          </a:fillRef>
-          <a:effectRef idx="2">
-            <a:schemeClr val="accent1"/>
-          </a:effectRef>
-          <a:fontRef idx="minor">
-            <a:schemeClr val="lt1"/>
-          </a:fontRef>
-        </p:style>
-        <p:txBody>
-          <a:bodyPr rtlCol="0" anchor="ctr"/>
-          <a:lstStyle/>
-          <a:p>
-            <a:pPr algn="ctr"/>
-          </a:p>
-        </p:txBody>
-      </p:sp>
-      <p:sp>
-        <p:nvSpPr>
-          <p:cNvPr id="141" name="Oval 140"/>
-          <p:cNvSpPr/>
-          <p:nvPr/>
-        </p:nvSpPr>
-        <p:spPr>
-          <a:xfrm>
-            <a:off x="7750800" y="4446000"/>
-            <a:ext cx="396000" cy="324000"/>
-          </a:xfrm>
-          <a:prstGeom prst="ellipse">
-            <a:avLst/>
-          </a:prstGeom>
-          <a:solidFill>
-            <a:srgbClr val="FD7066"/>
-          </a:solidFill>
-          <a:ln>
-            <a:noFill/>
-          </a:ln>
-        </p:spPr>
-        <p:style>
-          <a:lnRef idx="1">
-            <a:schemeClr val="accent1"/>
-          </a:lnRef>
-          <a:fillRef idx="3">
-            <a:schemeClr val="accent1"/>
-          </a:fillRef>
-          <a:effectRef idx="2">
-            <a:schemeClr val="accent1"/>
-          </a:effectRef>
-          <a:fontRef idx="minor">
-            <a:schemeClr val="lt1"/>
-          </a:fontRef>
-        </p:style>
-        <p:txBody>
-          <a:bodyPr rtlCol="0" anchor="ctr"/>
-          <a:lstStyle/>
-          <a:p>
-            <a:pPr algn="ctr"/>
-          </a:p>
-        </p:txBody>
-      </p:sp>
-      <p:sp>
-        <p:nvSpPr>
-          <p:cNvPr id="142" name="Oval 141"/>
-          <p:cNvSpPr/>
-          <p:nvPr/>
-        </p:nvSpPr>
-        <p:spPr>
-          <a:xfrm>
-            <a:off x="7642800" y="4518000"/>
-            <a:ext cx="180000" cy="144000"/>
-          </a:xfrm>
-          <a:prstGeom prst="ellipse">
-            <a:avLst/>
-          </a:prstGeom>
-          <a:solidFill>
-            <a:srgbClr val="FFFFFF"/>
-          </a:solidFill>
-          <a:ln>
-            <a:noFill/>
-          </a:ln>
-        </p:spPr>
-        <p:style>
-          <a:lnRef idx="1">
-            <a:schemeClr val="accent1"/>
-          </a:lnRef>
-          <a:fillRef idx="3">
-            <a:schemeClr val="accent1"/>
-          </a:fillRef>
-          <a:effectRef idx="2">
-            <a:schemeClr val="accent1"/>
-          </a:effectRef>
-          <a:fontRef idx="minor">
-            <a:schemeClr val="lt1"/>
-          </a:fontRef>
-        </p:style>
-        <p:txBody>
-          <a:bodyPr rtlCol="0" anchor="ctr"/>
-          <a:lstStyle/>
-          <a:p>
-            <a:pPr algn="ctr"/>
-          </a:p>
-        </p:txBody>
-      </p:sp>
-      <p:sp>
-        <p:nvSpPr>
-          <p:cNvPr id="143" name="TextBox 142"/>
-          <p:cNvSpPr txBox="1"/>
-          <p:nvPr/>
-        </p:nvSpPr>
-        <p:spPr>
-          <a:xfrm>
-            <a:off x="7138800" y="4986000"/>
-            <a:ext cx="1188000" cy="288000"/>
+      <p:pic>
+        <p:nvPicPr>
+          <p:cNvPr id="125" name="Picture 124" descr="logo.png"/>
+          <p:cNvPicPr>
+            <a:picLocks noChangeAspect="1"/>
+          </p:cNvPicPr>
+          <p:nvPr/>
+        </p:nvPicPr>
+        <p:blipFill>
+          <a:blip r:embed="rId2"/>
+          <a:stretch>
+            <a:fillRect/>
+          </a:stretch>
+        </p:blipFill>
+        <p:spPr>
+          <a:xfrm>
+            <a:off x="7138800" y="4158000"/>
+            <a:ext cx="1188000" cy="1260000"/>
           </a:xfrm>
           <a:prstGeom prst="rect">
             <a:avLst/>
           </a:prstGeom>
-          <a:noFill/>
-        </p:spPr>
-        <p:txBody>
-          <a:bodyPr wrap="square" lIns="0" rIns="0" tIns="0" bIns="0" anchor="t">
-            <a:spAutoFit/>
-          </a:bodyPr>
-          <a:lstStyle/>
-          <a:p>
-            <a:pPr algn="ctr"/>
-            <a:r>
-              <a:rPr sz="1500" b="1">
-                <a:solidFill>
-                  <a:srgbClr val="FD7066"/>
-                </a:solidFill>
-                <a:latin typeface="Arial Rounded MT Bold"/>
-              </a:rPr>
-              <a:t>mamawell</a:t>
-            </a:r>
-          </a:p>
-        </p:txBody>
-      </p:sp>
-      <p:sp>
-        <p:nvSpPr>
-          <p:cNvPr id="144" name="Oval 143"/>
+        </p:spPr>
+      </p:pic>
+      <p:sp>
+        <p:nvSpPr>
+          <p:cNvPr id="126" name="Oval 125"/>
           <p:cNvSpPr/>
           <p:nvPr/>
         </p:nvSpPr>
@@ -8976,7 +8136,7 @@
       </p:sp>
       <p:sp>
         <p:nvSpPr>
-          <p:cNvPr id="145" name="TextBox 144"/>
+          <p:cNvPr id="127" name="TextBox 126"/>
           <p:cNvSpPr txBox="1"/>
           <p:nvPr/>
         </p:nvSpPr>
@@ -9010,7 +8170,7 @@
       </p:sp>
       <p:sp>
         <p:nvSpPr>
-          <p:cNvPr id="146" name="TextBox 145"/>
+          <p:cNvPr id="128" name="TextBox 127"/>
           <p:cNvSpPr txBox="1"/>
           <p:nvPr/>
         </p:nvSpPr>
@@ -9045,7 +8205,7 @@
       </p:sp>
       <p:sp>
         <p:nvSpPr>
-          <p:cNvPr id="147" name="TextBox 146"/>
+          <p:cNvPr id="129" name="TextBox 128"/>
           <p:cNvSpPr txBox="1"/>
           <p:nvPr/>
         </p:nvSpPr>
@@ -9080,7 +8240,7 @@
       </p:sp>
       <p:cxnSp>
         <p:nvCxnSpPr>
-          <p:cNvPr id="148" name="Connector 147"/>
+          <p:cNvPr id="130" name="Connector 129"/>
           <p:cNvCxnSpPr/>
           <p:nvPr/>
         </p:nvCxnSpPr>
@@ -9116,7 +8276,7 @@
       </p:cxnSp>
       <p:sp>
         <p:nvSpPr>
-          <p:cNvPr id="149" name="Oval 148"/>
+          <p:cNvPr id="131" name="Oval 130"/>
           <p:cNvSpPr/>
           <p:nvPr/>
         </p:nvSpPr>
@@ -9159,7 +8319,7 @@
       </p:sp>
       <p:sp>
         <p:nvSpPr>
-          <p:cNvPr id="150" name="TextBox 149"/>
+          <p:cNvPr id="132" name="TextBox 131"/>
           <p:cNvSpPr txBox="1"/>
           <p:nvPr/>
         </p:nvSpPr>
@@ -9193,7 +8353,7 @@
       </p:sp>
       <p:sp>
         <p:nvSpPr>
-          <p:cNvPr id="151" name="TextBox 150"/>
+          <p:cNvPr id="133" name="TextBox 132"/>
           <p:cNvSpPr txBox="1"/>
           <p:nvPr/>
         </p:nvSpPr>
@@ -9228,7 +8388,7 @@
       </p:sp>
       <p:sp>
         <p:nvSpPr>
-          <p:cNvPr id="152" name="TextBox 151"/>
+          <p:cNvPr id="134" name="TextBox 133"/>
           <p:cNvSpPr txBox="1"/>
           <p:nvPr/>
         </p:nvSpPr>
@@ -9263,7 +8423,7 @@
       </p:sp>
       <p:cxnSp>
         <p:nvCxnSpPr>
-          <p:cNvPr id="153" name="Connector 152"/>
+          <p:cNvPr id="135" name="Connector 134"/>
           <p:cNvCxnSpPr/>
           <p:nvPr/>
         </p:nvCxnSpPr>
@@ -9299,7 +8459,7 @@
       </p:cxnSp>
       <p:sp>
         <p:nvSpPr>
-          <p:cNvPr id="154" name="Oval 153"/>
+          <p:cNvPr id="136" name="Oval 135"/>
           <p:cNvSpPr/>
           <p:nvPr/>
         </p:nvSpPr>
@@ -9342,7 +8502,7 @@
       </p:sp>
       <p:sp>
         <p:nvSpPr>
-          <p:cNvPr id="155" name="TextBox 154"/>
+          <p:cNvPr id="137" name="TextBox 136"/>
           <p:cNvSpPr txBox="1"/>
           <p:nvPr/>
         </p:nvSpPr>
@@ -9376,7 +8536,7 @@
       </p:sp>
       <p:sp>
         <p:nvSpPr>
-          <p:cNvPr id="156" name="TextBox 155"/>
+          <p:cNvPr id="138" name="TextBox 137"/>
           <p:cNvSpPr txBox="1"/>
           <p:nvPr/>
         </p:nvSpPr>
@@ -9411,7 +8571,7 @@
       </p:sp>
       <p:sp>
         <p:nvSpPr>
-          <p:cNvPr id="157" name="TextBox 156"/>
+          <p:cNvPr id="139" name="TextBox 138"/>
           <p:cNvSpPr txBox="1"/>
           <p:nvPr/>
         </p:nvSpPr>
@@ -9446,13 +8606,643 @@
       </p:sp>
       <p:cxnSp>
         <p:nvCxnSpPr>
+          <p:cNvPr id="140" name="Connector 139"/>
+          <p:cNvCxnSpPr/>
+          <p:nvPr/>
+        </p:nvCxnSpPr>
+        <p:spPr>
+          <a:xfrm>
+            <a:off x="471600.0" y="1746000.0"/>
+            <a:ext cx="144000.0" cy="0.0"/>
+          </a:xfrm>
+          <a:prstGeom prst="line">
+            <a:avLst/>
+          </a:prstGeom>
+          <a:ln w="3175">
+            <a:solidFill>
+              <a:srgbClr val="D6D6D6"/>
+            </a:solidFill>
+          </a:ln>
+        </p:spPr>
+        <p:style>
+          <a:lnRef idx="2">
+            <a:schemeClr val="accent1"/>
+          </a:lnRef>
+          <a:fillRef idx="0">
+            <a:schemeClr val="accent1"/>
+          </a:fillRef>
+          <a:effectRef idx="1">
+            <a:schemeClr val="accent1"/>
+          </a:effectRef>
+          <a:fontRef idx="minor">
+            <a:schemeClr val="tx1"/>
+          </a:fontRef>
+        </p:style>
+      </p:cxnSp>
+      <p:cxnSp>
+        <p:nvCxnSpPr>
+          <p:cNvPr id="141" name="Connector 140"/>
+          <p:cNvCxnSpPr/>
+          <p:nvPr/>
+        </p:nvCxnSpPr>
+        <p:spPr>
+          <a:xfrm>
+            <a:off x="543600.0" y="1674000.0"/>
+            <a:ext cx="0.0" cy="144000.0"/>
+          </a:xfrm>
+          <a:prstGeom prst="line">
+            <a:avLst/>
+          </a:prstGeom>
+          <a:ln w="3175">
+            <a:solidFill>
+              <a:srgbClr val="D6D6D6"/>
+            </a:solidFill>
+          </a:ln>
+        </p:spPr>
+        <p:style>
+          <a:lnRef idx="2">
+            <a:schemeClr val="accent1"/>
+          </a:lnRef>
+          <a:fillRef idx="0">
+            <a:schemeClr val="accent1"/>
+          </a:fillRef>
+          <a:effectRef idx="1">
+            <a:schemeClr val="accent1"/>
+          </a:effectRef>
+          <a:fontRef idx="minor">
+            <a:schemeClr val="tx1"/>
+          </a:fontRef>
+        </p:style>
+      </p:cxnSp>
+      <p:cxnSp>
+        <p:nvCxnSpPr>
+          <p:cNvPr id="142" name="Connector 141"/>
+          <p:cNvCxnSpPr/>
+          <p:nvPr/>
+        </p:nvCxnSpPr>
+        <p:spPr>
+          <a:xfrm>
+            <a:off x="3553200.0" y="1746000.0"/>
+            <a:ext cx="144000.0" cy="0.0"/>
+          </a:xfrm>
+          <a:prstGeom prst="line">
+            <a:avLst/>
+          </a:prstGeom>
+          <a:ln w="3175">
+            <a:solidFill>
+              <a:srgbClr val="D6D6D6"/>
+            </a:solidFill>
+          </a:ln>
+        </p:spPr>
+        <p:style>
+          <a:lnRef idx="2">
+            <a:schemeClr val="accent1"/>
+          </a:lnRef>
+          <a:fillRef idx="0">
+            <a:schemeClr val="accent1"/>
+          </a:fillRef>
+          <a:effectRef idx="1">
+            <a:schemeClr val="accent1"/>
+          </a:effectRef>
+          <a:fontRef idx="minor">
+            <a:schemeClr val="tx1"/>
+          </a:fontRef>
+        </p:style>
+      </p:cxnSp>
+      <p:cxnSp>
+        <p:nvCxnSpPr>
+          <p:cNvPr id="143" name="Connector 142"/>
+          <p:cNvCxnSpPr/>
+          <p:nvPr/>
+        </p:nvCxnSpPr>
+        <p:spPr>
+          <a:xfrm>
+            <a:off x="3625200.0" y="1674000.0"/>
+            <a:ext cx="0.0" cy="144000.0"/>
+          </a:xfrm>
+          <a:prstGeom prst="line">
+            <a:avLst/>
+          </a:prstGeom>
+          <a:ln w="3175">
+            <a:solidFill>
+              <a:srgbClr val="D6D6D6"/>
+            </a:solidFill>
+          </a:ln>
+        </p:spPr>
+        <p:style>
+          <a:lnRef idx="2">
+            <a:schemeClr val="accent1"/>
+          </a:lnRef>
+          <a:fillRef idx="0">
+            <a:schemeClr val="accent1"/>
+          </a:fillRef>
+          <a:effectRef idx="1">
+            <a:schemeClr val="accent1"/>
+          </a:effectRef>
+          <a:fontRef idx="minor">
+            <a:schemeClr val="tx1"/>
+          </a:fontRef>
+        </p:style>
+      </p:cxnSp>
+      <p:cxnSp>
+        <p:nvCxnSpPr>
+          <p:cNvPr id="144" name="Connector 143"/>
+          <p:cNvCxnSpPr/>
+          <p:nvPr/>
+        </p:nvCxnSpPr>
+        <p:spPr>
+          <a:xfrm>
+            <a:off x="471600.0" y="3690000.0"/>
+            <a:ext cx="144000.0" cy="0.0"/>
+          </a:xfrm>
+          <a:prstGeom prst="line">
+            <a:avLst/>
+          </a:prstGeom>
+          <a:ln w="3175">
+            <a:solidFill>
+              <a:srgbClr val="D6D6D6"/>
+            </a:solidFill>
+          </a:ln>
+        </p:spPr>
+        <p:style>
+          <a:lnRef idx="2">
+            <a:schemeClr val="accent1"/>
+          </a:lnRef>
+          <a:fillRef idx="0">
+            <a:schemeClr val="accent1"/>
+          </a:fillRef>
+          <a:effectRef idx="1">
+            <a:schemeClr val="accent1"/>
+          </a:effectRef>
+          <a:fontRef idx="minor">
+            <a:schemeClr val="tx1"/>
+          </a:fontRef>
+        </p:style>
+      </p:cxnSp>
+      <p:cxnSp>
+        <p:nvCxnSpPr>
+          <p:cNvPr id="145" name="Connector 144"/>
+          <p:cNvCxnSpPr/>
+          <p:nvPr/>
+        </p:nvCxnSpPr>
+        <p:spPr>
+          <a:xfrm>
+            <a:off x="543600.0" y="3618000.0"/>
+            <a:ext cx="0.0" cy="144000.0"/>
+          </a:xfrm>
+          <a:prstGeom prst="line">
+            <a:avLst/>
+          </a:prstGeom>
+          <a:ln w="3175">
+            <a:solidFill>
+              <a:srgbClr val="D6D6D6"/>
+            </a:solidFill>
+          </a:ln>
+        </p:spPr>
+        <p:style>
+          <a:lnRef idx="2">
+            <a:schemeClr val="accent1"/>
+          </a:lnRef>
+          <a:fillRef idx="0">
+            <a:schemeClr val="accent1"/>
+          </a:fillRef>
+          <a:effectRef idx="1">
+            <a:schemeClr val="accent1"/>
+          </a:effectRef>
+          <a:fontRef idx="minor">
+            <a:schemeClr val="tx1"/>
+          </a:fontRef>
+        </p:style>
+      </p:cxnSp>
+      <p:cxnSp>
+        <p:nvCxnSpPr>
+          <p:cNvPr id="146" name="Connector 145"/>
+          <p:cNvCxnSpPr/>
+          <p:nvPr/>
+        </p:nvCxnSpPr>
+        <p:spPr>
+          <a:xfrm>
+            <a:off x="3553200.0" y="3690000.0"/>
+            <a:ext cx="144000.0" cy="0.0"/>
+          </a:xfrm>
+          <a:prstGeom prst="line">
+            <a:avLst/>
+          </a:prstGeom>
+          <a:ln w="3175">
+            <a:solidFill>
+              <a:srgbClr val="D6D6D6"/>
+            </a:solidFill>
+          </a:ln>
+        </p:spPr>
+        <p:style>
+          <a:lnRef idx="2">
+            <a:schemeClr val="accent1"/>
+          </a:lnRef>
+          <a:fillRef idx="0">
+            <a:schemeClr val="accent1"/>
+          </a:fillRef>
+          <a:effectRef idx="1">
+            <a:schemeClr val="accent1"/>
+          </a:effectRef>
+          <a:fontRef idx="minor">
+            <a:schemeClr val="tx1"/>
+          </a:fontRef>
+        </p:style>
+      </p:cxnSp>
+      <p:cxnSp>
+        <p:nvCxnSpPr>
+          <p:cNvPr id="147" name="Connector 146"/>
+          <p:cNvCxnSpPr/>
+          <p:nvPr/>
+        </p:nvCxnSpPr>
+        <p:spPr>
+          <a:xfrm>
+            <a:off x="3625200.0" y="3618000.0"/>
+            <a:ext cx="0.0" cy="144000.0"/>
+          </a:xfrm>
+          <a:prstGeom prst="line">
+            <a:avLst/>
+          </a:prstGeom>
+          <a:ln w="3175">
+            <a:solidFill>
+              <a:srgbClr val="D6D6D6"/>
+            </a:solidFill>
+          </a:ln>
+        </p:spPr>
+        <p:style>
+          <a:lnRef idx="2">
+            <a:schemeClr val="accent1"/>
+          </a:lnRef>
+          <a:fillRef idx="0">
+            <a:schemeClr val="accent1"/>
+          </a:fillRef>
+          <a:effectRef idx="1">
+            <a:schemeClr val="accent1"/>
+          </a:effectRef>
+          <a:fontRef idx="minor">
+            <a:schemeClr val="tx1"/>
+          </a:fontRef>
+        </p:style>
+      </p:cxnSp>
+      <p:cxnSp>
+        <p:nvCxnSpPr>
+          <p:cNvPr id="148" name="Connector 147"/>
+          <p:cNvCxnSpPr/>
+          <p:nvPr/>
+        </p:nvCxnSpPr>
+        <p:spPr>
+          <a:xfrm>
+            <a:off x="3733200.0" y="1746000.0"/>
+            <a:ext cx="144000.0" cy="0.0"/>
+          </a:xfrm>
+          <a:prstGeom prst="line">
+            <a:avLst/>
+          </a:prstGeom>
+          <a:ln w="3175">
+            <a:solidFill>
+              <a:srgbClr val="D6D6D6"/>
+            </a:solidFill>
+          </a:ln>
+        </p:spPr>
+        <p:style>
+          <a:lnRef idx="2">
+            <a:schemeClr val="accent1"/>
+          </a:lnRef>
+          <a:fillRef idx="0">
+            <a:schemeClr val="accent1"/>
+          </a:fillRef>
+          <a:effectRef idx="1">
+            <a:schemeClr val="accent1"/>
+          </a:effectRef>
+          <a:fontRef idx="minor">
+            <a:schemeClr val="tx1"/>
+          </a:fontRef>
+        </p:style>
+      </p:cxnSp>
+      <p:cxnSp>
+        <p:nvCxnSpPr>
+          <p:cNvPr id="149" name="Connector 148"/>
+          <p:cNvCxnSpPr/>
+          <p:nvPr/>
+        </p:nvCxnSpPr>
+        <p:spPr>
+          <a:xfrm>
+            <a:off x="3805200.0" y="1674000.0"/>
+            <a:ext cx="0.0" cy="144000.0"/>
+          </a:xfrm>
+          <a:prstGeom prst="line">
+            <a:avLst/>
+          </a:prstGeom>
+          <a:ln w="3175">
+            <a:solidFill>
+              <a:srgbClr val="D6D6D6"/>
+            </a:solidFill>
+          </a:ln>
+        </p:spPr>
+        <p:style>
+          <a:lnRef idx="2">
+            <a:schemeClr val="accent1"/>
+          </a:lnRef>
+          <a:fillRef idx="0">
+            <a:schemeClr val="accent1"/>
+          </a:fillRef>
+          <a:effectRef idx="1">
+            <a:schemeClr val="accent1"/>
+          </a:effectRef>
+          <a:fontRef idx="minor">
+            <a:schemeClr val="tx1"/>
+          </a:fontRef>
+        </p:style>
+      </p:cxnSp>
+      <p:cxnSp>
+        <p:nvCxnSpPr>
+          <p:cNvPr id="150" name="Connector 149"/>
+          <p:cNvCxnSpPr/>
+          <p:nvPr/>
+        </p:nvCxnSpPr>
+        <p:spPr>
+          <a:xfrm>
+            <a:off x="6814800.0" y="1746000.0"/>
+            <a:ext cx="144000.0" cy="0.0"/>
+          </a:xfrm>
+          <a:prstGeom prst="line">
+            <a:avLst/>
+          </a:prstGeom>
+          <a:ln w="3175">
+            <a:solidFill>
+              <a:srgbClr val="D6D6D6"/>
+            </a:solidFill>
+          </a:ln>
+        </p:spPr>
+        <p:style>
+          <a:lnRef idx="2">
+            <a:schemeClr val="accent1"/>
+          </a:lnRef>
+          <a:fillRef idx="0">
+            <a:schemeClr val="accent1"/>
+          </a:fillRef>
+          <a:effectRef idx="1">
+            <a:schemeClr val="accent1"/>
+          </a:effectRef>
+          <a:fontRef idx="minor">
+            <a:schemeClr val="tx1"/>
+          </a:fontRef>
+        </p:style>
+      </p:cxnSp>
+      <p:cxnSp>
+        <p:nvCxnSpPr>
+          <p:cNvPr id="151" name="Connector 150"/>
+          <p:cNvCxnSpPr/>
+          <p:nvPr/>
+        </p:nvCxnSpPr>
+        <p:spPr>
+          <a:xfrm>
+            <a:off x="6886800.0" y="1674000.0"/>
+            <a:ext cx="0.0" cy="144000.0"/>
+          </a:xfrm>
+          <a:prstGeom prst="line">
+            <a:avLst/>
+          </a:prstGeom>
+          <a:ln w="3175">
+            <a:solidFill>
+              <a:srgbClr val="D6D6D6"/>
+            </a:solidFill>
+          </a:ln>
+        </p:spPr>
+        <p:style>
+          <a:lnRef idx="2">
+            <a:schemeClr val="accent1"/>
+          </a:lnRef>
+          <a:fillRef idx="0">
+            <a:schemeClr val="accent1"/>
+          </a:fillRef>
+          <a:effectRef idx="1">
+            <a:schemeClr val="accent1"/>
+          </a:effectRef>
+          <a:fontRef idx="minor">
+            <a:schemeClr val="tx1"/>
+          </a:fontRef>
+        </p:style>
+      </p:cxnSp>
+      <p:cxnSp>
+        <p:nvCxnSpPr>
+          <p:cNvPr id="152" name="Connector 151"/>
+          <p:cNvCxnSpPr/>
+          <p:nvPr/>
+        </p:nvCxnSpPr>
+        <p:spPr>
+          <a:xfrm>
+            <a:off x="3733200.0" y="3690000.0"/>
+            <a:ext cx="144000.0" cy="0.0"/>
+          </a:xfrm>
+          <a:prstGeom prst="line">
+            <a:avLst/>
+          </a:prstGeom>
+          <a:ln w="3175">
+            <a:solidFill>
+              <a:srgbClr val="D6D6D6"/>
+            </a:solidFill>
+          </a:ln>
+        </p:spPr>
+        <p:style>
+          <a:lnRef idx="2">
+            <a:schemeClr val="accent1"/>
+          </a:lnRef>
+          <a:fillRef idx="0">
+            <a:schemeClr val="accent1"/>
+          </a:fillRef>
+          <a:effectRef idx="1">
+            <a:schemeClr val="accent1"/>
+          </a:effectRef>
+          <a:fontRef idx="minor">
+            <a:schemeClr val="tx1"/>
+          </a:fontRef>
+        </p:style>
+      </p:cxnSp>
+      <p:cxnSp>
+        <p:nvCxnSpPr>
+          <p:cNvPr id="153" name="Connector 152"/>
+          <p:cNvCxnSpPr/>
+          <p:nvPr/>
+        </p:nvCxnSpPr>
+        <p:spPr>
+          <a:xfrm>
+            <a:off x="3805200.0" y="3618000.0"/>
+            <a:ext cx="0.0" cy="144000.0"/>
+          </a:xfrm>
+          <a:prstGeom prst="line">
+            <a:avLst/>
+          </a:prstGeom>
+          <a:ln w="3175">
+            <a:solidFill>
+              <a:srgbClr val="D6D6D6"/>
+            </a:solidFill>
+          </a:ln>
+        </p:spPr>
+        <p:style>
+          <a:lnRef idx="2">
+            <a:schemeClr val="accent1"/>
+          </a:lnRef>
+          <a:fillRef idx="0">
+            <a:schemeClr val="accent1"/>
+          </a:fillRef>
+          <a:effectRef idx="1">
+            <a:schemeClr val="accent1"/>
+          </a:effectRef>
+          <a:fontRef idx="minor">
+            <a:schemeClr val="tx1"/>
+          </a:fontRef>
+        </p:style>
+      </p:cxnSp>
+      <p:cxnSp>
+        <p:nvCxnSpPr>
+          <p:cNvPr id="154" name="Connector 153"/>
+          <p:cNvCxnSpPr/>
+          <p:nvPr/>
+        </p:nvCxnSpPr>
+        <p:spPr>
+          <a:xfrm>
+            <a:off x="6814800.0" y="3690000.0"/>
+            <a:ext cx="144000.0" cy="0.0"/>
+          </a:xfrm>
+          <a:prstGeom prst="line">
+            <a:avLst/>
+          </a:prstGeom>
+          <a:ln w="3175">
+            <a:solidFill>
+              <a:srgbClr val="D6D6D6"/>
+            </a:solidFill>
+          </a:ln>
+        </p:spPr>
+        <p:style>
+          <a:lnRef idx="2">
+            <a:schemeClr val="accent1"/>
+          </a:lnRef>
+          <a:fillRef idx="0">
+            <a:schemeClr val="accent1"/>
+          </a:fillRef>
+          <a:effectRef idx="1">
+            <a:schemeClr val="accent1"/>
+          </a:effectRef>
+          <a:fontRef idx="minor">
+            <a:schemeClr val="tx1"/>
+          </a:fontRef>
+        </p:style>
+      </p:cxnSp>
+      <p:cxnSp>
+        <p:nvCxnSpPr>
+          <p:cNvPr id="155" name="Connector 154"/>
+          <p:cNvCxnSpPr/>
+          <p:nvPr/>
+        </p:nvCxnSpPr>
+        <p:spPr>
+          <a:xfrm>
+            <a:off x="6886800.0" y="3618000.0"/>
+            <a:ext cx="0.0" cy="144000.0"/>
+          </a:xfrm>
+          <a:prstGeom prst="line">
+            <a:avLst/>
+          </a:prstGeom>
+          <a:ln w="3175">
+            <a:solidFill>
+              <a:srgbClr val="D6D6D6"/>
+            </a:solidFill>
+          </a:ln>
+        </p:spPr>
+        <p:style>
+          <a:lnRef idx="2">
+            <a:schemeClr val="accent1"/>
+          </a:lnRef>
+          <a:fillRef idx="0">
+            <a:schemeClr val="accent1"/>
+          </a:fillRef>
+          <a:effectRef idx="1">
+            <a:schemeClr val="accent1"/>
+          </a:effectRef>
+          <a:fontRef idx="minor">
+            <a:schemeClr val="tx1"/>
+          </a:fontRef>
+        </p:style>
+      </p:cxnSp>
+      <p:cxnSp>
+        <p:nvCxnSpPr>
+          <p:cNvPr id="156" name="Connector 155"/>
+          <p:cNvCxnSpPr/>
+          <p:nvPr/>
+        </p:nvCxnSpPr>
+        <p:spPr>
+          <a:xfrm>
+            <a:off x="6994800.0" y="1746000.0"/>
+            <a:ext cx="144000.0" cy="0.0"/>
+          </a:xfrm>
+          <a:prstGeom prst="line">
+            <a:avLst/>
+          </a:prstGeom>
+          <a:ln w="3175">
+            <a:solidFill>
+              <a:srgbClr val="D6D6D6"/>
+            </a:solidFill>
+          </a:ln>
+        </p:spPr>
+        <p:style>
+          <a:lnRef idx="2">
+            <a:schemeClr val="accent1"/>
+          </a:lnRef>
+          <a:fillRef idx="0">
+            <a:schemeClr val="accent1"/>
+          </a:fillRef>
+          <a:effectRef idx="1">
+            <a:schemeClr val="accent1"/>
+          </a:effectRef>
+          <a:fontRef idx="minor">
+            <a:schemeClr val="tx1"/>
+          </a:fontRef>
+        </p:style>
+      </p:cxnSp>
+      <p:cxnSp>
+        <p:nvCxnSpPr>
+          <p:cNvPr id="157" name="Connector 156"/>
+          <p:cNvCxnSpPr/>
+          <p:nvPr/>
+        </p:nvCxnSpPr>
+        <p:spPr>
+          <a:xfrm>
+            <a:off x="7066800.0" y="1674000.0"/>
+            <a:ext cx="0.0" cy="144000.0"/>
+          </a:xfrm>
+          <a:prstGeom prst="line">
+            <a:avLst/>
+          </a:prstGeom>
+          <a:ln w="3175">
+            <a:solidFill>
+              <a:srgbClr val="D6D6D6"/>
+            </a:solidFill>
+          </a:ln>
+        </p:spPr>
+        <p:style>
+          <a:lnRef idx="2">
+            <a:schemeClr val="accent1"/>
+          </a:lnRef>
+          <a:fillRef idx="0">
+            <a:schemeClr val="accent1"/>
+          </a:fillRef>
+          <a:effectRef idx="1">
+            <a:schemeClr val="accent1"/>
+          </a:effectRef>
+          <a:fontRef idx="minor">
+            <a:schemeClr val="tx1"/>
+          </a:fontRef>
+        </p:style>
+      </p:cxnSp>
+      <p:cxnSp>
+        <p:nvCxnSpPr>
           <p:cNvPr id="158" name="Connector 157"/>
           <p:cNvCxnSpPr/>
           <p:nvPr/>
         </p:nvCxnSpPr>
         <p:spPr>
           <a:xfrm>
-            <a:off x="471600.0" y="1746000.0"/>
+            <a:off x="10076400.0" y="1746000.0"/>
             <a:ext cx="144000.0" cy="0.0"/>
           </a:xfrm>
           <a:prstGeom prst="line">
@@ -9487,7 +9277,7 @@
         </p:nvCxnSpPr>
         <p:spPr>
           <a:xfrm>
-            <a:off x="543600.0" y="1674000.0"/>
+            <a:off x="10148400.0" y="1674000.0"/>
             <a:ext cx="0.0" cy="144000.0"/>
           </a:xfrm>
           <a:prstGeom prst="line">
@@ -9522,7 +9312,7 @@
         </p:nvCxnSpPr>
         <p:spPr>
           <a:xfrm>
-            <a:off x="3553200.0" y="1746000.0"/>
+            <a:off x="6994800.0" y="3690000.0"/>
             <a:ext cx="144000.0" cy="0.0"/>
           </a:xfrm>
           <a:prstGeom prst="line">
@@ -9557,7 +9347,7 @@
         </p:nvCxnSpPr>
         <p:spPr>
           <a:xfrm>
-            <a:off x="3625200.0" y="1674000.0"/>
+            <a:off x="7066800.0" y="3618000.0"/>
             <a:ext cx="0.0" cy="144000.0"/>
           </a:xfrm>
           <a:prstGeom prst="line">
@@ -9592,7 +9382,7 @@
         </p:nvCxnSpPr>
         <p:spPr>
           <a:xfrm>
-            <a:off x="471600.0" y="3690000.0"/>
+            <a:off x="10076400.0" y="3690000.0"/>
             <a:ext cx="144000.0" cy="0.0"/>
           </a:xfrm>
           <a:prstGeom prst="line">
@@ -9627,7 +9417,7 @@
         </p:nvCxnSpPr>
         <p:spPr>
           <a:xfrm>
-            <a:off x="543600.0" y="3618000.0"/>
+            <a:off x="10148400.0" y="3618000.0"/>
             <a:ext cx="0.0" cy="144000.0"/>
           </a:xfrm>
           <a:prstGeom prst="line">
@@ -9662,7 +9452,7 @@
         </p:nvCxnSpPr>
         <p:spPr>
           <a:xfrm>
-            <a:off x="3553200.0" y="3690000.0"/>
+            <a:off x="471600.0" y="3870000.0"/>
             <a:ext cx="144000.0" cy="0.0"/>
           </a:xfrm>
           <a:prstGeom prst="line">
@@ -9697,7 +9487,7 @@
         </p:nvCxnSpPr>
         <p:spPr>
           <a:xfrm>
-            <a:off x="3625200.0" y="3618000.0"/>
+            <a:off x="543600.0" y="3798000.0"/>
             <a:ext cx="0.0" cy="144000.0"/>
           </a:xfrm>
           <a:prstGeom prst="line">
@@ -9732,7 +9522,7 @@
         </p:nvCxnSpPr>
         <p:spPr>
           <a:xfrm>
-            <a:off x="3733200.0" y="1746000.0"/>
+            <a:off x="3553200.0" y="3870000.0"/>
             <a:ext cx="144000.0" cy="0.0"/>
           </a:xfrm>
           <a:prstGeom prst="line">
@@ -9767,7 +9557,7 @@
         </p:nvCxnSpPr>
         <p:spPr>
           <a:xfrm>
-            <a:off x="3805200.0" y="1674000.0"/>
+            <a:off x="3625200.0" y="3798000.0"/>
             <a:ext cx="0.0" cy="144000.0"/>
           </a:xfrm>
           <a:prstGeom prst="line">
@@ -9802,7 +9592,7 @@
         </p:nvCxnSpPr>
         <p:spPr>
           <a:xfrm>
-            <a:off x="6814800.0" y="1746000.0"/>
+            <a:off x="471600.0" y="5814000.0"/>
             <a:ext cx="144000.0" cy="0.0"/>
           </a:xfrm>
           <a:prstGeom prst="line">
@@ -9837,7 +9627,7 @@
         </p:nvCxnSpPr>
         <p:spPr>
           <a:xfrm>
-            <a:off x="6886800.0" y="1674000.0"/>
+            <a:off x="543600.0" y="5742000.0"/>
             <a:ext cx="0.0" cy="144000.0"/>
           </a:xfrm>
           <a:prstGeom prst="line">
@@ -9872,7 +9662,7 @@
         </p:nvCxnSpPr>
         <p:spPr>
           <a:xfrm>
-            <a:off x="3733200.0" y="3690000.0"/>
+            <a:off x="3553200.0" y="5814000.0"/>
             <a:ext cx="144000.0" cy="0.0"/>
           </a:xfrm>
           <a:prstGeom prst="line">
@@ -9907,7 +9697,7 @@
         </p:nvCxnSpPr>
         <p:spPr>
           <a:xfrm>
-            <a:off x="3805200.0" y="3618000.0"/>
+            <a:off x="3625200.0" y="5742000.0"/>
             <a:ext cx="0.0" cy="144000.0"/>
           </a:xfrm>
           <a:prstGeom prst="line">
@@ -9942,7 +9732,7 @@
         </p:nvCxnSpPr>
         <p:spPr>
           <a:xfrm>
-            <a:off x="6814800.0" y="3690000.0"/>
+            <a:off x="3733200.0" y="3870000.0"/>
             <a:ext cx="144000.0" cy="0.0"/>
           </a:xfrm>
           <a:prstGeom prst="line">
@@ -9977,7 +9767,7 @@
         </p:nvCxnSpPr>
         <p:spPr>
           <a:xfrm>
-            <a:off x="6886800.0" y="3618000.0"/>
+            <a:off x="3805200.0" y="3798000.0"/>
             <a:ext cx="0.0" cy="144000.0"/>
           </a:xfrm>
           <a:prstGeom prst="line">
@@ -10012,7 +9802,7 @@
         </p:nvCxnSpPr>
         <p:spPr>
           <a:xfrm>
-            <a:off x="6994800.0" y="1746000.0"/>
+            <a:off x="6814800.0" y="3870000.0"/>
             <a:ext cx="144000.0" cy="0.0"/>
           </a:xfrm>
           <a:prstGeom prst="line">
@@ -10047,7 +9837,7 @@
         </p:nvCxnSpPr>
         <p:spPr>
           <a:xfrm>
-            <a:off x="7066800.0" y="1674000.0"/>
+            <a:off x="6886800.0" y="3798000.0"/>
             <a:ext cx="0.0" cy="144000.0"/>
           </a:xfrm>
           <a:prstGeom prst="line">
@@ -10082,7 +9872,7 @@
         </p:nvCxnSpPr>
         <p:spPr>
           <a:xfrm>
-            <a:off x="10076400.0" y="1746000.0"/>
+            <a:off x="3733200.0" y="5814000.0"/>
             <a:ext cx="144000.0" cy="0.0"/>
           </a:xfrm>
           <a:prstGeom prst="line">
@@ -10117,7 +9907,7 @@
         </p:nvCxnSpPr>
         <p:spPr>
           <a:xfrm>
-            <a:off x="10148400.0" y="1674000.0"/>
+            <a:off x="3805200.0" y="5742000.0"/>
             <a:ext cx="0.0" cy="144000.0"/>
           </a:xfrm>
           <a:prstGeom prst="line">
@@ -10152,7 +9942,7 @@
         </p:nvCxnSpPr>
         <p:spPr>
           <a:xfrm>
-            <a:off x="6994800.0" y="3690000.0"/>
+            <a:off x="6814800.0" y="5814000.0"/>
             <a:ext cx="144000.0" cy="0.0"/>
           </a:xfrm>
           <a:prstGeom prst="line">
@@ -10187,7 +9977,7 @@
         </p:nvCxnSpPr>
         <p:spPr>
           <a:xfrm>
-            <a:off x="7066800.0" y="3618000.0"/>
+            <a:off x="6886800.0" y="5742000.0"/>
             <a:ext cx="0.0" cy="144000.0"/>
           </a:xfrm>
           <a:prstGeom prst="line">
@@ -10222,7 +10012,7 @@
         </p:nvCxnSpPr>
         <p:spPr>
           <a:xfrm>
-            <a:off x="10076400.0" y="3690000.0"/>
+            <a:off x="6994800.0" y="3870000.0"/>
             <a:ext cx="144000.0" cy="0.0"/>
           </a:xfrm>
           <a:prstGeom prst="line">
@@ -10257,7 +10047,7 @@
         </p:nvCxnSpPr>
         <p:spPr>
           <a:xfrm>
-            <a:off x="10148400.0" y="3618000.0"/>
+            <a:off x="7066800.0" y="3798000.0"/>
             <a:ext cx="0.0" cy="144000.0"/>
           </a:xfrm>
           <a:prstGeom prst="line">
@@ -10292,7 +10082,7 @@
         </p:nvCxnSpPr>
         <p:spPr>
           <a:xfrm>
-            <a:off x="471600.0" y="3870000.0"/>
+            <a:off x="10076400.0" y="3870000.0"/>
             <a:ext cx="144000.0" cy="0.0"/>
           </a:xfrm>
           <a:prstGeom prst="line">
@@ -10327,7 +10117,7 @@
         </p:nvCxnSpPr>
         <p:spPr>
           <a:xfrm>
-            <a:off x="543600.0" y="3798000.0"/>
+            <a:off x="10148400.0" y="3798000.0"/>
             <a:ext cx="0.0" cy="144000.0"/>
           </a:xfrm>
           <a:prstGeom prst="line">
@@ -10362,7 +10152,7 @@
         </p:nvCxnSpPr>
         <p:spPr>
           <a:xfrm>
-            <a:off x="3553200.0" y="3870000.0"/>
+            <a:off x="6994800.0" y="5814000.0"/>
             <a:ext cx="144000.0" cy="0.0"/>
           </a:xfrm>
           <a:prstGeom prst="line">
@@ -10397,7 +10187,7 @@
         </p:nvCxnSpPr>
         <p:spPr>
           <a:xfrm>
-            <a:off x="3625200.0" y="3798000.0"/>
+            <a:off x="7066800.0" y="5742000.0"/>
             <a:ext cx="0.0" cy="144000.0"/>
           </a:xfrm>
           <a:prstGeom prst="line">
@@ -10432,7 +10222,7 @@
         </p:nvCxnSpPr>
         <p:spPr>
           <a:xfrm>
-            <a:off x="471600.0" y="5814000.0"/>
+            <a:off x="10076400.0" y="5814000.0"/>
             <a:ext cx="144000.0" cy="0.0"/>
           </a:xfrm>
           <a:prstGeom prst="line">
@@ -10462,636 +10252,6 @@
       <p:cxnSp>
         <p:nvCxnSpPr>
           <p:cNvPr id="187" name="Connector 186"/>
-          <p:cNvCxnSpPr/>
-          <p:nvPr/>
-        </p:nvCxnSpPr>
-        <p:spPr>
-          <a:xfrm>
-            <a:off x="543600.0" y="5742000.0"/>
-            <a:ext cx="0.0" cy="144000.0"/>
-          </a:xfrm>
-          <a:prstGeom prst="line">
-            <a:avLst/>
-          </a:prstGeom>
-          <a:ln w="3175">
-            <a:solidFill>
-              <a:srgbClr val="D6D6D6"/>
-            </a:solidFill>
-          </a:ln>
-        </p:spPr>
-        <p:style>
-          <a:lnRef idx="2">
-            <a:schemeClr val="accent1"/>
-          </a:lnRef>
-          <a:fillRef idx="0">
-            <a:schemeClr val="accent1"/>
-          </a:fillRef>
-          <a:effectRef idx="1">
-            <a:schemeClr val="accent1"/>
-          </a:effectRef>
-          <a:fontRef idx="minor">
-            <a:schemeClr val="tx1"/>
-          </a:fontRef>
-        </p:style>
-      </p:cxnSp>
-      <p:cxnSp>
-        <p:nvCxnSpPr>
-          <p:cNvPr id="188" name="Connector 187"/>
-          <p:cNvCxnSpPr/>
-          <p:nvPr/>
-        </p:nvCxnSpPr>
-        <p:spPr>
-          <a:xfrm>
-            <a:off x="3553200.0" y="5814000.0"/>
-            <a:ext cx="144000.0" cy="0.0"/>
-          </a:xfrm>
-          <a:prstGeom prst="line">
-            <a:avLst/>
-          </a:prstGeom>
-          <a:ln w="3175">
-            <a:solidFill>
-              <a:srgbClr val="D6D6D6"/>
-            </a:solidFill>
-          </a:ln>
-        </p:spPr>
-        <p:style>
-          <a:lnRef idx="2">
-            <a:schemeClr val="accent1"/>
-          </a:lnRef>
-          <a:fillRef idx="0">
-            <a:schemeClr val="accent1"/>
-          </a:fillRef>
-          <a:effectRef idx="1">
-            <a:schemeClr val="accent1"/>
-          </a:effectRef>
-          <a:fontRef idx="minor">
-            <a:schemeClr val="tx1"/>
-          </a:fontRef>
-        </p:style>
-      </p:cxnSp>
-      <p:cxnSp>
-        <p:nvCxnSpPr>
-          <p:cNvPr id="189" name="Connector 188"/>
-          <p:cNvCxnSpPr/>
-          <p:nvPr/>
-        </p:nvCxnSpPr>
-        <p:spPr>
-          <a:xfrm>
-            <a:off x="3625200.0" y="5742000.0"/>
-            <a:ext cx="0.0" cy="144000.0"/>
-          </a:xfrm>
-          <a:prstGeom prst="line">
-            <a:avLst/>
-          </a:prstGeom>
-          <a:ln w="3175">
-            <a:solidFill>
-              <a:srgbClr val="D6D6D6"/>
-            </a:solidFill>
-          </a:ln>
-        </p:spPr>
-        <p:style>
-          <a:lnRef idx="2">
-            <a:schemeClr val="accent1"/>
-          </a:lnRef>
-          <a:fillRef idx="0">
-            <a:schemeClr val="accent1"/>
-          </a:fillRef>
-          <a:effectRef idx="1">
-            <a:schemeClr val="accent1"/>
-          </a:effectRef>
-          <a:fontRef idx="minor">
-            <a:schemeClr val="tx1"/>
-          </a:fontRef>
-        </p:style>
-      </p:cxnSp>
-      <p:cxnSp>
-        <p:nvCxnSpPr>
-          <p:cNvPr id="190" name="Connector 189"/>
-          <p:cNvCxnSpPr/>
-          <p:nvPr/>
-        </p:nvCxnSpPr>
-        <p:spPr>
-          <a:xfrm>
-            <a:off x="3733200.0" y="3870000.0"/>
-            <a:ext cx="144000.0" cy="0.0"/>
-          </a:xfrm>
-          <a:prstGeom prst="line">
-            <a:avLst/>
-          </a:prstGeom>
-          <a:ln w="3175">
-            <a:solidFill>
-              <a:srgbClr val="D6D6D6"/>
-            </a:solidFill>
-          </a:ln>
-        </p:spPr>
-        <p:style>
-          <a:lnRef idx="2">
-            <a:schemeClr val="accent1"/>
-          </a:lnRef>
-          <a:fillRef idx="0">
-            <a:schemeClr val="accent1"/>
-          </a:fillRef>
-          <a:effectRef idx="1">
-            <a:schemeClr val="accent1"/>
-          </a:effectRef>
-          <a:fontRef idx="minor">
-            <a:schemeClr val="tx1"/>
-          </a:fontRef>
-        </p:style>
-      </p:cxnSp>
-      <p:cxnSp>
-        <p:nvCxnSpPr>
-          <p:cNvPr id="191" name="Connector 190"/>
-          <p:cNvCxnSpPr/>
-          <p:nvPr/>
-        </p:nvCxnSpPr>
-        <p:spPr>
-          <a:xfrm>
-            <a:off x="3805200.0" y="3798000.0"/>
-            <a:ext cx="0.0" cy="144000.0"/>
-          </a:xfrm>
-          <a:prstGeom prst="line">
-            <a:avLst/>
-          </a:prstGeom>
-          <a:ln w="3175">
-            <a:solidFill>
-              <a:srgbClr val="D6D6D6"/>
-            </a:solidFill>
-          </a:ln>
-        </p:spPr>
-        <p:style>
-          <a:lnRef idx="2">
-            <a:schemeClr val="accent1"/>
-          </a:lnRef>
-          <a:fillRef idx="0">
-            <a:schemeClr val="accent1"/>
-          </a:fillRef>
-          <a:effectRef idx="1">
-            <a:schemeClr val="accent1"/>
-          </a:effectRef>
-          <a:fontRef idx="minor">
-            <a:schemeClr val="tx1"/>
-          </a:fontRef>
-        </p:style>
-      </p:cxnSp>
-      <p:cxnSp>
-        <p:nvCxnSpPr>
-          <p:cNvPr id="192" name="Connector 191"/>
-          <p:cNvCxnSpPr/>
-          <p:nvPr/>
-        </p:nvCxnSpPr>
-        <p:spPr>
-          <a:xfrm>
-            <a:off x="6814800.0" y="3870000.0"/>
-            <a:ext cx="144000.0" cy="0.0"/>
-          </a:xfrm>
-          <a:prstGeom prst="line">
-            <a:avLst/>
-          </a:prstGeom>
-          <a:ln w="3175">
-            <a:solidFill>
-              <a:srgbClr val="D6D6D6"/>
-            </a:solidFill>
-          </a:ln>
-        </p:spPr>
-        <p:style>
-          <a:lnRef idx="2">
-            <a:schemeClr val="accent1"/>
-          </a:lnRef>
-          <a:fillRef idx="0">
-            <a:schemeClr val="accent1"/>
-          </a:fillRef>
-          <a:effectRef idx="1">
-            <a:schemeClr val="accent1"/>
-          </a:effectRef>
-          <a:fontRef idx="minor">
-            <a:schemeClr val="tx1"/>
-          </a:fontRef>
-        </p:style>
-      </p:cxnSp>
-      <p:cxnSp>
-        <p:nvCxnSpPr>
-          <p:cNvPr id="193" name="Connector 192"/>
-          <p:cNvCxnSpPr/>
-          <p:nvPr/>
-        </p:nvCxnSpPr>
-        <p:spPr>
-          <a:xfrm>
-            <a:off x="6886800.0" y="3798000.0"/>
-            <a:ext cx="0.0" cy="144000.0"/>
-          </a:xfrm>
-          <a:prstGeom prst="line">
-            <a:avLst/>
-          </a:prstGeom>
-          <a:ln w="3175">
-            <a:solidFill>
-              <a:srgbClr val="D6D6D6"/>
-            </a:solidFill>
-          </a:ln>
-        </p:spPr>
-        <p:style>
-          <a:lnRef idx="2">
-            <a:schemeClr val="accent1"/>
-          </a:lnRef>
-          <a:fillRef idx="0">
-            <a:schemeClr val="accent1"/>
-          </a:fillRef>
-          <a:effectRef idx="1">
-            <a:schemeClr val="accent1"/>
-          </a:effectRef>
-          <a:fontRef idx="minor">
-            <a:schemeClr val="tx1"/>
-          </a:fontRef>
-        </p:style>
-      </p:cxnSp>
-      <p:cxnSp>
-        <p:nvCxnSpPr>
-          <p:cNvPr id="194" name="Connector 193"/>
-          <p:cNvCxnSpPr/>
-          <p:nvPr/>
-        </p:nvCxnSpPr>
-        <p:spPr>
-          <a:xfrm>
-            <a:off x="3733200.0" y="5814000.0"/>
-            <a:ext cx="144000.0" cy="0.0"/>
-          </a:xfrm>
-          <a:prstGeom prst="line">
-            <a:avLst/>
-          </a:prstGeom>
-          <a:ln w="3175">
-            <a:solidFill>
-              <a:srgbClr val="D6D6D6"/>
-            </a:solidFill>
-          </a:ln>
-        </p:spPr>
-        <p:style>
-          <a:lnRef idx="2">
-            <a:schemeClr val="accent1"/>
-          </a:lnRef>
-          <a:fillRef idx="0">
-            <a:schemeClr val="accent1"/>
-          </a:fillRef>
-          <a:effectRef idx="1">
-            <a:schemeClr val="accent1"/>
-          </a:effectRef>
-          <a:fontRef idx="minor">
-            <a:schemeClr val="tx1"/>
-          </a:fontRef>
-        </p:style>
-      </p:cxnSp>
-      <p:cxnSp>
-        <p:nvCxnSpPr>
-          <p:cNvPr id="195" name="Connector 194"/>
-          <p:cNvCxnSpPr/>
-          <p:nvPr/>
-        </p:nvCxnSpPr>
-        <p:spPr>
-          <a:xfrm>
-            <a:off x="3805200.0" y="5742000.0"/>
-            <a:ext cx="0.0" cy="144000.0"/>
-          </a:xfrm>
-          <a:prstGeom prst="line">
-            <a:avLst/>
-          </a:prstGeom>
-          <a:ln w="3175">
-            <a:solidFill>
-              <a:srgbClr val="D6D6D6"/>
-            </a:solidFill>
-          </a:ln>
-        </p:spPr>
-        <p:style>
-          <a:lnRef idx="2">
-            <a:schemeClr val="accent1"/>
-          </a:lnRef>
-          <a:fillRef idx="0">
-            <a:schemeClr val="accent1"/>
-          </a:fillRef>
-          <a:effectRef idx="1">
-            <a:schemeClr val="accent1"/>
-          </a:effectRef>
-          <a:fontRef idx="minor">
-            <a:schemeClr val="tx1"/>
-          </a:fontRef>
-        </p:style>
-      </p:cxnSp>
-      <p:cxnSp>
-        <p:nvCxnSpPr>
-          <p:cNvPr id="196" name="Connector 195"/>
-          <p:cNvCxnSpPr/>
-          <p:nvPr/>
-        </p:nvCxnSpPr>
-        <p:spPr>
-          <a:xfrm>
-            <a:off x="6814800.0" y="5814000.0"/>
-            <a:ext cx="144000.0" cy="0.0"/>
-          </a:xfrm>
-          <a:prstGeom prst="line">
-            <a:avLst/>
-          </a:prstGeom>
-          <a:ln w="3175">
-            <a:solidFill>
-              <a:srgbClr val="D6D6D6"/>
-            </a:solidFill>
-          </a:ln>
-        </p:spPr>
-        <p:style>
-          <a:lnRef idx="2">
-            <a:schemeClr val="accent1"/>
-          </a:lnRef>
-          <a:fillRef idx="0">
-            <a:schemeClr val="accent1"/>
-          </a:fillRef>
-          <a:effectRef idx="1">
-            <a:schemeClr val="accent1"/>
-          </a:effectRef>
-          <a:fontRef idx="minor">
-            <a:schemeClr val="tx1"/>
-          </a:fontRef>
-        </p:style>
-      </p:cxnSp>
-      <p:cxnSp>
-        <p:nvCxnSpPr>
-          <p:cNvPr id="197" name="Connector 196"/>
-          <p:cNvCxnSpPr/>
-          <p:nvPr/>
-        </p:nvCxnSpPr>
-        <p:spPr>
-          <a:xfrm>
-            <a:off x="6886800.0" y="5742000.0"/>
-            <a:ext cx="0.0" cy="144000.0"/>
-          </a:xfrm>
-          <a:prstGeom prst="line">
-            <a:avLst/>
-          </a:prstGeom>
-          <a:ln w="3175">
-            <a:solidFill>
-              <a:srgbClr val="D6D6D6"/>
-            </a:solidFill>
-          </a:ln>
-        </p:spPr>
-        <p:style>
-          <a:lnRef idx="2">
-            <a:schemeClr val="accent1"/>
-          </a:lnRef>
-          <a:fillRef idx="0">
-            <a:schemeClr val="accent1"/>
-          </a:fillRef>
-          <a:effectRef idx="1">
-            <a:schemeClr val="accent1"/>
-          </a:effectRef>
-          <a:fontRef idx="minor">
-            <a:schemeClr val="tx1"/>
-          </a:fontRef>
-        </p:style>
-      </p:cxnSp>
-      <p:cxnSp>
-        <p:nvCxnSpPr>
-          <p:cNvPr id="198" name="Connector 197"/>
-          <p:cNvCxnSpPr/>
-          <p:nvPr/>
-        </p:nvCxnSpPr>
-        <p:spPr>
-          <a:xfrm>
-            <a:off x="6994800.0" y="3870000.0"/>
-            <a:ext cx="144000.0" cy="0.0"/>
-          </a:xfrm>
-          <a:prstGeom prst="line">
-            <a:avLst/>
-          </a:prstGeom>
-          <a:ln w="3175">
-            <a:solidFill>
-              <a:srgbClr val="D6D6D6"/>
-            </a:solidFill>
-          </a:ln>
-        </p:spPr>
-        <p:style>
-          <a:lnRef idx="2">
-            <a:schemeClr val="accent1"/>
-          </a:lnRef>
-          <a:fillRef idx="0">
-            <a:schemeClr val="accent1"/>
-          </a:fillRef>
-          <a:effectRef idx="1">
-            <a:schemeClr val="accent1"/>
-          </a:effectRef>
-          <a:fontRef idx="minor">
-            <a:schemeClr val="tx1"/>
-          </a:fontRef>
-        </p:style>
-      </p:cxnSp>
-      <p:cxnSp>
-        <p:nvCxnSpPr>
-          <p:cNvPr id="199" name="Connector 198"/>
-          <p:cNvCxnSpPr/>
-          <p:nvPr/>
-        </p:nvCxnSpPr>
-        <p:spPr>
-          <a:xfrm>
-            <a:off x="7066800.0" y="3798000.0"/>
-            <a:ext cx="0.0" cy="144000.0"/>
-          </a:xfrm>
-          <a:prstGeom prst="line">
-            <a:avLst/>
-          </a:prstGeom>
-          <a:ln w="3175">
-            <a:solidFill>
-              <a:srgbClr val="D6D6D6"/>
-            </a:solidFill>
-          </a:ln>
-        </p:spPr>
-        <p:style>
-          <a:lnRef idx="2">
-            <a:schemeClr val="accent1"/>
-          </a:lnRef>
-          <a:fillRef idx="0">
-            <a:schemeClr val="accent1"/>
-          </a:fillRef>
-          <a:effectRef idx="1">
-            <a:schemeClr val="accent1"/>
-          </a:effectRef>
-          <a:fontRef idx="minor">
-            <a:schemeClr val="tx1"/>
-          </a:fontRef>
-        </p:style>
-      </p:cxnSp>
-      <p:cxnSp>
-        <p:nvCxnSpPr>
-          <p:cNvPr id="200" name="Connector 199"/>
-          <p:cNvCxnSpPr/>
-          <p:nvPr/>
-        </p:nvCxnSpPr>
-        <p:spPr>
-          <a:xfrm>
-            <a:off x="10076400.0" y="3870000.0"/>
-            <a:ext cx="144000.0" cy="0.0"/>
-          </a:xfrm>
-          <a:prstGeom prst="line">
-            <a:avLst/>
-          </a:prstGeom>
-          <a:ln w="3175">
-            <a:solidFill>
-              <a:srgbClr val="D6D6D6"/>
-            </a:solidFill>
-          </a:ln>
-        </p:spPr>
-        <p:style>
-          <a:lnRef idx="2">
-            <a:schemeClr val="accent1"/>
-          </a:lnRef>
-          <a:fillRef idx="0">
-            <a:schemeClr val="accent1"/>
-          </a:fillRef>
-          <a:effectRef idx="1">
-            <a:schemeClr val="accent1"/>
-          </a:effectRef>
-          <a:fontRef idx="minor">
-            <a:schemeClr val="tx1"/>
-          </a:fontRef>
-        </p:style>
-      </p:cxnSp>
-      <p:cxnSp>
-        <p:nvCxnSpPr>
-          <p:cNvPr id="201" name="Connector 200"/>
-          <p:cNvCxnSpPr/>
-          <p:nvPr/>
-        </p:nvCxnSpPr>
-        <p:spPr>
-          <a:xfrm>
-            <a:off x="10148400.0" y="3798000.0"/>
-            <a:ext cx="0.0" cy="144000.0"/>
-          </a:xfrm>
-          <a:prstGeom prst="line">
-            <a:avLst/>
-          </a:prstGeom>
-          <a:ln w="3175">
-            <a:solidFill>
-              <a:srgbClr val="D6D6D6"/>
-            </a:solidFill>
-          </a:ln>
-        </p:spPr>
-        <p:style>
-          <a:lnRef idx="2">
-            <a:schemeClr val="accent1"/>
-          </a:lnRef>
-          <a:fillRef idx="0">
-            <a:schemeClr val="accent1"/>
-          </a:fillRef>
-          <a:effectRef idx="1">
-            <a:schemeClr val="accent1"/>
-          </a:effectRef>
-          <a:fontRef idx="minor">
-            <a:schemeClr val="tx1"/>
-          </a:fontRef>
-        </p:style>
-      </p:cxnSp>
-      <p:cxnSp>
-        <p:nvCxnSpPr>
-          <p:cNvPr id="202" name="Connector 201"/>
-          <p:cNvCxnSpPr/>
-          <p:nvPr/>
-        </p:nvCxnSpPr>
-        <p:spPr>
-          <a:xfrm>
-            <a:off x="6994800.0" y="5814000.0"/>
-            <a:ext cx="144000.0" cy="0.0"/>
-          </a:xfrm>
-          <a:prstGeom prst="line">
-            <a:avLst/>
-          </a:prstGeom>
-          <a:ln w="3175">
-            <a:solidFill>
-              <a:srgbClr val="D6D6D6"/>
-            </a:solidFill>
-          </a:ln>
-        </p:spPr>
-        <p:style>
-          <a:lnRef idx="2">
-            <a:schemeClr val="accent1"/>
-          </a:lnRef>
-          <a:fillRef idx="0">
-            <a:schemeClr val="accent1"/>
-          </a:fillRef>
-          <a:effectRef idx="1">
-            <a:schemeClr val="accent1"/>
-          </a:effectRef>
-          <a:fontRef idx="minor">
-            <a:schemeClr val="tx1"/>
-          </a:fontRef>
-        </p:style>
-      </p:cxnSp>
-      <p:cxnSp>
-        <p:nvCxnSpPr>
-          <p:cNvPr id="203" name="Connector 202"/>
-          <p:cNvCxnSpPr/>
-          <p:nvPr/>
-        </p:nvCxnSpPr>
-        <p:spPr>
-          <a:xfrm>
-            <a:off x="7066800.0" y="5742000.0"/>
-            <a:ext cx="0.0" cy="144000.0"/>
-          </a:xfrm>
-          <a:prstGeom prst="line">
-            <a:avLst/>
-          </a:prstGeom>
-          <a:ln w="3175">
-            <a:solidFill>
-              <a:srgbClr val="D6D6D6"/>
-            </a:solidFill>
-          </a:ln>
-        </p:spPr>
-        <p:style>
-          <a:lnRef idx="2">
-            <a:schemeClr val="accent1"/>
-          </a:lnRef>
-          <a:fillRef idx="0">
-            <a:schemeClr val="accent1"/>
-          </a:fillRef>
-          <a:effectRef idx="1">
-            <a:schemeClr val="accent1"/>
-          </a:effectRef>
-          <a:fontRef idx="minor">
-            <a:schemeClr val="tx1"/>
-          </a:fontRef>
-        </p:style>
-      </p:cxnSp>
-      <p:cxnSp>
-        <p:nvCxnSpPr>
-          <p:cNvPr id="204" name="Connector 203"/>
-          <p:cNvCxnSpPr/>
-          <p:nvPr/>
-        </p:nvCxnSpPr>
-        <p:spPr>
-          <a:xfrm>
-            <a:off x="10076400.0" y="5814000.0"/>
-            <a:ext cx="144000.0" cy="0.0"/>
-          </a:xfrm>
-          <a:prstGeom prst="line">
-            <a:avLst/>
-          </a:prstGeom>
-          <a:ln w="3175">
-            <a:solidFill>
-              <a:srgbClr val="D6D6D6"/>
-            </a:solidFill>
-          </a:ln>
-        </p:spPr>
-        <p:style>
-          <a:lnRef idx="2">
-            <a:schemeClr val="accent1"/>
-          </a:lnRef>
-          <a:fillRef idx="0">
-            <a:schemeClr val="accent1"/>
-          </a:fillRef>
-          <a:effectRef idx="1">
-            <a:schemeClr val="accent1"/>
-          </a:effectRef>
-          <a:fontRef idx="minor">
-            <a:schemeClr val="tx1"/>
-          </a:fontRef>
-        </p:style>
-      </p:cxnSp>
-      <p:cxnSp>
-        <p:nvCxnSpPr>
-          <p:cNvPr id="205" name="Connector 204"/>
           <p:cNvCxnSpPr/>
           <p:nvPr/>
         </p:nvCxnSpPr>
